--- a/topic05/talk-2/ReactJS_02-2.pptx
+++ b/topic05/talk-2/ReactJS_02-2.pptx
@@ -179,6 +179,2899 @@
 </p:cmAuthorLst>
 </file>
 
+<file path=ppt/diagrams/colors1.xml><?xml version="1.0" encoding="utf-8"?>
+<dgm:colorsDef xmlns:dgm="http://schemas.openxmlformats.org/drawingml/2006/diagram" xmlns:a="http://schemas.openxmlformats.org/drawingml/2006/main" uniqueId="urn:microsoft.com/office/officeart/2018/5/colors/Iconchunking_neutralbg_colorful1">
+  <dgm:title val=""/>
+  <dgm:desc val=""/>
+  <dgm:catLst>
+    <dgm:cat type="colorful" pri="10100"/>
+  </dgm:catLst>
+  <dgm:styleLbl name="node0">
+    <dgm:fillClrLst meth="repeat">
+      <a:schemeClr val="accent1"/>
+    </dgm:fillClrLst>
+    <dgm:linClrLst meth="repeat">
+      <a:schemeClr val="lt1"/>
+    </dgm:linClrLst>
+    <dgm:effectClrLst/>
+    <dgm:txLinClrLst/>
+    <dgm:txFillClrLst/>
+    <dgm:txEffectClrLst/>
+  </dgm:styleLbl>
+  <dgm:styleLbl name="node1">
+    <dgm:fillClrLst meth="repeat">
+      <a:schemeClr val="accent2"/>
+      <a:schemeClr val="accent3"/>
+      <a:schemeClr val="accent4"/>
+      <a:schemeClr val="accent5"/>
+      <a:schemeClr val="accent6"/>
+    </dgm:fillClrLst>
+    <dgm:linClrLst meth="repeat">
+      <a:schemeClr val="lt1">
+        <a:alpha val="0"/>
+      </a:schemeClr>
+    </dgm:linClrLst>
+    <dgm:effectClrLst/>
+    <dgm:txLinClrLst/>
+    <dgm:txFillClrLst/>
+    <dgm:txEffectClrLst/>
+  </dgm:styleLbl>
+  <dgm:styleLbl name="alignNode1">
+    <dgm:fillClrLst meth="repeat">
+      <a:schemeClr val="accent2"/>
+      <a:schemeClr val="accent3"/>
+      <a:schemeClr val="accent4"/>
+      <a:schemeClr val="accent5"/>
+      <a:schemeClr val="accent6"/>
+    </dgm:fillClrLst>
+    <dgm:linClrLst meth="repeat">
+      <a:schemeClr val="accent2"/>
+      <a:schemeClr val="accent3"/>
+      <a:schemeClr val="accent4"/>
+      <a:schemeClr val="accent5"/>
+      <a:schemeClr val="accent6"/>
+    </dgm:linClrLst>
+    <dgm:effectClrLst/>
+    <dgm:txLinClrLst/>
+    <dgm:txFillClrLst/>
+    <dgm:txEffectClrLst/>
+  </dgm:styleLbl>
+  <dgm:styleLbl name="lnNode1">
+    <dgm:fillClrLst meth="repeat">
+      <a:schemeClr val="accent2"/>
+      <a:schemeClr val="accent3"/>
+      <a:schemeClr val="accent4"/>
+      <a:schemeClr val="accent5"/>
+      <a:schemeClr val="accent6"/>
+    </dgm:fillClrLst>
+    <dgm:linClrLst meth="repeat">
+      <a:schemeClr val="lt1"/>
+    </dgm:linClrLst>
+    <dgm:effectClrLst/>
+    <dgm:txLinClrLst/>
+    <dgm:txFillClrLst/>
+    <dgm:txEffectClrLst/>
+  </dgm:styleLbl>
+  <dgm:styleLbl name="vennNode1">
+    <dgm:fillClrLst meth="repeat">
+      <a:schemeClr val="accent2">
+        <a:alpha val="50000"/>
+      </a:schemeClr>
+      <a:schemeClr val="accent3">
+        <a:alpha val="50000"/>
+      </a:schemeClr>
+      <a:schemeClr val="accent4">
+        <a:alpha val="50000"/>
+      </a:schemeClr>
+      <a:schemeClr val="accent5">
+        <a:alpha val="50000"/>
+      </a:schemeClr>
+      <a:schemeClr val="accent6">
+        <a:alpha val="50000"/>
+      </a:schemeClr>
+    </dgm:fillClrLst>
+    <dgm:linClrLst meth="repeat">
+      <a:schemeClr val="lt1"/>
+    </dgm:linClrLst>
+    <dgm:effectClrLst/>
+    <dgm:txLinClrLst/>
+    <dgm:txFillClrLst/>
+    <dgm:txEffectClrLst/>
+  </dgm:styleLbl>
+  <dgm:styleLbl name="node2">
+    <dgm:fillClrLst>
+      <a:schemeClr val="accent2"/>
+    </dgm:fillClrLst>
+    <dgm:linClrLst meth="repeat">
+      <a:schemeClr val="lt1"/>
+    </dgm:linClrLst>
+    <dgm:effectClrLst/>
+    <dgm:txLinClrLst/>
+    <dgm:txFillClrLst/>
+    <dgm:txEffectClrLst/>
+  </dgm:styleLbl>
+  <dgm:styleLbl name="node3">
+    <dgm:fillClrLst>
+      <a:schemeClr val="accent3"/>
+    </dgm:fillClrLst>
+    <dgm:linClrLst meth="repeat">
+      <a:schemeClr val="lt1"/>
+    </dgm:linClrLst>
+    <dgm:effectClrLst/>
+    <dgm:txLinClrLst/>
+    <dgm:txFillClrLst/>
+    <dgm:txEffectClrLst/>
+  </dgm:styleLbl>
+  <dgm:styleLbl name="node4">
+    <dgm:fillClrLst>
+      <a:schemeClr val="accent4"/>
+    </dgm:fillClrLst>
+    <dgm:linClrLst meth="repeat">
+      <a:schemeClr val="lt1"/>
+    </dgm:linClrLst>
+    <dgm:effectClrLst/>
+    <dgm:txLinClrLst/>
+    <dgm:txFillClrLst/>
+    <dgm:txEffectClrLst/>
+  </dgm:styleLbl>
+  <dgm:styleLbl name="fgImgPlace1">
+    <dgm:fillClrLst meth="repeat">
+      <a:schemeClr val="accent2">
+        <a:tint val="50000"/>
+      </a:schemeClr>
+      <a:schemeClr val="accent3">
+        <a:tint val="50000"/>
+      </a:schemeClr>
+      <a:schemeClr val="accent4">
+        <a:tint val="50000"/>
+      </a:schemeClr>
+      <a:schemeClr val="accent5">
+        <a:tint val="50000"/>
+      </a:schemeClr>
+      <a:schemeClr val="accent6">
+        <a:tint val="50000"/>
+      </a:schemeClr>
+    </dgm:fillClrLst>
+    <dgm:linClrLst meth="repeat">
+      <a:schemeClr val="lt1"/>
+    </dgm:linClrLst>
+    <dgm:effectClrLst/>
+    <dgm:txLinClrLst/>
+    <dgm:txFillClrLst meth="repeat">
+      <a:schemeClr val="lt1"/>
+    </dgm:txFillClrLst>
+    <dgm:txEffectClrLst/>
+  </dgm:styleLbl>
+  <dgm:styleLbl name="alignImgPlace1">
+    <dgm:fillClrLst>
+      <a:schemeClr val="accent1">
+        <a:tint val="50000"/>
+      </a:schemeClr>
+      <a:schemeClr val="accent2">
+        <a:tint val="20000"/>
+      </a:schemeClr>
+    </dgm:fillClrLst>
+    <dgm:linClrLst meth="repeat">
+      <a:schemeClr val="lt1"/>
+    </dgm:linClrLst>
+    <dgm:effectClrLst/>
+    <dgm:txLinClrLst/>
+    <dgm:txFillClrLst meth="repeat">
+      <a:schemeClr val="lt1"/>
+    </dgm:txFillClrLst>
+    <dgm:txEffectClrLst/>
+  </dgm:styleLbl>
+  <dgm:styleLbl name="bgImgPlace1">
+    <dgm:fillClrLst>
+      <a:schemeClr val="accent1">
+        <a:tint val="50000"/>
+      </a:schemeClr>
+      <a:schemeClr val="accent2">
+        <a:tint val="20000"/>
+      </a:schemeClr>
+    </dgm:fillClrLst>
+    <dgm:linClrLst meth="repeat">
+      <a:schemeClr val="lt1"/>
+    </dgm:linClrLst>
+    <dgm:effectClrLst/>
+    <dgm:txLinClrLst/>
+    <dgm:txFillClrLst meth="repeat">
+      <a:schemeClr val="lt1"/>
+    </dgm:txFillClrLst>
+    <dgm:txEffectClrLst/>
+  </dgm:styleLbl>
+  <dgm:styleLbl name="sibTrans2D1">
+    <dgm:fillClrLst meth="repeat">
+      <a:schemeClr val="accent2"/>
+      <a:schemeClr val="accent3"/>
+      <a:schemeClr val="accent4"/>
+      <a:schemeClr val="accent5"/>
+      <a:schemeClr val="accent6"/>
+    </dgm:fillClrLst>
+    <dgm:linClrLst meth="cycle">
+      <a:schemeClr val="lt1"/>
+    </dgm:linClrLst>
+    <dgm:effectClrLst/>
+    <dgm:txLinClrLst/>
+    <dgm:txFillClrLst/>
+    <dgm:txEffectClrLst/>
+  </dgm:styleLbl>
+  <dgm:styleLbl name="fgSibTrans2D1">
+    <dgm:fillClrLst meth="repeat">
+      <a:schemeClr val="accent2"/>
+      <a:schemeClr val="accent3"/>
+      <a:schemeClr val="accent4"/>
+      <a:schemeClr val="accent5"/>
+      <a:schemeClr val="accent6"/>
+    </dgm:fillClrLst>
+    <dgm:linClrLst meth="cycle">
+      <a:schemeClr val="lt1"/>
+    </dgm:linClrLst>
+    <dgm:effectClrLst/>
+    <dgm:txLinClrLst/>
+    <dgm:txFillClrLst meth="repeat">
+      <a:schemeClr val="lt1"/>
+    </dgm:txFillClrLst>
+    <dgm:txEffectClrLst/>
+  </dgm:styleLbl>
+  <dgm:styleLbl name="bgSibTrans2D1">
+    <dgm:fillClrLst meth="repeat">
+      <a:schemeClr val="accent2"/>
+      <a:schemeClr val="accent3"/>
+      <a:schemeClr val="accent4"/>
+      <a:schemeClr val="accent5"/>
+      <a:schemeClr val="accent6"/>
+    </dgm:fillClrLst>
+    <dgm:linClrLst meth="cycle">
+      <a:schemeClr val="lt1"/>
+    </dgm:linClrLst>
+    <dgm:effectClrLst/>
+    <dgm:txLinClrLst/>
+    <dgm:txFillClrLst meth="repeat">
+      <a:schemeClr val="lt1"/>
+    </dgm:txFillClrLst>
+    <dgm:txEffectClrLst/>
+  </dgm:styleLbl>
+  <dgm:styleLbl name="sibTrans1D1">
+    <dgm:fillClrLst meth="repeat">
+      <a:schemeClr val="accent2"/>
+      <a:schemeClr val="accent3"/>
+      <a:schemeClr val="accent4"/>
+      <a:schemeClr val="accent5"/>
+      <a:schemeClr val="accent6"/>
+    </dgm:fillClrLst>
+    <dgm:linClrLst meth="repeat">
+      <a:schemeClr val="accent2"/>
+      <a:schemeClr val="accent3"/>
+      <a:schemeClr val="accent4"/>
+      <a:schemeClr val="accent5"/>
+      <a:schemeClr val="accent6"/>
+    </dgm:linClrLst>
+    <dgm:effectClrLst/>
+    <dgm:txLinClrLst/>
+    <dgm:txFillClrLst meth="repeat">
+      <a:schemeClr val="tx1"/>
+    </dgm:txFillClrLst>
+    <dgm:txEffectClrLst/>
+  </dgm:styleLbl>
+  <dgm:styleLbl name="callout">
+    <dgm:fillClrLst meth="repeat">
+      <a:schemeClr val="accent2"/>
+    </dgm:fillClrLst>
+    <dgm:linClrLst meth="repeat">
+      <a:schemeClr val="accent2">
+        <a:tint val="50000"/>
+      </a:schemeClr>
+    </dgm:linClrLst>
+    <dgm:effectClrLst/>
+    <dgm:txLinClrLst/>
+    <dgm:txFillClrLst meth="repeat">
+      <a:schemeClr val="tx1"/>
+    </dgm:txFillClrLst>
+    <dgm:txEffectClrLst/>
+  </dgm:styleLbl>
+  <dgm:styleLbl name="asst0">
+    <dgm:fillClrLst meth="repeat">
+      <a:schemeClr val="accent1"/>
+    </dgm:fillClrLst>
+    <dgm:linClrLst meth="repeat">
+      <a:schemeClr val="lt1"/>
+    </dgm:linClrLst>
+    <dgm:effectClrLst/>
+    <dgm:txLinClrLst/>
+    <dgm:txFillClrLst/>
+    <dgm:txEffectClrLst/>
+  </dgm:styleLbl>
+  <dgm:styleLbl name="asst1">
+    <dgm:fillClrLst meth="repeat">
+      <a:schemeClr val="accent2"/>
+    </dgm:fillClrLst>
+    <dgm:linClrLst meth="repeat">
+      <a:schemeClr val="lt1"/>
+    </dgm:linClrLst>
+    <dgm:effectClrLst/>
+    <dgm:txLinClrLst/>
+    <dgm:txFillClrLst/>
+    <dgm:txEffectClrLst/>
+  </dgm:styleLbl>
+  <dgm:styleLbl name="asst2">
+    <dgm:fillClrLst>
+      <a:schemeClr val="accent3"/>
+    </dgm:fillClrLst>
+    <dgm:linClrLst meth="repeat">
+      <a:schemeClr val="lt1"/>
+    </dgm:linClrLst>
+    <dgm:effectClrLst/>
+    <dgm:txLinClrLst/>
+    <dgm:txFillClrLst/>
+    <dgm:txEffectClrLst/>
+  </dgm:styleLbl>
+  <dgm:styleLbl name="asst3">
+    <dgm:fillClrLst>
+      <a:schemeClr val="accent4"/>
+    </dgm:fillClrLst>
+    <dgm:linClrLst meth="repeat">
+      <a:schemeClr val="lt1"/>
+    </dgm:linClrLst>
+    <dgm:effectClrLst/>
+    <dgm:txLinClrLst/>
+    <dgm:txFillClrLst/>
+    <dgm:txEffectClrLst/>
+  </dgm:styleLbl>
+  <dgm:styleLbl name="asst4">
+    <dgm:fillClrLst>
+      <a:schemeClr val="accent5"/>
+    </dgm:fillClrLst>
+    <dgm:linClrLst meth="repeat">
+      <a:schemeClr val="lt1"/>
+    </dgm:linClrLst>
+    <dgm:effectClrLst/>
+    <dgm:txLinClrLst/>
+    <dgm:txFillClrLst/>
+    <dgm:txEffectClrLst/>
+  </dgm:styleLbl>
+  <dgm:styleLbl name="parChTrans2D1">
+    <dgm:fillClrLst meth="repeat">
+      <a:schemeClr val="accent2"/>
+    </dgm:fillClrLst>
+    <dgm:linClrLst meth="repeat">
+      <a:schemeClr val="lt1"/>
+    </dgm:linClrLst>
+    <dgm:effectClrLst/>
+    <dgm:txLinClrLst/>
+    <dgm:txFillClrLst meth="repeat">
+      <a:schemeClr val="lt1"/>
+    </dgm:txFillClrLst>
+    <dgm:txEffectClrLst/>
+  </dgm:styleLbl>
+  <dgm:styleLbl name="parChTrans2D2">
+    <dgm:fillClrLst meth="repeat">
+      <a:schemeClr val="accent3"/>
+    </dgm:fillClrLst>
+    <dgm:linClrLst meth="repeat">
+      <a:schemeClr val="lt1"/>
+    </dgm:linClrLst>
+    <dgm:effectClrLst/>
+    <dgm:txLinClrLst/>
+    <dgm:txFillClrLst/>
+    <dgm:txEffectClrLst/>
+  </dgm:styleLbl>
+  <dgm:styleLbl name="parChTrans2D3">
+    <dgm:fillClrLst meth="repeat">
+      <a:schemeClr val="accent4"/>
+    </dgm:fillClrLst>
+    <dgm:linClrLst meth="repeat">
+      <a:schemeClr val="lt1"/>
+    </dgm:linClrLst>
+    <dgm:effectClrLst/>
+    <dgm:txLinClrLst/>
+    <dgm:txFillClrLst/>
+    <dgm:txEffectClrLst/>
+  </dgm:styleLbl>
+  <dgm:styleLbl name="parChTrans2D4">
+    <dgm:fillClrLst meth="repeat">
+      <a:schemeClr val="accent5"/>
+    </dgm:fillClrLst>
+    <dgm:linClrLst meth="repeat">
+      <a:schemeClr val="lt1"/>
+    </dgm:linClrLst>
+    <dgm:effectClrLst/>
+    <dgm:txLinClrLst/>
+    <dgm:txFillClrLst meth="repeat">
+      <a:schemeClr val="lt1"/>
+    </dgm:txFillClrLst>
+    <dgm:txEffectClrLst/>
+  </dgm:styleLbl>
+  <dgm:styleLbl name="parChTrans1D1">
+    <dgm:fillClrLst meth="repeat">
+      <a:schemeClr val="accent2"/>
+    </dgm:fillClrLst>
+    <dgm:linClrLst meth="repeat">
+      <a:schemeClr val="accent1"/>
+    </dgm:linClrLst>
+    <dgm:effectClrLst/>
+    <dgm:txLinClrLst/>
+    <dgm:txFillClrLst meth="repeat">
+      <a:schemeClr val="tx1"/>
+    </dgm:txFillClrLst>
+    <dgm:txEffectClrLst/>
+  </dgm:styleLbl>
+  <dgm:styleLbl name="parChTrans1D2">
+    <dgm:fillClrLst meth="repeat">
+      <a:schemeClr val="accent3">
+        <a:tint val="90000"/>
+      </a:schemeClr>
+    </dgm:fillClrLst>
+    <dgm:linClrLst meth="repeat">
+      <a:schemeClr val="accent2"/>
+    </dgm:linClrLst>
+    <dgm:effectClrLst/>
+    <dgm:txLinClrLst/>
+    <dgm:txFillClrLst meth="repeat">
+      <a:schemeClr val="tx1"/>
+    </dgm:txFillClrLst>
+    <dgm:txEffectClrLst/>
+  </dgm:styleLbl>
+  <dgm:styleLbl name="parChTrans1D3">
+    <dgm:fillClrLst meth="repeat">
+      <a:schemeClr val="accent4">
+        <a:tint val="70000"/>
+      </a:schemeClr>
+    </dgm:fillClrLst>
+    <dgm:linClrLst meth="repeat">
+      <a:schemeClr val="accent3"/>
+    </dgm:linClrLst>
+    <dgm:effectClrLst/>
+    <dgm:txLinClrLst/>
+    <dgm:txFillClrLst meth="repeat">
+      <a:schemeClr val="tx1"/>
+    </dgm:txFillClrLst>
+    <dgm:txEffectClrLst/>
+  </dgm:styleLbl>
+  <dgm:styleLbl name="parChTrans1D4">
+    <dgm:fillClrLst meth="repeat">
+      <a:schemeClr val="accent5">
+        <a:tint val="50000"/>
+      </a:schemeClr>
+    </dgm:fillClrLst>
+    <dgm:linClrLst meth="repeat">
+      <a:schemeClr val="accent4"/>
+    </dgm:linClrLst>
+    <dgm:effectClrLst/>
+    <dgm:txLinClrLst/>
+    <dgm:txFillClrLst meth="repeat">
+      <a:schemeClr val="tx1"/>
+    </dgm:txFillClrLst>
+    <dgm:txEffectClrLst/>
+  </dgm:styleLbl>
+  <dgm:styleLbl name="fgAcc1">
+    <dgm:fillClrLst meth="repeat">
+      <a:schemeClr val="lt1">
+        <a:alpha val="90000"/>
+      </a:schemeClr>
+    </dgm:fillClrLst>
+    <dgm:linClrLst meth="repeat">
+      <a:schemeClr val="accent2"/>
+      <a:schemeClr val="accent3"/>
+      <a:schemeClr val="accent4"/>
+      <a:schemeClr val="accent5"/>
+      <a:schemeClr val="accent6"/>
+    </dgm:linClrLst>
+    <dgm:effectClrLst/>
+    <dgm:txLinClrLst/>
+    <dgm:txFillClrLst meth="repeat">
+      <a:schemeClr val="dk1"/>
+    </dgm:txFillClrLst>
+    <dgm:txEffectClrLst/>
+  </dgm:styleLbl>
+  <dgm:styleLbl name="conFgAcc1">
+    <dgm:fillClrLst meth="repeat">
+      <a:schemeClr val="lt1">
+        <a:alpha val="90000"/>
+      </a:schemeClr>
+    </dgm:fillClrLst>
+    <dgm:linClrLst meth="repeat">
+      <a:schemeClr val="accent2"/>
+      <a:schemeClr val="accent3"/>
+      <a:schemeClr val="accent4"/>
+      <a:schemeClr val="accent5"/>
+      <a:schemeClr val="accent6"/>
+    </dgm:linClrLst>
+    <dgm:effectClrLst/>
+    <dgm:txLinClrLst/>
+    <dgm:txFillClrLst meth="repeat">
+      <a:schemeClr val="dk1"/>
+    </dgm:txFillClrLst>
+    <dgm:txEffectClrLst/>
+  </dgm:styleLbl>
+  <dgm:styleLbl name="alignAcc1">
+    <dgm:fillClrLst meth="repeat">
+      <a:schemeClr val="lt1">
+        <a:alpha val="90000"/>
+      </a:schemeClr>
+    </dgm:fillClrLst>
+    <dgm:linClrLst meth="repeat">
+      <a:schemeClr val="accent2"/>
+      <a:schemeClr val="accent3"/>
+      <a:schemeClr val="accent4"/>
+      <a:schemeClr val="accent5"/>
+      <a:schemeClr val="accent6"/>
+    </dgm:linClrLst>
+    <dgm:effectClrLst/>
+    <dgm:txLinClrLst/>
+    <dgm:txFillClrLst meth="repeat">
+      <a:schemeClr val="dk1"/>
+    </dgm:txFillClrLst>
+    <dgm:txEffectClrLst/>
+  </dgm:styleLbl>
+  <dgm:styleLbl name="trAlignAcc1">
+    <dgm:fillClrLst meth="repeat">
+      <a:schemeClr val="lt1">
+        <a:alpha val="40000"/>
+      </a:schemeClr>
+    </dgm:fillClrLst>
+    <dgm:linClrLst meth="repeat">
+      <a:schemeClr val="accent1"/>
+    </dgm:linClrLst>
+    <dgm:effectClrLst/>
+    <dgm:txLinClrLst/>
+    <dgm:txFillClrLst meth="repeat">
+      <a:schemeClr val="dk1"/>
+    </dgm:txFillClrLst>
+    <dgm:txEffectClrLst/>
+  </dgm:styleLbl>
+  <dgm:styleLbl name="bgAcc1">
+    <dgm:fillClrLst meth="repeat">
+      <a:schemeClr val="lt1">
+        <a:alpha val="90000"/>
+      </a:schemeClr>
+    </dgm:fillClrLst>
+    <dgm:linClrLst meth="repeat">
+      <a:schemeClr val="accent2"/>
+      <a:schemeClr val="accent3"/>
+      <a:schemeClr val="accent4"/>
+      <a:schemeClr val="accent5"/>
+      <a:schemeClr val="accent6"/>
+    </dgm:linClrLst>
+    <dgm:effectClrLst/>
+    <dgm:txLinClrLst/>
+    <dgm:txFillClrLst meth="repeat">
+      <a:schemeClr val="dk1"/>
+    </dgm:txFillClrLst>
+    <dgm:txEffectClrLst/>
+  </dgm:styleLbl>
+  <dgm:styleLbl name="solidFgAcc1">
+    <dgm:fillClrLst meth="repeat">
+      <a:schemeClr val="lt1"/>
+    </dgm:fillClrLst>
+    <dgm:linClrLst meth="repeat">
+      <a:schemeClr val="accent2"/>
+      <a:schemeClr val="accent3"/>
+      <a:schemeClr val="accent4"/>
+      <a:schemeClr val="accent5"/>
+      <a:schemeClr val="accent6"/>
+    </dgm:linClrLst>
+    <dgm:effectClrLst/>
+    <dgm:txLinClrLst/>
+    <dgm:txFillClrLst meth="repeat">
+      <a:schemeClr val="dk1"/>
+    </dgm:txFillClrLst>
+    <dgm:txEffectClrLst/>
+  </dgm:styleLbl>
+  <dgm:styleLbl name="solidAlignAcc1">
+    <dgm:fillClrLst meth="repeat">
+      <a:schemeClr val="lt1"/>
+    </dgm:fillClrLst>
+    <dgm:linClrLst meth="repeat">
+      <a:schemeClr val="accent2"/>
+      <a:schemeClr val="accent3"/>
+      <a:schemeClr val="accent4"/>
+      <a:schemeClr val="accent5"/>
+      <a:schemeClr val="accent6"/>
+    </dgm:linClrLst>
+    <dgm:effectClrLst/>
+    <dgm:txLinClrLst/>
+    <dgm:txFillClrLst meth="repeat">
+      <a:schemeClr val="dk1"/>
+    </dgm:txFillClrLst>
+    <dgm:txEffectClrLst/>
+  </dgm:styleLbl>
+  <dgm:styleLbl name="solidBgAcc1">
+    <dgm:fillClrLst meth="repeat">
+      <a:schemeClr val="lt1"/>
+    </dgm:fillClrLst>
+    <dgm:linClrLst meth="repeat">
+      <a:schemeClr val="accent2"/>
+      <a:schemeClr val="accent3"/>
+      <a:schemeClr val="accent4"/>
+      <a:schemeClr val="accent5"/>
+      <a:schemeClr val="accent6"/>
+    </dgm:linClrLst>
+    <dgm:effectClrLst/>
+    <dgm:txLinClrLst/>
+    <dgm:txFillClrLst meth="repeat">
+      <a:schemeClr val="dk1"/>
+    </dgm:txFillClrLst>
+    <dgm:txEffectClrLst/>
+  </dgm:styleLbl>
+  <dgm:styleLbl name="fgAccFollowNode1">
+    <dgm:fillClrLst meth="repeat">
+      <a:schemeClr val="accent2">
+        <a:tint val="40000"/>
+        <a:alpha val="90000"/>
+      </a:schemeClr>
+      <a:schemeClr val="accent3">
+        <a:tint val="40000"/>
+        <a:alpha val="90000"/>
+      </a:schemeClr>
+      <a:schemeClr val="accent4">
+        <a:tint val="40000"/>
+        <a:alpha val="90000"/>
+      </a:schemeClr>
+      <a:schemeClr val="accent5">
+        <a:tint val="40000"/>
+        <a:alpha val="90000"/>
+      </a:schemeClr>
+      <a:schemeClr val="accent6">
+        <a:tint val="40000"/>
+        <a:alpha val="90000"/>
+      </a:schemeClr>
+    </dgm:fillClrLst>
+    <dgm:linClrLst meth="repeat">
+      <a:schemeClr val="accent2">
+        <a:tint val="40000"/>
+        <a:alpha val="90000"/>
+      </a:schemeClr>
+      <a:schemeClr val="accent3">
+        <a:tint val="40000"/>
+        <a:alpha val="90000"/>
+      </a:schemeClr>
+      <a:schemeClr val="accent4">
+        <a:tint val="40000"/>
+        <a:alpha val="90000"/>
+      </a:schemeClr>
+      <a:schemeClr val="accent5">
+        <a:tint val="40000"/>
+        <a:alpha val="90000"/>
+      </a:schemeClr>
+      <a:schemeClr val="accent6">
+        <a:tint val="40000"/>
+        <a:alpha val="90000"/>
+      </a:schemeClr>
+    </dgm:linClrLst>
+    <dgm:effectClrLst/>
+    <dgm:txLinClrLst/>
+    <dgm:txFillClrLst meth="repeat">
+      <a:schemeClr val="dk1"/>
+    </dgm:txFillClrLst>
+    <dgm:txEffectClrLst/>
+  </dgm:styleLbl>
+  <dgm:styleLbl name="alignAccFollowNode1">
+    <dgm:fillClrLst meth="repeat">
+      <a:schemeClr val="accent2">
+        <a:tint val="40000"/>
+        <a:alpha val="90000"/>
+      </a:schemeClr>
+      <a:schemeClr val="accent3">
+        <a:tint val="40000"/>
+        <a:alpha val="90000"/>
+      </a:schemeClr>
+      <a:schemeClr val="accent4">
+        <a:tint val="40000"/>
+        <a:alpha val="90000"/>
+      </a:schemeClr>
+      <a:schemeClr val="accent5">
+        <a:tint val="40000"/>
+        <a:alpha val="90000"/>
+      </a:schemeClr>
+      <a:schemeClr val="accent6">
+        <a:tint val="40000"/>
+        <a:alpha val="90000"/>
+      </a:schemeClr>
+    </dgm:fillClrLst>
+    <dgm:linClrLst meth="repeat">
+      <a:schemeClr val="accent2">
+        <a:tint val="40000"/>
+        <a:alpha val="90000"/>
+      </a:schemeClr>
+      <a:schemeClr val="accent3">
+        <a:tint val="40000"/>
+        <a:alpha val="90000"/>
+      </a:schemeClr>
+      <a:schemeClr val="accent4">
+        <a:tint val="40000"/>
+        <a:alpha val="90000"/>
+      </a:schemeClr>
+      <a:schemeClr val="accent5">
+        <a:tint val="40000"/>
+        <a:alpha val="90000"/>
+      </a:schemeClr>
+      <a:schemeClr val="accent6">
+        <a:tint val="40000"/>
+        <a:alpha val="90000"/>
+      </a:schemeClr>
+    </dgm:linClrLst>
+    <dgm:effectClrLst/>
+    <dgm:txLinClrLst/>
+    <dgm:txFillClrLst meth="repeat">
+      <a:schemeClr val="dk1"/>
+    </dgm:txFillClrLst>
+    <dgm:txEffectClrLst/>
+  </dgm:styleLbl>
+  <dgm:styleLbl name="bgAccFollowNode1">
+    <dgm:fillClrLst meth="repeat">
+      <a:schemeClr val="accent2">
+        <a:tint val="40000"/>
+        <a:alpha val="90000"/>
+      </a:schemeClr>
+      <a:schemeClr val="accent3">
+        <a:tint val="40000"/>
+        <a:alpha val="90000"/>
+      </a:schemeClr>
+      <a:schemeClr val="accent4">
+        <a:tint val="40000"/>
+        <a:alpha val="90000"/>
+      </a:schemeClr>
+      <a:schemeClr val="accent5">
+        <a:tint val="40000"/>
+        <a:alpha val="90000"/>
+      </a:schemeClr>
+      <a:schemeClr val="accent6">
+        <a:tint val="40000"/>
+        <a:alpha val="90000"/>
+      </a:schemeClr>
+    </dgm:fillClrLst>
+    <dgm:linClrLst meth="repeat">
+      <a:schemeClr val="accent2">
+        <a:tint val="40000"/>
+        <a:alpha val="90000"/>
+      </a:schemeClr>
+      <a:schemeClr val="accent3">
+        <a:tint val="40000"/>
+        <a:alpha val="90000"/>
+      </a:schemeClr>
+      <a:schemeClr val="accent4">
+        <a:tint val="40000"/>
+        <a:alpha val="90000"/>
+      </a:schemeClr>
+      <a:schemeClr val="accent5">
+        <a:tint val="40000"/>
+        <a:alpha val="90000"/>
+      </a:schemeClr>
+      <a:schemeClr val="accent6">
+        <a:tint val="40000"/>
+        <a:alpha val="90000"/>
+      </a:schemeClr>
+    </dgm:linClrLst>
+    <dgm:effectClrLst/>
+    <dgm:txLinClrLst/>
+    <dgm:txFillClrLst meth="repeat">
+      <a:schemeClr val="dk1"/>
+    </dgm:txFillClrLst>
+    <dgm:txEffectClrLst/>
+  </dgm:styleLbl>
+  <dgm:styleLbl name="fgAcc0">
+    <dgm:fillClrLst meth="repeat">
+      <a:schemeClr val="lt1">
+        <a:alpha val="90000"/>
+      </a:schemeClr>
+    </dgm:fillClrLst>
+    <dgm:linClrLst>
+      <a:schemeClr val="accent1"/>
+    </dgm:linClrLst>
+    <dgm:effectClrLst/>
+    <dgm:txLinClrLst/>
+    <dgm:txFillClrLst meth="repeat">
+      <a:schemeClr val="dk1"/>
+    </dgm:txFillClrLst>
+    <dgm:txEffectClrLst/>
+  </dgm:styleLbl>
+  <dgm:styleLbl name="fgAcc2">
+    <dgm:fillClrLst meth="repeat">
+      <a:schemeClr val="lt1">
+        <a:alpha val="90000"/>
+      </a:schemeClr>
+    </dgm:fillClrLst>
+    <dgm:linClrLst>
+      <a:schemeClr val="accent2"/>
+    </dgm:linClrLst>
+    <dgm:effectClrLst/>
+    <dgm:txLinClrLst/>
+    <dgm:txFillClrLst meth="repeat">
+      <a:schemeClr val="dk1"/>
+    </dgm:txFillClrLst>
+    <dgm:txEffectClrLst/>
+  </dgm:styleLbl>
+  <dgm:styleLbl name="fgAcc3">
+    <dgm:fillClrLst meth="repeat">
+      <a:schemeClr val="lt1">
+        <a:alpha val="90000"/>
+      </a:schemeClr>
+    </dgm:fillClrLst>
+    <dgm:linClrLst>
+      <a:schemeClr val="accent3"/>
+    </dgm:linClrLst>
+    <dgm:effectClrLst/>
+    <dgm:txLinClrLst/>
+    <dgm:txFillClrLst meth="repeat">
+      <a:schemeClr val="dk1"/>
+    </dgm:txFillClrLst>
+    <dgm:txEffectClrLst/>
+  </dgm:styleLbl>
+  <dgm:styleLbl name="fgAcc4">
+    <dgm:fillClrLst meth="repeat">
+      <a:schemeClr val="lt1">
+        <a:alpha val="90000"/>
+      </a:schemeClr>
+    </dgm:fillClrLst>
+    <dgm:linClrLst>
+      <a:schemeClr val="accent4"/>
+    </dgm:linClrLst>
+    <dgm:effectClrLst/>
+    <dgm:txLinClrLst/>
+    <dgm:txFillClrLst meth="repeat">
+      <a:schemeClr val="dk1"/>
+    </dgm:txFillClrLst>
+    <dgm:txEffectClrLst/>
+  </dgm:styleLbl>
+  <dgm:styleLbl name="bgShp">
+    <dgm:fillClrLst meth="repeat">
+      <a:schemeClr val="bg1">
+        <a:lumMod val="95000"/>
+      </a:schemeClr>
+    </dgm:fillClrLst>
+    <dgm:linClrLst meth="repeat">
+      <a:schemeClr val="dk1"/>
+    </dgm:linClrLst>
+    <dgm:effectClrLst/>
+    <dgm:txLinClrLst/>
+    <dgm:txFillClrLst meth="repeat">
+      <a:schemeClr val="dk1"/>
+    </dgm:txFillClrLst>
+    <dgm:txEffectClrLst/>
+  </dgm:styleLbl>
+  <dgm:styleLbl name="dkBgShp">
+    <dgm:fillClrLst meth="repeat">
+      <a:schemeClr val="accent2">
+        <a:shade val="90000"/>
+      </a:schemeClr>
+    </dgm:fillClrLst>
+    <dgm:linClrLst meth="repeat">
+      <a:schemeClr val="dk1"/>
+    </dgm:linClrLst>
+    <dgm:effectClrLst/>
+    <dgm:txLinClrLst/>
+    <dgm:txFillClrLst meth="repeat">
+      <a:schemeClr val="lt1"/>
+    </dgm:txFillClrLst>
+    <dgm:txEffectClrLst/>
+  </dgm:styleLbl>
+  <dgm:styleLbl name="trBgShp">
+    <dgm:fillClrLst meth="repeat">
+      <a:schemeClr val="accent1">
+        <a:tint val="50000"/>
+        <a:alpha val="40000"/>
+      </a:schemeClr>
+    </dgm:fillClrLst>
+    <dgm:linClrLst meth="repeat">
+      <a:schemeClr val="accent2"/>
+    </dgm:linClrLst>
+    <dgm:effectClrLst/>
+    <dgm:txLinClrLst/>
+    <dgm:txFillClrLst meth="repeat">
+      <a:schemeClr val="lt1"/>
+    </dgm:txFillClrLst>
+    <dgm:txEffectClrLst/>
+  </dgm:styleLbl>
+  <dgm:styleLbl name="fgShp">
+    <dgm:fillClrLst meth="repeat">
+      <a:schemeClr val="accent2">
+        <a:tint val="40000"/>
+      </a:schemeClr>
+    </dgm:fillClrLst>
+    <dgm:linClrLst meth="repeat">
+      <a:schemeClr val="lt1"/>
+    </dgm:linClrLst>
+    <dgm:effectClrLst/>
+    <dgm:txLinClrLst/>
+    <dgm:txFillClrLst meth="repeat">
+      <a:schemeClr val="dk1"/>
+    </dgm:txFillClrLst>
+    <dgm:txEffectClrLst/>
+  </dgm:styleLbl>
+  <dgm:styleLbl name="revTx">
+    <dgm:fillClrLst meth="repeat">
+      <a:schemeClr val="lt1">
+        <a:alpha val="0"/>
+      </a:schemeClr>
+    </dgm:fillClrLst>
+    <dgm:linClrLst meth="repeat">
+      <a:schemeClr val="dk1">
+        <a:alpha val="0"/>
+      </a:schemeClr>
+    </dgm:linClrLst>
+    <dgm:effectClrLst/>
+    <dgm:txLinClrLst/>
+    <dgm:txFillClrLst meth="repeat">
+      <a:schemeClr val="tx1"/>
+    </dgm:txFillClrLst>
+    <dgm:txEffectClrLst/>
+  </dgm:styleLbl>
+</dgm:colorsDef>
+</file>
+
+<file path=ppt/diagrams/data1.xml><?xml version="1.0" encoding="utf-8"?>
+<dgm:dataModel xmlns:dgm="http://schemas.openxmlformats.org/drawingml/2006/diagram" xmlns:a="http://schemas.openxmlformats.org/drawingml/2006/main">
+  <dgm:ptLst>
+    <dgm:pt modelId="{B304EB34-5BB6-4F86-B1E7-1E999E867BF5}" type="doc">
+      <dgm:prSet loTypeId="urn:microsoft.com/office/officeart/2018/2/layout/IconLabelDescriptionList" loCatId="icon" qsTypeId="urn:microsoft.com/office/officeart/2005/8/quickstyle/simple1" qsCatId="simple" csTypeId="urn:microsoft.com/office/officeart/2018/5/colors/Iconchunking_neutralbg_colorful1" csCatId="colorful" phldr="1"/>
+      <dgm:spPr/>
+      <dgm:t>
+        <a:bodyPr/>
+        <a:lstStyle/>
+        <a:p>
+          <a:endParaRPr lang="en-US"/>
+        </a:p>
+      </dgm:t>
+    </dgm:pt>
+    <dgm:pt modelId="{A960ED74-7C3E-4344-B838-267F8835FCAF}">
+      <dgm:prSet/>
+      <dgm:spPr/>
+      <dgm:t>
+        <a:bodyPr/>
+        <a:lstStyle/>
+        <a:p>
+          <a:pPr>
+            <a:defRPr b="1"/>
+          </a:pPr>
+          <a:r>
+            <a:rPr lang="en-US" b="1"/>
+            <a:t>App UI changes:</a:t>
+          </a:r>
+          <a:endParaRPr lang="en-US"/>
+        </a:p>
+      </dgm:t>
+    </dgm:pt>
+    <dgm:pt modelId="{C1FAECB0-1BC1-4AA3-8E09-F9A5ACAD47E2}" type="parTrans" cxnId="{B559329E-F8C0-4070-AC21-ED5D8DD0F8D1}">
+      <dgm:prSet/>
+      <dgm:spPr/>
+      <dgm:t>
+        <a:bodyPr/>
+        <a:lstStyle/>
+        <a:p>
+          <a:endParaRPr lang="en-US"/>
+        </a:p>
+      </dgm:t>
+    </dgm:pt>
+    <dgm:pt modelId="{D13CF884-93E0-49E5-8268-E363F2CF61F3}" type="sibTrans" cxnId="{B559329E-F8C0-4070-AC21-ED5D8DD0F8D1}">
+      <dgm:prSet/>
+      <dgm:spPr/>
+      <dgm:t>
+        <a:bodyPr/>
+        <a:lstStyle/>
+        <a:p>
+          <a:endParaRPr lang="en-US"/>
+        </a:p>
+      </dgm:t>
+    </dgm:pt>
+    <dgm:pt modelId="{E109D79C-8387-4A6A-8187-B4E4B634559C}">
+      <dgm:prSet/>
+      <dgm:spPr/>
+      <dgm:t>
+        <a:bodyPr/>
+        <a:lstStyle/>
+        <a:p>
+          <a:r>
+            <a:rPr lang="en-US" b="1" dirty="0"/>
+            <a:t>A ‘Reset’ button – loads a new list of friends (overwriting the current list).</a:t>
+          </a:r>
+          <a:endParaRPr lang="en-US" dirty="0"/>
+        </a:p>
+      </dgm:t>
+    </dgm:pt>
+    <dgm:pt modelId="{3ADB3AD0-B04A-4AFD-9180-559980F9F0CF}" type="parTrans" cxnId="{207677D8-28B9-46D2-8F79-0BFC6BB65178}">
+      <dgm:prSet/>
+      <dgm:spPr/>
+      <dgm:t>
+        <a:bodyPr/>
+        <a:lstStyle/>
+        <a:p>
+          <a:endParaRPr lang="en-US"/>
+        </a:p>
+      </dgm:t>
+    </dgm:pt>
+    <dgm:pt modelId="{1DF93110-5628-48E3-A385-956602E8C0B6}" type="sibTrans" cxnId="{207677D8-28B9-46D2-8F79-0BFC6BB65178}">
+      <dgm:prSet/>
+      <dgm:spPr/>
+      <dgm:t>
+        <a:bodyPr/>
+        <a:lstStyle/>
+        <a:p>
+          <a:endParaRPr lang="en-US"/>
+        </a:p>
+      </dgm:t>
+    </dgm:pt>
+    <dgm:pt modelId="{1187D4DF-470F-41DA-9941-81600D26ADBE}">
+      <dgm:prSet/>
+      <dgm:spPr/>
+      <dgm:t>
+        <a:bodyPr/>
+        <a:lstStyle/>
+        <a:p>
+          <a:r>
+            <a:rPr lang="en-US" b="1" dirty="0"/>
+            <a:t>Combine Reset button and search text into a new component, </a:t>
+          </a:r>
+          <a:r>
+            <a:rPr lang="en-US" b="1" dirty="0" err="1"/>
+            <a:t>SearchBox</a:t>
+          </a:r>
+          <a:r>
+            <a:rPr lang="en-US" b="1" dirty="0"/>
+            <a:t>.</a:t>
+          </a:r>
+          <a:endParaRPr lang="en-US" dirty="0"/>
+        </a:p>
+      </dgm:t>
+    </dgm:pt>
+    <dgm:pt modelId="{E3DF9A1C-6987-424D-B162-5544352B0559}" type="parTrans" cxnId="{FEEC24F6-0DD4-49B2-AE57-AD8FAC086FED}">
+      <dgm:prSet/>
+      <dgm:spPr/>
+      <dgm:t>
+        <a:bodyPr/>
+        <a:lstStyle/>
+        <a:p>
+          <a:endParaRPr lang="en-US"/>
+        </a:p>
+      </dgm:t>
+    </dgm:pt>
+    <dgm:pt modelId="{11632B02-C332-4F9D-B156-19DDC029D275}" type="sibTrans" cxnId="{FEEC24F6-0DD4-49B2-AE57-AD8FAC086FED}">
+      <dgm:prSet/>
+      <dgm:spPr/>
+      <dgm:t>
+        <a:bodyPr/>
+        <a:lstStyle/>
+        <a:p>
+          <a:endParaRPr lang="en-US"/>
+        </a:p>
+      </dgm:t>
+    </dgm:pt>
+    <dgm:pt modelId="{057C98EB-0078-4C6D-9103-37802DED1608}">
+      <dgm:prSet/>
+      <dgm:spPr/>
+      <dgm:t>
+        <a:bodyPr/>
+        <a:lstStyle/>
+        <a:p>
+          <a:r>
+            <a:rPr lang="en-US" b="1"/>
+            <a:t>Browser tab title - shows # of matching friends (side effect).</a:t>
+          </a:r>
+          <a:endParaRPr lang="en-US"/>
+        </a:p>
+      </dgm:t>
+    </dgm:pt>
+    <dgm:pt modelId="{FB9C8104-470E-43E9-B954-479B21791A03}" type="parTrans" cxnId="{7C9CD107-B6F8-4471-A396-4731E135870E}">
+      <dgm:prSet/>
+      <dgm:spPr/>
+      <dgm:t>
+        <a:bodyPr/>
+        <a:lstStyle/>
+        <a:p>
+          <a:endParaRPr lang="en-US"/>
+        </a:p>
+      </dgm:t>
+    </dgm:pt>
+    <dgm:pt modelId="{CE77E540-4893-46E7-826D-E98CDB605021}" type="sibTrans" cxnId="{7C9CD107-B6F8-4471-A396-4731E135870E}">
+      <dgm:prSet/>
+      <dgm:spPr/>
+      <dgm:t>
+        <a:bodyPr/>
+        <a:lstStyle/>
+        <a:p>
+          <a:endParaRPr lang="en-US"/>
+        </a:p>
+      </dgm:t>
+    </dgm:pt>
+    <dgm:pt modelId="{074F8333-E62E-4175-BAEB-0EA3992429C1}">
+      <dgm:prSet/>
+      <dgm:spPr/>
+      <dgm:t>
+        <a:bodyPr/>
+        <a:lstStyle/>
+        <a:p>
+          <a:pPr>
+            <a:defRPr b="1"/>
+          </a:pPr>
+          <a:r>
+            <a:rPr lang="en-US" b="1" dirty="0"/>
+            <a:t>Ref. lecture </a:t>
+          </a:r>
+          <a:r>
+            <a:rPr lang="en-US" b="1" dirty="0" err="1"/>
+            <a:t>archiv</a:t>
+          </a:r>
+          <a:endParaRPr lang="en-US" dirty="0"/>
+        </a:p>
+      </dgm:t>
+    </dgm:pt>
+    <dgm:pt modelId="{33D61969-CCC7-451E-9414-FE487DBB11FC}" type="sibTrans" cxnId="{9B82338E-706D-4ED0-BB27-AFE729656100}">
+      <dgm:prSet/>
+      <dgm:spPr/>
+      <dgm:t>
+        <a:bodyPr/>
+        <a:lstStyle/>
+        <a:p>
+          <a:endParaRPr lang="en-US"/>
+        </a:p>
+      </dgm:t>
+    </dgm:pt>
+    <dgm:pt modelId="{5AEFED28-3C12-4A9F-BB2D-4731DF5C3ABA}" type="parTrans" cxnId="{9B82338E-706D-4ED0-BB27-AFE729656100}">
+      <dgm:prSet/>
+      <dgm:spPr/>
+      <dgm:t>
+        <a:bodyPr/>
+        <a:lstStyle/>
+        <a:p>
+          <a:endParaRPr lang="en-US"/>
+        </a:p>
+      </dgm:t>
+    </dgm:pt>
+    <dgm:pt modelId="{2A781417-E8A2-4984-85DB-598868CBFBFF}" type="pres">
+      <dgm:prSet presAssocID="{B304EB34-5BB6-4F86-B1E7-1E999E867BF5}" presName="root" presStyleCnt="0">
+        <dgm:presLayoutVars>
+          <dgm:dir/>
+          <dgm:resizeHandles val="exact"/>
+        </dgm:presLayoutVars>
+      </dgm:prSet>
+      <dgm:spPr/>
+    </dgm:pt>
+    <dgm:pt modelId="{DE43EEA3-07A9-4218-9BD6-6C9C61F02F97}" type="pres">
+      <dgm:prSet presAssocID="{A960ED74-7C3E-4344-B838-267F8835FCAF}" presName="compNode" presStyleCnt="0"/>
+      <dgm:spPr/>
+    </dgm:pt>
+    <dgm:pt modelId="{00FD6486-D36D-437E-8AD3-805AAF799A26}" type="pres">
+      <dgm:prSet presAssocID="{A960ED74-7C3E-4344-B838-267F8835FCAF}" presName="iconRect" presStyleLbl="node1" presStyleIdx="0" presStyleCnt="2"/>
+      <dgm:spPr>
+        <a:blipFill>
+          <a:blip xmlns:r="http://schemas.openxmlformats.org/officeDocument/2006/relationships" r:embed="rId1">
+            <a:extLst>
+              <a:ext uri="{28A0092B-C50C-407E-A947-70E740481C1C}">
+                <a14:useLocalDpi xmlns:a14="http://schemas.microsoft.com/office/drawing/2010/main" val="0"/>
+              </a:ext>
+              <a:ext uri="{96DAC541-7B7A-43D3-8B79-37D633B846F1}">
+                <asvg:svgBlip xmlns:asvg="http://schemas.microsoft.com/office/drawing/2016/SVG/main" r:embed="rId2"/>
+              </a:ext>
+            </a:extLst>
+          </a:blip>
+          <a:stretch>
+            <a:fillRect/>
+          </a:stretch>
+        </a:blipFill>
+        <a:ln>
+          <a:noFill/>
+        </a:ln>
+      </dgm:spPr>
+      <dgm:extLst>
+        <a:ext uri="{E40237B7-FDA0-4F09-8148-C483321AD2D9}">
+          <dgm14:cNvPr xmlns:dgm14="http://schemas.microsoft.com/office/drawing/2010/diagram" id="0" name="" descr="Flowchart"/>
+        </a:ext>
+      </dgm:extLst>
+    </dgm:pt>
+    <dgm:pt modelId="{E58C78F3-C1E8-4B92-9346-55FFCE6AF736}" type="pres">
+      <dgm:prSet presAssocID="{A960ED74-7C3E-4344-B838-267F8835FCAF}" presName="iconSpace" presStyleCnt="0"/>
+      <dgm:spPr/>
+    </dgm:pt>
+    <dgm:pt modelId="{44DE8AF7-6CC1-4956-85FC-67D2D140A8A2}" type="pres">
+      <dgm:prSet presAssocID="{A960ED74-7C3E-4344-B838-267F8835FCAF}" presName="parTx" presStyleLbl="revTx" presStyleIdx="0" presStyleCnt="4">
+        <dgm:presLayoutVars>
+          <dgm:chMax val="0"/>
+          <dgm:chPref val="0"/>
+        </dgm:presLayoutVars>
+      </dgm:prSet>
+      <dgm:spPr/>
+    </dgm:pt>
+    <dgm:pt modelId="{F1047807-A403-4E92-8F99-6616AFF66F7E}" type="pres">
+      <dgm:prSet presAssocID="{A960ED74-7C3E-4344-B838-267F8835FCAF}" presName="txSpace" presStyleCnt="0"/>
+      <dgm:spPr/>
+    </dgm:pt>
+    <dgm:pt modelId="{2BC7D02A-33A3-4436-8B16-A50A09BBD922}" type="pres">
+      <dgm:prSet presAssocID="{A960ED74-7C3E-4344-B838-267F8835FCAF}" presName="desTx" presStyleLbl="revTx" presStyleIdx="1" presStyleCnt="4">
+        <dgm:presLayoutVars/>
+      </dgm:prSet>
+      <dgm:spPr/>
+    </dgm:pt>
+    <dgm:pt modelId="{E6A81165-516D-44E8-8EE3-DF3AF20E4FE1}" type="pres">
+      <dgm:prSet presAssocID="{D13CF884-93E0-49E5-8268-E363F2CF61F3}" presName="sibTrans" presStyleCnt="0"/>
+      <dgm:spPr/>
+    </dgm:pt>
+    <dgm:pt modelId="{2209E4A8-F82D-4B7A-B678-20F475678590}" type="pres">
+      <dgm:prSet presAssocID="{074F8333-E62E-4175-BAEB-0EA3992429C1}" presName="compNode" presStyleCnt="0"/>
+      <dgm:spPr/>
+    </dgm:pt>
+    <dgm:pt modelId="{DA98B6B5-E5D0-41FF-8E71-E7FAAE55B869}" type="pres">
+      <dgm:prSet presAssocID="{074F8333-E62E-4175-BAEB-0EA3992429C1}" presName="iconRect" presStyleLbl="node1" presStyleIdx="1" presStyleCnt="2"/>
+      <dgm:spPr>
+        <a:ln>
+          <a:noFill/>
+        </a:ln>
+      </dgm:spPr>
+    </dgm:pt>
+    <dgm:pt modelId="{3B856DA1-B1CF-4D60-B9B9-CAF25807D8D0}" type="pres">
+      <dgm:prSet presAssocID="{074F8333-E62E-4175-BAEB-0EA3992429C1}" presName="iconSpace" presStyleCnt="0"/>
+      <dgm:spPr/>
+    </dgm:pt>
+    <dgm:pt modelId="{3393A517-5438-4AD4-8527-5369B898A33B}" type="pres">
+      <dgm:prSet presAssocID="{074F8333-E62E-4175-BAEB-0EA3992429C1}" presName="parTx" presStyleLbl="revTx" presStyleIdx="2" presStyleCnt="4">
+        <dgm:presLayoutVars>
+          <dgm:chMax val="0"/>
+          <dgm:chPref val="0"/>
+        </dgm:presLayoutVars>
+      </dgm:prSet>
+      <dgm:spPr/>
+    </dgm:pt>
+    <dgm:pt modelId="{3F3EEAE4-1CDD-45D6-A2CA-FA60784A5E10}" type="pres">
+      <dgm:prSet presAssocID="{074F8333-E62E-4175-BAEB-0EA3992429C1}" presName="txSpace" presStyleCnt="0"/>
+      <dgm:spPr/>
+    </dgm:pt>
+    <dgm:pt modelId="{F907BB7D-8870-4A41-A670-D1E7F5090172}" type="pres">
+      <dgm:prSet presAssocID="{074F8333-E62E-4175-BAEB-0EA3992429C1}" presName="desTx" presStyleLbl="revTx" presStyleIdx="3" presStyleCnt="4">
+        <dgm:presLayoutVars/>
+      </dgm:prSet>
+      <dgm:spPr/>
+    </dgm:pt>
+  </dgm:ptLst>
+  <dgm:cxnLst>
+    <dgm:cxn modelId="{7C9CD107-B6F8-4471-A396-4731E135870E}" srcId="{A960ED74-7C3E-4344-B838-267F8835FCAF}" destId="{057C98EB-0078-4C6D-9103-37802DED1608}" srcOrd="2" destOrd="0" parTransId="{FB9C8104-470E-43E9-B954-479B21791A03}" sibTransId="{CE77E540-4893-46E7-826D-E98CDB605021}"/>
+    <dgm:cxn modelId="{78EB771A-A695-49E0-AED4-FB6F0542B2D5}" type="presOf" srcId="{074F8333-E62E-4175-BAEB-0EA3992429C1}" destId="{3393A517-5438-4AD4-8527-5369B898A33B}" srcOrd="0" destOrd="0" presId="urn:microsoft.com/office/officeart/2018/2/layout/IconLabelDescriptionList"/>
+    <dgm:cxn modelId="{9B82338E-706D-4ED0-BB27-AFE729656100}" srcId="{B304EB34-5BB6-4F86-B1E7-1E999E867BF5}" destId="{074F8333-E62E-4175-BAEB-0EA3992429C1}" srcOrd="1" destOrd="0" parTransId="{5AEFED28-3C12-4A9F-BB2D-4731DF5C3ABA}" sibTransId="{33D61969-CCC7-451E-9414-FE487DBB11FC}"/>
+    <dgm:cxn modelId="{B559329E-F8C0-4070-AC21-ED5D8DD0F8D1}" srcId="{B304EB34-5BB6-4F86-B1E7-1E999E867BF5}" destId="{A960ED74-7C3E-4344-B838-267F8835FCAF}" srcOrd="0" destOrd="0" parTransId="{C1FAECB0-1BC1-4AA3-8E09-F9A5ACAD47E2}" sibTransId="{D13CF884-93E0-49E5-8268-E363F2CF61F3}"/>
+    <dgm:cxn modelId="{E7C050A2-A221-4A3C-B215-F5EAD4F04111}" type="presOf" srcId="{B304EB34-5BB6-4F86-B1E7-1E999E867BF5}" destId="{2A781417-E8A2-4984-85DB-598868CBFBFF}" srcOrd="0" destOrd="0" presId="urn:microsoft.com/office/officeart/2018/2/layout/IconLabelDescriptionList"/>
+    <dgm:cxn modelId="{EA75EFAE-E779-4BD6-A9EF-1BE33D2BFCF6}" type="presOf" srcId="{057C98EB-0078-4C6D-9103-37802DED1608}" destId="{2BC7D02A-33A3-4436-8B16-A50A09BBD922}" srcOrd="0" destOrd="2" presId="urn:microsoft.com/office/officeart/2018/2/layout/IconLabelDescriptionList"/>
+    <dgm:cxn modelId="{542C90CC-9010-4ED0-820E-4ACDBF86A8C3}" type="presOf" srcId="{E109D79C-8387-4A6A-8187-B4E4B634559C}" destId="{2BC7D02A-33A3-4436-8B16-A50A09BBD922}" srcOrd="0" destOrd="0" presId="urn:microsoft.com/office/officeart/2018/2/layout/IconLabelDescriptionList"/>
+    <dgm:cxn modelId="{207677D8-28B9-46D2-8F79-0BFC6BB65178}" srcId="{A960ED74-7C3E-4344-B838-267F8835FCAF}" destId="{E109D79C-8387-4A6A-8187-B4E4B634559C}" srcOrd="0" destOrd="0" parTransId="{3ADB3AD0-B04A-4AFD-9180-559980F9F0CF}" sibTransId="{1DF93110-5628-48E3-A385-956602E8C0B6}"/>
+    <dgm:cxn modelId="{FEEC24F6-0DD4-49B2-AE57-AD8FAC086FED}" srcId="{A960ED74-7C3E-4344-B838-267F8835FCAF}" destId="{1187D4DF-470F-41DA-9941-81600D26ADBE}" srcOrd="1" destOrd="0" parTransId="{E3DF9A1C-6987-424D-B162-5544352B0559}" sibTransId="{11632B02-C332-4F9D-B156-19DDC029D275}"/>
+    <dgm:cxn modelId="{561690F8-679F-4649-83A4-90425F1A3CD6}" type="presOf" srcId="{1187D4DF-470F-41DA-9941-81600D26ADBE}" destId="{2BC7D02A-33A3-4436-8B16-A50A09BBD922}" srcOrd="0" destOrd="1" presId="urn:microsoft.com/office/officeart/2018/2/layout/IconLabelDescriptionList"/>
+    <dgm:cxn modelId="{F3B3ACFD-3EEA-4972-8F20-8BD28C4A52C9}" type="presOf" srcId="{A960ED74-7C3E-4344-B838-267F8835FCAF}" destId="{44DE8AF7-6CC1-4956-85FC-67D2D140A8A2}" srcOrd="0" destOrd="0" presId="urn:microsoft.com/office/officeart/2018/2/layout/IconLabelDescriptionList"/>
+    <dgm:cxn modelId="{DCF6E384-9031-49A4-A2C9-178291125021}" type="presParOf" srcId="{2A781417-E8A2-4984-85DB-598868CBFBFF}" destId="{DE43EEA3-07A9-4218-9BD6-6C9C61F02F97}" srcOrd="0" destOrd="0" presId="urn:microsoft.com/office/officeart/2018/2/layout/IconLabelDescriptionList"/>
+    <dgm:cxn modelId="{0FC78C87-2255-4832-9386-A67C4CCE0290}" type="presParOf" srcId="{DE43EEA3-07A9-4218-9BD6-6C9C61F02F97}" destId="{00FD6486-D36D-437E-8AD3-805AAF799A26}" srcOrd="0" destOrd="0" presId="urn:microsoft.com/office/officeart/2018/2/layout/IconLabelDescriptionList"/>
+    <dgm:cxn modelId="{DC9D4E23-3192-4BA8-B644-32B395536852}" type="presParOf" srcId="{DE43EEA3-07A9-4218-9BD6-6C9C61F02F97}" destId="{E58C78F3-C1E8-4B92-9346-55FFCE6AF736}" srcOrd="1" destOrd="0" presId="urn:microsoft.com/office/officeart/2018/2/layout/IconLabelDescriptionList"/>
+    <dgm:cxn modelId="{2849B525-FBDA-4755-AA8E-685110309011}" type="presParOf" srcId="{DE43EEA3-07A9-4218-9BD6-6C9C61F02F97}" destId="{44DE8AF7-6CC1-4956-85FC-67D2D140A8A2}" srcOrd="2" destOrd="0" presId="urn:microsoft.com/office/officeart/2018/2/layout/IconLabelDescriptionList"/>
+    <dgm:cxn modelId="{473A86BD-6025-4205-ACCF-D3F9D4E7C833}" type="presParOf" srcId="{DE43EEA3-07A9-4218-9BD6-6C9C61F02F97}" destId="{F1047807-A403-4E92-8F99-6616AFF66F7E}" srcOrd="3" destOrd="0" presId="urn:microsoft.com/office/officeart/2018/2/layout/IconLabelDescriptionList"/>
+    <dgm:cxn modelId="{B3DB0D00-31C7-4EF5-9E6C-9625A0AD7B61}" type="presParOf" srcId="{DE43EEA3-07A9-4218-9BD6-6C9C61F02F97}" destId="{2BC7D02A-33A3-4436-8B16-A50A09BBD922}" srcOrd="4" destOrd="0" presId="urn:microsoft.com/office/officeart/2018/2/layout/IconLabelDescriptionList"/>
+    <dgm:cxn modelId="{C618E370-D8AA-441C-A50C-6B3ADF4C26F8}" type="presParOf" srcId="{2A781417-E8A2-4984-85DB-598868CBFBFF}" destId="{E6A81165-516D-44E8-8EE3-DF3AF20E4FE1}" srcOrd="1" destOrd="0" presId="urn:microsoft.com/office/officeart/2018/2/layout/IconLabelDescriptionList"/>
+    <dgm:cxn modelId="{1D0825A9-4BB0-4FC9-86B2-8D281B037A38}" type="presParOf" srcId="{2A781417-E8A2-4984-85DB-598868CBFBFF}" destId="{2209E4A8-F82D-4B7A-B678-20F475678590}" srcOrd="2" destOrd="0" presId="urn:microsoft.com/office/officeart/2018/2/layout/IconLabelDescriptionList"/>
+    <dgm:cxn modelId="{E66276DA-12FD-44AA-BE64-B9B35AA6DEED}" type="presParOf" srcId="{2209E4A8-F82D-4B7A-B678-20F475678590}" destId="{DA98B6B5-E5D0-41FF-8E71-E7FAAE55B869}" srcOrd="0" destOrd="0" presId="urn:microsoft.com/office/officeart/2018/2/layout/IconLabelDescriptionList"/>
+    <dgm:cxn modelId="{F2AD7B7B-4C52-45B3-8B3D-BC4F204E5610}" type="presParOf" srcId="{2209E4A8-F82D-4B7A-B678-20F475678590}" destId="{3B856DA1-B1CF-4D60-B9B9-CAF25807D8D0}" srcOrd="1" destOrd="0" presId="urn:microsoft.com/office/officeart/2018/2/layout/IconLabelDescriptionList"/>
+    <dgm:cxn modelId="{512E15CA-A6A1-44DC-BAAA-49391D3F6B7F}" type="presParOf" srcId="{2209E4A8-F82D-4B7A-B678-20F475678590}" destId="{3393A517-5438-4AD4-8527-5369B898A33B}" srcOrd="2" destOrd="0" presId="urn:microsoft.com/office/officeart/2018/2/layout/IconLabelDescriptionList"/>
+    <dgm:cxn modelId="{CBB9E37B-EF0F-4CE9-881C-D92A0B40FA75}" type="presParOf" srcId="{2209E4A8-F82D-4B7A-B678-20F475678590}" destId="{3F3EEAE4-1CDD-45D6-A2CA-FA60784A5E10}" srcOrd="3" destOrd="0" presId="urn:microsoft.com/office/officeart/2018/2/layout/IconLabelDescriptionList"/>
+    <dgm:cxn modelId="{41B41CB4-05EE-452E-9A48-4E5667487BD8}" type="presParOf" srcId="{2209E4A8-F82D-4B7A-B678-20F475678590}" destId="{F907BB7D-8870-4A41-A670-D1E7F5090172}" srcOrd="4" destOrd="0" presId="urn:microsoft.com/office/officeart/2018/2/layout/IconLabelDescriptionList"/>
+  </dgm:cxnLst>
+  <dgm:bg>
+    <a:noFill/>
+  </dgm:bg>
+  <dgm:whole/>
+  <dgm:extLst>
+    <a:ext uri="http://schemas.microsoft.com/office/drawing/2008/diagram">
+      <dsp:dataModelExt xmlns:dsp="http://schemas.microsoft.com/office/drawing/2008/diagram" relId="rId11" minVer="http://schemas.openxmlformats.org/drawingml/2006/diagram"/>
+    </a:ext>
+  </dgm:extLst>
+</dgm:dataModel>
+</file>
+
+<file path=ppt/diagrams/drawing1.xml><?xml version="1.0" encoding="utf-8"?>
+<dsp:drawing xmlns:dgm="http://schemas.openxmlformats.org/drawingml/2006/diagram" xmlns:dsp="http://schemas.microsoft.com/office/drawing/2008/diagram" xmlns:a="http://schemas.openxmlformats.org/drawingml/2006/main">
+  <dsp:spTree>
+    <dsp:nvGrpSpPr>
+      <dsp:cNvPr id="0" name=""/>
+      <dsp:cNvGrpSpPr/>
+    </dsp:nvGrpSpPr>
+    <dsp:grpSpPr/>
+    <dsp:sp modelId="{00FD6486-D36D-437E-8AD3-805AAF799A26}">
+      <dsp:nvSpPr>
+        <dsp:cNvPr id="0" name=""/>
+        <dsp:cNvSpPr/>
+      </dsp:nvSpPr>
+      <dsp:spPr>
+        <a:xfrm>
+          <a:off x="765914" y="80662"/>
+          <a:ext cx="1512000" cy="1512000"/>
+        </a:xfrm>
+        <a:prstGeom prst="rect">
+          <a:avLst/>
+        </a:prstGeom>
+        <a:blipFill>
+          <a:blip xmlns:r="http://schemas.openxmlformats.org/officeDocument/2006/relationships" r:embed="rId1">
+            <a:extLst>
+              <a:ext uri="{28A0092B-C50C-407E-A947-70E740481C1C}">
+                <a14:useLocalDpi xmlns:a14="http://schemas.microsoft.com/office/drawing/2010/main" val="0"/>
+              </a:ext>
+              <a:ext uri="{96DAC541-7B7A-43D3-8B79-37D633B846F1}">
+                <asvg:svgBlip xmlns:asvg="http://schemas.microsoft.com/office/drawing/2016/SVG/main" r:embed="rId2"/>
+              </a:ext>
+            </a:extLst>
+          </a:blip>
+          <a:stretch>
+            <a:fillRect/>
+          </a:stretch>
+        </a:blipFill>
+        <a:ln w="25400" cap="flat" cmpd="sng" algn="ctr">
+          <a:noFill/>
+          <a:prstDash val="solid"/>
+        </a:ln>
+        <a:effectLst/>
+      </dsp:spPr>
+      <dsp:style>
+        <a:lnRef idx="2">
+          <a:scrgbClr r="0" g="0" b="0"/>
+        </a:lnRef>
+        <a:fillRef idx="1">
+          <a:scrgbClr r="0" g="0" b="0"/>
+        </a:fillRef>
+        <a:effectRef idx="0">
+          <a:scrgbClr r="0" g="0" b="0"/>
+        </a:effectRef>
+        <a:fontRef idx="minor">
+          <a:schemeClr val="lt1"/>
+        </a:fontRef>
+      </dsp:style>
+    </dsp:sp>
+    <dsp:sp modelId="{44DE8AF7-6CC1-4956-85FC-67D2D140A8A2}">
+      <dsp:nvSpPr>
+        <dsp:cNvPr id="0" name=""/>
+        <dsp:cNvSpPr/>
+      </dsp:nvSpPr>
+      <dsp:spPr>
+        <a:xfrm>
+          <a:off x="765914" y="1766016"/>
+          <a:ext cx="4320000" cy="648000"/>
+        </a:xfrm>
+        <a:prstGeom prst="rect">
+          <a:avLst/>
+        </a:prstGeom>
+        <a:noFill/>
+        <a:ln>
+          <a:noFill/>
+        </a:ln>
+        <a:effectLst/>
+      </dsp:spPr>
+      <dsp:style>
+        <a:lnRef idx="0">
+          <a:scrgbClr r="0" g="0" b="0"/>
+        </a:lnRef>
+        <a:fillRef idx="0">
+          <a:scrgbClr r="0" g="0" b="0"/>
+        </a:fillRef>
+        <a:effectRef idx="0">
+          <a:scrgbClr r="0" g="0" b="0"/>
+        </a:effectRef>
+        <a:fontRef idx="minor"/>
+      </dsp:style>
+      <dsp:txBody>
+        <a:bodyPr spcFirstLastPara="0" vert="horz" wrap="square" lIns="0" tIns="0" rIns="0" bIns="0" numCol="1" spcCol="1270" anchor="t" anchorCtr="0">
+          <a:noAutofit/>
+        </a:bodyPr>
+        <a:lstStyle/>
+        <a:p>
+          <a:pPr marL="0" lvl="0" indent="0" algn="l" defTabSz="1600200">
+            <a:lnSpc>
+              <a:spcPct val="90000"/>
+            </a:lnSpc>
+            <a:spcBef>
+              <a:spcPct val="0"/>
+            </a:spcBef>
+            <a:spcAft>
+              <a:spcPct val="35000"/>
+            </a:spcAft>
+            <a:buNone/>
+            <a:defRPr b="1"/>
+          </a:pPr>
+          <a:r>
+            <a:rPr lang="en-US" sz="3600" b="1" kern="1200"/>
+            <a:t>App UI changes:</a:t>
+          </a:r>
+          <a:endParaRPr lang="en-US" sz="3600" kern="1200"/>
+        </a:p>
+      </dsp:txBody>
+      <dsp:txXfrm>
+        <a:off x="765914" y="1766016"/>
+        <a:ext cx="4320000" cy="648000"/>
+      </dsp:txXfrm>
+    </dsp:sp>
+    <dsp:sp modelId="{2BC7D02A-33A3-4436-8B16-A50A09BBD922}">
+      <dsp:nvSpPr>
+        <dsp:cNvPr id="0" name=""/>
+        <dsp:cNvSpPr/>
+      </dsp:nvSpPr>
+      <dsp:spPr>
+        <a:xfrm>
+          <a:off x="765914" y="2494645"/>
+          <a:ext cx="4320000" cy="1617497"/>
+        </a:xfrm>
+        <a:prstGeom prst="rect">
+          <a:avLst/>
+        </a:prstGeom>
+        <a:noFill/>
+        <a:ln>
+          <a:noFill/>
+        </a:ln>
+        <a:effectLst/>
+      </dsp:spPr>
+      <dsp:style>
+        <a:lnRef idx="0">
+          <a:scrgbClr r="0" g="0" b="0"/>
+        </a:lnRef>
+        <a:fillRef idx="0">
+          <a:scrgbClr r="0" g="0" b="0"/>
+        </a:fillRef>
+        <a:effectRef idx="0">
+          <a:scrgbClr r="0" g="0" b="0"/>
+        </a:effectRef>
+        <a:fontRef idx="minor"/>
+      </dsp:style>
+      <dsp:txBody>
+        <a:bodyPr spcFirstLastPara="0" vert="horz" wrap="square" lIns="0" tIns="0" rIns="0" bIns="0" numCol="1" spcCol="1270" anchor="t" anchorCtr="0">
+          <a:noAutofit/>
+        </a:bodyPr>
+        <a:lstStyle/>
+        <a:p>
+          <a:pPr marL="0" lvl="0" indent="0" algn="l" defTabSz="755650">
+            <a:lnSpc>
+              <a:spcPct val="90000"/>
+            </a:lnSpc>
+            <a:spcBef>
+              <a:spcPct val="0"/>
+            </a:spcBef>
+            <a:spcAft>
+              <a:spcPct val="35000"/>
+            </a:spcAft>
+            <a:buNone/>
+          </a:pPr>
+          <a:r>
+            <a:rPr lang="en-US" sz="1700" b="1" kern="1200" dirty="0"/>
+            <a:t>A ‘Reset’ button – loads a new list of friends (overwriting the current list).</a:t>
+          </a:r>
+          <a:endParaRPr lang="en-US" sz="1700" kern="1200" dirty="0"/>
+        </a:p>
+        <a:p>
+          <a:pPr marL="0" lvl="0" indent="0" algn="l" defTabSz="755650">
+            <a:lnSpc>
+              <a:spcPct val="90000"/>
+            </a:lnSpc>
+            <a:spcBef>
+              <a:spcPct val="0"/>
+            </a:spcBef>
+            <a:spcAft>
+              <a:spcPct val="35000"/>
+            </a:spcAft>
+            <a:buNone/>
+          </a:pPr>
+          <a:r>
+            <a:rPr lang="en-US" sz="1700" b="1" kern="1200" dirty="0"/>
+            <a:t>Combine Reset button and search text into a new component, </a:t>
+          </a:r>
+          <a:r>
+            <a:rPr lang="en-US" sz="1700" b="1" kern="1200" dirty="0" err="1"/>
+            <a:t>SearchBox</a:t>
+          </a:r>
+          <a:r>
+            <a:rPr lang="en-US" sz="1700" b="1" kern="1200" dirty="0"/>
+            <a:t>.</a:t>
+          </a:r>
+          <a:endParaRPr lang="en-US" sz="1700" kern="1200" dirty="0"/>
+        </a:p>
+        <a:p>
+          <a:pPr marL="0" lvl="0" indent="0" algn="l" defTabSz="755650">
+            <a:lnSpc>
+              <a:spcPct val="90000"/>
+            </a:lnSpc>
+            <a:spcBef>
+              <a:spcPct val="0"/>
+            </a:spcBef>
+            <a:spcAft>
+              <a:spcPct val="35000"/>
+            </a:spcAft>
+            <a:buNone/>
+          </a:pPr>
+          <a:r>
+            <a:rPr lang="en-US" sz="1700" b="1" kern="1200"/>
+            <a:t>Browser tab title - shows # of matching friends (side effect).</a:t>
+          </a:r>
+          <a:endParaRPr lang="en-US" sz="1700" kern="1200"/>
+        </a:p>
+      </dsp:txBody>
+      <dsp:txXfrm>
+        <a:off x="765914" y="2494645"/>
+        <a:ext cx="4320000" cy="1617497"/>
+      </dsp:txXfrm>
+    </dsp:sp>
+    <dsp:sp modelId="{DA98B6B5-E5D0-41FF-8E71-E7FAAE55B869}">
+      <dsp:nvSpPr>
+        <dsp:cNvPr id="0" name=""/>
+        <dsp:cNvSpPr/>
+      </dsp:nvSpPr>
+      <dsp:spPr>
+        <a:xfrm>
+          <a:off x="5841914" y="80662"/>
+          <a:ext cx="1512000" cy="1512000"/>
+        </a:xfrm>
+        <a:prstGeom prst="rect">
+          <a:avLst/>
+        </a:prstGeom>
+        <a:solidFill>
+          <a:schemeClr val="accent3">
+            <a:hueOff val="0"/>
+            <a:satOff val="0"/>
+            <a:lumOff val="0"/>
+            <a:alphaOff val="0"/>
+          </a:schemeClr>
+        </a:solidFill>
+        <a:ln w="25400" cap="flat" cmpd="sng" algn="ctr">
+          <a:noFill/>
+          <a:prstDash val="solid"/>
+        </a:ln>
+        <a:effectLst/>
+      </dsp:spPr>
+      <dsp:style>
+        <a:lnRef idx="2">
+          <a:scrgbClr r="0" g="0" b="0"/>
+        </a:lnRef>
+        <a:fillRef idx="1">
+          <a:scrgbClr r="0" g="0" b="0"/>
+        </a:fillRef>
+        <a:effectRef idx="0">
+          <a:scrgbClr r="0" g="0" b="0"/>
+        </a:effectRef>
+        <a:fontRef idx="minor">
+          <a:schemeClr val="lt1"/>
+        </a:fontRef>
+      </dsp:style>
+    </dsp:sp>
+    <dsp:sp modelId="{3393A517-5438-4AD4-8527-5369B898A33B}">
+      <dsp:nvSpPr>
+        <dsp:cNvPr id="0" name=""/>
+        <dsp:cNvSpPr/>
+      </dsp:nvSpPr>
+      <dsp:spPr>
+        <a:xfrm>
+          <a:off x="5841914" y="1766016"/>
+          <a:ext cx="4320000" cy="648000"/>
+        </a:xfrm>
+        <a:prstGeom prst="rect">
+          <a:avLst/>
+        </a:prstGeom>
+        <a:noFill/>
+        <a:ln>
+          <a:noFill/>
+        </a:ln>
+        <a:effectLst/>
+      </dsp:spPr>
+      <dsp:style>
+        <a:lnRef idx="0">
+          <a:scrgbClr r="0" g="0" b="0"/>
+        </a:lnRef>
+        <a:fillRef idx="0">
+          <a:scrgbClr r="0" g="0" b="0"/>
+        </a:fillRef>
+        <a:effectRef idx="0">
+          <a:scrgbClr r="0" g="0" b="0"/>
+        </a:effectRef>
+        <a:fontRef idx="minor"/>
+      </dsp:style>
+      <dsp:txBody>
+        <a:bodyPr spcFirstLastPara="0" vert="horz" wrap="square" lIns="0" tIns="0" rIns="0" bIns="0" numCol="1" spcCol="1270" anchor="t" anchorCtr="0">
+          <a:noAutofit/>
+        </a:bodyPr>
+        <a:lstStyle/>
+        <a:p>
+          <a:pPr marL="0" lvl="0" indent="0" algn="l" defTabSz="1600200">
+            <a:lnSpc>
+              <a:spcPct val="90000"/>
+            </a:lnSpc>
+            <a:spcBef>
+              <a:spcPct val="0"/>
+            </a:spcBef>
+            <a:spcAft>
+              <a:spcPct val="35000"/>
+            </a:spcAft>
+            <a:buNone/>
+            <a:defRPr b="1"/>
+          </a:pPr>
+          <a:r>
+            <a:rPr lang="en-US" sz="3600" b="1" kern="1200" dirty="0"/>
+            <a:t>Ref. lecture </a:t>
+          </a:r>
+          <a:r>
+            <a:rPr lang="en-US" sz="3600" b="1" kern="1200" dirty="0" err="1"/>
+            <a:t>archiv</a:t>
+          </a:r>
+          <a:endParaRPr lang="en-US" sz="3600" kern="1200" dirty="0"/>
+        </a:p>
+      </dsp:txBody>
+      <dsp:txXfrm>
+        <a:off x="5841914" y="1766016"/>
+        <a:ext cx="4320000" cy="648000"/>
+      </dsp:txXfrm>
+    </dsp:sp>
+    <dsp:sp modelId="{F907BB7D-8870-4A41-A670-D1E7F5090172}">
+      <dsp:nvSpPr>
+        <dsp:cNvPr id="0" name=""/>
+        <dsp:cNvSpPr/>
+      </dsp:nvSpPr>
+      <dsp:spPr>
+        <a:xfrm>
+          <a:off x="5841914" y="2494645"/>
+          <a:ext cx="4320000" cy="1617497"/>
+        </a:xfrm>
+        <a:prstGeom prst="rect">
+          <a:avLst/>
+        </a:prstGeom>
+        <a:noFill/>
+        <a:ln>
+          <a:noFill/>
+        </a:ln>
+        <a:effectLst/>
+      </dsp:spPr>
+      <dsp:style>
+        <a:lnRef idx="0">
+          <a:scrgbClr r="0" g="0" b="0"/>
+        </a:lnRef>
+        <a:fillRef idx="0">
+          <a:scrgbClr r="0" g="0" b="0"/>
+        </a:fillRef>
+        <a:effectRef idx="0">
+          <a:scrgbClr r="0" g="0" b="0"/>
+        </a:effectRef>
+        <a:fontRef idx="minor"/>
+      </dsp:style>
+    </dsp:sp>
+  </dsp:spTree>
+</dsp:drawing>
+</file>
+
+<file path=ppt/diagrams/layout1.xml><?xml version="1.0" encoding="utf-8"?>
+<dgm:layoutDef xmlns:dgm="http://schemas.openxmlformats.org/drawingml/2006/diagram" xmlns:a="http://schemas.openxmlformats.org/drawingml/2006/main" uniqueId="urn:microsoft.com/office/officeart/2018/2/layout/IconLabelDescriptionList">
+  <dgm:title val="Icon Label Description List"/>
+  <dgm:desc val="Use to show non-sequential or grouped chunks of information. The placeholder holds an icon or small picture, and corresponding text boxes show Level 1 and Level 2 text respectively. Works well for minimal Level 1 text accompanied by lengthier Level two text."/>
+  <dgm:catLst>
+    <dgm:cat type="icon" pri="500"/>
+  </dgm:catLst>
+  <dgm:sampData useDef="1">
+    <dgm:dataModel>
+      <dgm:ptLst/>
+      <dgm:bg/>
+      <dgm:whole/>
+    </dgm:dataModel>
+  </dgm:sampData>
+  <dgm:styleData useDef="1">
+    <dgm:dataModel>
+      <dgm:ptLst/>
+      <dgm:bg/>
+      <dgm:whole/>
+    </dgm:dataModel>
+  </dgm:styleData>
+  <dgm:clrData useDef="1">
+    <dgm:dataModel>
+      <dgm:ptLst/>
+      <dgm:bg/>
+      <dgm:whole/>
+    </dgm:dataModel>
+  </dgm:clrData>
+  <dgm:layoutNode name="root">
+    <dgm:varLst>
+      <dgm:dir/>
+      <dgm:resizeHandles val="exact"/>
+    </dgm:varLst>
+    <dgm:choose name="Name0">
+      <dgm:if name="Name1" axis="self" func="var" arg="dir" op="equ" val="norm">
+        <dgm:alg type="lin"/>
+      </dgm:if>
+      <dgm:else name="Name2">
+        <dgm:alg type="lin">
+          <dgm:param type="linDir" val="fromR"/>
+        </dgm:alg>
+      </dgm:else>
+    </dgm:choose>
+    <dgm:shape xmlns:r="http://schemas.openxmlformats.org/officeDocument/2006/relationships" r:blip="">
+      <dgm:adjLst/>
+    </dgm:shape>
+    <dgm:presOf/>
+    <dgm:constrLst>
+      <dgm:constr type="h" for="ch" forName="compNode" refType="h" fact="0.45"/>
+      <dgm:constr type="w" for="ch" forName="compNode" val="120"/>
+      <dgm:constr type="w" for="ch" forName="sibTrans" refType="w" refFor="ch" refForName="compNode" fact="0.175"/>
+      <dgm:constr type="primFontSz" for="des" forName="parTx" val="36"/>
+      <dgm:constr type="primFontSz" for="des" forName="desTx" refType="primFontSz" refFor="des" refForName="parTx" op="lte" fact="0.75"/>
+      <dgm:constr type="h" for="des" forName="compNode" op="equ"/>
+      <dgm:constr type="h" for="des" forName="iconRect" op="equ"/>
+      <dgm:constr type="w" for="des" forName="iconRect" op="equ"/>
+      <dgm:constr type="h" for="des" forName="iconSpace" op="equ"/>
+      <dgm:constr type="h" for="des" forName="parTx" op="equ"/>
+      <dgm:constr type="h" for="des" forName="txSpace" op="equ"/>
+      <dgm:constr type="h" for="des" forName="desTx" op="equ"/>
+    </dgm:constrLst>
+    <dgm:ruleLst>
+      <dgm:rule type="w" for="ch" forName="compNode" val="0" fact="NaN" max="NaN"/>
+    </dgm:ruleLst>
+    <dgm:forEach name="Name3" axis="ch" ptType="node">
+      <dgm:layoutNode name="compNode">
+        <dgm:alg type="composite"/>
+        <dgm:shape xmlns:r="http://schemas.openxmlformats.org/officeDocument/2006/relationships" r:blip="">
+          <dgm:adjLst/>
+        </dgm:shape>
+        <dgm:presOf axis="self"/>
+        <dgm:constrLst>
+          <dgm:constr type="w" for="ch" forName="iconRect" refType="w" fact="0.35"/>
+          <dgm:constr type="h" for="ch" forName="iconRect" refType="w" refFor="ch" refForName="iconRect"/>
+          <dgm:constr type="l" for="ch" forName="iconRect"/>
+          <dgm:constr type="t" for="ch" forName="iconRect"/>
+          <dgm:constr type="w" for="ch" forName="iconSpace" refType="w"/>
+          <dgm:constr type="h" for="ch" forName="iconSpace" refType="h" fact="0.043"/>
+          <dgm:constr type="l" for="ch" forName="iconSpace"/>
+          <dgm:constr type="t" for="ch" forName="iconSpace" refType="b" refFor="ch" refForName="iconRect"/>
+          <dgm:constr type="w" for="ch" forName="parTx" refType="w"/>
+          <dgm:constr type="h" for="ch" forName="parTx" refType="w" fact="0.15"/>
+          <dgm:constr type="l" for="ch" forName="parTx"/>
+          <dgm:constr type="t" for="ch" forName="parTx" refType="b" refFor="ch" refForName="iconSpace"/>
+          <dgm:constr type="h" for="ch" forName="txSpace" refType="h" fact="0.02"/>
+          <dgm:constr type="w" for="ch" forName="txSpace" refType="w"/>
+          <dgm:constr type="l" for="ch" forName="txSpace"/>
+          <dgm:constr type="t" for="ch" forName="txSpace" refType="b" refFor="ch" refForName="parTx"/>
+          <dgm:constr type="w" for="ch" forName="desTx" refType="w"/>
+          <dgm:constr type="l" for="ch" forName="desTx"/>
+          <dgm:constr type="t" for="ch" forName="desTx" refType="b" refFor="ch" refForName="txSpace"/>
+        </dgm:constrLst>
+        <dgm:ruleLst>
+          <dgm:rule type="h" val="INF" fact="NaN" max="NaN"/>
+        </dgm:ruleLst>
+        <dgm:layoutNode name="iconRect" styleLbl="node1">
+          <dgm:alg type="sp"/>
+          <dgm:shape xmlns:r="http://schemas.openxmlformats.org/officeDocument/2006/relationships" type="rect" r:blip="" blipPhldr="1">
+            <dgm:adjLst/>
+          </dgm:shape>
+          <dgm:presOf/>
+          <dgm:constrLst/>
+          <dgm:ruleLst/>
+        </dgm:layoutNode>
+        <dgm:layoutNode name="iconSpace">
+          <dgm:alg type="sp"/>
+          <dgm:shape xmlns:r="http://schemas.openxmlformats.org/officeDocument/2006/relationships" r:blip="">
+            <dgm:adjLst/>
+          </dgm:shape>
+          <dgm:presOf/>
+          <dgm:constrLst/>
+          <dgm:ruleLst/>
+        </dgm:layoutNode>
+        <dgm:layoutNode name="parTx" styleLbl="revTx">
+          <dgm:varLst>
+            <dgm:chMax val="0"/>
+            <dgm:chPref val="0"/>
+          </dgm:varLst>
+          <dgm:alg type="tx">
+            <dgm:param type="txAnchorVert" val="t"/>
+            <dgm:param type="parTxLTRAlign" val="l"/>
+            <dgm:param type="shpTxLTRAlignCh" val="l"/>
+            <dgm:param type="parTxRTLAlign" val="r"/>
+            <dgm:param type="shpTxRTLAlignCh" val="r"/>
+          </dgm:alg>
+          <dgm:shape xmlns:r="http://schemas.openxmlformats.org/officeDocument/2006/relationships" type="rect" r:blip="">
+            <dgm:adjLst/>
+          </dgm:shape>
+          <dgm:presOf axis="self" ptType="node"/>
+          <dgm:constrLst>
+            <dgm:constr type="lMarg"/>
+            <dgm:constr type="rMarg"/>
+            <dgm:constr type="tMarg"/>
+            <dgm:constr type="bMarg"/>
+          </dgm:constrLst>
+          <dgm:ruleLst>
+            <dgm:rule type="primFontSz" val="14" fact="NaN" max="NaN"/>
+            <dgm:rule type="h" val="INF" fact="NaN" max="NaN"/>
+          </dgm:ruleLst>
+        </dgm:layoutNode>
+        <dgm:layoutNode name="txSpace">
+          <dgm:alg type="sp"/>
+          <dgm:shape xmlns:r="http://schemas.openxmlformats.org/officeDocument/2006/relationships" r:blip="">
+            <dgm:adjLst/>
+          </dgm:shape>
+          <dgm:presOf/>
+          <dgm:constrLst/>
+          <dgm:ruleLst/>
+        </dgm:layoutNode>
+        <dgm:layoutNode name="desTx" styleLbl="revTx">
+          <dgm:varLst/>
+          <dgm:alg type="tx">
+            <dgm:param type="stBulletLvl" val="0"/>
+            <dgm:param type="txAnchorVert" val="t"/>
+            <dgm:param type="parTxLTRAlign" val="l"/>
+            <dgm:param type="shpTxLTRAlignCh" val="l"/>
+            <dgm:param type="parTxRTLAlign" val="r"/>
+            <dgm:param type="shpTxRTLAlignCh" val="r"/>
+          </dgm:alg>
+          <dgm:shape xmlns:r="http://schemas.openxmlformats.org/officeDocument/2006/relationships" type="rect" r:blip="">
+            <dgm:adjLst/>
+          </dgm:shape>
+          <dgm:presOf axis="des" ptType="node"/>
+          <dgm:constrLst>
+            <dgm:constr type="secFontSz" refType="primFontSz"/>
+            <dgm:constr type="lMarg"/>
+            <dgm:constr type="rMarg"/>
+            <dgm:constr type="tMarg"/>
+            <dgm:constr type="bMarg"/>
+          </dgm:constrLst>
+          <dgm:ruleLst>
+            <dgm:rule type="primFontSz" val="NaN" fact="NaN" max="17"/>
+            <dgm:rule type="h" val="INF" fact="NaN" max="NaN"/>
+          </dgm:ruleLst>
+        </dgm:layoutNode>
+      </dgm:layoutNode>
+      <dgm:forEach name="Name4" axis="followSib" ptType="sibTrans" cnt="1">
+        <dgm:layoutNode name="sibTrans">
+          <dgm:alg type="sp"/>
+          <dgm:shape xmlns:r="http://schemas.openxmlformats.org/officeDocument/2006/relationships" r:blip="">
+            <dgm:adjLst/>
+          </dgm:shape>
+          <dgm:presOf axis="self"/>
+          <dgm:constrLst/>
+          <dgm:ruleLst/>
+        </dgm:layoutNode>
+      </dgm:forEach>
+    </dgm:forEach>
+  </dgm:layoutNode>
+  <dgm:extLst>
+    <a:ext uri="{68A01E43-0DF5-4B5B-8FA6-DAF915123BFB}">
+      <dgm1612:lstStyle xmlns:dgm1612="http://schemas.microsoft.com/office/drawing/2016/12/diagram">
+        <a:lvl1pPr>
+          <a:lnSpc>
+            <a:spcPct val="100000"/>
+          </a:lnSpc>
+          <a:defRPr b="1"/>
+        </a:lvl1pPr>
+        <a:lvl2pPr>
+          <a:lnSpc>
+            <a:spcPct val="100000"/>
+          </a:lnSpc>
+        </a:lvl2pPr>
+      </dgm1612:lstStyle>
+    </a:ext>
+  </dgm:extLst>
+</dgm:layoutDef>
+</file>
+
+<file path=ppt/diagrams/quickStyle1.xml><?xml version="1.0" encoding="utf-8"?>
+<dgm:styleDef xmlns:dgm="http://schemas.openxmlformats.org/drawingml/2006/diagram" xmlns:a="http://schemas.openxmlformats.org/drawingml/2006/main" uniqueId="urn:microsoft.com/office/officeart/2005/8/quickstyle/simple1">
+  <dgm:title val=""/>
+  <dgm:desc val=""/>
+  <dgm:catLst>
+    <dgm:cat type="simple" pri="10100"/>
+  </dgm:catLst>
+  <dgm:scene3d>
+    <a:camera prst="orthographicFront"/>
+    <a:lightRig rig="threePt" dir="t"/>
+  </dgm:scene3d>
+  <dgm:styleLbl name="node0">
+    <dgm:scene3d>
+      <a:camera prst="orthographicFront"/>
+      <a:lightRig rig="threePt" dir="t"/>
+    </dgm:scene3d>
+    <dgm:sp3d/>
+    <dgm:txPr/>
+    <dgm:style>
+      <a:lnRef idx="2">
+        <a:scrgbClr r="0" g="0" b="0"/>
+      </a:lnRef>
+      <a:fillRef idx="1">
+        <a:scrgbClr r="0" g="0" b="0"/>
+      </a:fillRef>
+      <a:effectRef idx="0">
+        <a:scrgbClr r="0" g="0" b="0"/>
+      </a:effectRef>
+      <a:fontRef idx="minor">
+        <a:schemeClr val="lt1"/>
+      </a:fontRef>
+    </dgm:style>
+  </dgm:styleLbl>
+  <dgm:styleLbl name="lnNode1">
+    <dgm:scene3d>
+      <a:camera prst="orthographicFront"/>
+      <a:lightRig rig="threePt" dir="t"/>
+    </dgm:scene3d>
+    <dgm:sp3d/>
+    <dgm:txPr/>
+    <dgm:style>
+      <a:lnRef idx="2">
+        <a:scrgbClr r="0" g="0" b="0"/>
+      </a:lnRef>
+      <a:fillRef idx="1">
+        <a:scrgbClr r="0" g="0" b="0"/>
+      </a:fillRef>
+      <a:effectRef idx="0">
+        <a:scrgbClr r="0" g="0" b="0"/>
+      </a:effectRef>
+      <a:fontRef idx="minor">
+        <a:schemeClr val="lt1"/>
+      </a:fontRef>
+    </dgm:style>
+  </dgm:styleLbl>
+  <dgm:styleLbl name="vennNode1">
+    <dgm:scene3d>
+      <a:camera prst="orthographicFront"/>
+      <a:lightRig rig="threePt" dir="t"/>
+    </dgm:scene3d>
+    <dgm:sp3d/>
+    <dgm:txPr/>
+    <dgm:style>
+      <a:lnRef idx="2">
+        <a:scrgbClr r="0" g="0" b="0"/>
+      </a:lnRef>
+      <a:fillRef idx="1">
+        <a:scrgbClr r="0" g="0" b="0"/>
+      </a:fillRef>
+      <a:effectRef idx="0">
+        <a:scrgbClr r="0" g="0" b="0"/>
+      </a:effectRef>
+      <a:fontRef idx="minor">
+        <a:schemeClr val="tx1"/>
+      </a:fontRef>
+    </dgm:style>
+  </dgm:styleLbl>
+  <dgm:styleLbl name="alignNode1">
+    <dgm:scene3d>
+      <a:camera prst="orthographicFront"/>
+      <a:lightRig rig="threePt" dir="t"/>
+    </dgm:scene3d>
+    <dgm:sp3d/>
+    <dgm:txPr/>
+    <dgm:style>
+      <a:lnRef idx="2">
+        <a:scrgbClr r="0" g="0" b="0"/>
+      </a:lnRef>
+      <a:fillRef idx="1">
+        <a:scrgbClr r="0" g="0" b="0"/>
+      </a:fillRef>
+      <a:effectRef idx="0">
+        <a:scrgbClr r="0" g="0" b="0"/>
+      </a:effectRef>
+      <a:fontRef idx="minor">
+        <a:schemeClr val="lt1"/>
+      </a:fontRef>
+    </dgm:style>
+  </dgm:styleLbl>
+  <dgm:styleLbl name="node1">
+    <dgm:scene3d>
+      <a:camera prst="orthographicFront"/>
+      <a:lightRig rig="threePt" dir="t"/>
+    </dgm:scene3d>
+    <dgm:sp3d/>
+    <dgm:txPr/>
+    <dgm:style>
+      <a:lnRef idx="2">
+        <a:scrgbClr r="0" g="0" b="0"/>
+      </a:lnRef>
+      <a:fillRef idx="1">
+        <a:scrgbClr r="0" g="0" b="0"/>
+      </a:fillRef>
+      <a:effectRef idx="0">
+        <a:scrgbClr r="0" g="0" b="0"/>
+      </a:effectRef>
+      <a:fontRef idx="minor">
+        <a:schemeClr val="lt1"/>
+      </a:fontRef>
+    </dgm:style>
+  </dgm:styleLbl>
+  <dgm:styleLbl name="node2">
+    <dgm:scene3d>
+      <a:camera prst="orthographicFront"/>
+      <a:lightRig rig="threePt" dir="t"/>
+    </dgm:scene3d>
+    <dgm:sp3d/>
+    <dgm:txPr/>
+    <dgm:style>
+      <a:lnRef idx="2">
+        <a:scrgbClr r="0" g="0" b="0"/>
+      </a:lnRef>
+      <a:fillRef idx="1">
+        <a:scrgbClr r="0" g="0" b="0"/>
+      </a:fillRef>
+      <a:effectRef idx="0">
+        <a:scrgbClr r="0" g="0" b="0"/>
+      </a:effectRef>
+      <a:fontRef idx="minor">
+        <a:schemeClr val="lt1"/>
+      </a:fontRef>
+    </dgm:style>
+  </dgm:styleLbl>
+  <dgm:styleLbl name="node3">
+    <dgm:scene3d>
+      <a:camera prst="orthographicFront"/>
+      <a:lightRig rig="threePt" dir="t"/>
+    </dgm:scene3d>
+    <dgm:sp3d/>
+    <dgm:txPr/>
+    <dgm:style>
+      <a:lnRef idx="2">
+        <a:scrgbClr r="0" g="0" b="0"/>
+      </a:lnRef>
+      <a:fillRef idx="1">
+        <a:scrgbClr r="0" g="0" b="0"/>
+      </a:fillRef>
+      <a:effectRef idx="0">
+        <a:scrgbClr r="0" g="0" b="0"/>
+      </a:effectRef>
+      <a:fontRef idx="minor">
+        <a:schemeClr val="lt1"/>
+      </a:fontRef>
+    </dgm:style>
+  </dgm:styleLbl>
+  <dgm:styleLbl name="node4">
+    <dgm:scene3d>
+      <a:camera prst="orthographicFront"/>
+      <a:lightRig rig="threePt" dir="t"/>
+    </dgm:scene3d>
+    <dgm:sp3d/>
+    <dgm:txPr/>
+    <dgm:style>
+      <a:lnRef idx="2">
+        <a:scrgbClr r="0" g="0" b="0"/>
+      </a:lnRef>
+      <a:fillRef idx="1">
+        <a:scrgbClr r="0" g="0" b="0"/>
+      </a:fillRef>
+      <a:effectRef idx="0">
+        <a:scrgbClr r="0" g="0" b="0"/>
+      </a:effectRef>
+      <a:fontRef idx="minor">
+        <a:schemeClr val="lt1"/>
+      </a:fontRef>
+    </dgm:style>
+  </dgm:styleLbl>
+  <dgm:styleLbl name="fgImgPlace1">
+    <dgm:scene3d>
+      <a:camera prst="orthographicFront"/>
+      <a:lightRig rig="threePt" dir="t"/>
+    </dgm:scene3d>
+    <dgm:sp3d/>
+    <dgm:txPr/>
+    <dgm:style>
+      <a:lnRef idx="2">
+        <a:scrgbClr r="0" g="0" b="0"/>
+      </a:lnRef>
+      <a:fillRef idx="1">
+        <a:scrgbClr r="0" g="0" b="0"/>
+      </a:fillRef>
+      <a:effectRef idx="0">
+        <a:scrgbClr r="0" g="0" b="0"/>
+      </a:effectRef>
+      <a:fontRef idx="minor"/>
+    </dgm:style>
+  </dgm:styleLbl>
+  <dgm:styleLbl name="alignImgPlace1">
+    <dgm:scene3d>
+      <a:camera prst="orthographicFront"/>
+      <a:lightRig rig="threePt" dir="t"/>
+    </dgm:scene3d>
+    <dgm:sp3d/>
+    <dgm:txPr/>
+    <dgm:style>
+      <a:lnRef idx="2">
+        <a:scrgbClr r="0" g="0" b="0"/>
+      </a:lnRef>
+      <a:fillRef idx="1">
+        <a:scrgbClr r="0" g="0" b="0"/>
+      </a:fillRef>
+      <a:effectRef idx="0">
+        <a:scrgbClr r="0" g="0" b="0"/>
+      </a:effectRef>
+      <a:fontRef idx="minor"/>
+    </dgm:style>
+  </dgm:styleLbl>
+  <dgm:styleLbl name="bgImgPlace1">
+    <dgm:scene3d>
+      <a:camera prst="orthographicFront"/>
+      <a:lightRig rig="threePt" dir="t"/>
+    </dgm:scene3d>
+    <dgm:sp3d/>
+    <dgm:txPr/>
+    <dgm:style>
+      <a:lnRef idx="2">
+        <a:scrgbClr r="0" g="0" b="0"/>
+      </a:lnRef>
+      <a:fillRef idx="1">
+        <a:scrgbClr r="0" g="0" b="0"/>
+      </a:fillRef>
+      <a:effectRef idx="0">
+        <a:scrgbClr r="0" g="0" b="0"/>
+      </a:effectRef>
+      <a:fontRef idx="minor"/>
+    </dgm:style>
+  </dgm:styleLbl>
+  <dgm:styleLbl name="sibTrans2D1">
+    <dgm:scene3d>
+      <a:camera prst="orthographicFront"/>
+      <a:lightRig rig="threePt" dir="t"/>
+    </dgm:scene3d>
+    <dgm:sp3d/>
+    <dgm:txPr/>
+    <dgm:style>
+      <a:lnRef idx="0">
+        <a:scrgbClr r="0" g="0" b="0"/>
+      </a:lnRef>
+      <a:fillRef idx="1">
+        <a:scrgbClr r="0" g="0" b="0"/>
+      </a:fillRef>
+      <a:effectRef idx="0">
+        <a:scrgbClr r="0" g="0" b="0"/>
+      </a:effectRef>
+      <a:fontRef idx="minor">
+        <a:schemeClr val="lt1"/>
+      </a:fontRef>
+    </dgm:style>
+  </dgm:styleLbl>
+  <dgm:styleLbl name="fgSibTrans2D1">
+    <dgm:scene3d>
+      <a:camera prst="orthographicFront"/>
+      <a:lightRig rig="threePt" dir="t"/>
+    </dgm:scene3d>
+    <dgm:sp3d/>
+    <dgm:txPr/>
+    <dgm:style>
+      <a:lnRef idx="0">
+        <a:scrgbClr r="0" g="0" b="0"/>
+      </a:lnRef>
+      <a:fillRef idx="1">
+        <a:scrgbClr r="0" g="0" b="0"/>
+      </a:fillRef>
+      <a:effectRef idx="0">
+        <a:scrgbClr r="0" g="0" b="0"/>
+      </a:effectRef>
+      <a:fontRef idx="minor">
+        <a:schemeClr val="lt1"/>
+      </a:fontRef>
+    </dgm:style>
+  </dgm:styleLbl>
+  <dgm:styleLbl name="bgSibTrans2D1">
+    <dgm:scene3d>
+      <a:camera prst="orthographicFront"/>
+      <a:lightRig rig="threePt" dir="t"/>
+    </dgm:scene3d>
+    <dgm:sp3d/>
+    <dgm:txPr/>
+    <dgm:style>
+      <a:lnRef idx="0">
+        <a:scrgbClr r="0" g="0" b="0"/>
+      </a:lnRef>
+      <a:fillRef idx="1">
+        <a:scrgbClr r="0" g="0" b="0"/>
+      </a:fillRef>
+      <a:effectRef idx="0">
+        <a:scrgbClr r="0" g="0" b="0"/>
+      </a:effectRef>
+      <a:fontRef idx="minor">
+        <a:schemeClr val="lt1"/>
+      </a:fontRef>
+    </dgm:style>
+  </dgm:styleLbl>
+  <dgm:styleLbl name="sibTrans1D1">
+    <dgm:scene3d>
+      <a:camera prst="orthographicFront"/>
+      <a:lightRig rig="threePt" dir="t"/>
+    </dgm:scene3d>
+    <dgm:sp3d/>
+    <dgm:txPr/>
+    <dgm:style>
+      <a:lnRef idx="1">
+        <a:scrgbClr r="0" g="0" b="0"/>
+      </a:lnRef>
+      <a:fillRef idx="0">
+        <a:scrgbClr r="0" g="0" b="0"/>
+      </a:fillRef>
+      <a:effectRef idx="0">
+        <a:scrgbClr r="0" g="0" b="0"/>
+      </a:effectRef>
+      <a:fontRef idx="minor"/>
+    </dgm:style>
+  </dgm:styleLbl>
+  <dgm:styleLbl name="callout">
+    <dgm:scene3d>
+      <a:camera prst="orthographicFront"/>
+      <a:lightRig rig="threePt" dir="t"/>
+    </dgm:scene3d>
+    <dgm:sp3d/>
+    <dgm:txPr/>
+    <dgm:style>
+      <a:lnRef idx="2">
+        <a:scrgbClr r="0" g="0" b="0"/>
+      </a:lnRef>
+      <a:fillRef idx="1">
+        <a:scrgbClr r="0" g="0" b="0"/>
+      </a:fillRef>
+      <a:effectRef idx="0">
+        <a:scrgbClr r="0" g="0" b="0"/>
+      </a:effectRef>
+      <a:fontRef idx="minor"/>
+    </dgm:style>
+  </dgm:styleLbl>
+  <dgm:styleLbl name="asst0">
+    <dgm:scene3d>
+      <a:camera prst="orthographicFront"/>
+      <a:lightRig rig="threePt" dir="t"/>
+    </dgm:scene3d>
+    <dgm:sp3d/>
+    <dgm:txPr/>
+    <dgm:style>
+      <a:lnRef idx="2">
+        <a:scrgbClr r="0" g="0" b="0"/>
+      </a:lnRef>
+      <a:fillRef idx="1">
+        <a:scrgbClr r="0" g="0" b="0"/>
+      </a:fillRef>
+      <a:effectRef idx="0">
+        <a:scrgbClr r="0" g="0" b="0"/>
+      </a:effectRef>
+      <a:fontRef idx="minor">
+        <a:schemeClr val="lt1"/>
+      </a:fontRef>
+    </dgm:style>
+  </dgm:styleLbl>
+  <dgm:styleLbl name="asst1">
+    <dgm:scene3d>
+      <a:camera prst="orthographicFront"/>
+      <a:lightRig rig="threePt" dir="t"/>
+    </dgm:scene3d>
+    <dgm:sp3d/>
+    <dgm:txPr/>
+    <dgm:style>
+      <a:lnRef idx="2">
+        <a:scrgbClr r="0" g="0" b="0"/>
+      </a:lnRef>
+      <a:fillRef idx="1">
+        <a:scrgbClr r="0" g="0" b="0"/>
+      </a:fillRef>
+      <a:effectRef idx="0">
+        <a:scrgbClr r="0" g="0" b="0"/>
+      </a:effectRef>
+      <a:fontRef idx="minor">
+        <a:schemeClr val="lt1"/>
+      </a:fontRef>
+    </dgm:style>
+  </dgm:styleLbl>
+  <dgm:styleLbl name="asst2">
+    <dgm:scene3d>
+      <a:camera prst="orthographicFront"/>
+      <a:lightRig rig="threePt" dir="t"/>
+    </dgm:scene3d>
+    <dgm:sp3d/>
+    <dgm:txPr/>
+    <dgm:style>
+      <a:lnRef idx="2">
+        <a:scrgbClr r="0" g="0" b="0"/>
+      </a:lnRef>
+      <a:fillRef idx="1">
+        <a:scrgbClr r="0" g="0" b="0"/>
+      </a:fillRef>
+      <a:effectRef idx="0">
+        <a:scrgbClr r="0" g="0" b="0"/>
+      </a:effectRef>
+      <a:fontRef idx="minor">
+        <a:schemeClr val="lt1"/>
+      </a:fontRef>
+    </dgm:style>
+  </dgm:styleLbl>
+  <dgm:styleLbl name="asst3">
+    <dgm:scene3d>
+      <a:camera prst="orthographicFront"/>
+      <a:lightRig rig="threePt" dir="t"/>
+    </dgm:scene3d>
+    <dgm:sp3d/>
+    <dgm:txPr/>
+    <dgm:style>
+      <a:lnRef idx="2">
+        <a:scrgbClr r="0" g="0" b="0"/>
+      </a:lnRef>
+      <a:fillRef idx="1">
+        <a:scrgbClr r="0" g="0" b="0"/>
+      </a:fillRef>
+      <a:effectRef idx="0">
+        <a:scrgbClr r="0" g="0" b="0"/>
+      </a:effectRef>
+      <a:fontRef idx="minor">
+        <a:schemeClr val="lt1"/>
+      </a:fontRef>
+    </dgm:style>
+  </dgm:styleLbl>
+  <dgm:styleLbl name="asst4">
+    <dgm:scene3d>
+      <a:camera prst="orthographicFront"/>
+      <a:lightRig rig="threePt" dir="t"/>
+    </dgm:scene3d>
+    <dgm:sp3d/>
+    <dgm:txPr/>
+    <dgm:style>
+      <a:lnRef idx="2">
+        <a:scrgbClr r="0" g="0" b="0"/>
+      </a:lnRef>
+      <a:fillRef idx="1">
+        <a:scrgbClr r="0" g="0" b="0"/>
+      </a:fillRef>
+      <a:effectRef idx="0">
+        <a:scrgbClr r="0" g="0" b="0"/>
+      </a:effectRef>
+      <a:fontRef idx="minor">
+        <a:schemeClr val="lt1"/>
+      </a:fontRef>
+    </dgm:style>
+  </dgm:styleLbl>
+  <dgm:styleLbl name="parChTrans2D1">
+    <dgm:scene3d>
+      <a:camera prst="orthographicFront"/>
+      <a:lightRig rig="threePt" dir="t"/>
+    </dgm:scene3d>
+    <dgm:sp3d/>
+    <dgm:txPr/>
+    <dgm:style>
+      <a:lnRef idx="2">
+        <a:scrgbClr r="0" g="0" b="0"/>
+      </a:lnRef>
+      <a:fillRef idx="1">
+        <a:scrgbClr r="0" g="0" b="0"/>
+      </a:fillRef>
+      <a:effectRef idx="0">
+        <a:scrgbClr r="0" g="0" b="0"/>
+      </a:effectRef>
+      <a:fontRef idx="minor">
+        <a:schemeClr val="lt1"/>
+      </a:fontRef>
+    </dgm:style>
+  </dgm:styleLbl>
+  <dgm:styleLbl name="parChTrans2D2">
+    <dgm:scene3d>
+      <a:camera prst="orthographicFront"/>
+      <a:lightRig rig="threePt" dir="t"/>
+    </dgm:scene3d>
+    <dgm:sp3d/>
+    <dgm:txPr/>
+    <dgm:style>
+      <a:lnRef idx="2">
+        <a:scrgbClr r="0" g="0" b="0"/>
+      </a:lnRef>
+      <a:fillRef idx="1">
+        <a:scrgbClr r="0" g="0" b="0"/>
+      </a:fillRef>
+      <a:effectRef idx="0">
+        <a:scrgbClr r="0" g="0" b="0"/>
+      </a:effectRef>
+      <a:fontRef idx="minor">
+        <a:schemeClr val="lt1"/>
+      </a:fontRef>
+    </dgm:style>
+  </dgm:styleLbl>
+  <dgm:styleLbl name="parChTrans2D3">
+    <dgm:scene3d>
+      <a:camera prst="orthographicFront"/>
+      <a:lightRig rig="threePt" dir="t"/>
+    </dgm:scene3d>
+    <dgm:sp3d/>
+    <dgm:txPr/>
+    <dgm:style>
+      <a:lnRef idx="2">
+        <a:scrgbClr r="0" g="0" b="0"/>
+      </a:lnRef>
+      <a:fillRef idx="1">
+        <a:scrgbClr r="0" g="0" b="0"/>
+      </a:fillRef>
+      <a:effectRef idx="0">
+        <a:scrgbClr r="0" g="0" b="0"/>
+      </a:effectRef>
+      <a:fontRef idx="minor">
+        <a:schemeClr val="lt1"/>
+      </a:fontRef>
+    </dgm:style>
+  </dgm:styleLbl>
+  <dgm:styleLbl name="parChTrans2D4">
+    <dgm:scene3d>
+      <a:camera prst="orthographicFront"/>
+      <a:lightRig rig="threePt" dir="t"/>
+    </dgm:scene3d>
+    <dgm:sp3d/>
+    <dgm:txPr/>
+    <dgm:style>
+      <a:lnRef idx="2">
+        <a:scrgbClr r="0" g="0" b="0"/>
+      </a:lnRef>
+      <a:fillRef idx="1">
+        <a:scrgbClr r="0" g="0" b="0"/>
+      </a:fillRef>
+      <a:effectRef idx="0">
+        <a:scrgbClr r="0" g="0" b="0"/>
+      </a:effectRef>
+      <a:fontRef idx="minor">
+        <a:schemeClr val="lt1"/>
+      </a:fontRef>
+    </dgm:style>
+  </dgm:styleLbl>
+  <dgm:styleLbl name="parChTrans1D1">
+    <dgm:scene3d>
+      <a:camera prst="orthographicFront"/>
+      <a:lightRig rig="threePt" dir="t"/>
+    </dgm:scene3d>
+    <dgm:sp3d/>
+    <dgm:txPr/>
+    <dgm:style>
+      <a:lnRef idx="2">
+        <a:scrgbClr r="0" g="0" b="0"/>
+      </a:lnRef>
+      <a:fillRef idx="0">
+        <a:scrgbClr r="0" g="0" b="0"/>
+      </a:fillRef>
+      <a:effectRef idx="0">
+        <a:scrgbClr r="0" g="0" b="0"/>
+      </a:effectRef>
+      <a:fontRef idx="minor"/>
+    </dgm:style>
+  </dgm:styleLbl>
+  <dgm:styleLbl name="parChTrans1D2">
+    <dgm:scene3d>
+      <a:camera prst="orthographicFront"/>
+      <a:lightRig rig="threePt" dir="t"/>
+    </dgm:scene3d>
+    <dgm:sp3d/>
+    <dgm:txPr/>
+    <dgm:style>
+      <a:lnRef idx="2">
+        <a:scrgbClr r="0" g="0" b="0"/>
+      </a:lnRef>
+      <a:fillRef idx="0">
+        <a:scrgbClr r="0" g="0" b="0"/>
+      </a:fillRef>
+      <a:effectRef idx="0">
+        <a:scrgbClr r="0" g="0" b="0"/>
+      </a:effectRef>
+      <a:fontRef idx="minor"/>
+    </dgm:style>
+  </dgm:styleLbl>
+  <dgm:styleLbl name="parChTrans1D3">
+    <dgm:scene3d>
+      <a:camera prst="orthographicFront"/>
+      <a:lightRig rig="threePt" dir="t"/>
+    </dgm:scene3d>
+    <dgm:sp3d/>
+    <dgm:txPr/>
+    <dgm:style>
+      <a:lnRef idx="2">
+        <a:scrgbClr r="0" g="0" b="0"/>
+      </a:lnRef>
+      <a:fillRef idx="0">
+        <a:scrgbClr r="0" g="0" b="0"/>
+      </a:fillRef>
+      <a:effectRef idx="0">
+        <a:scrgbClr r="0" g="0" b="0"/>
+      </a:effectRef>
+      <a:fontRef idx="minor"/>
+    </dgm:style>
+  </dgm:styleLbl>
+  <dgm:styleLbl name="parChTrans1D4">
+    <dgm:scene3d>
+      <a:camera prst="orthographicFront"/>
+      <a:lightRig rig="threePt" dir="t"/>
+    </dgm:scene3d>
+    <dgm:sp3d/>
+    <dgm:txPr/>
+    <dgm:style>
+      <a:lnRef idx="2">
+        <a:scrgbClr r="0" g="0" b="0"/>
+      </a:lnRef>
+      <a:fillRef idx="0">
+        <a:scrgbClr r="0" g="0" b="0"/>
+      </a:fillRef>
+      <a:effectRef idx="0">
+        <a:scrgbClr r="0" g="0" b="0"/>
+      </a:effectRef>
+      <a:fontRef idx="minor"/>
+    </dgm:style>
+  </dgm:styleLbl>
+  <dgm:styleLbl name="fgAcc1">
+    <dgm:scene3d>
+      <a:camera prst="orthographicFront"/>
+      <a:lightRig rig="threePt" dir="t"/>
+    </dgm:scene3d>
+    <dgm:sp3d/>
+    <dgm:txPr/>
+    <dgm:style>
+      <a:lnRef idx="2">
+        <a:scrgbClr r="0" g="0" b="0"/>
+      </a:lnRef>
+      <a:fillRef idx="1">
+        <a:scrgbClr r="0" g="0" b="0"/>
+      </a:fillRef>
+      <a:effectRef idx="0">
+        <a:scrgbClr r="0" g="0" b="0"/>
+      </a:effectRef>
+      <a:fontRef idx="minor"/>
+    </dgm:style>
+  </dgm:styleLbl>
+  <dgm:styleLbl name="conFgAcc1">
+    <dgm:scene3d>
+      <a:camera prst="orthographicFront"/>
+      <a:lightRig rig="threePt" dir="t"/>
+    </dgm:scene3d>
+    <dgm:sp3d/>
+    <dgm:txPr/>
+    <dgm:style>
+      <a:lnRef idx="2">
+        <a:scrgbClr r="0" g="0" b="0"/>
+      </a:lnRef>
+      <a:fillRef idx="1">
+        <a:scrgbClr r="0" g="0" b="0"/>
+      </a:fillRef>
+      <a:effectRef idx="0">
+        <a:scrgbClr r="0" g="0" b="0"/>
+      </a:effectRef>
+      <a:fontRef idx="minor"/>
+    </dgm:style>
+  </dgm:styleLbl>
+  <dgm:styleLbl name="alignAcc1">
+    <dgm:scene3d>
+      <a:camera prst="orthographicFront"/>
+      <a:lightRig rig="threePt" dir="t"/>
+    </dgm:scene3d>
+    <dgm:sp3d/>
+    <dgm:txPr/>
+    <dgm:style>
+      <a:lnRef idx="2">
+        <a:scrgbClr r="0" g="0" b="0"/>
+      </a:lnRef>
+      <a:fillRef idx="1">
+        <a:scrgbClr r="0" g="0" b="0"/>
+      </a:fillRef>
+      <a:effectRef idx="0">
+        <a:scrgbClr r="0" g="0" b="0"/>
+      </a:effectRef>
+      <a:fontRef idx="minor"/>
+    </dgm:style>
+  </dgm:styleLbl>
+  <dgm:styleLbl name="trAlignAcc1">
+    <dgm:scene3d>
+      <a:camera prst="orthographicFront"/>
+      <a:lightRig rig="threePt" dir="t"/>
+    </dgm:scene3d>
+    <dgm:sp3d/>
+    <dgm:txPr/>
+    <dgm:style>
+      <a:lnRef idx="1">
+        <a:scrgbClr r="0" g="0" b="0"/>
+      </a:lnRef>
+      <a:fillRef idx="1">
+        <a:scrgbClr r="0" g="0" b="0"/>
+      </a:fillRef>
+      <a:effectRef idx="0">
+        <a:scrgbClr r="0" g="0" b="0"/>
+      </a:effectRef>
+      <a:fontRef idx="minor"/>
+    </dgm:style>
+  </dgm:styleLbl>
+  <dgm:styleLbl name="bgAcc1">
+    <dgm:scene3d>
+      <a:camera prst="orthographicFront"/>
+      <a:lightRig rig="threePt" dir="t"/>
+    </dgm:scene3d>
+    <dgm:sp3d/>
+    <dgm:txPr/>
+    <dgm:style>
+      <a:lnRef idx="2">
+        <a:scrgbClr r="0" g="0" b="0"/>
+      </a:lnRef>
+      <a:fillRef idx="1">
+        <a:scrgbClr r="0" g="0" b="0"/>
+      </a:fillRef>
+      <a:effectRef idx="0">
+        <a:scrgbClr r="0" g="0" b="0"/>
+      </a:effectRef>
+      <a:fontRef idx="minor"/>
+    </dgm:style>
+  </dgm:styleLbl>
+  <dgm:styleLbl name="solidFgAcc1">
+    <dgm:scene3d>
+      <a:camera prst="orthographicFront"/>
+      <a:lightRig rig="threePt" dir="t"/>
+    </dgm:scene3d>
+    <dgm:sp3d/>
+    <dgm:txPr/>
+    <dgm:style>
+      <a:lnRef idx="2">
+        <a:scrgbClr r="0" g="0" b="0"/>
+      </a:lnRef>
+      <a:fillRef idx="1">
+        <a:scrgbClr r="0" g="0" b="0"/>
+      </a:fillRef>
+      <a:effectRef idx="0">
+        <a:scrgbClr r="0" g="0" b="0"/>
+      </a:effectRef>
+      <a:fontRef idx="minor"/>
+    </dgm:style>
+  </dgm:styleLbl>
+  <dgm:styleLbl name="solidAlignAcc1">
+    <dgm:scene3d>
+      <a:camera prst="orthographicFront"/>
+      <a:lightRig rig="threePt" dir="t"/>
+    </dgm:scene3d>
+    <dgm:sp3d/>
+    <dgm:txPr/>
+    <dgm:style>
+      <a:lnRef idx="2">
+        <a:scrgbClr r="0" g="0" b="0"/>
+      </a:lnRef>
+      <a:fillRef idx="1">
+        <a:scrgbClr r="0" g="0" b="0"/>
+      </a:fillRef>
+      <a:effectRef idx="0">
+        <a:scrgbClr r="0" g="0" b="0"/>
+      </a:effectRef>
+      <a:fontRef idx="minor"/>
+    </dgm:style>
+  </dgm:styleLbl>
+  <dgm:styleLbl name="solidBgAcc1">
+    <dgm:scene3d>
+      <a:camera prst="orthographicFront"/>
+      <a:lightRig rig="threePt" dir="t"/>
+    </dgm:scene3d>
+    <dgm:sp3d/>
+    <dgm:txPr/>
+    <dgm:style>
+      <a:lnRef idx="2">
+        <a:scrgbClr r="0" g="0" b="0"/>
+      </a:lnRef>
+      <a:fillRef idx="1">
+        <a:scrgbClr r="0" g="0" b="0"/>
+      </a:fillRef>
+      <a:effectRef idx="0">
+        <a:scrgbClr r="0" g="0" b="0"/>
+      </a:effectRef>
+      <a:fontRef idx="minor"/>
+    </dgm:style>
+  </dgm:styleLbl>
+  <dgm:styleLbl name="fgAccFollowNode1">
+    <dgm:scene3d>
+      <a:camera prst="orthographicFront"/>
+      <a:lightRig rig="threePt" dir="t"/>
+    </dgm:scene3d>
+    <dgm:sp3d/>
+    <dgm:txPr/>
+    <dgm:style>
+      <a:lnRef idx="2">
+        <a:scrgbClr r="0" g="0" b="0"/>
+      </a:lnRef>
+      <a:fillRef idx="1">
+        <a:scrgbClr r="0" g="0" b="0"/>
+      </a:fillRef>
+      <a:effectRef idx="0">
+        <a:scrgbClr r="0" g="0" b="0"/>
+      </a:effectRef>
+      <a:fontRef idx="minor"/>
+    </dgm:style>
+  </dgm:styleLbl>
+  <dgm:styleLbl name="alignAccFollowNode1">
+    <dgm:scene3d>
+      <a:camera prst="orthographicFront"/>
+      <a:lightRig rig="threePt" dir="t"/>
+    </dgm:scene3d>
+    <dgm:sp3d/>
+    <dgm:txPr/>
+    <dgm:style>
+      <a:lnRef idx="2">
+        <a:scrgbClr r="0" g="0" b="0"/>
+      </a:lnRef>
+      <a:fillRef idx="1">
+        <a:scrgbClr r="0" g="0" b="0"/>
+      </a:fillRef>
+      <a:effectRef idx="0">
+        <a:scrgbClr r="0" g="0" b="0"/>
+      </a:effectRef>
+      <a:fontRef idx="minor"/>
+    </dgm:style>
+  </dgm:styleLbl>
+  <dgm:styleLbl name="bgAccFollowNode1">
+    <dgm:scene3d>
+      <a:camera prst="orthographicFront"/>
+      <a:lightRig rig="threePt" dir="t"/>
+    </dgm:scene3d>
+    <dgm:sp3d/>
+    <dgm:txPr/>
+    <dgm:style>
+      <a:lnRef idx="2">
+        <a:scrgbClr r="0" g="0" b="0"/>
+      </a:lnRef>
+      <a:fillRef idx="1">
+        <a:scrgbClr r="0" g="0" b="0"/>
+      </a:fillRef>
+      <a:effectRef idx="0">
+        <a:scrgbClr r="0" g="0" b="0"/>
+      </a:effectRef>
+      <a:fontRef idx="minor"/>
+    </dgm:style>
+  </dgm:styleLbl>
+  <dgm:styleLbl name="fgAcc0">
+    <dgm:scene3d>
+      <a:camera prst="orthographicFront"/>
+      <a:lightRig rig="threePt" dir="t"/>
+    </dgm:scene3d>
+    <dgm:sp3d/>
+    <dgm:txPr/>
+    <dgm:style>
+      <a:lnRef idx="2">
+        <a:scrgbClr r="0" g="0" b="0"/>
+      </a:lnRef>
+      <a:fillRef idx="1">
+        <a:scrgbClr r="0" g="0" b="0"/>
+      </a:fillRef>
+      <a:effectRef idx="0">
+        <a:scrgbClr r="0" g="0" b="0"/>
+      </a:effectRef>
+      <a:fontRef idx="minor"/>
+    </dgm:style>
+  </dgm:styleLbl>
+  <dgm:styleLbl name="fgAcc2">
+    <dgm:scene3d>
+      <a:camera prst="orthographicFront"/>
+      <a:lightRig rig="threePt" dir="t"/>
+    </dgm:scene3d>
+    <dgm:sp3d/>
+    <dgm:txPr/>
+    <dgm:style>
+      <a:lnRef idx="2">
+        <a:scrgbClr r="0" g="0" b="0"/>
+      </a:lnRef>
+      <a:fillRef idx="1">
+        <a:scrgbClr r="0" g="0" b="0"/>
+      </a:fillRef>
+      <a:effectRef idx="0">
+        <a:scrgbClr r="0" g="0" b="0"/>
+      </a:effectRef>
+      <a:fontRef idx="minor"/>
+    </dgm:style>
+  </dgm:styleLbl>
+  <dgm:styleLbl name="fgAcc3">
+    <dgm:scene3d>
+      <a:camera prst="orthographicFront"/>
+      <a:lightRig rig="threePt" dir="t"/>
+    </dgm:scene3d>
+    <dgm:sp3d/>
+    <dgm:txPr/>
+    <dgm:style>
+      <a:lnRef idx="2">
+        <a:scrgbClr r="0" g="0" b="0"/>
+      </a:lnRef>
+      <a:fillRef idx="1">
+        <a:scrgbClr r="0" g="0" b="0"/>
+      </a:fillRef>
+      <a:effectRef idx="0">
+        <a:scrgbClr r="0" g="0" b="0"/>
+      </a:effectRef>
+      <a:fontRef idx="minor"/>
+    </dgm:style>
+  </dgm:styleLbl>
+  <dgm:styleLbl name="fgAcc4">
+    <dgm:scene3d>
+      <a:camera prst="orthographicFront"/>
+      <a:lightRig rig="threePt" dir="t"/>
+    </dgm:scene3d>
+    <dgm:sp3d/>
+    <dgm:txPr/>
+    <dgm:style>
+      <a:lnRef idx="2">
+        <a:scrgbClr r="0" g="0" b="0"/>
+      </a:lnRef>
+      <a:fillRef idx="1">
+        <a:scrgbClr r="0" g="0" b="0"/>
+      </a:fillRef>
+      <a:effectRef idx="0">
+        <a:scrgbClr r="0" g="0" b="0"/>
+      </a:effectRef>
+      <a:fontRef idx="minor"/>
+    </dgm:style>
+  </dgm:styleLbl>
+  <dgm:styleLbl name="bgShp">
+    <dgm:scene3d>
+      <a:camera prst="orthographicFront"/>
+      <a:lightRig rig="threePt" dir="t"/>
+    </dgm:scene3d>
+    <dgm:sp3d/>
+    <dgm:txPr/>
+    <dgm:style>
+      <a:lnRef idx="0">
+        <a:scrgbClr r="0" g="0" b="0"/>
+      </a:lnRef>
+      <a:fillRef idx="1">
+        <a:scrgbClr r="0" g="0" b="0"/>
+      </a:fillRef>
+      <a:effectRef idx="0">
+        <a:scrgbClr r="0" g="0" b="0"/>
+      </a:effectRef>
+      <a:fontRef idx="minor"/>
+    </dgm:style>
+  </dgm:styleLbl>
+  <dgm:styleLbl name="dkBgShp">
+    <dgm:scene3d>
+      <a:camera prst="orthographicFront"/>
+      <a:lightRig rig="threePt" dir="t"/>
+    </dgm:scene3d>
+    <dgm:sp3d/>
+    <dgm:txPr/>
+    <dgm:style>
+      <a:lnRef idx="0">
+        <a:scrgbClr r="0" g="0" b="0"/>
+      </a:lnRef>
+      <a:fillRef idx="1">
+        <a:scrgbClr r="0" g="0" b="0"/>
+      </a:fillRef>
+      <a:effectRef idx="0">
+        <a:scrgbClr r="0" g="0" b="0"/>
+      </a:effectRef>
+      <a:fontRef idx="minor"/>
+    </dgm:style>
+  </dgm:styleLbl>
+  <dgm:styleLbl name="trBgShp">
+    <dgm:scene3d>
+      <a:camera prst="orthographicFront"/>
+      <a:lightRig rig="threePt" dir="t"/>
+    </dgm:scene3d>
+    <dgm:sp3d/>
+    <dgm:txPr/>
+    <dgm:style>
+      <a:lnRef idx="0">
+        <a:scrgbClr r="0" g="0" b="0"/>
+      </a:lnRef>
+      <a:fillRef idx="1">
+        <a:scrgbClr r="0" g="0" b="0"/>
+      </a:fillRef>
+      <a:effectRef idx="0">
+        <a:scrgbClr r="0" g="0" b="0"/>
+      </a:effectRef>
+      <a:fontRef idx="minor"/>
+    </dgm:style>
+  </dgm:styleLbl>
+  <dgm:styleLbl name="fgShp">
+    <dgm:scene3d>
+      <a:camera prst="orthographicFront"/>
+      <a:lightRig rig="threePt" dir="t"/>
+    </dgm:scene3d>
+    <dgm:sp3d/>
+    <dgm:txPr/>
+    <dgm:style>
+      <a:lnRef idx="2">
+        <a:scrgbClr r="0" g="0" b="0"/>
+      </a:lnRef>
+      <a:fillRef idx="1">
+        <a:scrgbClr r="0" g="0" b="0"/>
+      </a:fillRef>
+      <a:effectRef idx="0">
+        <a:scrgbClr r="0" g="0" b="0"/>
+      </a:effectRef>
+      <a:fontRef idx="minor"/>
+    </dgm:style>
+  </dgm:styleLbl>
+  <dgm:styleLbl name="revTx">
+    <dgm:scene3d>
+      <a:camera prst="orthographicFront"/>
+      <a:lightRig rig="threePt" dir="t"/>
+    </dgm:scene3d>
+    <dgm:sp3d/>
+    <dgm:txPr/>
+    <dgm:style>
+      <a:lnRef idx="0">
+        <a:scrgbClr r="0" g="0" b="0"/>
+      </a:lnRef>
+      <a:fillRef idx="0">
+        <a:scrgbClr r="0" g="0" b="0"/>
+      </a:fillRef>
+      <a:effectRef idx="0">
+        <a:scrgbClr r="0" g="0" b="0"/>
+      </a:effectRef>
+      <a:fontRef idx="minor"/>
+    </dgm:style>
+  </dgm:styleLbl>
+</dgm:styleDef>
+</file>
+
 <file path=ppt/handoutMasters/handoutMaster1.xml><?xml version="1.0" encoding="utf-8"?>
 <p:handoutMaster xmlns:a="http://schemas.openxmlformats.org/drawingml/2006/main" xmlns:r="http://schemas.openxmlformats.org/officeDocument/2006/relationships" xmlns:p="http://schemas.openxmlformats.org/presentationml/2006/main">
   <p:cSld>
@@ -296,7 +3189,7 @@
               <a:pPr>
                 <a:defRPr/>
               </a:pPr>
-              <a:t>5/29/2024</a:t>
+              <a:t>3/18/2026</a:t>
             </a:fld>
             <a:endParaRPr lang="en-US" altLang="en-US"/>
           </a:p>
@@ -398,6 +3291,11 @@
         </p:txBody>
       </p:sp>
     </p:spTree>
+    <p:extLst>
+      <p:ext uri="{BB962C8B-B14F-4D97-AF65-F5344CB8AC3E}">
+        <p14:creationId xmlns:p14="http://schemas.microsoft.com/office/powerpoint/2010/main" val="1"/>
+      </p:ext>
+    </p:extLst>
   </p:cSld>
   <p:clrMap bg1="lt1" tx1="dk1" bg2="lt2" tx2="dk2" accent1="accent1" accent2="accent2" accent3="accent3" accent4="accent4" accent5="accent5" accent6="accent6" hlink="hlink" folHlink="folHlink"/>
   <p:hf hdr="0" ftr="0" dt="0"/>
@@ -719,7 +3617,7 @@
             </a:extLst>
           </p:cNvPr>
           <p:cNvSpPr>
-            <a:spLocks noRot="1" noChangeArrowheads="1" noTextEdit="1"/>
+            <a:spLocks noGrp="1" noRot="1" noChangeAspect="1" noChangeArrowheads="1" noTextEdit="1"/>
           </p:cNvSpPr>
           <p:nvPr>
             <p:ph type="sldImg" idx="2"/>
@@ -5435,6 +8333,14 @@
 <file path=ppt/slides/slide1.xml><?xml version="1.0" encoding="utf-8"?>
 <p:sld xmlns:a="http://schemas.openxmlformats.org/drawingml/2006/main" xmlns:r="http://schemas.openxmlformats.org/officeDocument/2006/relationships" xmlns:p="http://schemas.openxmlformats.org/presentationml/2006/main">
   <p:cSld>
+    <p:bg>
+      <p:bgPr>
+        <a:solidFill>
+          <a:schemeClr val="bg1"/>
+        </a:solidFill>
+        <a:effectLst/>
+      </p:bgPr>
+    </p:bg>
     <p:spTree>
       <p:nvGrpSpPr>
         <p:cNvPr id="1" name=""/>
@@ -5449,6 +8355,382 @@
           <a:chExt cx="0" cy="0"/>
         </a:xfrm>
       </p:grpSpPr>
+      <p:sp useBgFill="1">
+        <p:nvSpPr>
+          <p:cNvPr id="14343" name="Rectangle 14342">
+            <a:extLst>
+              <a:ext uri="{FF2B5EF4-FFF2-40B4-BE49-F238E27FC236}">
+                <a16:creationId xmlns:a16="http://schemas.microsoft.com/office/drawing/2014/main" id="{8555C5B3-193A-4749-9AFD-682E53CDDE8F}"/>
+              </a:ext>
+              <a:ext uri="{C183D7F6-B498-43B3-948B-1728B52AA6E4}">
+                <adec:decorative xmlns:adec="http://schemas.microsoft.com/office/drawing/2017/decorative" val="1"/>
+              </a:ext>
+            </a:extLst>
+          </p:cNvPr>
+          <p:cNvSpPr>
+            <a:spLocks noGrp="1" noRot="1" noChangeAspect="1" noMove="1" noResize="1" noEditPoints="1" noAdjustHandles="1" noChangeArrowheads="1" noChangeShapeType="1" noTextEdit="1"/>
+          </p:cNvSpPr>
+          <p:nvPr>
+            <p:extLst>
+              <p:ext uri="{386F3935-93C4-4BCD-93E2-E3B085C9AB24}">
+                <p16:designElem xmlns:p16="http://schemas.microsoft.com/office/powerpoint/2015/main" val="1"/>
+              </p:ext>
+            </p:extLst>
+          </p:nvPr>
+        </p:nvSpPr>
+        <p:spPr>
+          <a:xfrm>
+            <a:off x="0" y="0"/>
+            <a:ext cx="12192000" cy="6858000"/>
+          </a:xfrm>
+          <a:prstGeom prst="rect">
+            <a:avLst/>
+          </a:prstGeom>
+          <a:ln w="12700" cap="flat" cmpd="sng" algn="ctr">
+            <a:noFill/>
+            <a:prstDash val="solid"/>
+            <a:miter lim="800000"/>
+          </a:ln>
+          <a:effectLst/>
+          <a:extLst>
+            <a:ext uri="{91240B29-F687-4F45-9708-019B960494DF}">
+              <a14:hiddenLine xmlns:a14="http://schemas.microsoft.com/office/drawing/2010/main" w="12700" cap="flat" cmpd="sng" algn="ctr">
+                <a:solidFill>
+                  <a:schemeClr val="accent1">
+                    <a:shade val="50000"/>
+                  </a:schemeClr>
+                </a:solidFill>
+                <a:prstDash val="solid"/>
+                <a:miter lim="800000"/>
+              </a14:hiddenLine>
+            </a:ext>
+          </a:extLst>
+        </p:spPr>
+        <p:style>
+          <a:lnRef idx="2">
+            <a:schemeClr val="accent1">
+              <a:shade val="50000"/>
+            </a:schemeClr>
+          </a:lnRef>
+          <a:fillRef idx="1">
+            <a:schemeClr val="accent1"/>
+          </a:fillRef>
+          <a:effectRef idx="0">
+            <a:schemeClr val="accent1"/>
+          </a:effectRef>
+          <a:fontRef idx="minor">
+            <a:schemeClr val="lt1"/>
+          </a:fontRef>
+        </p:style>
+        <p:txBody>
+          <a:bodyPr rtlCol="0" anchor="ctr"/>
+          <a:lstStyle/>
+          <a:p>
+            <a:pPr algn="ctr"/>
+            <a:endParaRPr lang="en-US" dirty="0"/>
+          </a:p>
+        </p:txBody>
+      </p:sp>
+      <p:sp>
+        <p:nvSpPr>
+          <p:cNvPr id="14345" name="Rectangle 14344">
+            <a:extLst>
+              <a:ext uri="{FF2B5EF4-FFF2-40B4-BE49-F238E27FC236}">
+                <a16:creationId xmlns:a16="http://schemas.microsoft.com/office/drawing/2014/main" id="{2EAE06A6-F76A-41C9-827A-C561B004485C}"/>
+              </a:ext>
+              <a:ext uri="{C183D7F6-B498-43B3-948B-1728B52AA6E4}">
+                <adec:decorative xmlns:adec="http://schemas.microsoft.com/office/drawing/2017/decorative" val="1"/>
+              </a:ext>
+            </a:extLst>
+          </p:cNvPr>
+          <p:cNvSpPr>
+            <a:spLocks noGrp="1" noRot="1" noChangeAspect="1" noMove="1" noResize="1" noEditPoints="1" noAdjustHandles="1" noChangeArrowheads="1" noChangeShapeType="1" noTextEdit="1"/>
+          </p:cNvSpPr>
+          <p:nvPr>
+            <p:extLst>
+              <p:ext uri="{386F3935-93C4-4BCD-93E2-E3B085C9AB24}">
+                <p16:designElem xmlns:p16="http://schemas.microsoft.com/office/powerpoint/2015/main" val="1"/>
+              </p:ext>
+            </p:extLst>
+          </p:nvPr>
+        </p:nvSpPr>
+        <p:spPr>
+          <a:xfrm flipH="1">
+            <a:off x="0" y="-3"/>
+            <a:ext cx="12192000" cy="6858000"/>
+          </a:xfrm>
+          <a:prstGeom prst="rect">
+            <a:avLst/>
+          </a:prstGeom>
+          <a:gradFill>
+            <a:gsLst>
+              <a:gs pos="0">
+                <a:srgbClr val="000000"/>
+              </a:gs>
+              <a:gs pos="100000">
+                <a:schemeClr val="accent1">
+                  <a:lumMod val="75000"/>
+                </a:schemeClr>
+              </a:gs>
+            </a:gsLst>
+            <a:lin ang="6600000" scaled="0"/>
+          </a:gradFill>
+          <a:ln>
+            <a:noFill/>
+          </a:ln>
+        </p:spPr>
+        <p:style>
+          <a:lnRef idx="2">
+            <a:schemeClr val="accent1">
+              <a:shade val="50000"/>
+            </a:schemeClr>
+          </a:lnRef>
+          <a:fillRef idx="1">
+            <a:schemeClr val="accent1"/>
+          </a:fillRef>
+          <a:effectRef idx="0">
+            <a:schemeClr val="accent1"/>
+          </a:effectRef>
+          <a:fontRef idx="minor">
+            <a:schemeClr val="lt1"/>
+          </a:fontRef>
+        </p:style>
+        <p:txBody>
+          <a:bodyPr rtlCol="0" anchor="ctr"/>
+          <a:lstStyle/>
+          <a:p>
+            <a:pPr algn="ctr"/>
+            <a:endParaRPr lang="en-US" dirty="0"/>
+          </a:p>
+        </p:txBody>
+      </p:sp>
+      <p:sp>
+        <p:nvSpPr>
+          <p:cNvPr id="14347" name="Rectangle 14346">
+            <a:extLst>
+              <a:ext uri="{FF2B5EF4-FFF2-40B4-BE49-F238E27FC236}">
+                <a16:creationId xmlns:a16="http://schemas.microsoft.com/office/drawing/2014/main" id="{89F9D4E8-0639-444B-949B-9518585061AF}"/>
+              </a:ext>
+              <a:ext uri="{C183D7F6-B498-43B3-948B-1728B52AA6E4}">
+                <adec:decorative xmlns:adec="http://schemas.microsoft.com/office/drawing/2017/decorative" val="1"/>
+              </a:ext>
+            </a:extLst>
+          </p:cNvPr>
+          <p:cNvSpPr>
+            <a:spLocks noGrp="1" noRot="1" noChangeAspect="1" noMove="1" noResize="1" noEditPoints="1" noAdjustHandles="1" noChangeArrowheads="1" noChangeShapeType="1" noTextEdit="1"/>
+          </p:cNvSpPr>
+          <p:nvPr>
+            <p:extLst>
+              <p:ext uri="{386F3935-93C4-4BCD-93E2-E3B085C9AB24}">
+                <p16:designElem xmlns:p16="http://schemas.microsoft.com/office/powerpoint/2015/main" val="1"/>
+              </p:ext>
+            </p:extLst>
+          </p:nvPr>
+        </p:nvSpPr>
+        <p:spPr>
+          <a:xfrm flipH="1">
+            <a:off x="480861" y="0"/>
+            <a:ext cx="7661934" cy="6858000"/>
+          </a:xfrm>
+          <a:prstGeom prst="rect">
+            <a:avLst/>
+          </a:prstGeom>
+          <a:gradFill>
+            <a:gsLst>
+              <a:gs pos="0">
+                <a:schemeClr val="accent1">
+                  <a:lumMod val="75000"/>
+                  <a:alpha val="45000"/>
+                </a:schemeClr>
+              </a:gs>
+              <a:gs pos="100000">
+                <a:srgbClr val="000000">
+                  <a:alpha val="29000"/>
+                </a:srgbClr>
+              </a:gs>
+            </a:gsLst>
+            <a:lin ang="12000000" scaled="0"/>
+          </a:gradFill>
+          <a:ln>
+            <a:noFill/>
+          </a:ln>
+        </p:spPr>
+        <p:style>
+          <a:lnRef idx="2">
+            <a:schemeClr val="accent1">
+              <a:shade val="50000"/>
+            </a:schemeClr>
+          </a:lnRef>
+          <a:fillRef idx="1">
+            <a:schemeClr val="accent1"/>
+          </a:fillRef>
+          <a:effectRef idx="0">
+            <a:schemeClr val="accent1"/>
+          </a:effectRef>
+          <a:fontRef idx="minor">
+            <a:schemeClr val="lt1"/>
+          </a:fontRef>
+        </p:style>
+        <p:txBody>
+          <a:bodyPr rtlCol="0" anchor="ctr"/>
+          <a:lstStyle/>
+          <a:p>
+            <a:pPr algn="ctr"/>
+            <a:endParaRPr lang="en-US" dirty="0"/>
+          </a:p>
+        </p:txBody>
+      </p:sp>
+      <p:sp>
+        <p:nvSpPr>
+          <p:cNvPr id="14349" name="Rectangle 14348">
+            <a:extLst>
+              <a:ext uri="{FF2B5EF4-FFF2-40B4-BE49-F238E27FC236}">
+                <a16:creationId xmlns:a16="http://schemas.microsoft.com/office/drawing/2014/main" id="{7E3DA7A2-ED70-4BBA-AB72-00AD461FA405}"/>
+              </a:ext>
+              <a:ext uri="{C183D7F6-B498-43B3-948B-1728B52AA6E4}">
+                <adec:decorative xmlns:adec="http://schemas.microsoft.com/office/drawing/2017/decorative" val="1"/>
+              </a:ext>
+            </a:extLst>
+          </p:cNvPr>
+          <p:cNvSpPr>
+            <a:spLocks noGrp="1" noRot="1" noChangeAspect="1" noMove="1" noResize="1" noEditPoints="1" noAdjustHandles="1" noChangeArrowheads="1" noChangeShapeType="1" noTextEdit="1"/>
+          </p:cNvSpPr>
+          <p:nvPr>
+            <p:extLst>
+              <p:ext uri="{386F3935-93C4-4BCD-93E2-E3B085C9AB24}">
+                <p16:designElem xmlns:p16="http://schemas.microsoft.com/office/powerpoint/2015/main" val="1"/>
+              </p:ext>
+            </p:extLst>
+          </p:nvPr>
+        </p:nvSpPr>
+        <p:spPr>
+          <a:xfrm rot="10800000" flipH="1">
+            <a:off x="480862" y="-6"/>
+            <a:ext cx="11711138" cy="6410334"/>
+          </a:xfrm>
+          <a:prstGeom prst="rect">
+            <a:avLst/>
+          </a:prstGeom>
+          <a:gradFill>
+            <a:gsLst>
+              <a:gs pos="0">
+                <a:schemeClr val="accent1">
+                  <a:alpha val="0"/>
+                </a:schemeClr>
+              </a:gs>
+              <a:gs pos="100000">
+                <a:srgbClr val="000000">
+                  <a:alpha val="41000"/>
+                </a:srgbClr>
+              </a:gs>
+            </a:gsLst>
+            <a:lin ang="18000000" scaled="0"/>
+          </a:gradFill>
+          <a:ln>
+            <a:noFill/>
+          </a:ln>
+        </p:spPr>
+        <p:style>
+          <a:lnRef idx="2">
+            <a:schemeClr val="accent1">
+              <a:shade val="50000"/>
+            </a:schemeClr>
+          </a:lnRef>
+          <a:fillRef idx="1">
+            <a:schemeClr val="accent1"/>
+          </a:fillRef>
+          <a:effectRef idx="0">
+            <a:schemeClr val="accent1"/>
+          </a:effectRef>
+          <a:fontRef idx="minor">
+            <a:schemeClr val="lt1"/>
+          </a:fontRef>
+        </p:style>
+        <p:txBody>
+          <a:bodyPr rtlCol="0" anchor="ctr"/>
+          <a:lstStyle/>
+          <a:p>
+            <a:pPr algn="ctr"/>
+            <a:endParaRPr lang="en-US" dirty="0"/>
+          </a:p>
+        </p:txBody>
+      </p:sp>
+      <p:sp>
+        <p:nvSpPr>
+          <p:cNvPr id="14351" name="Rectangle 14350">
+            <a:extLst>
+              <a:ext uri="{FF2B5EF4-FFF2-40B4-BE49-F238E27FC236}">
+                <a16:creationId xmlns:a16="http://schemas.microsoft.com/office/drawing/2014/main" id="{FC485432-3647-4218-B5D3-15D3FA222B13}"/>
+              </a:ext>
+              <a:ext uri="{C183D7F6-B498-43B3-948B-1728B52AA6E4}">
+                <adec:decorative xmlns:adec="http://schemas.microsoft.com/office/drawing/2017/decorative" val="1"/>
+              </a:ext>
+            </a:extLst>
+          </p:cNvPr>
+          <p:cNvSpPr>
+            <a:spLocks noGrp="1" noRot="1" noChangeAspect="1" noMove="1" noResize="1" noEditPoints="1" noAdjustHandles="1" noChangeArrowheads="1" noChangeShapeType="1" noTextEdit="1"/>
+          </p:cNvSpPr>
+          <p:nvPr>
+            <p:extLst>
+              <p:ext uri="{386F3935-93C4-4BCD-93E2-E3B085C9AB24}">
+                <p16:designElem xmlns:p16="http://schemas.microsoft.com/office/powerpoint/2015/main" val="1"/>
+              </p:ext>
+            </p:extLst>
+          </p:nvPr>
+        </p:nvSpPr>
+        <p:spPr>
+          <a:xfrm rot="16200000">
+            <a:off x="4844797" y="-489206"/>
+            <a:ext cx="2502408" cy="12191998"/>
+          </a:xfrm>
+          <a:prstGeom prst="rect">
+            <a:avLst/>
+          </a:prstGeom>
+          <a:gradFill>
+            <a:gsLst>
+              <a:gs pos="0">
+                <a:schemeClr val="accent1">
+                  <a:alpha val="24000"/>
+                </a:schemeClr>
+              </a:gs>
+              <a:gs pos="78000">
+                <a:schemeClr val="accent1">
+                  <a:lumMod val="50000"/>
+                  <a:alpha val="0"/>
+                </a:schemeClr>
+              </a:gs>
+            </a:gsLst>
+            <a:lin ang="10200000" scaled="0"/>
+          </a:gradFill>
+          <a:ln>
+            <a:noFill/>
+          </a:ln>
+        </p:spPr>
+        <p:style>
+          <a:lnRef idx="2">
+            <a:schemeClr val="accent1">
+              <a:shade val="50000"/>
+            </a:schemeClr>
+          </a:lnRef>
+          <a:fillRef idx="1">
+            <a:schemeClr val="accent1"/>
+          </a:fillRef>
+          <a:effectRef idx="0">
+            <a:schemeClr val="accent1"/>
+          </a:effectRef>
+          <a:fontRef idx="minor">
+            <a:schemeClr val="lt1"/>
+          </a:fontRef>
+        </p:style>
+        <p:txBody>
+          <a:bodyPr rtlCol="0" anchor="ctr"/>
+          <a:lstStyle/>
+          <a:p>
+            <a:pPr algn="ctr"/>
+            <a:endParaRPr lang="en-US"/>
+          </a:p>
+        </p:txBody>
+      </p:sp>
       <p:sp>
         <p:nvSpPr>
           <p:cNvPr id="14338" name="Rectangle 3">
@@ -5467,85 +8749,76 @@
         </p:nvSpPr>
         <p:spPr>
           <a:xfrm>
-            <a:off x="2819400" y="2209800"/>
-            <a:ext cx="6400800" cy="1752600"/>
+            <a:off x="1127208" y="4756265"/>
+            <a:ext cx="4393278" cy="1244483"/>
           </a:xfrm>
         </p:spPr>
         <p:txBody>
-          <a:bodyPr rtlCol="0">
-            <a:normAutofit fontScale="92500" lnSpcReduction="20000"/>
+          <a:bodyPr rtlCol="0" anchor="t">
+            <a:normAutofit/>
           </a:bodyPr>
           <a:lstStyle/>
           <a:p>
-            <a:pPr eaLnBrk="1" fontAlgn="auto" hangingPunct="1">
+            <a:pPr algn="l" eaLnBrk="1" fontAlgn="auto" hangingPunct="1">
+              <a:lnSpc>
+                <a:spcPct val="90000"/>
+              </a:lnSpc>
               <a:spcAft>
                 <a:spcPts val="0"/>
               </a:spcAft>
               <a:defRPr/>
             </a:pPr>
             <a:r>
-              <a:rPr lang="en-US" sz="4500" dirty="0">
-                <a:solidFill>
-                  <a:srgbClr val="800000"/>
+              <a:rPr lang="en-US" sz="2200">
+                <a:solidFill>
+                  <a:srgbClr val="FFFFFF"/>
                 </a:solidFill>
                 <a:latin typeface="Arial" charset="0"/>
                 <a:ea typeface="+mn-ea"/>
                 <a:cs typeface="+mn-cs"/>
               </a:rPr>
-              <a:t>ReactJS</a:t>
+              <a:t>ReactJS.</a:t>
             </a:r>
-            <a:r>
-              <a:rPr lang="en-US" sz="4500" dirty="0">
-                <a:latin typeface="Arial" charset="0"/>
-                <a:ea typeface="+mn-ea"/>
-                <a:cs typeface="+mn-cs"/>
-              </a:rPr>
-              <a:t>.</a:t>
-            </a:r>
-          </a:p>
-          <a:p>
-            <a:pPr eaLnBrk="1" fontAlgn="auto" hangingPunct="1">
+          </a:p>
+          <a:p>
+            <a:pPr algn="l" eaLnBrk="1" fontAlgn="auto" hangingPunct="1">
+              <a:lnSpc>
+                <a:spcPct val="90000"/>
+              </a:lnSpc>
               <a:spcAft>
                 <a:spcPts val="0"/>
               </a:spcAft>
               <a:defRPr/>
             </a:pPr>
-            <a:endParaRPr lang="en-US" sz="4500" dirty="0">
+            <a:endParaRPr lang="en-US" sz="2200">
+              <a:solidFill>
+                <a:srgbClr val="FFFFFF"/>
+              </a:solidFill>
               <a:latin typeface="Arial" charset="0"/>
               <a:ea typeface="+mn-ea"/>
               <a:cs typeface="+mn-cs"/>
             </a:endParaRPr>
           </a:p>
           <a:p>
-            <a:pPr eaLnBrk="1" fontAlgn="auto" hangingPunct="1">
+            <a:pPr algn="l" eaLnBrk="1" fontAlgn="auto" hangingPunct="1">
+              <a:lnSpc>
+                <a:spcPct val="90000"/>
+              </a:lnSpc>
               <a:spcAft>
                 <a:spcPts val="0"/>
               </a:spcAft>
               <a:defRPr/>
             </a:pPr>
             <a:r>
-              <a:rPr lang="en-US" sz="2800" dirty="0">
+              <a:rPr lang="en-US" sz="2200">
+                <a:solidFill>
+                  <a:srgbClr val="FFFFFF"/>
+                </a:solidFill>
                 <a:latin typeface="Arial" charset="0"/>
                 <a:ea typeface="+mn-ea"/>
                 <a:cs typeface="+mn-cs"/>
               </a:rPr>
-              <a:t>The Component model (</a:t>
-            </a:r>
-            <a:r>
-              <a:rPr lang="en-US" sz="2800" dirty="0" err="1">
-                <a:latin typeface="Arial" charset="0"/>
-                <a:ea typeface="+mn-ea"/>
-                <a:cs typeface="+mn-cs"/>
-              </a:rPr>
-              <a:t>Contd</a:t>
-            </a:r>
-            <a:r>
-              <a:rPr lang="en-US" sz="2800" dirty="0">
-                <a:latin typeface="Arial" charset="0"/>
-                <a:ea typeface="+mn-ea"/>
-                <a:cs typeface="+mn-cs"/>
-              </a:rPr>
-              <a:t>)</a:t>
+              <a:t>The Component model (Contd)</a:t>
             </a:r>
           </a:p>
         </p:txBody>
@@ -5567,7 +8840,10 @@
           </p:nvPr>
         </p:nvSpPr>
         <p:spPr bwMode="auto">
-          <a:noFill/>
+          <a:xfrm rot="5400000">
+            <a:off x="-1627736" y="1792986"/>
+            <a:ext cx="3713794" cy="365125"/>
+          </a:xfrm>
           <a:extLst>
             <a:ext uri="{909E8E84-426E-40DD-AFC4-6F175D3DCCD1}">
               <a14:hiddenFill xmlns:a14="http://schemas.microsoft.com/office/drawing/2010/main">
@@ -5589,10 +8865,11 @@
           </a:extLst>
         </p:spPr>
         <p:txBody>
-          <a:bodyPr wrap="square" numCol="1" anchorCtr="0" compatLnSpc="1">
+          <a:bodyPr numCol="1" anchorCtr="0" compatLnSpc="1">
             <a:prstTxWarp prst="textNoShape">
               <a:avLst/>
             </a:prstTxWarp>
+            <a:normAutofit/>
           </a:bodyPr>
           <a:lstStyle>
             <a:lvl1pPr>
@@ -5735,16 +9012,16 @@
             </a:lvl9pPr>
           </a:lstStyle>
           <a:p>
-            <a:pPr>
+            <a:pPr algn="l">
               <a:spcBef>
                 <a:spcPct val="0"/>
               </a:spcBef>
               <a:buFontTx/>
               <a:buNone/>
             </a:pPr>
-            <a:endParaRPr lang="en-US" altLang="en-US" sz="1200">
+            <a:endParaRPr lang="en-US" altLang="en-US" sz="1100">
               <a:solidFill>
-                <a:schemeClr val="bg2"/>
+                <a:srgbClr val="FFFFFF"/>
               </a:solidFill>
               <a:latin typeface="Arial" panose="020B0604020202020204" pitchFamily="34" charset="0"/>
             </a:endParaRPr>
@@ -5753,208 +9030,64 @@
       </p:sp>
       <p:sp>
         <p:nvSpPr>
-          <p:cNvPr id="4100" name="Slide Number Placeholder 5">
+          <p:cNvPr id="14353" name="Oval 14352">
             <a:extLst>
               <a:ext uri="{FF2B5EF4-FFF2-40B4-BE49-F238E27FC236}">
-                <a16:creationId xmlns:a16="http://schemas.microsoft.com/office/drawing/2014/main" id="{9614E955-ADD5-2D71-01D8-DAFC1A51BD46}"/>
+                <a16:creationId xmlns:a16="http://schemas.microsoft.com/office/drawing/2014/main" id="{F4AFDDCA-6ABA-4D23-8A5C-1BF0F4308148}"/>
+              </a:ext>
+              <a:ext uri="{C183D7F6-B498-43B3-948B-1728B52AA6E4}">
+                <adec:decorative xmlns:adec="http://schemas.microsoft.com/office/drawing/2017/decorative" val="1"/>
               </a:ext>
             </a:extLst>
           </p:cNvPr>
           <p:cNvSpPr>
-            <a:spLocks noGrp="1"/>
+            <a:spLocks noGrp="1" noRot="1" noChangeAspect="1" noMove="1" noResize="1" noEditPoints="1" noAdjustHandles="1" noChangeArrowheads="1" noChangeShapeType="1" noTextEdit="1"/>
           </p:cNvSpPr>
           <p:nvPr>
-            <p:ph type="sldNum" sz="quarter" idx="12"/>
+            <p:extLst>
+              <p:ext uri="{386F3935-93C4-4BCD-93E2-E3B085C9AB24}">
+                <p16:designElem xmlns:p16="http://schemas.microsoft.com/office/powerpoint/2015/main" val="1"/>
+              </p:ext>
+            </p:extLst>
           </p:nvPr>
         </p:nvSpPr>
-        <p:spPr bwMode="auto">
-          <a:noFill/>
-          <a:extLst>
-            <a:ext uri="{909E8E84-426E-40DD-AFC4-6F175D3DCCD1}">
-              <a14:hiddenFill xmlns:a14="http://schemas.microsoft.com/office/drawing/2010/main">
-                <a:solidFill>
-                  <a:srgbClr val="FFFFFF"/>
-                </a:solidFill>
-              </a14:hiddenFill>
-            </a:ext>
-            <a:ext uri="{91240B29-F687-4F45-9708-019B960494DF}">
-              <a14:hiddenLine xmlns:a14="http://schemas.microsoft.com/office/drawing/2010/main" w="9525">
-                <a:solidFill>
-                  <a:srgbClr val="000000"/>
-                </a:solidFill>
-                <a:round/>
-                <a:headEnd/>
-                <a:tailEnd/>
-              </a14:hiddenLine>
-            </a:ext>
-          </a:extLst>
+        <p:spPr>
+          <a:xfrm>
+            <a:off x="6390589" y="1062544"/>
+            <a:ext cx="4756162" cy="4756162"/>
+          </a:xfrm>
+          <a:prstGeom prst="ellipse">
+            <a:avLst/>
+          </a:prstGeom>
+          <a:solidFill>
+            <a:schemeClr val="bg1"/>
+          </a:solidFill>
+          <a:ln>
+            <a:noFill/>
+          </a:ln>
         </p:spPr>
+        <p:style>
+          <a:lnRef idx="2">
+            <a:schemeClr val="accent1">
+              <a:shade val="50000"/>
+            </a:schemeClr>
+          </a:lnRef>
+          <a:fillRef idx="1">
+            <a:schemeClr val="accent1"/>
+          </a:fillRef>
+          <a:effectRef idx="0">
+            <a:schemeClr val="accent1"/>
+          </a:effectRef>
+          <a:fontRef idx="minor">
+            <a:schemeClr val="lt1"/>
+          </a:fontRef>
+        </p:style>
         <p:txBody>
-          <a:bodyPr/>
-          <a:lstStyle>
-            <a:lvl1pPr>
-              <a:spcBef>
-                <a:spcPct val="20000"/>
-              </a:spcBef>
-              <a:buFont typeface="Arial" panose="020B0604020202020204" pitchFamily="34" charset="0"/>
-              <a:buChar char="•"/>
-              <a:defRPr sz="3200">
-                <a:solidFill>
-                  <a:schemeClr val="tx1"/>
-                </a:solidFill>
-                <a:latin typeface="Calibri" panose="020F0502020204030204" pitchFamily="34" charset="0"/>
-                <a:ea typeface="ＭＳ Ｐゴシック" panose="020B0600070205080204" pitchFamily="34" charset="-128"/>
-              </a:defRPr>
-            </a:lvl1pPr>
-            <a:lvl2pPr marL="742950" indent="-285750">
-              <a:spcBef>
-                <a:spcPct val="20000"/>
-              </a:spcBef>
-              <a:buFont typeface="Arial" panose="020B0604020202020204" pitchFamily="34" charset="0"/>
-              <a:buChar char="–"/>
-              <a:defRPr sz="2800">
-                <a:solidFill>
-                  <a:schemeClr val="tx1"/>
-                </a:solidFill>
-                <a:latin typeface="Calibri" panose="020F0502020204030204" pitchFamily="34" charset="0"/>
-                <a:ea typeface="ＭＳ Ｐゴシック" panose="020B0600070205080204" pitchFamily="34" charset="-128"/>
-              </a:defRPr>
-            </a:lvl2pPr>
-            <a:lvl3pPr marL="1143000" indent="-228600">
-              <a:spcBef>
-                <a:spcPct val="20000"/>
-              </a:spcBef>
-              <a:buFont typeface="Arial" panose="020B0604020202020204" pitchFamily="34" charset="0"/>
-              <a:buChar char="•"/>
-              <a:defRPr sz="2400">
-                <a:solidFill>
-                  <a:schemeClr val="tx1"/>
-                </a:solidFill>
-                <a:latin typeface="Calibri" panose="020F0502020204030204" pitchFamily="34" charset="0"/>
-                <a:ea typeface="ＭＳ Ｐゴシック" panose="020B0600070205080204" pitchFamily="34" charset="-128"/>
-              </a:defRPr>
-            </a:lvl3pPr>
-            <a:lvl4pPr marL="1600200" indent="-228600">
-              <a:spcBef>
-                <a:spcPct val="20000"/>
-              </a:spcBef>
-              <a:buFont typeface="Arial" panose="020B0604020202020204" pitchFamily="34" charset="0"/>
-              <a:buChar char="–"/>
-              <a:defRPr sz="2000">
-                <a:solidFill>
-                  <a:schemeClr val="tx1"/>
-                </a:solidFill>
-                <a:latin typeface="Calibri" panose="020F0502020204030204" pitchFamily="34" charset="0"/>
-                <a:ea typeface="ＭＳ Ｐゴシック" panose="020B0600070205080204" pitchFamily="34" charset="-128"/>
-              </a:defRPr>
-            </a:lvl4pPr>
-            <a:lvl5pPr marL="2057400" indent="-228600">
-              <a:spcBef>
-                <a:spcPct val="20000"/>
-              </a:spcBef>
-              <a:buFont typeface="Arial" panose="020B0604020202020204" pitchFamily="34" charset="0"/>
-              <a:buChar char="»"/>
-              <a:defRPr sz="2000">
-                <a:solidFill>
-                  <a:schemeClr val="tx1"/>
-                </a:solidFill>
-                <a:latin typeface="Calibri" panose="020F0502020204030204" pitchFamily="34" charset="0"/>
-                <a:ea typeface="ＭＳ Ｐゴシック" panose="020B0600070205080204" pitchFamily="34" charset="-128"/>
-              </a:defRPr>
-            </a:lvl5pPr>
-            <a:lvl6pPr marL="2514600" indent="-228600" eaLnBrk="0" fontAlgn="base" hangingPunct="0">
-              <a:spcBef>
-                <a:spcPct val="20000"/>
-              </a:spcBef>
-              <a:spcAft>
-                <a:spcPct val="0"/>
-              </a:spcAft>
-              <a:buFont typeface="Arial" panose="020B0604020202020204" pitchFamily="34" charset="0"/>
-              <a:buChar char="»"/>
-              <a:defRPr sz="2000">
-                <a:solidFill>
-                  <a:schemeClr val="tx1"/>
-                </a:solidFill>
-                <a:latin typeface="Calibri" panose="020F0502020204030204" pitchFamily="34" charset="0"/>
-                <a:ea typeface="ＭＳ Ｐゴシック" panose="020B0600070205080204" pitchFamily="34" charset="-128"/>
-              </a:defRPr>
-            </a:lvl6pPr>
-            <a:lvl7pPr marL="2971800" indent="-228600" eaLnBrk="0" fontAlgn="base" hangingPunct="0">
-              <a:spcBef>
-                <a:spcPct val="20000"/>
-              </a:spcBef>
-              <a:spcAft>
-                <a:spcPct val="0"/>
-              </a:spcAft>
-              <a:buFont typeface="Arial" panose="020B0604020202020204" pitchFamily="34" charset="0"/>
-              <a:buChar char="»"/>
-              <a:defRPr sz="2000">
-                <a:solidFill>
-                  <a:schemeClr val="tx1"/>
-                </a:solidFill>
-                <a:latin typeface="Calibri" panose="020F0502020204030204" pitchFamily="34" charset="0"/>
-                <a:ea typeface="ＭＳ Ｐゴシック" panose="020B0600070205080204" pitchFamily="34" charset="-128"/>
-              </a:defRPr>
-            </a:lvl7pPr>
-            <a:lvl8pPr marL="3429000" indent="-228600" eaLnBrk="0" fontAlgn="base" hangingPunct="0">
-              <a:spcBef>
-                <a:spcPct val="20000"/>
-              </a:spcBef>
-              <a:spcAft>
-                <a:spcPct val="0"/>
-              </a:spcAft>
-              <a:buFont typeface="Arial" panose="020B0604020202020204" pitchFamily="34" charset="0"/>
-              <a:buChar char="»"/>
-              <a:defRPr sz="2000">
-                <a:solidFill>
-                  <a:schemeClr val="tx1"/>
-                </a:solidFill>
-                <a:latin typeface="Calibri" panose="020F0502020204030204" pitchFamily="34" charset="0"/>
-                <a:ea typeface="ＭＳ Ｐゴシック" panose="020B0600070205080204" pitchFamily="34" charset="-128"/>
-              </a:defRPr>
-            </a:lvl8pPr>
-            <a:lvl9pPr marL="3886200" indent="-228600" eaLnBrk="0" fontAlgn="base" hangingPunct="0">
-              <a:spcBef>
-                <a:spcPct val="20000"/>
-              </a:spcBef>
-              <a:spcAft>
-                <a:spcPct val="0"/>
-              </a:spcAft>
-              <a:buFont typeface="Arial" panose="020B0604020202020204" pitchFamily="34" charset="0"/>
-              <a:buChar char="»"/>
-              <a:defRPr sz="2000">
-                <a:solidFill>
-                  <a:schemeClr val="tx1"/>
-                </a:solidFill>
-                <a:latin typeface="Calibri" panose="020F0502020204030204" pitchFamily="34" charset="0"/>
-                <a:ea typeface="ＭＳ Ｐゴシック" panose="020B0600070205080204" pitchFamily="34" charset="-128"/>
-              </a:defRPr>
-            </a:lvl9pPr>
-          </a:lstStyle>
-          <a:p>
-            <a:pPr>
-              <a:spcBef>
-                <a:spcPct val="0"/>
-              </a:spcBef>
-              <a:buFontTx/>
-              <a:buNone/>
-            </a:pPr>
-            <a:fld id="{6552A993-E2D5-46B3-B0FF-2E5E9100F699}" type="slidenum">
-              <a:rPr lang="en-US" altLang="en-US" sz="1400" smtClean="0">
-                <a:latin typeface="Arial" panose="020B0604020202020204" pitchFamily="34" charset="0"/>
-              </a:rPr>
-              <a:pPr>
-                <a:spcBef>
-                  <a:spcPct val="0"/>
-                </a:spcBef>
-                <a:buFontTx/>
-                <a:buNone/>
-              </a:pPr>
-              <a:t>1</a:t>
-            </a:fld>
-            <a:endParaRPr lang="en-US" altLang="en-US" sz="1400">
-              <a:latin typeface="Arial" panose="020B0604020202020204" pitchFamily="34" charset="0"/>
-            </a:endParaRPr>
+          <a:bodyPr rtlCol="0" anchor="ctr"/>
+          <a:lstStyle/>
+          <a:p>
+            <a:pPr algn="ctr"/>
+            <a:endParaRPr lang="en-US"/>
           </a:p>
         </p:txBody>
       </p:sp>
@@ -5980,23 +9113,19 @@
               </a:ext>
             </a:extLst>
           </a:blip>
-          <a:srcRect/>
           <a:stretch>
             <a:fillRect/>
           </a:stretch>
         </p:blipFill>
         <p:spPr bwMode="auto">
           <a:xfrm>
-            <a:off x="4876800" y="457200"/>
-            <a:ext cx="1587500" cy="1587500"/>
+            <a:off x="7461874" y="2108877"/>
+            <a:ext cx="2654533" cy="2654533"/>
           </a:xfrm>
           <a:prstGeom prst="rect">
             <a:avLst/>
           </a:prstGeom>
           <a:noFill/>
-          <a:ln>
-            <a:noFill/>
-          </a:ln>
           <a:extLst>
             <a:ext uri="{909E8E84-426E-40DD-AFC4-6F175D3DCCD1}">
               <a14:hiddenFill xmlns:a14="http://schemas.microsoft.com/office/drawing/2010/main">
@@ -6018,6 +9147,230 @@
           </a:extLst>
         </p:spPr>
       </p:pic>
+      <p:sp>
+        <p:nvSpPr>
+          <p:cNvPr id="4100" name="Slide Number Placeholder 5">
+            <a:extLst>
+              <a:ext uri="{FF2B5EF4-FFF2-40B4-BE49-F238E27FC236}">
+                <a16:creationId xmlns:a16="http://schemas.microsoft.com/office/drawing/2014/main" id="{9614E955-ADD5-2D71-01D8-DAFC1A51BD46}"/>
+              </a:ext>
+            </a:extLst>
+          </p:cNvPr>
+          <p:cNvSpPr>
+            <a:spLocks noGrp="1"/>
+          </p:cNvSpPr>
+          <p:nvPr>
+            <p:ph type="sldNum" sz="quarter" idx="12"/>
+          </p:nvPr>
+        </p:nvSpPr>
+        <p:spPr bwMode="auto">
+          <a:xfrm>
+            <a:off x="11704320" y="6451600"/>
+            <a:ext cx="444500" cy="365125"/>
+          </a:xfrm>
+          <a:extLst>
+            <a:ext uri="{909E8E84-426E-40DD-AFC4-6F175D3DCCD1}">
+              <a14:hiddenFill xmlns:a14="http://schemas.microsoft.com/office/drawing/2010/main">
+                <a:solidFill>
+                  <a:srgbClr val="FFFFFF"/>
+                </a:solidFill>
+              </a14:hiddenFill>
+            </a:ext>
+            <a:ext uri="{91240B29-F687-4F45-9708-019B960494DF}">
+              <a14:hiddenLine xmlns:a14="http://schemas.microsoft.com/office/drawing/2010/main" w="9525">
+                <a:solidFill>
+                  <a:srgbClr val="000000"/>
+                </a:solidFill>
+                <a:round/>
+                <a:headEnd/>
+                <a:tailEnd/>
+              </a14:hiddenLine>
+            </a:ext>
+          </a:extLst>
+        </p:spPr>
+        <p:txBody>
+          <a:bodyPr>
+            <a:normAutofit/>
+          </a:bodyPr>
+          <a:lstStyle>
+            <a:lvl1pPr>
+              <a:spcBef>
+                <a:spcPct val="20000"/>
+              </a:spcBef>
+              <a:buFont typeface="Arial" panose="020B0604020202020204" pitchFamily="34" charset="0"/>
+              <a:buChar char="•"/>
+              <a:defRPr sz="3200">
+                <a:solidFill>
+                  <a:schemeClr val="tx1"/>
+                </a:solidFill>
+                <a:latin typeface="Calibri" panose="020F0502020204030204" pitchFamily="34" charset="0"/>
+                <a:ea typeface="ＭＳ Ｐゴシック" panose="020B0600070205080204" pitchFamily="34" charset="-128"/>
+              </a:defRPr>
+            </a:lvl1pPr>
+            <a:lvl2pPr marL="742950" indent="-285750">
+              <a:spcBef>
+                <a:spcPct val="20000"/>
+              </a:spcBef>
+              <a:buFont typeface="Arial" panose="020B0604020202020204" pitchFamily="34" charset="0"/>
+              <a:buChar char="–"/>
+              <a:defRPr sz="2800">
+                <a:solidFill>
+                  <a:schemeClr val="tx1"/>
+                </a:solidFill>
+                <a:latin typeface="Calibri" panose="020F0502020204030204" pitchFamily="34" charset="0"/>
+                <a:ea typeface="ＭＳ Ｐゴシック" panose="020B0600070205080204" pitchFamily="34" charset="-128"/>
+              </a:defRPr>
+            </a:lvl2pPr>
+            <a:lvl3pPr marL="1143000" indent="-228600">
+              <a:spcBef>
+                <a:spcPct val="20000"/>
+              </a:spcBef>
+              <a:buFont typeface="Arial" panose="020B0604020202020204" pitchFamily="34" charset="0"/>
+              <a:buChar char="•"/>
+              <a:defRPr sz="2400">
+                <a:solidFill>
+                  <a:schemeClr val="tx1"/>
+                </a:solidFill>
+                <a:latin typeface="Calibri" panose="020F0502020204030204" pitchFamily="34" charset="0"/>
+                <a:ea typeface="ＭＳ Ｐゴシック" panose="020B0600070205080204" pitchFamily="34" charset="-128"/>
+              </a:defRPr>
+            </a:lvl3pPr>
+            <a:lvl4pPr marL="1600200" indent="-228600">
+              <a:spcBef>
+                <a:spcPct val="20000"/>
+              </a:spcBef>
+              <a:buFont typeface="Arial" panose="020B0604020202020204" pitchFamily="34" charset="0"/>
+              <a:buChar char="–"/>
+              <a:defRPr sz="2000">
+                <a:solidFill>
+                  <a:schemeClr val="tx1"/>
+                </a:solidFill>
+                <a:latin typeface="Calibri" panose="020F0502020204030204" pitchFamily="34" charset="0"/>
+                <a:ea typeface="ＭＳ Ｐゴシック" panose="020B0600070205080204" pitchFamily="34" charset="-128"/>
+              </a:defRPr>
+            </a:lvl4pPr>
+            <a:lvl5pPr marL="2057400" indent="-228600">
+              <a:spcBef>
+                <a:spcPct val="20000"/>
+              </a:spcBef>
+              <a:buFont typeface="Arial" panose="020B0604020202020204" pitchFamily="34" charset="0"/>
+              <a:buChar char="»"/>
+              <a:defRPr sz="2000">
+                <a:solidFill>
+                  <a:schemeClr val="tx1"/>
+                </a:solidFill>
+                <a:latin typeface="Calibri" panose="020F0502020204030204" pitchFamily="34" charset="0"/>
+                <a:ea typeface="ＭＳ Ｐゴシック" panose="020B0600070205080204" pitchFamily="34" charset="-128"/>
+              </a:defRPr>
+            </a:lvl5pPr>
+            <a:lvl6pPr marL="2514600" indent="-228600" eaLnBrk="0" fontAlgn="base" hangingPunct="0">
+              <a:spcBef>
+                <a:spcPct val="20000"/>
+              </a:spcBef>
+              <a:spcAft>
+                <a:spcPct val="0"/>
+              </a:spcAft>
+              <a:buFont typeface="Arial" panose="020B0604020202020204" pitchFamily="34" charset="0"/>
+              <a:buChar char="»"/>
+              <a:defRPr sz="2000">
+                <a:solidFill>
+                  <a:schemeClr val="tx1"/>
+                </a:solidFill>
+                <a:latin typeface="Calibri" panose="020F0502020204030204" pitchFamily="34" charset="0"/>
+                <a:ea typeface="ＭＳ Ｐゴシック" panose="020B0600070205080204" pitchFamily="34" charset="-128"/>
+              </a:defRPr>
+            </a:lvl6pPr>
+            <a:lvl7pPr marL="2971800" indent="-228600" eaLnBrk="0" fontAlgn="base" hangingPunct="0">
+              <a:spcBef>
+                <a:spcPct val="20000"/>
+              </a:spcBef>
+              <a:spcAft>
+                <a:spcPct val="0"/>
+              </a:spcAft>
+              <a:buFont typeface="Arial" panose="020B0604020202020204" pitchFamily="34" charset="0"/>
+              <a:buChar char="»"/>
+              <a:defRPr sz="2000">
+                <a:solidFill>
+                  <a:schemeClr val="tx1"/>
+                </a:solidFill>
+                <a:latin typeface="Calibri" panose="020F0502020204030204" pitchFamily="34" charset="0"/>
+                <a:ea typeface="ＭＳ Ｐゴシック" panose="020B0600070205080204" pitchFamily="34" charset="-128"/>
+              </a:defRPr>
+            </a:lvl7pPr>
+            <a:lvl8pPr marL="3429000" indent="-228600" eaLnBrk="0" fontAlgn="base" hangingPunct="0">
+              <a:spcBef>
+                <a:spcPct val="20000"/>
+              </a:spcBef>
+              <a:spcAft>
+                <a:spcPct val="0"/>
+              </a:spcAft>
+              <a:buFont typeface="Arial" panose="020B0604020202020204" pitchFamily="34" charset="0"/>
+              <a:buChar char="»"/>
+              <a:defRPr sz="2000">
+                <a:solidFill>
+                  <a:schemeClr val="tx1"/>
+                </a:solidFill>
+                <a:latin typeface="Calibri" panose="020F0502020204030204" pitchFamily="34" charset="0"/>
+                <a:ea typeface="ＭＳ Ｐゴシック" panose="020B0600070205080204" pitchFamily="34" charset="-128"/>
+              </a:defRPr>
+            </a:lvl8pPr>
+            <a:lvl9pPr marL="3886200" indent="-228600" eaLnBrk="0" fontAlgn="base" hangingPunct="0">
+              <a:spcBef>
+                <a:spcPct val="20000"/>
+              </a:spcBef>
+              <a:spcAft>
+                <a:spcPct val="0"/>
+              </a:spcAft>
+              <a:buFont typeface="Arial" panose="020B0604020202020204" pitchFamily="34" charset="0"/>
+              <a:buChar char="»"/>
+              <a:defRPr sz="2000">
+                <a:solidFill>
+                  <a:schemeClr val="tx1"/>
+                </a:solidFill>
+                <a:latin typeface="Calibri" panose="020F0502020204030204" pitchFamily="34" charset="0"/>
+                <a:ea typeface="ＭＳ Ｐゴシック" panose="020B0600070205080204" pitchFamily="34" charset="-128"/>
+              </a:defRPr>
+            </a:lvl9pPr>
+          </a:lstStyle>
+          <a:p>
+            <a:pPr>
+              <a:spcBef>
+                <a:spcPct val="0"/>
+              </a:spcBef>
+              <a:spcAft>
+                <a:spcPts val="600"/>
+              </a:spcAft>
+              <a:buFontTx/>
+              <a:buNone/>
+            </a:pPr>
+            <a:fld id="{6552A993-E2D5-46B3-B0FF-2E5E9100F699}" type="slidenum">
+              <a:rPr lang="en-US" altLang="en-US" sz="1100">
+                <a:solidFill>
+                  <a:srgbClr val="FFFFFF"/>
+                </a:solidFill>
+                <a:latin typeface="Arial" panose="020B0604020202020204" pitchFamily="34" charset="0"/>
+              </a:rPr>
+              <a:pPr>
+                <a:spcBef>
+                  <a:spcPct val="0"/>
+                </a:spcBef>
+                <a:spcAft>
+                  <a:spcPts val="600"/>
+                </a:spcAft>
+                <a:buFontTx/>
+                <a:buNone/>
+              </a:pPr>
+              <a:t>1</a:t>
+            </a:fld>
+            <a:endParaRPr lang="en-US" altLang="en-US" sz="1100">
+              <a:solidFill>
+                <a:srgbClr val="FFFFFF"/>
+              </a:solidFill>
+              <a:latin typeface="Arial" panose="020B0604020202020204" pitchFamily="34" charset="0"/>
+            </a:endParaRPr>
+          </a:p>
+        </p:txBody>
+      </p:sp>
     </p:spTree>
   </p:cSld>
   <p:clrMapOvr>
@@ -6931,6 +10284,14 @@
 <file path=ppt/slides/slide11.xml><?xml version="1.0" encoding="utf-8"?>
 <p:sld xmlns:a="http://schemas.openxmlformats.org/drawingml/2006/main" xmlns:r="http://schemas.openxmlformats.org/officeDocument/2006/relationships" xmlns:p="http://schemas.openxmlformats.org/presentationml/2006/main">
   <p:cSld>
+    <p:bg>
+      <p:bgPr>
+        <a:solidFill>
+          <a:schemeClr val="bg1"/>
+        </a:solidFill>
+        <a:effectLst/>
+      </p:bgPr>
+    </p:bg>
     <p:spTree>
       <p:nvGrpSpPr>
         <p:cNvPr id="1" name=""/>
@@ -6945,6 +10306,628 @@
           <a:chExt cx="0" cy="0"/>
         </a:xfrm>
       </p:grpSpPr>
+      <p:sp useBgFill="1">
+        <p:nvSpPr>
+          <p:cNvPr id="16391" name="Rectangle 16390">
+            <a:extLst>
+              <a:ext uri="{FF2B5EF4-FFF2-40B4-BE49-F238E27FC236}">
+                <a16:creationId xmlns:a16="http://schemas.microsoft.com/office/drawing/2014/main" id="{09588DA8-065E-4F6F-8EFD-43104AB2E0CF}"/>
+              </a:ext>
+              <a:ext uri="{C183D7F6-B498-43B3-948B-1728B52AA6E4}">
+                <adec:decorative xmlns:adec="http://schemas.microsoft.com/office/drawing/2017/decorative" val="1"/>
+              </a:ext>
+            </a:extLst>
+          </p:cNvPr>
+          <p:cNvSpPr>
+            <a:spLocks noGrp="1" noRot="1" noChangeAspect="1" noMove="1" noResize="1" noEditPoints="1" noAdjustHandles="1" noChangeArrowheads="1" noChangeShapeType="1" noTextEdit="1"/>
+          </p:cNvSpPr>
+          <p:nvPr>
+            <p:extLst>
+              <p:ext uri="{386F3935-93C4-4BCD-93E2-E3B085C9AB24}">
+                <p16:designElem xmlns:p16="http://schemas.microsoft.com/office/powerpoint/2015/main" val="1"/>
+              </p:ext>
+            </p:extLst>
+          </p:nvPr>
+        </p:nvSpPr>
+        <p:spPr>
+          <a:xfrm>
+            <a:off x="0" y="0"/>
+            <a:ext cx="12192000" cy="6858000"/>
+          </a:xfrm>
+          <a:prstGeom prst="rect">
+            <a:avLst/>
+          </a:prstGeom>
+          <a:ln w="12700" cap="flat" cmpd="sng" algn="ctr">
+            <a:noFill/>
+            <a:prstDash val="solid"/>
+            <a:miter lim="800000"/>
+          </a:ln>
+          <a:effectLst/>
+          <a:extLst>
+            <a:ext uri="{91240B29-F687-4F45-9708-019B960494DF}">
+              <a14:hiddenLine xmlns:a14="http://schemas.microsoft.com/office/drawing/2010/main" w="12700" cap="flat" cmpd="sng" algn="ctr">
+                <a:solidFill>
+                  <a:schemeClr val="accent1">
+                    <a:shade val="50000"/>
+                  </a:schemeClr>
+                </a:solidFill>
+                <a:prstDash val="solid"/>
+                <a:miter lim="800000"/>
+              </a14:hiddenLine>
+            </a:ext>
+          </a:extLst>
+        </p:spPr>
+        <p:style>
+          <a:lnRef idx="2">
+            <a:schemeClr val="accent1">
+              <a:shade val="50000"/>
+            </a:schemeClr>
+          </a:lnRef>
+          <a:fillRef idx="1">
+            <a:schemeClr val="accent1"/>
+          </a:fillRef>
+          <a:effectRef idx="0">
+            <a:schemeClr val="accent1"/>
+          </a:effectRef>
+          <a:fontRef idx="minor">
+            <a:schemeClr val="lt1"/>
+          </a:fontRef>
+        </p:style>
+        <p:txBody>
+          <a:bodyPr rtlCol="0" anchor="ctr"/>
+          <a:lstStyle/>
+          <a:p>
+            <a:pPr algn="ctr"/>
+            <a:endParaRPr lang="en-US"/>
+          </a:p>
+        </p:txBody>
+      </p:sp>
+      <p:sp useBgFill="1">
+        <p:nvSpPr>
+          <p:cNvPr id="16393" name="Rectangle 16392">
+            <a:extLst>
+              <a:ext uri="{FF2B5EF4-FFF2-40B4-BE49-F238E27FC236}">
+                <a16:creationId xmlns:a16="http://schemas.microsoft.com/office/drawing/2014/main" id="{C4285719-470E-454C-AF62-8323075F1F5B}"/>
+              </a:ext>
+              <a:ext uri="{C183D7F6-B498-43B3-948B-1728B52AA6E4}">
+                <adec:decorative xmlns:adec="http://schemas.microsoft.com/office/drawing/2017/decorative" val="1"/>
+              </a:ext>
+            </a:extLst>
+          </p:cNvPr>
+          <p:cNvSpPr>
+            <a:spLocks noGrp="1" noRot="1" noChangeAspect="1" noMove="1" noResize="1" noEditPoints="1" noAdjustHandles="1" noChangeArrowheads="1" noChangeShapeType="1" noTextEdit="1"/>
+          </p:cNvSpPr>
+          <p:nvPr>
+            <p:extLst>
+              <p:ext uri="{386F3935-93C4-4BCD-93E2-E3B085C9AB24}">
+                <p16:designElem xmlns:p16="http://schemas.microsoft.com/office/powerpoint/2015/main" val="1"/>
+              </p:ext>
+            </p:extLst>
+          </p:nvPr>
+        </p:nvSpPr>
+        <p:spPr>
+          <a:xfrm>
+            <a:off x="0" y="0"/>
+            <a:ext cx="12188952" cy="6858000"/>
+          </a:xfrm>
+          <a:prstGeom prst="rect">
+            <a:avLst/>
+          </a:prstGeom>
+          <a:ln w="12700" cap="flat" cmpd="sng" algn="ctr">
+            <a:noFill/>
+            <a:prstDash val="solid"/>
+            <a:miter lim="800000"/>
+          </a:ln>
+          <a:effectLst/>
+          <a:extLst>
+            <a:ext uri="{91240B29-F687-4F45-9708-019B960494DF}">
+              <a14:hiddenLine xmlns:a14="http://schemas.microsoft.com/office/drawing/2010/main" w="12700" cap="flat" cmpd="sng" algn="ctr">
+                <a:solidFill>
+                  <a:schemeClr val="accent1">
+                    <a:shade val="50000"/>
+                  </a:schemeClr>
+                </a:solidFill>
+                <a:prstDash val="solid"/>
+                <a:miter lim="800000"/>
+              </a14:hiddenLine>
+            </a:ext>
+          </a:extLst>
+        </p:spPr>
+        <p:style>
+          <a:lnRef idx="2">
+            <a:schemeClr val="accent1">
+              <a:shade val="50000"/>
+            </a:schemeClr>
+          </a:lnRef>
+          <a:fillRef idx="1">
+            <a:schemeClr val="accent1"/>
+          </a:fillRef>
+          <a:effectRef idx="0">
+            <a:schemeClr val="accent1"/>
+          </a:effectRef>
+          <a:fontRef idx="minor">
+            <a:schemeClr val="lt1"/>
+          </a:fontRef>
+        </p:style>
+        <p:txBody>
+          <a:bodyPr rtlCol="0" anchor="ctr"/>
+          <a:lstStyle/>
+          <a:p>
+            <a:pPr algn="ctr"/>
+            <a:endParaRPr lang="en-US"/>
+          </a:p>
+        </p:txBody>
+      </p:sp>
+      <p:sp>
+        <p:nvSpPr>
+          <p:cNvPr id="16395" name="Rectangle 16394">
+            <a:extLst>
+              <a:ext uri="{FF2B5EF4-FFF2-40B4-BE49-F238E27FC236}">
+                <a16:creationId xmlns:a16="http://schemas.microsoft.com/office/drawing/2014/main" id="{CD9FE4EF-C4D8-49A0-B2FF-81D8DB7D8A24}"/>
+              </a:ext>
+              <a:ext uri="{C183D7F6-B498-43B3-948B-1728B52AA6E4}">
+                <adec:decorative xmlns:adec="http://schemas.microsoft.com/office/drawing/2017/decorative" val="1"/>
+              </a:ext>
+            </a:extLst>
+          </p:cNvPr>
+          <p:cNvSpPr>
+            <a:spLocks noGrp="1" noRot="1" noChangeAspect="1" noMove="1" noResize="1" noEditPoints="1" noAdjustHandles="1" noChangeArrowheads="1" noChangeShapeType="1" noTextEdit="1"/>
+          </p:cNvSpPr>
+          <p:nvPr>
+            <p:extLst>
+              <p:ext uri="{386F3935-93C4-4BCD-93E2-E3B085C9AB24}">
+                <p16:designElem xmlns:p16="http://schemas.microsoft.com/office/powerpoint/2015/main" val="1"/>
+              </p:ext>
+            </p:extLst>
+          </p:nvPr>
+        </p:nvSpPr>
+        <p:spPr>
+          <a:xfrm rot="5400000" flipH="1">
+            <a:off x="-1410084" y="1410082"/>
+            <a:ext cx="6858000" cy="4037836"/>
+          </a:xfrm>
+          <a:prstGeom prst="rect">
+            <a:avLst/>
+          </a:prstGeom>
+          <a:gradFill>
+            <a:gsLst>
+              <a:gs pos="8000">
+                <a:srgbClr val="000000"/>
+              </a:gs>
+              <a:gs pos="100000">
+                <a:schemeClr val="accent1">
+                  <a:lumMod val="75000"/>
+                </a:schemeClr>
+              </a:gs>
+            </a:gsLst>
+            <a:lin ang="3000000" scaled="0"/>
+          </a:gradFill>
+          <a:ln>
+            <a:noFill/>
+          </a:ln>
+        </p:spPr>
+        <p:style>
+          <a:lnRef idx="2">
+            <a:schemeClr val="accent1">
+              <a:shade val="50000"/>
+            </a:schemeClr>
+          </a:lnRef>
+          <a:fillRef idx="1">
+            <a:schemeClr val="accent1"/>
+          </a:fillRef>
+          <a:effectRef idx="0">
+            <a:schemeClr val="accent1"/>
+          </a:effectRef>
+          <a:fontRef idx="minor">
+            <a:schemeClr val="lt1"/>
+          </a:fontRef>
+        </p:style>
+        <p:txBody>
+          <a:bodyPr rtlCol="0" anchor="ctr"/>
+          <a:lstStyle/>
+          <a:p>
+            <a:pPr algn="ctr"/>
+            <a:endParaRPr lang="en-US"/>
+          </a:p>
+        </p:txBody>
+      </p:sp>
+      <p:sp>
+        <p:nvSpPr>
+          <p:cNvPr id="16397" name="Rectangle 16396">
+            <a:extLst>
+              <a:ext uri="{FF2B5EF4-FFF2-40B4-BE49-F238E27FC236}">
+                <a16:creationId xmlns:a16="http://schemas.microsoft.com/office/drawing/2014/main" id="{4300840D-0A0B-4512-BACA-B439D5B9C57C}"/>
+              </a:ext>
+              <a:ext uri="{C183D7F6-B498-43B3-948B-1728B52AA6E4}">
+                <adec:decorative xmlns:adec="http://schemas.microsoft.com/office/drawing/2017/decorative" val="1"/>
+              </a:ext>
+            </a:extLst>
+          </p:cNvPr>
+          <p:cNvSpPr>
+            <a:spLocks noGrp="1" noRot="1" noChangeAspect="1" noMove="1" noResize="1" noEditPoints="1" noAdjustHandles="1" noChangeArrowheads="1" noChangeShapeType="1" noTextEdit="1"/>
+          </p:cNvSpPr>
+          <p:nvPr>
+            <p:extLst>
+              <p:ext uri="{386F3935-93C4-4BCD-93E2-E3B085C9AB24}">
+                <p16:designElem xmlns:p16="http://schemas.microsoft.com/office/powerpoint/2015/main" val="1"/>
+              </p:ext>
+            </p:extLst>
+          </p:nvPr>
+        </p:nvSpPr>
+        <p:spPr>
+          <a:xfrm rot="5400000" flipH="1">
+            <a:off x="-1410085" y="1420219"/>
+            <a:ext cx="6857999" cy="4037839"/>
+          </a:xfrm>
+          <a:prstGeom prst="rect">
+            <a:avLst/>
+          </a:prstGeom>
+          <a:gradFill>
+            <a:gsLst>
+              <a:gs pos="0">
+                <a:srgbClr val="000000">
+                  <a:alpha val="0"/>
+                </a:srgbClr>
+              </a:gs>
+              <a:gs pos="99000">
+                <a:schemeClr val="accent1">
+                  <a:alpha val="46000"/>
+                </a:schemeClr>
+              </a:gs>
+            </a:gsLst>
+            <a:lin ang="1800000" scaled="0"/>
+          </a:gradFill>
+          <a:ln>
+            <a:noFill/>
+          </a:ln>
+        </p:spPr>
+        <p:style>
+          <a:lnRef idx="2">
+            <a:schemeClr val="accent1">
+              <a:shade val="50000"/>
+            </a:schemeClr>
+          </a:lnRef>
+          <a:fillRef idx="1">
+            <a:schemeClr val="accent1"/>
+          </a:fillRef>
+          <a:effectRef idx="0">
+            <a:schemeClr val="accent1"/>
+          </a:effectRef>
+          <a:fontRef idx="minor">
+            <a:schemeClr val="lt1"/>
+          </a:fontRef>
+        </p:style>
+        <p:txBody>
+          <a:bodyPr rtlCol="0" anchor="ctr"/>
+          <a:lstStyle/>
+          <a:p>
+            <a:pPr algn="ctr"/>
+            <a:endParaRPr lang="en-US"/>
+          </a:p>
+        </p:txBody>
+      </p:sp>
+      <p:sp>
+        <p:nvSpPr>
+          <p:cNvPr id="16399" name="Rectangle 16398">
+            <a:extLst>
+              <a:ext uri="{FF2B5EF4-FFF2-40B4-BE49-F238E27FC236}">
+                <a16:creationId xmlns:a16="http://schemas.microsoft.com/office/drawing/2014/main" id="{D2B78728-A580-49A7-84F9-6EF6F583ADE0}"/>
+              </a:ext>
+              <a:ext uri="{C183D7F6-B498-43B3-948B-1728B52AA6E4}">
+                <adec:decorative xmlns:adec="http://schemas.microsoft.com/office/drawing/2017/decorative" val="1"/>
+              </a:ext>
+            </a:extLst>
+          </p:cNvPr>
+          <p:cNvSpPr>
+            <a:spLocks noGrp="1" noRot="1" noChangeAspect="1" noMove="1" noResize="1" noEditPoints="1" noAdjustHandles="1" noChangeArrowheads="1" noChangeShapeType="1" noTextEdit="1"/>
+          </p:cNvSpPr>
+          <p:nvPr>
+            <p:extLst>
+              <p:ext uri="{386F3935-93C4-4BCD-93E2-E3B085C9AB24}">
+                <p16:designElem xmlns:p16="http://schemas.microsoft.com/office/powerpoint/2015/main" val="1"/>
+              </p:ext>
+            </p:extLst>
+          </p:nvPr>
+        </p:nvSpPr>
+        <p:spPr>
+          <a:xfrm rot="5400000" flipH="1">
+            <a:off x="767923" y="3588085"/>
+            <a:ext cx="2501979" cy="4037841"/>
+          </a:xfrm>
+          <a:prstGeom prst="rect">
+            <a:avLst/>
+          </a:prstGeom>
+          <a:gradFill>
+            <a:gsLst>
+              <a:gs pos="2000">
+                <a:schemeClr val="accent1">
+                  <a:alpha val="29000"/>
+                </a:schemeClr>
+              </a:gs>
+              <a:gs pos="100000">
+                <a:srgbClr val="000000">
+                  <a:alpha val="30000"/>
+                </a:srgbClr>
+              </a:gs>
+            </a:gsLst>
+            <a:lin ang="7800000" scaled="0"/>
+          </a:gradFill>
+          <a:ln>
+            <a:noFill/>
+          </a:ln>
+        </p:spPr>
+        <p:style>
+          <a:lnRef idx="2">
+            <a:schemeClr val="accent1">
+              <a:shade val="50000"/>
+            </a:schemeClr>
+          </a:lnRef>
+          <a:fillRef idx="1">
+            <a:schemeClr val="accent1"/>
+          </a:fillRef>
+          <a:effectRef idx="0">
+            <a:schemeClr val="accent1"/>
+          </a:effectRef>
+          <a:fontRef idx="minor">
+            <a:schemeClr val="lt1"/>
+          </a:fontRef>
+        </p:style>
+        <p:txBody>
+          <a:bodyPr rtlCol="0" anchor="ctr"/>
+          <a:lstStyle/>
+          <a:p>
+            <a:pPr algn="ctr"/>
+            <a:endParaRPr lang="en-US" dirty="0"/>
+          </a:p>
+        </p:txBody>
+      </p:sp>
+      <p:sp>
+        <p:nvSpPr>
+          <p:cNvPr id="16401" name="Freeform: Shape 16400">
+            <a:extLst>
+              <a:ext uri="{FF2B5EF4-FFF2-40B4-BE49-F238E27FC236}">
+                <a16:creationId xmlns:a16="http://schemas.microsoft.com/office/drawing/2014/main" id="{38FAA1A1-D861-433F-88FA-1E9D6FD31D11}"/>
+              </a:ext>
+              <a:ext uri="{C183D7F6-B498-43B3-948B-1728B52AA6E4}">
+                <adec:decorative xmlns:adec="http://schemas.microsoft.com/office/drawing/2017/decorative" val="1"/>
+              </a:ext>
+            </a:extLst>
+          </p:cNvPr>
+          <p:cNvSpPr>
+            <a:spLocks noGrp="1" noRot="1" noChangeAspect="1" noMove="1" noResize="1" noEditPoints="1" noAdjustHandles="1" noChangeArrowheads="1" noChangeShapeType="1" noTextEdit="1"/>
+          </p:cNvSpPr>
+          <p:nvPr>
+            <p:extLst>
+              <p:ext uri="{386F3935-93C4-4BCD-93E2-E3B085C9AB24}">
+                <p16:designElem xmlns:p16="http://schemas.microsoft.com/office/powerpoint/2015/main" val="1"/>
+              </p:ext>
+            </p:extLst>
+          </p:nvPr>
+        </p:nvSpPr>
+        <p:spPr>
+          <a:xfrm rot="20635413">
+            <a:off x="-501737" y="969718"/>
+            <a:ext cx="3900357" cy="4178958"/>
+          </a:xfrm>
+          <a:custGeom>
+            <a:avLst/>
+            <a:gdLst>
+              <a:gd name="connsiteX0" fmla="*/ 2432225 w 3900357"/>
+              <a:gd name="connsiteY0" fmla="*/ 93939 h 4178958"/>
+              <a:gd name="connsiteX1" fmla="*/ 3900357 w 3900357"/>
+              <a:gd name="connsiteY1" fmla="*/ 2089479 h 4178958"/>
+              <a:gd name="connsiteX2" fmla="*/ 1810878 w 3900357"/>
+              <a:gd name="connsiteY2" fmla="*/ 4178958 h 4178958"/>
+              <a:gd name="connsiteX3" fmla="*/ 78249 w 3900357"/>
+              <a:gd name="connsiteY3" fmla="*/ 3257727 h 4178958"/>
+              <a:gd name="connsiteX4" fmla="*/ 0 w 3900357"/>
+              <a:gd name="connsiteY4" fmla="*/ 3128923 h 4178958"/>
+              <a:gd name="connsiteX5" fmla="*/ 831324 w 3900357"/>
+              <a:gd name="connsiteY5" fmla="*/ 244281 h 4178958"/>
+              <a:gd name="connsiteX6" fmla="*/ 997559 w 3900357"/>
+              <a:gd name="connsiteY6" fmla="*/ 164202 h 4178958"/>
+              <a:gd name="connsiteX7" fmla="*/ 1810878 w 3900357"/>
+              <a:gd name="connsiteY7" fmla="*/ 0 h 4178958"/>
+              <a:gd name="connsiteX8" fmla="*/ 2432225 w 3900357"/>
+              <a:gd name="connsiteY8" fmla="*/ 93939 h 4178958"/>
+            </a:gdLst>
+            <a:ahLst/>
+            <a:cxnLst>
+              <a:cxn ang="0">
+                <a:pos x="connsiteX0" y="connsiteY0"/>
+              </a:cxn>
+              <a:cxn ang="0">
+                <a:pos x="connsiteX1" y="connsiteY1"/>
+              </a:cxn>
+              <a:cxn ang="0">
+                <a:pos x="connsiteX2" y="connsiteY2"/>
+              </a:cxn>
+              <a:cxn ang="0">
+                <a:pos x="connsiteX3" y="connsiteY3"/>
+              </a:cxn>
+              <a:cxn ang="0">
+                <a:pos x="connsiteX4" y="connsiteY4"/>
+              </a:cxn>
+              <a:cxn ang="0">
+                <a:pos x="connsiteX5" y="connsiteY5"/>
+              </a:cxn>
+              <a:cxn ang="0">
+                <a:pos x="connsiteX6" y="connsiteY6"/>
+              </a:cxn>
+              <a:cxn ang="0">
+                <a:pos x="connsiteX7" y="connsiteY7"/>
+              </a:cxn>
+              <a:cxn ang="0">
+                <a:pos x="connsiteX8" y="connsiteY8"/>
+              </a:cxn>
+            </a:cxnLst>
+            <a:rect l="l" t="t" r="r" b="b"/>
+            <a:pathLst>
+              <a:path w="3900357" h="4178958">
+                <a:moveTo>
+                  <a:pt x="2432225" y="93939"/>
+                </a:moveTo>
+                <a:cubicBezTo>
+                  <a:pt x="3282786" y="358491"/>
+                  <a:pt x="3900357" y="1151865"/>
+                  <a:pt x="3900357" y="2089479"/>
+                </a:cubicBezTo>
+                <a:cubicBezTo>
+                  <a:pt x="3900357" y="3243466"/>
+                  <a:pt x="2964865" y="4178958"/>
+                  <a:pt x="1810878" y="4178958"/>
+                </a:cubicBezTo>
+                <a:cubicBezTo>
+                  <a:pt x="1089636" y="4178958"/>
+                  <a:pt x="453744" y="3813531"/>
+                  <a:pt x="78249" y="3257727"/>
+                </a:cubicBezTo>
+                <a:lnTo>
+                  <a:pt x="0" y="3128923"/>
+                </a:lnTo>
+                <a:lnTo>
+                  <a:pt x="831324" y="244281"/>
+                </a:lnTo>
+                <a:lnTo>
+                  <a:pt x="997559" y="164202"/>
+                </a:lnTo>
+                <a:cubicBezTo>
+                  <a:pt x="1247540" y="58468"/>
+                  <a:pt x="1522381" y="0"/>
+                  <a:pt x="1810878" y="0"/>
+                </a:cubicBezTo>
+                <a:cubicBezTo>
+                  <a:pt x="2027251" y="0"/>
+                  <a:pt x="2235942" y="32888"/>
+                  <a:pt x="2432225" y="93939"/>
+                </a:cubicBezTo>
+                <a:close/>
+              </a:path>
+            </a:pathLst>
+          </a:custGeom>
+          <a:gradFill>
+            <a:gsLst>
+              <a:gs pos="29000">
+                <a:srgbClr val="000000">
+                  <a:alpha val="0"/>
+                </a:srgbClr>
+              </a:gs>
+              <a:gs pos="100000">
+                <a:schemeClr val="accent1">
+                  <a:alpha val="43000"/>
+                </a:schemeClr>
+              </a:gs>
+            </a:gsLst>
+            <a:lin ang="1800000" scaled="0"/>
+          </a:gradFill>
+          <a:ln>
+            <a:noFill/>
+          </a:ln>
+        </p:spPr>
+        <p:style>
+          <a:lnRef idx="2">
+            <a:schemeClr val="accent1">
+              <a:shade val="50000"/>
+            </a:schemeClr>
+          </a:lnRef>
+          <a:fillRef idx="1">
+            <a:schemeClr val="accent1"/>
+          </a:fillRef>
+          <a:effectRef idx="0">
+            <a:schemeClr val="accent1"/>
+          </a:effectRef>
+          <a:fontRef idx="minor">
+            <a:schemeClr val="lt1"/>
+          </a:fontRef>
+        </p:style>
+        <p:txBody>
+          <a:bodyPr wrap="square" rtlCol="0" anchor="ctr">
+            <a:noAutofit/>
+          </a:bodyPr>
+          <a:lstStyle/>
+          <a:p>
+            <a:pPr algn="ctr"/>
+            <a:endParaRPr lang="en-US" dirty="0"/>
+          </a:p>
+        </p:txBody>
+      </p:sp>
+      <p:sp>
+        <p:nvSpPr>
+          <p:cNvPr id="16403" name="Rectangle 16402">
+            <a:extLst>
+              <a:ext uri="{FF2B5EF4-FFF2-40B4-BE49-F238E27FC236}">
+                <a16:creationId xmlns:a16="http://schemas.microsoft.com/office/drawing/2014/main" id="{8D71EDA1-87BF-4D5D-AB79-F346FD19278A}"/>
+              </a:ext>
+              <a:ext uri="{C183D7F6-B498-43B3-948B-1728B52AA6E4}">
+                <adec:decorative xmlns:adec="http://schemas.microsoft.com/office/drawing/2017/decorative" val="1"/>
+              </a:ext>
+            </a:extLst>
+          </p:cNvPr>
+          <p:cNvSpPr>
+            <a:spLocks noGrp="1" noRot="1" noChangeAspect="1" noMove="1" noResize="1" noEditPoints="1" noAdjustHandles="1" noChangeArrowheads="1" noChangeShapeType="1" noTextEdit="1"/>
+          </p:cNvSpPr>
+          <p:nvPr>
+            <p:extLst>
+              <p:ext uri="{386F3935-93C4-4BCD-93E2-E3B085C9AB24}">
+                <p16:designElem xmlns:p16="http://schemas.microsoft.com/office/powerpoint/2015/main" val="1"/>
+              </p:ext>
+            </p:extLst>
+          </p:nvPr>
+        </p:nvSpPr>
+        <p:spPr>
+          <a:xfrm rot="5400000" flipH="1">
+            <a:off x="-1410093" y="1399943"/>
+            <a:ext cx="6858003" cy="4037835"/>
+          </a:xfrm>
+          <a:prstGeom prst="rect">
+            <a:avLst/>
+          </a:prstGeom>
+          <a:gradFill>
+            <a:gsLst>
+              <a:gs pos="0">
+                <a:srgbClr val="000000">
+                  <a:alpha val="0"/>
+                </a:srgbClr>
+              </a:gs>
+              <a:gs pos="99000">
+                <a:schemeClr val="accent1">
+                  <a:lumMod val="60000"/>
+                  <a:lumOff val="40000"/>
+                  <a:alpha val="11000"/>
+                </a:schemeClr>
+              </a:gs>
+            </a:gsLst>
+            <a:lin ang="7200000" scaled="0"/>
+          </a:gradFill>
+          <a:ln>
+            <a:noFill/>
+          </a:ln>
+        </p:spPr>
+        <p:style>
+          <a:lnRef idx="2">
+            <a:schemeClr val="accent1">
+              <a:shade val="50000"/>
+            </a:schemeClr>
+          </a:lnRef>
+          <a:fillRef idx="1">
+            <a:schemeClr val="accent1"/>
+          </a:fillRef>
+          <a:effectRef idx="0">
+            <a:schemeClr val="accent1"/>
+          </a:effectRef>
+          <a:fontRef idx="minor">
+            <a:schemeClr val="lt1"/>
+          </a:fontRef>
+        </p:style>
+        <p:txBody>
+          <a:bodyPr rtlCol="0" anchor="ctr"/>
+          <a:lstStyle/>
+          <a:p>
+            <a:pPr algn="ctr"/>
+            <a:endParaRPr lang="en-US"/>
+          </a:p>
+        </p:txBody>
+      </p:sp>
       <p:sp>
         <p:nvSpPr>
           <p:cNvPr id="15362" name="Title 1">
@@ -6961,14 +10944,24 @@
             <p:ph type="title"/>
           </p:nvPr>
         </p:nvSpPr>
-        <p:spPr/>
+        <p:spPr>
+          <a:xfrm>
+            <a:off x="466722" y="586855"/>
+            <a:ext cx="3201366" cy="3387497"/>
+          </a:xfrm>
+        </p:spPr>
         <p:txBody>
-          <a:bodyPr/>
+          <a:bodyPr anchor="b">
+            <a:normAutofit/>
+          </a:bodyPr>
           <a:lstStyle/>
           <a:p>
-            <a:pPr eaLnBrk="1" hangingPunct="1"/>
+            <a:pPr algn="r" eaLnBrk="1" hangingPunct="1"/>
             <a:r>
-              <a:rPr lang="en-US" altLang="en-US" sz="3600">
+              <a:rPr lang="en-US" altLang="en-US" sz="4000">
+                <a:solidFill>
+                  <a:srgbClr val="FFFFFF"/>
+                </a:solidFill>
                 <a:latin typeface="Arial" panose="020B0604020202020204" pitchFamily="34" charset="0"/>
                 <a:ea typeface="ＭＳ Ｐゴシック" panose="020B0600070205080204" pitchFamily="34" charset="-128"/>
               </a:rPr>
@@ -6995,17 +10988,20 @@
         </p:nvSpPr>
         <p:spPr>
           <a:xfrm>
-            <a:off x="2057400" y="1371600"/>
-            <a:ext cx="8229600" cy="4525963"/>
+            <a:off x="4810259" y="649480"/>
+            <a:ext cx="6555347" cy="5546047"/>
           </a:xfrm>
         </p:spPr>
         <p:txBody>
-          <a:bodyPr rtlCol="0">
-            <a:normAutofit fontScale="92500" lnSpcReduction="10000"/>
+          <a:bodyPr rtlCol="0" anchor="ctr">
+            <a:normAutofit/>
           </a:bodyPr>
           <a:lstStyle/>
           <a:p>
             <a:pPr eaLnBrk="1" fontAlgn="auto" hangingPunct="1">
+              <a:lnSpc>
+                <a:spcPct val="90000"/>
+              </a:lnSpc>
               <a:spcAft>
                 <a:spcPts val="0"/>
               </a:spcAft>
@@ -7043,9 +11039,15 @@
               </a:rPr>
               <a:t>with the display.</a:t>
             </a:r>
+            <a:endParaRPr lang="en-US" sz="2000" b="1">
+              <a:latin typeface="Arial" charset="0"/>
+            </a:endParaRPr>
           </a:p>
           <a:p>
             <a:pPr eaLnBrk="1" fontAlgn="auto" hangingPunct="1">
+              <a:lnSpc>
+                <a:spcPct val="90000"/>
+              </a:lnSpc>
               <a:spcAft>
                 <a:spcPts val="0"/>
               </a:spcAft>
@@ -7053,12 +11055,15 @@
               <a:buChar char="•"/>
               <a:defRPr/>
             </a:pPr>
-            <a:endParaRPr lang="en-US" sz="2000" b="1" dirty="0">
+            <a:endParaRPr lang="en-US" sz="2000" b="1">
               <a:latin typeface="Arial" charset="0"/>
             </a:endParaRPr>
           </a:p>
           <a:p>
             <a:pPr eaLnBrk="1" fontAlgn="auto" hangingPunct="1">
+              <a:lnSpc>
+                <a:spcPct val="90000"/>
+              </a:lnSpc>
               <a:spcAft>
                 <a:spcPts val="0"/>
               </a:spcAft>
@@ -7072,9 +11077,15 @@
               </a:rPr>
               <a:t> Traditional performance best practice:</a:t>
             </a:r>
+            <a:endParaRPr lang="en-US" sz="2000" b="1">
+              <a:latin typeface="Arial" charset="0"/>
+            </a:endParaRPr>
           </a:p>
           <a:p>
             <a:pPr marL="800100" lvl="1" indent="-342900" eaLnBrk="1" fontAlgn="auto" hangingPunct="1">
+              <a:lnSpc>
+                <a:spcPct val="90000"/>
+              </a:lnSpc>
               <a:spcAft>
                 <a:spcPts val="0"/>
               </a:spcAft>
@@ -7088,9 +11099,15 @@
               </a:rPr>
               <a:t>Minimize direct accessing of the DOM.</a:t>
             </a:r>
+            <a:endParaRPr lang="en-US" sz="2000" b="1">
+              <a:latin typeface="Arial" charset="0"/>
+            </a:endParaRPr>
           </a:p>
           <a:p>
             <a:pPr marL="800100" lvl="1" indent="-342900" eaLnBrk="1" fontAlgn="auto" hangingPunct="1">
+              <a:lnSpc>
+                <a:spcPct val="90000"/>
+              </a:lnSpc>
               <a:spcAft>
                 <a:spcPts val="0"/>
               </a:spcAft>
@@ -7104,9 +11121,15 @@
               </a:rPr>
               <a:t>Avoid ‘expensive’ DOM operations.</a:t>
             </a:r>
+            <a:endParaRPr lang="en-US" sz="2000" b="1">
+              <a:latin typeface="Arial" charset="0"/>
+            </a:endParaRPr>
           </a:p>
           <a:p>
             <a:pPr marL="800100" lvl="1" indent="-342900" eaLnBrk="1" fontAlgn="auto" hangingPunct="1">
+              <a:lnSpc>
+                <a:spcPct val="90000"/>
+              </a:lnSpc>
               <a:spcAft>
                 <a:spcPts val="0"/>
               </a:spcAft>
@@ -7120,9 +11143,15 @@
               </a:rPr>
               <a:t>Update elements offline, then replace in the DOM.</a:t>
             </a:r>
+            <a:endParaRPr lang="en-US" sz="2000" b="1">
+              <a:latin typeface="Arial" charset="0"/>
+            </a:endParaRPr>
           </a:p>
           <a:p>
             <a:pPr marL="800100" lvl="1" indent="-342900" eaLnBrk="1" fontAlgn="auto" hangingPunct="1">
+              <a:lnSpc>
+                <a:spcPct val="90000"/>
+              </a:lnSpc>
               <a:spcAft>
                 <a:spcPts val="0"/>
               </a:spcAft>
@@ -7137,7 +11166,7 @@
               <a:t>Avoid changing layouts in </a:t>
             </a:r>
             <a:r>
-              <a:rPr lang="en-US" sz="2000" b="1" dirty="0" err="1">
+              <a:rPr lang="en-US" sz="2000" b="1">
                 <a:latin typeface="Arial" charset="0"/>
               </a:rPr>
               <a:t>Javascript</a:t>
@@ -7148,9 +11177,15 @@
               </a:rPr>
               <a:t>.</a:t>
             </a:r>
+            <a:endParaRPr lang="en-US" sz="2000" b="1">
+              <a:latin typeface="Arial" charset="0"/>
+            </a:endParaRPr>
           </a:p>
           <a:p>
             <a:pPr marL="800100" lvl="1" indent="-342900" eaLnBrk="1" fontAlgn="auto" hangingPunct="1">
+              <a:lnSpc>
+                <a:spcPct val="90000"/>
+              </a:lnSpc>
               <a:spcAft>
                 <a:spcPts val="0"/>
               </a:spcAft>
@@ -7164,9 +11199,15 @@
               </a:rPr>
               <a:t>. . .  etc.</a:t>
             </a:r>
+            <a:endParaRPr lang="en-US" sz="2000" b="1">
+              <a:latin typeface="Arial" charset="0"/>
+            </a:endParaRPr>
           </a:p>
           <a:p>
             <a:pPr marL="800100" lvl="1" indent="-342900" eaLnBrk="1" fontAlgn="auto" hangingPunct="1">
+              <a:lnSpc>
+                <a:spcPct val="90000"/>
+              </a:lnSpc>
               <a:spcAft>
                 <a:spcPts val="0"/>
               </a:spcAft>
@@ -7174,12 +11215,15 @@
               <a:buAutoNum type="arabicPeriod"/>
               <a:defRPr/>
             </a:pPr>
-            <a:endParaRPr lang="en-US" sz="2000" b="1" dirty="0">
+            <a:endParaRPr lang="en-US" sz="2000" b="1">
               <a:latin typeface="Arial" charset="0"/>
             </a:endParaRPr>
           </a:p>
           <a:p>
             <a:pPr eaLnBrk="1" fontAlgn="auto" hangingPunct="1">
+              <a:lnSpc>
+                <a:spcPct val="90000"/>
+              </a:lnSpc>
               <a:spcAft>
                 <a:spcPts val="0"/>
               </a:spcAft>
@@ -7193,9 +11237,15 @@
               </a:rPr>
               <a:t>Should the developer be responsible for low-level DOM optimization? Probably not.</a:t>
             </a:r>
+            <a:endParaRPr lang="en-US" sz="2000" b="1">
+              <a:latin typeface="Arial" charset="0"/>
+            </a:endParaRPr>
           </a:p>
           <a:p>
             <a:pPr lvl="1" eaLnBrk="1" fontAlgn="auto" hangingPunct="1">
+              <a:lnSpc>
+                <a:spcPct val="90000"/>
+              </a:lnSpc>
               <a:spcAft>
                 <a:spcPts val="0"/>
               </a:spcAft>
@@ -7224,6 +11274,10 @@
               </a:rPr>
               <a:t> to shield developers from these concerns.</a:t>
             </a:r>
+            <a:endParaRPr lang="en-US" sz="2000" b="1">
+              <a:latin typeface="Arial" charset="0"/>
+              <a:cs typeface="ＭＳ Ｐゴシック" charset="0"/>
+            </a:endParaRPr>
           </a:p>
         </p:txBody>
       </p:sp>
@@ -7244,7 +11298,10 @@
           </p:nvPr>
         </p:nvSpPr>
         <p:spPr bwMode="auto">
-          <a:noFill/>
+          <a:xfrm>
+            <a:off x="11704320" y="6455664"/>
+            <a:ext cx="448056" cy="365125"/>
+          </a:xfrm>
           <a:extLst>
             <a:ext uri="{909E8E84-426E-40DD-AFC4-6F175D3DCCD1}">
               <a14:hiddenFill xmlns:a14="http://schemas.microsoft.com/office/drawing/2010/main">
@@ -7266,7 +11323,9 @@
           </a:extLst>
         </p:spPr>
         <p:txBody>
-          <a:bodyPr/>
+          <a:bodyPr>
+            <a:normAutofit/>
+          </a:bodyPr>
           <a:lstStyle>
             <a:lvl1pPr>
               <a:spcBef>
@@ -7412,23 +11471,41 @@
               <a:spcBef>
                 <a:spcPct val="0"/>
               </a:spcBef>
+              <a:spcAft>
+                <a:spcPts val="600"/>
+              </a:spcAft>
               <a:buFontTx/>
               <a:buNone/>
             </a:pPr>
             <a:fld id="{059D956D-B83E-4F9A-B924-76BCFA99D205}" type="slidenum">
-              <a:rPr lang="en-US" altLang="en-US" sz="1400" smtClean="0">
+              <a:rPr lang="en-US" altLang="en-US" sz="1100">
+                <a:solidFill>
+                  <a:schemeClr val="tx1">
+                    <a:lumMod val="50000"/>
+                    <a:lumOff val="50000"/>
+                  </a:schemeClr>
+                </a:solidFill>
                 <a:latin typeface="Arial" panose="020B0604020202020204" pitchFamily="34" charset="0"/>
               </a:rPr>
               <a:pPr>
                 <a:spcBef>
                   <a:spcPct val="0"/>
                 </a:spcBef>
+                <a:spcAft>
+                  <a:spcPts val="600"/>
+                </a:spcAft>
                 <a:buFontTx/>
                 <a:buNone/>
               </a:pPr>
               <a:t>11</a:t>
             </a:fld>
-            <a:endParaRPr lang="en-US" altLang="en-US" sz="1400">
+            <a:endParaRPr lang="en-US" altLang="en-US" sz="1100">
+              <a:solidFill>
+                <a:schemeClr val="tx1">
+                  <a:lumMod val="50000"/>
+                  <a:lumOff val="50000"/>
+                </a:schemeClr>
+              </a:solidFill>
               <a:latin typeface="Arial" panose="020B0604020202020204" pitchFamily="34" charset="0"/>
             </a:endParaRPr>
           </a:p>
@@ -7777,6 +11854,14 @@
 <file path=ppt/slides/slide12.xml><?xml version="1.0" encoding="utf-8"?>
 <p:sld xmlns:a="http://schemas.openxmlformats.org/drawingml/2006/main" xmlns:r="http://schemas.openxmlformats.org/officeDocument/2006/relationships" xmlns:p="http://schemas.openxmlformats.org/presentationml/2006/main">
   <p:cSld>
+    <p:bg>
+      <p:bgPr>
+        <a:solidFill>
+          <a:schemeClr val="bg1"/>
+        </a:solidFill>
+        <a:effectLst/>
+      </p:bgPr>
+    </p:bg>
     <p:spTree>
       <p:nvGrpSpPr>
         <p:cNvPr id="1" name=""/>
@@ -7791,6 +11876,628 @@
           <a:chExt cx="0" cy="0"/>
         </a:xfrm>
       </p:grpSpPr>
+      <p:sp useBgFill="1">
+        <p:nvSpPr>
+          <p:cNvPr id="32775" name="Rectangle 32774">
+            <a:extLst>
+              <a:ext uri="{FF2B5EF4-FFF2-40B4-BE49-F238E27FC236}">
+                <a16:creationId xmlns:a16="http://schemas.microsoft.com/office/drawing/2014/main" id="{09588DA8-065E-4F6F-8EFD-43104AB2E0CF}"/>
+              </a:ext>
+              <a:ext uri="{C183D7F6-B498-43B3-948B-1728B52AA6E4}">
+                <adec:decorative xmlns:adec="http://schemas.microsoft.com/office/drawing/2017/decorative" val="1"/>
+              </a:ext>
+            </a:extLst>
+          </p:cNvPr>
+          <p:cNvSpPr>
+            <a:spLocks noGrp="1" noRot="1" noChangeAspect="1" noMove="1" noResize="1" noEditPoints="1" noAdjustHandles="1" noChangeArrowheads="1" noChangeShapeType="1" noTextEdit="1"/>
+          </p:cNvSpPr>
+          <p:nvPr>
+            <p:extLst>
+              <p:ext uri="{386F3935-93C4-4BCD-93E2-E3B085C9AB24}">
+                <p16:designElem xmlns:p16="http://schemas.microsoft.com/office/powerpoint/2015/main" val="1"/>
+              </p:ext>
+            </p:extLst>
+          </p:nvPr>
+        </p:nvSpPr>
+        <p:spPr>
+          <a:xfrm>
+            <a:off x="0" y="0"/>
+            <a:ext cx="12192000" cy="6858000"/>
+          </a:xfrm>
+          <a:prstGeom prst="rect">
+            <a:avLst/>
+          </a:prstGeom>
+          <a:ln w="12700" cap="flat" cmpd="sng" algn="ctr">
+            <a:noFill/>
+            <a:prstDash val="solid"/>
+            <a:miter lim="800000"/>
+          </a:ln>
+          <a:effectLst/>
+          <a:extLst>
+            <a:ext uri="{91240B29-F687-4F45-9708-019B960494DF}">
+              <a14:hiddenLine xmlns:a14="http://schemas.microsoft.com/office/drawing/2010/main" w="12700" cap="flat" cmpd="sng" algn="ctr">
+                <a:solidFill>
+                  <a:schemeClr val="accent1">
+                    <a:shade val="50000"/>
+                  </a:schemeClr>
+                </a:solidFill>
+                <a:prstDash val="solid"/>
+                <a:miter lim="800000"/>
+              </a14:hiddenLine>
+            </a:ext>
+          </a:extLst>
+        </p:spPr>
+        <p:style>
+          <a:lnRef idx="2">
+            <a:schemeClr val="accent1">
+              <a:shade val="50000"/>
+            </a:schemeClr>
+          </a:lnRef>
+          <a:fillRef idx="1">
+            <a:schemeClr val="accent1"/>
+          </a:fillRef>
+          <a:effectRef idx="0">
+            <a:schemeClr val="accent1"/>
+          </a:effectRef>
+          <a:fontRef idx="minor">
+            <a:schemeClr val="lt1"/>
+          </a:fontRef>
+        </p:style>
+        <p:txBody>
+          <a:bodyPr rtlCol="0" anchor="ctr"/>
+          <a:lstStyle/>
+          <a:p>
+            <a:pPr algn="ctr"/>
+            <a:endParaRPr lang="en-US"/>
+          </a:p>
+        </p:txBody>
+      </p:sp>
+      <p:sp useBgFill="1">
+        <p:nvSpPr>
+          <p:cNvPr id="32777" name="Rectangle 32776">
+            <a:extLst>
+              <a:ext uri="{FF2B5EF4-FFF2-40B4-BE49-F238E27FC236}">
+                <a16:creationId xmlns:a16="http://schemas.microsoft.com/office/drawing/2014/main" id="{C4285719-470E-454C-AF62-8323075F1F5B}"/>
+              </a:ext>
+              <a:ext uri="{C183D7F6-B498-43B3-948B-1728B52AA6E4}">
+                <adec:decorative xmlns:adec="http://schemas.microsoft.com/office/drawing/2017/decorative" val="1"/>
+              </a:ext>
+            </a:extLst>
+          </p:cNvPr>
+          <p:cNvSpPr>
+            <a:spLocks noGrp="1" noRot="1" noChangeAspect="1" noMove="1" noResize="1" noEditPoints="1" noAdjustHandles="1" noChangeArrowheads="1" noChangeShapeType="1" noTextEdit="1"/>
+          </p:cNvSpPr>
+          <p:nvPr>
+            <p:extLst>
+              <p:ext uri="{386F3935-93C4-4BCD-93E2-E3B085C9AB24}">
+                <p16:designElem xmlns:p16="http://schemas.microsoft.com/office/powerpoint/2015/main" val="1"/>
+              </p:ext>
+            </p:extLst>
+          </p:nvPr>
+        </p:nvSpPr>
+        <p:spPr>
+          <a:xfrm>
+            <a:off x="0" y="0"/>
+            <a:ext cx="12188952" cy="6858000"/>
+          </a:xfrm>
+          <a:prstGeom prst="rect">
+            <a:avLst/>
+          </a:prstGeom>
+          <a:ln w="12700" cap="flat" cmpd="sng" algn="ctr">
+            <a:noFill/>
+            <a:prstDash val="solid"/>
+            <a:miter lim="800000"/>
+          </a:ln>
+          <a:effectLst/>
+          <a:extLst>
+            <a:ext uri="{91240B29-F687-4F45-9708-019B960494DF}">
+              <a14:hiddenLine xmlns:a14="http://schemas.microsoft.com/office/drawing/2010/main" w="12700" cap="flat" cmpd="sng" algn="ctr">
+                <a:solidFill>
+                  <a:schemeClr val="accent1">
+                    <a:shade val="50000"/>
+                  </a:schemeClr>
+                </a:solidFill>
+                <a:prstDash val="solid"/>
+                <a:miter lim="800000"/>
+              </a14:hiddenLine>
+            </a:ext>
+          </a:extLst>
+        </p:spPr>
+        <p:style>
+          <a:lnRef idx="2">
+            <a:schemeClr val="accent1">
+              <a:shade val="50000"/>
+            </a:schemeClr>
+          </a:lnRef>
+          <a:fillRef idx="1">
+            <a:schemeClr val="accent1"/>
+          </a:fillRef>
+          <a:effectRef idx="0">
+            <a:schemeClr val="accent1"/>
+          </a:effectRef>
+          <a:fontRef idx="minor">
+            <a:schemeClr val="lt1"/>
+          </a:fontRef>
+        </p:style>
+        <p:txBody>
+          <a:bodyPr rtlCol="0" anchor="ctr"/>
+          <a:lstStyle/>
+          <a:p>
+            <a:pPr algn="ctr"/>
+            <a:endParaRPr lang="en-US"/>
+          </a:p>
+        </p:txBody>
+      </p:sp>
+      <p:sp>
+        <p:nvSpPr>
+          <p:cNvPr id="32779" name="Rectangle 32778">
+            <a:extLst>
+              <a:ext uri="{FF2B5EF4-FFF2-40B4-BE49-F238E27FC236}">
+                <a16:creationId xmlns:a16="http://schemas.microsoft.com/office/drawing/2014/main" id="{CD9FE4EF-C4D8-49A0-B2FF-81D8DB7D8A24}"/>
+              </a:ext>
+              <a:ext uri="{C183D7F6-B498-43B3-948B-1728B52AA6E4}">
+                <adec:decorative xmlns:adec="http://schemas.microsoft.com/office/drawing/2017/decorative" val="1"/>
+              </a:ext>
+            </a:extLst>
+          </p:cNvPr>
+          <p:cNvSpPr>
+            <a:spLocks noGrp="1" noRot="1" noChangeAspect="1" noMove="1" noResize="1" noEditPoints="1" noAdjustHandles="1" noChangeArrowheads="1" noChangeShapeType="1" noTextEdit="1"/>
+          </p:cNvSpPr>
+          <p:nvPr>
+            <p:extLst>
+              <p:ext uri="{386F3935-93C4-4BCD-93E2-E3B085C9AB24}">
+                <p16:designElem xmlns:p16="http://schemas.microsoft.com/office/powerpoint/2015/main" val="1"/>
+              </p:ext>
+            </p:extLst>
+          </p:nvPr>
+        </p:nvSpPr>
+        <p:spPr>
+          <a:xfrm rot="5400000" flipH="1">
+            <a:off x="-1410084" y="1410082"/>
+            <a:ext cx="6858000" cy="4037836"/>
+          </a:xfrm>
+          <a:prstGeom prst="rect">
+            <a:avLst/>
+          </a:prstGeom>
+          <a:gradFill>
+            <a:gsLst>
+              <a:gs pos="8000">
+                <a:srgbClr val="000000"/>
+              </a:gs>
+              <a:gs pos="100000">
+                <a:schemeClr val="accent1">
+                  <a:lumMod val="75000"/>
+                </a:schemeClr>
+              </a:gs>
+            </a:gsLst>
+            <a:lin ang="3000000" scaled="0"/>
+          </a:gradFill>
+          <a:ln>
+            <a:noFill/>
+          </a:ln>
+        </p:spPr>
+        <p:style>
+          <a:lnRef idx="2">
+            <a:schemeClr val="accent1">
+              <a:shade val="50000"/>
+            </a:schemeClr>
+          </a:lnRef>
+          <a:fillRef idx="1">
+            <a:schemeClr val="accent1"/>
+          </a:fillRef>
+          <a:effectRef idx="0">
+            <a:schemeClr val="accent1"/>
+          </a:effectRef>
+          <a:fontRef idx="minor">
+            <a:schemeClr val="lt1"/>
+          </a:fontRef>
+        </p:style>
+        <p:txBody>
+          <a:bodyPr rtlCol="0" anchor="ctr"/>
+          <a:lstStyle/>
+          <a:p>
+            <a:pPr algn="ctr"/>
+            <a:endParaRPr lang="en-US"/>
+          </a:p>
+        </p:txBody>
+      </p:sp>
+      <p:sp>
+        <p:nvSpPr>
+          <p:cNvPr id="32781" name="Rectangle 32780">
+            <a:extLst>
+              <a:ext uri="{FF2B5EF4-FFF2-40B4-BE49-F238E27FC236}">
+                <a16:creationId xmlns:a16="http://schemas.microsoft.com/office/drawing/2014/main" id="{4300840D-0A0B-4512-BACA-B439D5B9C57C}"/>
+              </a:ext>
+              <a:ext uri="{C183D7F6-B498-43B3-948B-1728B52AA6E4}">
+                <adec:decorative xmlns:adec="http://schemas.microsoft.com/office/drawing/2017/decorative" val="1"/>
+              </a:ext>
+            </a:extLst>
+          </p:cNvPr>
+          <p:cNvSpPr>
+            <a:spLocks noGrp="1" noRot="1" noChangeAspect="1" noMove="1" noResize="1" noEditPoints="1" noAdjustHandles="1" noChangeArrowheads="1" noChangeShapeType="1" noTextEdit="1"/>
+          </p:cNvSpPr>
+          <p:nvPr>
+            <p:extLst>
+              <p:ext uri="{386F3935-93C4-4BCD-93E2-E3B085C9AB24}">
+                <p16:designElem xmlns:p16="http://schemas.microsoft.com/office/powerpoint/2015/main" val="1"/>
+              </p:ext>
+            </p:extLst>
+          </p:nvPr>
+        </p:nvSpPr>
+        <p:spPr>
+          <a:xfrm rot="5400000" flipH="1">
+            <a:off x="-1410085" y="1420219"/>
+            <a:ext cx="6857999" cy="4037839"/>
+          </a:xfrm>
+          <a:prstGeom prst="rect">
+            <a:avLst/>
+          </a:prstGeom>
+          <a:gradFill>
+            <a:gsLst>
+              <a:gs pos="0">
+                <a:srgbClr val="000000">
+                  <a:alpha val="0"/>
+                </a:srgbClr>
+              </a:gs>
+              <a:gs pos="99000">
+                <a:schemeClr val="accent1">
+                  <a:alpha val="46000"/>
+                </a:schemeClr>
+              </a:gs>
+            </a:gsLst>
+            <a:lin ang="1800000" scaled="0"/>
+          </a:gradFill>
+          <a:ln>
+            <a:noFill/>
+          </a:ln>
+        </p:spPr>
+        <p:style>
+          <a:lnRef idx="2">
+            <a:schemeClr val="accent1">
+              <a:shade val="50000"/>
+            </a:schemeClr>
+          </a:lnRef>
+          <a:fillRef idx="1">
+            <a:schemeClr val="accent1"/>
+          </a:fillRef>
+          <a:effectRef idx="0">
+            <a:schemeClr val="accent1"/>
+          </a:effectRef>
+          <a:fontRef idx="minor">
+            <a:schemeClr val="lt1"/>
+          </a:fontRef>
+        </p:style>
+        <p:txBody>
+          <a:bodyPr rtlCol="0" anchor="ctr"/>
+          <a:lstStyle/>
+          <a:p>
+            <a:pPr algn="ctr"/>
+            <a:endParaRPr lang="en-US"/>
+          </a:p>
+        </p:txBody>
+      </p:sp>
+      <p:sp>
+        <p:nvSpPr>
+          <p:cNvPr id="32783" name="Rectangle 32782">
+            <a:extLst>
+              <a:ext uri="{FF2B5EF4-FFF2-40B4-BE49-F238E27FC236}">
+                <a16:creationId xmlns:a16="http://schemas.microsoft.com/office/drawing/2014/main" id="{D2B78728-A580-49A7-84F9-6EF6F583ADE0}"/>
+              </a:ext>
+              <a:ext uri="{C183D7F6-B498-43B3-948B-1728B52AA6E4}">
+                <adec:decorative xmlns:adec="http://schemas.microsoft.com/office/drawing/2017/decorative" val="1"/>
+              </a:ext>
+            </a:extLst>
+          </p:cNvPr>
+          <p:cNvSpPr>
+            <a:spLocks noGrp="1" noRot="1" noChangeAspect="1" noMove="1" noResize="1" noEditPoints="1" noAdjustHandles="1" noChangeArrowheads="1" noChangeShapeType="1" noTextEdit="1"/>
+          </p:cNvSpPr>
+          <p:nvPr>
+            <p:extLst>
+              <p:ext uri="{386F3935-93C4-4BCD-93E2-E3B085C9AB24}">
+                <p16:designElem xmlns:p16="http://schemas.microsoft.com/office/powerpoint/2015/main" val="1"/>
+              </p:ext>
+            </p:extLst>
+          </p:nvPr>
+        </p:nvSpPr>
+        <p:spPr>
+          <a:xfrm rot="5400000" flipH="1">
+            <a:off x="767923" y="3588085"/>
+            <a:ext cx="2501979" cy="4037841"/>
+          </a:xfrm>
+          <a:prstGeom prst="rect">
+            <a:avLst/>
+          </a:prstGeom>
+          <a:gradFill>
+            <a:gsLst>
+              <a:gs pos="2000">
+                <a:schemeClr val="accent1">
+                  <a:alpha val="29000"/>
+                </a:schemeClr>
+              </a:gs>
+              <a:gs pos="100000">
+                <a:srgbClr val="000000">
+                  <a:alpha val="30000"/>
+                </a:srgbClr>
+              </a:gs>
+            </a:gsLst>
+            <a:lin ang="7800000" scaled="0"/>
+          </a:gradFill>
+          <a:ln>
+            <a:noFill/>
+          </a:ln>
+        </p:spPr>
+        <p:style>
+          <a:lnRef idx="2">
+            <a:schemeClr val="accent1">
+              <a:shade val="50000"/>
+            </a:schemeClr>
+          </a:lnRef>
+          <a:fillRef idx="1">
+            <a:schemeClr val="accent1"/>
+          </a:fillRef>
+          <a:effectRef idx="0">
+            <a:schemeClr val="accent1"/>
+          </a:effectRef>
+          <a:fontRef idx="minor">
+            <a:schemeClr val="lt1"/>
+          </a:fontRef>
+        </p:style>
+        <p:txBody>
+          <a:bodyPr rtlCol="0" anchor="ctr"/>
+          <a:lstStyle/>
+          <a:p>
+            <a:pPr algn="ctr"/>
+            <a:endParaRPr lang="en-US" dirty="0"/>
+          </a:p>
+        </p:txBody>
+      </p:sp>
+      <p:sp>
+        <p:nvSpPr>
+          <p:cNvPr id="32785" name="Freeform: Shape 32784">
+            <a:extLst>
+              <a:ext uri="{FF2B5EF4-FFF2-40B4-BE49-F238E27FC236}">
+                <a16:creationId xmlns:a16="http://schemas.microsoft.com/office/drawing/2014/main" id="{38FAA1A1-D861-433F-88FA-1E9D6FD31D11}"/>
+              </a:ext>
+              <a:ext uri="{C183D7F6-B498-43B3-948B-1728B52AA6E4}">
+                <adec:decorative xmlns:adec="http://schemas.microsoft.com/office/drawing/2017/decorative" val="1"/>
+              </a:ext>
+            </a:extLst>
+          </p:cNvPr>
+          <p:cNvSpPr>
+            <a:spLocks noGrp="1" noRot="1" noChangeAspect="1" noMove="1" noResize="1" noEditPoints="1" noAdjustHandles="1" noChangeArrowheads="1" noChangeShapeType="1" noTextEdit="1"/>
+          </p:cNvSpPr>
+          <p:nvPr>
+            <p:extLst>
+              <p:ext uri="{386F3935-93C4-4BCD-93E2-E3B085C9AB24}">
+                <p16:designElem xmlns:p16="http://schemas.microsoft.com/office/powerpoint/2015/main" val="1"/>
+              </p:ext>
+            </p:extLst>
+          </p:nvPr>
+        </p:nvSpPr>
+        <p:spPr>
+          <a:xfrm rot="20635413">
+            <a:off x="-501737" y="969718"/>
+            <a:ext cx="3900357" cy="4178958"/>
+          </a:xfrm>
+          <a:custGeom>
+            <a:avLst/>
+            <a:gdLst>
+              <a:gd name="connsiteX0" fmla="*/ 2432225 w 3900357"/>
+              <a:gd name="connsiteY0" fmla="*/ 93939 h 4178958"/>
+              <a:gd name="connsiteX1" fmla="*/ 3900357 w 3900357"/>
+              <a:gd name="connsiteY1" fmla="*/ 2089479 h 4178958"/>
+              <a:gd name="connsiteX2" fmla="*/ 1810878 w 3900357"/>
+              <a:gd name="connsiteY2" fmla="*/ 4178958 h 4178958"/>
+              <a:gd name="connsiteX3" fmla="*/ 78249 w 3900357"/>
+              <a:gd name="connsiteY3" fmla="*/ 3257727 h 4178958"/>
+              <a:gd name="connsiteX4" fmla="*/ 0 w 3900357"/>
+              <a:gd name="connsiteY4" fmla="*/ 3128923 h 4178958"/>
+              <a:gd name="connsiteX5" fmla="*/ 831324 w 3900357"/>
+              <a:gd name="connsiteY5" fmla="*/ 244281 h 4178958"/>
+              <a:gd name="connsiteX6" fmla="*/ 997559 w 3900357"/>
+              <a:gd name="connsiteY6" fmla="*/ 164202 h 4178958"/>
+              <a:gd name="connsiteX7" fmla="*/ 1810878 w 3900357"/>
+              <a:gd name="connsiteY7" fmla="*/ 0 h 4178958"/>
+              <a:gd name="connsiteX8" fmla="*/ 2432225 w 3900357"/>
+              <a:gd name="connsiteY8" fmla="*/ 93939 h 4178958"/>
+            </a:gdLst>
+            <a:ahLst/>
+            <a:cxnLst>
+              <a:cxn ang="0">
+                <a:pos x="connsiteX0" y="connsiteY0"/>
+              </a:cxn>
+              <a:cxn ang="0">
+                <a:pos x="connsiteX1" y="connsiteY1"/>
+              </a:cxn>
+              <a:cxn ang="0">
+                <a:pos x="connsiteX2" y="connsiteY2"/>
+              </a:cxn>
+              <a:cxn ang="0">
+                <a:pos x="connsiteX3" y="connsiteY3"/>
+              </a:cxn>
+              <a:cxn ang="0">
+                <a:pos x="connsiteX4" y="connsiteY4"/>
+              </a:cxn>
+              <a:cxn ang="0">
+                <a:pos x="connsiteX5" y="connsiteY5"/>
+              </a:cxn>
+              <a:cxn ang="0">
+                <a:pos x="connsiteX6" y="connsiteY6"/>
+              </a:cxn>
+              <a:cxn ang="0">
+                <a:pos x="connsiteX7" y="connsiteY7"/>
+              </a:cxn>
+              <a:cxn ang="0">
+                <a:pos x="connsiteX8" y="connsiteY8"/>
+              </a:cxn>
+            </a:cxnLst>
+            <a:rect l="l" t="t" r="r" b="b"/>
+            <a:pathLst>
+              <a:path w="3900357" h="4178958">
+                <a:moveTo>
+                  <a:pt x="2432225" y="93939"/>
+                </a:moveTo>
+                <a:cubicBezTo>
+                  <a:pt x="3282786" y="358491"/>
+                  <a:pt x="3900357" y="1151865"/>
+                  <a:pt x="3900357" y="2089479"/>
+                </a:cubicBezTo>
+                <a:cubicBezTo>
+                  <a:pt x="3900357" y="3243466"/>
+                  <a:pt x="2964865" y="4178958"/>
+                  <a:pt x="1810878" y="4178958"/>
+                </a:cubicBezTo>
+                <a:cubicBezTo>
+                  <a:pt x="1089636" y="4178958"/>
+                  <a:pt x="453744" y="3813531"/>
+                  <a:pt x="78249" y="3257727"/>
+                </a:cubicBezTo>
+                <a:lnTo>
+                  <a:pt x="0" y="3128923"/>
+                </a:lnTo>
+                <a:lnTo>
+                  <a:pt x="831324" y="244281"/>
+                </a:lnTo>
+                <a:lnTo>
+                  <a:pt x="997559" y="164202"/>
+                </a:lnTo>
+                <a:cubicBezTo>
+                  <a:pt x="1247540" y="58468"/>
+                  <a:pt x="1522381" y="0"/>
+                  <a:pt x="1810878" y="0"/>
+                </a:cubicBezTo>
+                <a:cubicBezTo>
+                  <a:pt x="2027251" y="0"/>
+                  <a:pt x="2235942" y="32888"/>
+                  <a:pt x="2432225" y="93939"/>
+                </a:cubicBezTo>
+                <a:close/>
+              </a:path>
+            </a:pathLst>
+          </a:custGeom>
+          <a:gradFill>
+            <a:gsLst>
+              <a:gs pos="29000">
+                <a:srgbClr val="000000">
+                  <a:alpha val="0"/>
+                </a:srgbClr>
+              </a:gs>
+              <a:gs pos="100000">
+                <a:schemeClr val="accent1">
+                  <a:alpha val="43000"/>
+                </a:schemeClr>
+              </a:gs>
+            </a:gsLst>
+            <a:lin ang="1800000" scaled="0"/>
+          </a:gradFill>
+          <a:ln>
+            <a:noFill/>
+          </a:ln>
+        </p:spPr>
+        <p:style>
+          <a:lnRef idx="2">
+            <a:schemeClr val="accent1">
+              <a:shade val="50000"/>
+            </a:schemeClr>
+          </a:lnRef>
+          <a:fillRef idx="1">
+            <a:schemeClr val="accent1"/>
+          </a:fillRef>
+          <a:effectRef idx="0">
+            <a:schemeClr val="accent1"/>
+          </a:effectRef>
+          <a:fontRef idx="minor">
+            <a:schemeClr val="lt1"/>
+          </a:fontRef>
+        </p:style>
+        <p:txBody>
+          <a:bodyPr wrap="square" rtlCol="0" anchor="ctr">
+            <a:noAutofit/>
+          </a:bodyPr>
+          <a:lstStyle/>
+          <a:p>
+            <a:pPr algn="ctr"/>
+            <a:endParaRPr lang="en-US" dirty="0"/>
+          </a:p>
+        </p:txBody>
+      </p:sp>
+      <p:sp>
+        <p:nvSpPr>
+          <p:cNvPr id="32787" name="Rectangle 32786">
+            <a:extLst>
+              <a:ext uri="{FF2B5EF4-FFF2-40B4-BE49-F238E27FC236}">
+                <a16:creationId xmlns:a16="http://schemas.microsoft.com/office/drawing/2014/main" id="{8D71EDA1-87BF-4D5D-AB79-F346FD19278A}"/>
+              </a:ext>
+              <a:ext uri="{C183D7F6-B498-43B3-948B-1728B52AA6E4}">
+                <adec:decorative xmlns:adec="http://schemas.microsoft.com/office/drawing/2017/decorative" val="1"/>
+              </a:ext>
+            </a:extLst>
+          </p:cNvPr>
+          <p:cNvSpPr>
+            <a:spLocks noGrp="1" noRot="1" noChangeAspect="1" noMove="1" noResize="1" noEditPoints="1" noAdjustHandles="1" noChangeArrowheads="1" noChangeShapeType="1" noTextEdit="1"/>
+          </p:cNvSpPr>
+          <p:nvPr>
+            <p:extLst>
+              <p:ext uri="{386F3935-93C4-4BCD-93E2-E3B085C9AB24}">
+                <p16:designElem xmlns:p16="http://schemas.microsoft.com/office/powerpoint/2015/main" val="1"/>
+              </p:ext>
+            </p:extLst>
+          </p:nvPr>
+        </p:nvSpPr>
+        <p:spPr>
+          <a:xfrm rot="5400000" flipH="1">
+            <a:off x="-1410093" y="1399943"/>
+            <a:ext cx="6858003" cy="4037835"/>
+          </a:xfrm>
+          <a:prstGeom prst="rect">
+            <a:avLst/>
+          </a:prstGeom>
+          <a:gradFill>
+            <a:gsLst>
+              <a:gs pos="0">
+                <a:srgbClr val="000000">
+                  <a:alpha val="0"/>
+                </a:srgbClr>
+              </a:gs>
+              <a:gs pos="99000">
+                <a:schemeClr val="accent1">
+                  <a:lumMod val="60000"/>
+                  <a:lumOff val="40000"/>
+                  <a:alpha val="11000"/>
+                </a:schemeClr>
+              </a:gs>
+            </a:gsLst>
+            <a:lin ang="7200000" scaled="0"/>
+          </a:gradFill>
+          <a:ln>
+            <a:noFill/>
+          </a:ln>
+        </p:spPr>
+        <p:style>
+          <a:lnRef idx="2">
+            <a:schemeClr val="accent1">
+              <a:shade val="50000"/>
+            </a:schemeClr>
+          </a:lnRef>
+          <a:fillRef idx="1">
+            <a:schemeClr val="accent1"/>
+          </a:fillRef>
+          <a:effectRef idx="0">
+            <a:schemeClr val="accent1"/>
+          </a:effectRef>
+          <a:fontRef idx="minor">
+            <a:schemeClr val="lt1"/>
+          </a:fontRef>
+        </p:style>
+        <p:txBody>
+          <a:bodyPr rtlCol="0" anchor="ctr"/>
+          <a:lstStyle/>
+          <a:p>
+            <a:pPr algn="ctr"/>
+            <a:endParaRPr lang="en-US"/>
+          </a:p>
+        </p:txBody>
+      </p:sp>
       <p:sp>
         <p:nvSpPr>
           <p:cNvPr id="16386" name="Title 1">
@@ -7807,14 +12514,24 @@
             <p:ph type="title"/>
           </p:nvPr>
         </p:nvSpPr>
-        <p:spPr/>
+        <p:spPr>
+          <a:xfrm>
+            <a:off x="466722" y="586855"/>
+            <a:ext cx="3201366" cy="3387497"/>
+          </a:xfrm>
+        </p:spPr>
         <p:txBody>
-          <a:bodyPr/>
+          <a:bodyPr anchor="b">
+            <a:normAutofit/>
+          </a:bodyPr>
           <a:lstStyle/>
           <a:p>
-            <a:pPr eaLnBrk="1" hangingPunct="1"/>
+            <a:pPr algn="r" eaLnBrk="1" hangingPunct="1"/>
             <a:r>
-              <a:rPr lang="en-US" altLang="en-US" sz="3600">
+              <a:rPr lang="en-US" altLang="en-US" sz="4000">
+                <a:solidFill>
+                  <a:srgbClr val="FFFFFF"/>
+                </a:solidFill>
                 <a:latin typeface="Arial" panose="020B0604020202020204" pitchFamily="34" charset="0"/>
                 <a:ea typeface="ＭＳ Ｐゴシック" panose="020B0600070205080204" pitchFamily="34" charset="-128"/>
               </a:rPr>
@@ -7841,13 +12558,13 @@
         </p:nvSpPr>
         <p:spPr>
           <a:xfrm>
-            <a:off x="2057400" y="1447800"/>
-            <a:ext cx="8229600" cy="4525963"/>
+            <a:off x="4810259" y="649480"/>
+            <a:ext cx="6555347" cy="5546047"/>
           </a:xfrm>
         </p:spPr>
         <p:txBody>
-          <a:bodyPr>
-            <a:normAutofit lnSpcReduction="10000"/>
+          <a:bodyPr anchor="ctr">
+            <a:normAutofit/>
           </a:bodyPr>
           <a:lstStyle/>
           <a:p>
@@ -7940,21 +12657,21 @@
               <a:defRPr/>
             </a:pPr>
             <a:r>
-              <a:rPr lang="en-US" altLang="en-US" sz="2200" b="1" dirty="0">
+              <a:rPr lang="en-US" altLang="en-US" sz="2000" b="1">
                 <a:latin typeface="Arial" charset="0"/>
                 <a:ea typeface="ＭＳ Ｐゴシック" charset="-128"/>
               </a:rPr>
               <a:t> Performs a </a:t>
             </a:r>
             <a:r>
-              <a:rPr lang="en-US" altLang="en-US" sz="2200" i="1" dirty="0">
+              <a:rPr lang="en-US" altLang="en-US" sz="2000" i="1">
                 <a:latin typeface="Arial" charset="0"/>
                 <a:ea typeface="ＭＳ Ｐゴシック" charset="-128"/>
               </a:rPr>
               <a:t>diff</a:t>
             </a:r>
             <a:r>
-              <a:rPr lang="en-US" altLang="en-US" sz="2200" b="1" dirty="0">
+              <a:rPr lang="en-US" altLang="en-US" sz="2000" b="1">
                 <a:latin typeface="Arial" charset="0"/>
                 <a:ea typeface="ＭＳ Ｐゴシック" charset="-128"/>
               </a:rPr>
@@ -7971,21 +12688,21 @@
               <a:defRPr/>
             </a:pPr>
             <a:r>
-              <a:rPr lang="en-US" altLang="en-US" sz="2200" b="1" dirty="0">
+              <a:rPr lang="en-US" altLang="en-US" sz="2000" b="1">
                 <a:latin typeface="Arial" charset="0"/>
                 <a:ea typeface="ＭＳ Ｐゴシック" charset="-128"/>
               </a:rPr>
               <a:t> Computes the </a:t>
             </a:r>
             <a:r>
-              <a:rPr lang="en-US" altLang="en-US" sz="2200" i="1" dirty="0">
+              <a:rPr lang="en-US" altLang="en-US" sz="2000" i="1">
                 <a:latin typeface="Arial" charset="0"/>
                 <a:ea typeface="ＭＳ Ｐゴシック" charset="-128"/>
               </a:rPr>
               <a:t>set of changes</a:t>
             </a:r>
             <a:r>
-              <a:rPr lang="en-US" altLang="en-US" sz="2200" b="1" dirty="0">
+              <a:rPr lang="en-US" altLang="en-US" sz="2000" b="1">
                 <a:latin typeface="Arial" charset="0"/>
                 <a:ea typeface="ＭＳ Ｐゴシック" charset="-128"/>
               </a:rPr>
@@ -8002,7 +12719,7 @@
               <a:defRPr/>
             </a:pPr>
             <a:r>
-              <a:rPr lang="en-US" altLang="en-US" sz="2200" b="1" dirty="0">
+              <a:rPr lang="en-US" altLang="en-US" sz="2000" b="1">
                 <a:latin typeface="Arial" charset="0"/>
                 <a:ea typeface="ＭＳ Ｐゴシック" charset="-128"/>
               </a:rPr>
@@ -8091,7 +12808,10 @@
           </p:nvPr>
         </p:nvSpPr>
         <p:spPr bwMode="auto">
-          <a:noFill/>
+          <a:xfrm>
+            <a:off x="11704320" y="6455664"/>
+            <a:ext cx="448056" cy="365125"/>
+          </a:xfrm>
           <a:extLst>
             <a:ext uri="{909E8E84-426E-40DD-AFC4-6F175D3DCCD1}">
               <a14:hiddenFill xmlns:a14="http://schemas.microsoft.com/office/drawing/2010/main">
@@ -8113,7 +12833,9 @@
           </a:extLst>
         </p:spPr>
         <p:txBody>
-          <a:bodyPr/>
+          <a:bodyPr>
+            <a:normAutofit/>
+          </a:bodyPr>
           <a:lstStyle>
             <a:lvl1pPr>
               <a:spcBef>
@@ -8259,23 +12981,41 @@
               <a:spcBef>
                 <a:spcPct val="0"/>
               </a:spcBef>
+              <a:spcAft>
+                <a:spcPts val="600"/>
+              </a:spcAft>
               <a:buFontTx/>
               <a:buNone/>
             </a:pPr>
             <a:fld id="{5FFBD19C-0837-4B06-8FC3-FC03CA96E851}" type="slidenum">
-              <a:rPr lang="en-US" altLang="en-US" sz="1400" smtClean="0">
+              <a:rPr lang="en-US" altLang="en-US" sz="1100">
+                <a:solidFill>
+                  <a:schemeClr val="tx1">
+                    <a:lumMod val="50000"/>
+                    <a:lumOff val="50000"/>
+                  </a:schemeClr>
+                </a:solidFill>
                 <a:latin typeface="Arial" panose="020B0604020202020204" pitchFamily="34" charset="0"/>
               </a:rPr>
               <a:pPr>
                 <a:spcBef>
                   <a:spcPct val="0"/>
                 </a:spcBef>
+                <a:spcAft>
+                  <a:spcPts val="600"/>
+                </a:spcAft>
                 <a:buFontTx/>
                 <a:buNone/>
               </a:pPr>
               <a:t>12</a:t>
             </a:fld>
-            <a:endParaRPr lang="en-US" altLang="en-US" sz="1400">
+            <a:endParaRPr lang="en-US" altLang="en-US" sz="1100">
+              <a:solidFill>
+                <a:schemeClr val="tx1">
+                  <a:lumMod val="50000"/>
+                  <a:lumOff val="50000"/>
+                </a:schemeClr>
+              </a:solidFill>
               <a:latin typeface="Arial" panose="020B0604020202020204" pitchFamily="34" charset="0"/>
             </a:endParaRPr>
           </a:p>
@@ -9921,8 +14661,8 @@
           </a:p>
         </p:txBody>
       </p:sp>
-      <mc:AlternateContent xmlns:mc="http://schemas.openxmlformats.org/markup-compatibility/2006">
-        <mc:Choice xmlns:p14="http://schemas.microsoft.com/office/powerpoint/2010/main" Requires="p14">
+      <mc:AlternateContent xmlns:mc="http://schemas.openxmlformats.org/markup-compatibility/2006" xmlns:p14="http://schemas.microsoft.com/office/powerpoint/2010/main">
+        <mc:Choice Requires="p14">
           <p:contentPart p14:bwMode="auto" r:id="rId3">
             <p14:nvContentPartPr>
               <p14:cNvPr id="4" name="Ink 3">
@@ -9941,7 +14681,7 @@
             </p14:xfrm>
           </p:contentPart>
         </mc:Choice>
-        <mc:Fallback>
+        <mc:Fallback xmlns="">
           <p:pic>
             <p:nvPicPr>
               <p:cNvPr id="4" name="Ink 3">
@@ -9972,8 +14712,8 @@
           </p:pic>
         </mc:Fallback>
       </mc:AlternateContent>
-      <mc:AlternateContent xmlns:mc="http://schemas.openxmlformats.org/markup-compatibility/2006">
-        <mc:Choice xmlns:p14="http://schemas.microsoft.com/office/powerpoint/2010/main" Requires="p14">
+      <mc:AlternateContent xmlns:mc="http://schemas.openxmlformats.org/markup-compatibility/2006" xmlns:p14="http://schemas.microsoft.com/office/powerpoint/2010/main">
+        <mc:Choice Requires="p14">
           <p:contentPart p14:bwMode="auto" r:id="rId5">
             <p14:nvContentPartPr>
               <p14:cNvPr id="5" name="Ink 4">
@@ -9992,7 +14732,7 @@
             </p14:xfrm>
           </p:contentPart>
         </mc:Choice>
-        <mc:Fallback>
+        <mc:Fallback xmlns="">
           <p:pic>
             <p:nvPicPr>
               <p:cNvPr id="5" name="Ink 4">
@@ -10023,8 +14763,8 @@
           </p:pic>
         </mc:Fallback>
       </mc:AlternateContent>
-      <mc:AlternateContent xmlns:mc="http://schemas.openxmlformats.org/markup-compatibility/2006">
-        <mc:Choice xmlns:p14="http://schemas.microsoft.com/office/powerpoint/2010/main" Requires="p14">
+      <mc:AlternateContent xmlns:mc="http://schemas.openxmlformats.org/markup-compatibility/2006" xmlns:p14="http://schemas.microsoft.com/office/powerpoint/2010/main">
+        <mc:Choice Requires="p14">
           <p:contentPart p14:bwMode="auto" r:id="rId6">
             <p14:nvContentPartPr>
               <p14:cNvPr id="6" name="Ink 5">
@@ -10043,7 +14783,7 @@
             </p14:xfrm>
           </p:contentPart>
         </mc:Choice>
-        <mc:Fallback>
+        <mc:Fallback xmlns="">
           <p:pic>
             <p:nvPicPr>
               <p:cNvPr id="6" name="Ink 5">
@@ -10074,8 +14814,8 @@
           </p:pic>
         </mc:Fallback>
       </mc:AlternateContent>
-      <mc:AlternateContent xmlns:mc="http://schemas.openxmlformats.org/markup-compatibility/2006">
-        <mc:Choice xmlns:p14="http://schemas.microsoft.com/office/powerpoint/2010/main" Requires="p14">
+      <mc:AlternateContent xmlns:mc="http://schemas.openxmlformats.org/markup-compatibility/2006" xmlns:p14="http://schemas.microsoft.com/office/powerpoint/2010/main">
+        <mc:Choice Requires="p14">
           <p:contentPart p14:bwMode="auto" r:id="rId8">
             <p14:nvContentPartPr>
               <p14:cNvPr id="7" name="Ink 6">
@@ -10094,7 +14834,7 @@
             </p14:xfrm>
           </p:contentPart>
         </mc:Choice>
-        <mc:Fallback>
+        <mc:Fallback xmlns="">
           <p:pic>
             <p:nvPicPr>
               <p:cNvPr id="7" name="Ink 6">
@@ -11736,6 +16476,14 @@
 <file path=ppt/slides/slide3.xml><?xml version="1.0" encoding="utf-8"?>
 <p:sld xmlns:a="http://schemas.openxmlformats.org/drawingml/2006/main" xmlns:r="http://schemas.openxmlformats.org/officeDocument/2006/relationships" xmlns:p="http://schemas.openxmlformats.org/presentationml/2006/main">
   <p:cSld>
+    <p:bg>
+      <p:bgPr>
+        <a:solidFill>
+          <a:schemeClr val="bg1"/>
+        </a:solidFill>
+        <a:effectLst/>
+      </p:bgPr>
+    </p:bg>
     <p:spTree>
       <p:nvGrpSpPr>
         <p:cNvPr id="1" name=""/>
@@ -11750,6 +16498,308 @@
           <a:chExt cx="0" cy="0"/>
         </a:xfrm>
       </p:grpSpPr>
+      <p:sp useBgFill="1">
+        <p:nvSpPr>
+          <p:cNvPr id="7179" name="Rectangle 7178">
+            <a:extLst>
+              <a:ext uri="{FF2B5EF4-FFF2-40B4-BE49-F238E27FC236}">
+                <a16:creationId xmlns:a16="http://schemas.microsoft.com/office/drawing/2014/main" id="{BACC6370-2D7E-4714-9D71-7542949D7D5D}"/>
+              </a:ext>
+              <a:ext uri="{C183D7F6-B498-43B3-948B-1728B52AA6E4}">
+                <adec:decorative xmlns:adec="http://schemas.microsoft.com/office/drawing/2017/decorative" val="1"/>
+              </a:ext>
+            </a:extLst>
+          </p:cNvPr>
+          <p:cNvSpPr>
+            <a:spLocks noGrp="1" noRot="1" noChangeAspect="1" noMove="1" noResize="1" noEditPoints="1" noAdjustHandles="1" noChangeArrowheads="1" noChangeShapeType="1" noTextEdit="1"/>
+          </p:cNvSpPr>
+          <p:nvPr>
+            <p:extLst>
+              <p:ext uri="{386F3935-93C4-4BCD-93E2-E3B085C9AB24}">
+                <p16:designElem xmlns:p16="http://schemas.microsoft.com/office/powerpoint/2015/main" val="1"/>
+              </p:ext>
+            </p:extLst>
+          </p:nvPr>
+        </p:nvSpPr>
+        <p:spPr>
+          <a:xfrm>
+            <a:off x="0" y="0"/>
+            <a:ext cx="12192000" cy="6858000"/>
+          </a:xfrm>
+          <a:prstGeom prst="rect">
+            <a:avLst/>
+          </a:prstGeom>
+          <a:ln w="12700" cap="flat" cmpd="sng" algn="ctr">
+            <a:noFill/>
+            <a:prstDash val="solid"/>
+            <a:miter lim="800000"/>
+          </a:ln>
+          <a:effectLst/>
+          <a:extLst>
+            <a:ext uri="{91240B29-F687-4F45-9708-019B960494DF}">
+              <a14:hiddenLine xmlns:a14="http://schemas.microsoft.com/office/drawing/2010/main" w="12700" cap="flat" cmpd="sng" algn="ctr">
+                <a:solidFill>
+                  <a:schemeClr val="accent1">
+                    <a:shade val="50000"/>
+                  </a:schemeClr>
+                </a:solidFill>
+                <a:prstDash val="solid"/>
+                <a:miter lim="800000"/>
+              </a14:hiddenLine>
+            </a:ext>
+          </a:extLst>
+        </p:spPr>
+        <p:style>
+          <a:lnRef idx="2">
+            <a:schemeClr val="accent1">
+              <a:shade val="50000"/>
+            </a:schemeClr>
+          </a:lnRef>
+          <a:fillRef idx="1">
+            <a:schemeClr val="accent1"/>
+          </a:fillRef>
+          <a:effectRef idx="0">
+            <a:schemeClr val="accent1"/>
+          </a:effectRef>
+          <a:fontRef idx="minor">
+            <a:schemeClr val="lt1"/>
+          </a:fontRef>
+        </p:style>
+        <p:txBody>
+          <a:bodyPr rtlCol="0" anchor="ctr"/>
+          <a:lstStyle/>
+          <a:p>
+            <a:pPr algn="ctr"/>
+            <a:endParaRPr lang="en-US"/>
+          </a:p>
+        </p:txBody>
+      </p:sp>
+      <p:sp>
+        <p:nvSpPr>
+          <p:cNvPr id="7181" name="Rectangle 7180">
+            <a:extLst>
+              <a:ext uri="{FF2B5EF4-FFF2-40B4-BE49-F238E27FC236}">
+                <a16:creationId xmlns:a16="http://schemas.microsoft.com/office/drawing/2014/main" id="{F68B3F68-107C-434F-AA38-110D5EA91B85}"/>
+              </a:ext>
+              <a:ext uri="{C183D7F6-B498-43B3-948B-1728B52AA6E4}">
+                <adec:decorative xmlns:adec="http://schemas.microsoft.com/office/drawing/2017/decorative" val="1"/>
+              </a:ext>
+            </a:extLst>
+          </p:cNvPr>
+          <p:cNvSpPr>
+            <a:spLocks noGrp="1" noRot="1" noChangeAspect="1" noMove="1" noResize="1" noEditPoints="1" noAdjustHandles="1" noChangeArrowheads="1" noChangeShapeType="1" noTextEdit="1"/>
+          </p:cNvSpPr>
+          <p:nvPr>
+            <p:extLst>
+              <p:ext uri="{386F3935-93C4-4BCD-93E2-E3B085C9AB24}">
+                <p16:designElem xmlns:p16="http://schemas.microsoft.com/office/powerpoint/2015/main" val="1"/>
+              </p:ext>
+            </p:extLst>
+          </p:nvPr>
+        </p:nvSpPr>
+        <p:spPr>
+          <a:xfrm flipH="1">
+            <a:off x="2" y="0"/>
+            <a:ext cx="12191998" cy="1575955"/>
+          </a:xfrm>
+          <a:prstGeom prst="rect">
+            <a:avLst/>
+          </a:prstGeom>
+          <a:gradFill>
+            <a:gsLst>
+              <a:gs pos="0">
+                <a:srgbClr val="000000">
+                  <a:alpha val="96000"/>
+                </a:srgbClr>
+              </a:gs>
+              <a:gs pos="100000">
+                <a:schemeClr val="accent1">
+                  <a:lumMod val="75000"/>
+                </a:schemeClr>
+              </a:gs>
+            </a:gsLst>
+            <a:lin ang="8400000" scaled="0"/>
+          </a:gradFill>
+          <a:ln>
+            <a:noFill/>
+          </a:ln>
+        </p:spPr>
+        <p:style>
+          <a:lnRef idx="2">
+            <a:schemeClr val="accent1">
+              <a:shade val="50000"/>
+            </a:schemeClr>
+          </a:lnRef>
+          <a:fillRef idx="1">
+            <a:schemeClr val="accent1"/>
+          </a:fillRef>
+          <a:effectRef idx="0">
+            <a:schemeClr val="accent1"/>
+          </a:effectRef>
+          <a:fontRef idx="minor">
+            <a:schemeClr val="lt1"/>
+          </a:fontRef>
+        </p:style>
+        <p:txBody>
+          <a:bodyPr rtlCol="0" anchor="ctr"/>
+          <a:lstStyle/>
+          <a:p>
+            <a:pPr algn="ctr"/>
+            <a:endParaRPr lang="en-US"/>
+          </a:p>
+        </p:txBody>
+      </p:sp>
+      <p:sp>
+        <p:nvSpPr>
+          <p:cNvPr id="7183" name="Rectangle 7182">
+            <a:extLst>
+              <a:ext uri="{FF2B5EF4-FFF2-40B4-BE49-F238E27FC236}">
+                <a16:creationId xmlns:a16="http://schemas.microsoft.com/office/drawing/2014/main" id="{AAD0DBB9-1A4B-4391-81D4-CB19F9AB918A}"/>
+              </a:ext>
+              <a:ext uri="{C183D7F6-B498-43B3-948B-1728B52AA6E4}">
+                <adec:decorative xmlns:adec="http://schemas.microsoft.com/office/drawing/2017/decorative" val="1"/>
+              </a:ext>
+            </a:extLst>
+          </p:cNvPr>
+          <p:cNvSpPr>
+            <a:spLocks noGrp="1" noRot="1" noChangeAspect="1" noMove="1" noResize="1" noEditPoints="1" noAdjustHandles="1" noChangeArrowheads="1" noChangeShapeType="1" noTextEdit="1"/>
+          </p:cNvSpPr>
+          <p:nvPr>
+            <p:extLst>
+              <p:ext uri="{386F3935-93C4-4BCD-93E2-E3B085C9AB24}">
+                <p16:designElem xmlns:p16="http://schemas.microsoft.com/office/powerpoint/2015/main" val="1"/>
+              </p:ext>
+            </p:extLst>
+          </p:nvPr>
+        </p:nvSpPr>
+        <p:spPr>
+          <a:xfrm rot="10800000" flipH="1">
+            <a:off x="8128857" y="0"/>
+            <a:ext cx="4063143" cy="1576412"/>
+          </a:xfrm>
+          <a:prstGeom prst="rect">
+            <a:avLst/>
+          </a:prstGeom>
+          <a:gradFill>
+            <a:gsLst>
+              <a:gs pos="19000">
+                <a:schemeClr val="accent1">
+                  <a:lumMod val="50000"/>
+                  <a:alpha val="68000"/>
+                </a:schemeClr>
+              </a:gs>
+              <a:gs pos="100000">
+                <a:schemeClr val="accent1">
+                  <a:alpha val="79000"/>
+                </a:schemeClr>
+              </a:gs>
+            </a:gsLst>
+            <a:lin ang="19200000" scaled="0"/>
+          </a:gradFill>
+          <a:ln>
+            <a:noFill/>
+          </a:ln>
+        </p:spPr>
+        <p:style>
+          <a:lnRef idx="2">
+            <a:schemeClr val="accent1">
+              <a:shade val="50000"/>
+            </a:schemeClr>
+          </a:lnRef>
+          <a:fillRef idx="1">
+            <a:schemeClr val="accent1"/>
+          </a:fillRef>
+          <a:effectRef idx="0">
+            <a:schemeClr val="accent1"/>
+          </a:effectRef>
+          <a:fontRef idx="minor">
+            <a:schemeClr val="lt1"/>
+          </a:fontRef>
+        </p:style>
+        <p:txBody>
+          <a:bodyPr rtlCol="0" anchor="ctr"/>
+          <a:lstStyle/>
+          <a:p>
+            <a:pPr algn="ctr"/>
+            <a:endParaRPr lang="en-US"/>
+          </a:p>
+        </p:txBody>
+      </p:sp>
+      <p:sp>
+        <p:nvSpPr>
+          <p:cNvPr id="7185" name="Rectangle 7184">
+            <a:extLst>
+              <a:ext uri="{FF2B5EF4-FFF2-40B4-BE49-F238E27FC236}">
+                <a16:creationId xmlns:a16="http://schemas.microsoft.com/office/drawing/2014/main" id="{063BBA22-50EA-4C4D-BE05-F1CE4E63AA56}"/>
+              </a:ext>
+              <a:ext uri="{C183D7F6-B498-43B3-948B-1728B52AA6E4}">
+                <adec:decorative xmlns:adec="http://schemas.microsoft.com/office/drawing/2017/decorative" val="1"/>
+              </a:ext>
+            </a:extLst>
+          </p:cNvPr>
+          <p:cNvSpPr>
+            <a:spLocks noGrp="1" noRot="1" noChangeAspect="1" noMove="1" noResize="1" noEditPoints="1" noAdjustHandles="1" noChangeArrowheads="1" noChangeShapeType="1" noTextEdit="1"/>
+          </p:cNvSpPr>
+          <p:nvPr>
+            <p:extLst>
+              <p:ext uri="{386F3935-93C4-4BCD-93E2-E3B085C9AB24}">
+                <p16:designElem xmlns:p16="http://schemas.microsoft.com/office/powerpoint/2015/main" val="1"/>
+              </p:ext>
+            </p:extLst>
+          </p:nvPr>
+        </p:nvSpPr>
+        <p:spPr>
+          <a:xfrm rot="5400000">
+            <a:off x="5307777" y="-5307778"/>
+            <a:ext cx="1576446" cy="12192002"/>
+          </a:xfrm>
+          <a:prstGeom prst="rect">
+            <a:avLst/>
+          </a:prstGeom>
+          <a:gradFill>
+            <a:gsLst>
+              <a:gs pos="23000">
+                <a:schemeClr val="accent1">
+                  <a:alpha val="0"/>
+                </a:schemeClr>
+              </a:gs>
+              <a:gs pos="99000">
+                <a:srgbClr val="000000">
+                  <a:alpha val="74000"/>
+                </a:srgbClr>
+              </a:gs>
+            </a:gsLst>
+            <a:lin ang="20400000" scaled="0"/>
+          </a:gradFill>
+          <a:ln>
+            <a:noFill/>
+          </a:ln>
+        </p:spPr>
+        <p:style>
+          <a:lnRef idx="2">
+            <a:schemeClr val="accent1">
+              <a:shade val="50000"/>
+            </a:schemeClr>
+          </a:lnRef>
+          <a:fillRef idx="1">
+            <a:schemeClr val="accent1"/>
+          </a:fillRef>
+          <a:effectRef idx="0">
+            <a:schemeClr val="accent1"/>
+          </a:effectRef>
+          <a:fontRef idx="minor">
+            <a:schemeClr val="lt1"/>
+          </a:fontRef>
+        </p:style>
+        <p:txBody>
+          <a:bodyPr rtlCol="0" anchor="ctr"/>
+          <a:lstStyle/>
+          <a:p>
+            <a:pPr algn="ctr"/>
+            <a:endParaRPr lang="en-US" dirty="0"/>
+          </a:p>
+        </p:txBody>
+      </p:sp>
       <p:sp>
         <p:nvSpPr>
           <p:cNvPr id="7170" name="Title 1">
@@ -11768,19 +16818,29 @@
         </p:nvSpPr>
         <p:spPr>
           <a:xfrm>
-            <a:off x="2514600" y="274638"/>
-            <a:ext cx="7086600" cy="1143000"/>
+            <a:off x="1371597" y="348865"/>
+            <a:ext cx="10044023" cy="877729"/>
           </a:xfrm>
         </p:spPr>
         <p:txBody>
-          <a:bodyPr/>
+          <a:bodyPr vert="horz" lIns="91440" tIns="45720" rIns="91440" bIns="45720" rtlCol="0" anchor="ctr">
+            <a:normAutofit/>
+          </a:bodyPr>
           <a:lstStyle/>
           <a:p>
-            <a:pPr eaLnBrk="1" hangingPunct="1"/>
+            <a:pPr algn="l" defTabSz="914400" eaLnBrk="1" hangingPunct="1">
+              <a:lnSpc>
+                <a:spcPct val="90000"/>
+              </a:lnSpc>
+            </a:pPr>
             <a:r>
-              <a:rPr lang="en-US" altLang="en-US" sz="3200">
-                <a:latin typeface="Arial" panose="020B0604020202020204" pitchFamily="34" charset="0"/>
-                <a:ea typeface="ＭＳ Ｐゴシック" panose="020B0600070205080204" pitchFamily="34" charset="-128"/>
+              <a:rPr lang="en-US" altLang="en-US" sz="4000" kern="1200">
+                <a:solidFill>
+                  <a:srgbClr val="FFFFFF"/>
+                </a:solidFill>
+                <a:latin typeface="+mj-lt"/>
+                <a:ea typeface="+mj-ea"/>
+                <a:cs typeface="+mj-cs"/>
               </a:rPr>
               <a:t>Sample App 1 – Version 2</a:t>
             </a:r>
@@ -11804,7 +16864,10 @@
           </p:nvPr>
         </p:nvSpPr>
         <p:spPr bwMode="auto">
-          <a:noFill/>
+          <a:xfrm rot="5400000">
+            <a:off x="-1828800" y="1984248"/>
+            <a:ext cx="4114800" cy="365125"/>
+          </a:xfrm>
           <a:extLst>
             <a:ext uri="{909E8E84-426E-40DD-AFC4-6F175D3DCCD1}">
               <a14:hiddenFill xmlns:a14="http://schemas.microsoft.com/office/drawing/2010/main">
@@ -11826,10 +16889,11 @@
           </a:extLst>
         </p:spPr>
         <p:txBody>
-          <a:bodyPr wrap="square" numCol="1" anchorCtr="0" compatLnSpc="1">
+          <a:bodyPr vert="horz" lIns="91440" tIns="45720" rIns="91440" bIns="45720" numCol="1" rtlCol="0" anchor="ctr" anchorCtr="0" compatLnSpc="1">
             <a:prstTxWarp prst="textNoShape">
               <a:avLst/>
             </a:prstTxWarp>
+            <a:normAutofit/>
           </a:bodyPr>
           <a:lstStyle>
             <a:lvl1pPr>
@@ -11972,18 +17036,20 @@
             </a:lvl9pPr>
           </a:lstStyle>
           <a:p>
-            <a:pPr>
+            <a:pPr algn="l">
               <a:spcBef>
                 <a:spcPct val="0"/>
               </a:spcBef>
               <a:buFontTx/>
               <a:buNone/>
             </a:pPr>
-            <a:endParaRPr lang="en-US" altLang="en-US" sz="1200">
+            <a:endParaRPr lang="en-US" altLang="en-US" sz="1100" kern="1200">
               <a:solidFill>
-                <a:schemeClr val="bg2"/>
+                <a:srgbClr val="FFFFFF"/>
               </a:solidFill>
-              <a:latin typeface="Arial" panose="020B0604020202020204" pitchFamily="34" charset="0"/>
+              <a:latin typeface="+mn-lt"/>
+              <a:ea typeface="+mn-ea"/>
+              <a:cs typeface="+mn-cs"/>
             </a:endParaRPr>
           </a:p>
         </p:txBody>
@@ -12005,7 +17071,10 @@
           </p:nvPr>
         </p:nvSpPr>
         <p:spPr bwMode="auto">
-          <a:noFill/>
+          <a:xfrm>
+            <a:off x="11704320" y="6455664"/>
+            <a:ext cx="448056" cy="365125"/>
+          </a:xfrm>
           <a:extLst>
             <a:ext uri="{909E8E84-426E-40DD-AFC4-6F175D3DCCD1}">
               <a14:hiddenFill xmlns:a14="http://schemas.microsoft.com/office/drawing/2010/main">
@@ -12027,7 +17096,9 @@
           </a:extLst>
         </p:spPr>
         <p:txBody>
-          <a:bodyPr/>
+          <a:bodyPr vert="horz" lIns="91440" tIns="45720" rIns="91440" bIns="45720" rtlCol="0" anchor="ctr">
+            <a:normAutofit/>
+          </a:bodyPr>
           <a:lstStyle>
             <a:lvl1pPr>
               <a:spcBef>
@@ -12173,540 +17244,51 @@
               <a:spcBef>
                 <a:spcPct val="0"/>
               </a:spcBef>
+              <a:spcAft>
+                <a:spcPts val="600"/>
+              </a:spcAft>
               <a:buFontTx/>
               <a:buNone/>
             </a:pPr>
             <a:fld id="{2B58FA62-E281-4DD2-8A2D-C36F87627FFC}" type="slidenum">
-              <a:rPr lang="en-US" altLang="en-US" sz="1400" smtClean="0">
-                <a:latin typeface="Arial" panose="020B0604020202020204" pitchFamily="34" charset="0"/>
+              <a:rPr lang="en-US" altLang="en-US" sz="1100">
+                <a:solidFill>
+                  <a:schemeClr val="tx1">
+                    <a:lumMod val="50000"/>
+                    <a:lumOff val="50000"/>
+                  </a:schemeClr>
+                </a:solidFill>
+                <a:latin typeface="+mn-lt"/>
+                <a:ea typeface="+mn-ea"/>
               </a:rPr>
               <a:pPr>
                 <a:spcBef>
                   <a:spcPct val="0"/>
                 </a:spcBef>
+                <a:spcAft>
+                  <a:spcPts val="600"/>
+                </a:spcAft>
                 <a:buFontTx/>
                 <a:buNone/>
               </a:pPr>
               <a:t>3</a:t>
             </a:fld>
-            <a:endParaRPr lang="en-US" altLang="en-US" sz="1400">
-              <a:latin typeface="Arial" panose="020B0604020202020204" pitchFamily="34" charset="0"/>
+            <a:endParaRPr lang="en-US" altLang="en-US" sz="1100">
+              <a:solidFill>
+                <a:schemeClr val="tx1">
+                  <a:lumMod val="50000"/>
+                  <a:lumOff val="50000"/>
+                </a:schemeClr>
+              </a:solidFill>
+              <a:latin typeface="+mn-lt"/>
+              <a:ea typeface="+mn-ea"/>
             </a:endParaRPr>
           </a:p>
         </p:txBody>
       </p:sp>
-      <p:sp>
-        <p:nvSpPr>
-          <p:cNvPr id="9" name="Content Placeholder 2">
-            <a:extLst>
-              <a:ext uri="{FF2B5EF4-FFF2-40B4-BE49-F238E27FC236}">
-                <a16:creationId xmlns:a16="http://schemas.microsoft.com/office/drawing/2014/main" id="{E0484465-3D20-E815-27D6-10BA6A55F877}"/>
-              </a:ext>
-            </a:extLst>
-          </p:cNvPr>
-          <p:cNvSpPr txBox="1">
-            <a:spLocks/>
-          </p:cNvSpPr>
-          <p:nvPr/>
-        </p:nvSpPr>
-        <p:spPr bwMode="auto">
-          <a:xfrm>
-            <a:off x="5934075" y="1454150"/>
-            <a:ext cx="4038600" cy="4221163"/>
-          </a:xfrm>
-          <a:prstGeom prst="rect">
-            <a:avLst/>
-          </a:prstGeom>
-          <a:noFill/>
-          <a:ln>
-            <a:noFill/>
-          </a:ln>
-        </p:spPr>
-        <p:txBody>
-          <a:bodyPr>
-            <a:normAutofit lnSpcReduction="10000"/>
-          </a:bodyPr>
-          <a:lstStyle>
-            <a:lvl1pPr marL="342900" indent="-342900" algn="l" defTabSz="457200" rtl="0" eaLnBrk="0" fontAlgn="base" hangingPunct="0">
-              <a:spcBef>
-                <a:spcPct val="20000"/>
-              </a:spcBef>
-              <a:spcAft>
-                <a:spcPct val="0"/>
-              </a:spcAft>
-              <a:buFont typeface="Arial" panose="020B0604020202020204" pitchFamily="34" charset="0"/>
-              <a:buChar char="•"/>
-              <a:defRPr sz="3200" kern="1200">
-                <a:solidFill>
-                  <a:schemeClr val="tx1"/>
-                </a:solidFill>
-                <a:latin typeface="+mn-lt"/>
-                <a:ea typeface="ＭＳ Ｐゴシック" charset="0"/>
-                <a:cs typeface="ＭＳ Ｐゴシック" charset="0"/>
-              </a:defRPr>
-            </a:lvl1pPr>
-            <a:lvl2pPr marL="742950" indent="-285750" algn="l" defTabSz="457200" rtl="0" eaLnBrk="0" fontAlgn="base" hangingPunct="0">
-              <a:spcBef>
-                <a:spcPct val="20000"/>
-              </a:spcBef>
-              <a:spcAft>
-                <a:spcPct val="0"/>
-              </a:spcAft>
-              <a:buFont typeface="Arial" panose="020B0604020202020204" pitchFamily="34" charset="0"/>
-              <a:buChar char="–"/>
-              <a:defRPr sz="2800" kern="1200">
-                <a:solidFill>
-                  <a:schemeClr val="tx1"/>
-                </a:solidFill>
-                <a:latin typeface="+mn-lt"/>
-                <a:ea typeface="ＭＳ Ｐゴシック" charset="0"/>
-                <a:cs typeface="+mn-cs"/>
-              </a:defRPr>
-            </a:lvl2pPr>
-            <a:lvl3pPr marL="1143000" indent="-228600" algn="l" defTabSz="457200" rtl="0" eaLnBrk="0" fontAlgn="base" hangingPunct="0">
-              <a:spcBef>
-                <a:spcPct val="20000"/>
-              </a:spcBef>
-              <a:spcAft>
-                <a:spcPct val="0"/>
-              </a:spcAft>
-              <a:buFont typeface="Arial" panose="020B0604020202020204" pitchFamily="34" charset="0"/>
-              <a:buChar char="•"/>
-              <a:defRPr sz="2400" kern="1200">
-                <a:solidFill>
-                  <a:schemeClr val="tx1"/>
-                </a:solidFill>
-                <a:latin typeface="+mn-lt"/>
-                <a:ea typeface="ＭＳ Ｐゴシック" charset="0"/>
-                <a:cs typeface="+mn-cs"/>
-              </a:defRPr>
-            </a:lvl3pPr>
-            <a:lvl4pPr marL="1600200" indent="-228600" algn="l" defTabSz="457200" rtl="0" eaLnBrk="0" fontAlgn="base" hangingPunct="0">
-              <a:spcBef>
-                <a:spcPct val="20000"/>
-              </a:spcBef>
-              <a:spcAft>
-                <a:spcPct val="0"/>
-              </a:spcAft>
-              <a:buFont typeface="Arial" panose="020B0604020202020204" pitchFamily="34" charset="0"/>
-              <a:buChar char="–"/>
-              <a:defRPr sz="2000" kern="1200">
-                <a:solidFill>
-                  <a:schemeClr val="tx1"/>
-                </a:solidFill>
-                <a:latin typeface="+mn-lt"/>
-                <a:ea typeface="ＭＳ Ｐゴシック" charset="0"/>
-                <a:cs typeface="+mn-cs"/>
-              </a:defRPr>
-            </a:lvl4pPr>
-            <a:lvl5pPr marL="2057400" indent="-228600" algn="l" defTabSz="457200" rtl="0" eaLnBrk="0" fontAlgn="base" hangingPunct="0">
-              <a:spcBef>
-                <a:spcPct val="20000"/>
-              </a:spcBef>
-              <a:spcAft>
-                <a:spcPct val="0"/>
-              </a:spcAft>
-              <a:buFont typeface="Arial" panose="020B0604020202020204" pitchFamily="34" charset="0"/>
-              <a:buChar char="»"/>
-              <a:defRPr sz="2000" kern="1200">
-                <a:solidFill>
-                  <a:schemeClr val="tx1"/>
-                </a:solidFill>
-                <a:latin typeface="+mn-lt"/>
-                <a:ea typeface="ＭＳ Ｐゴシック" charset="0"/>
-                <a:cs typeface="+mn-cs"/>
-              </a:defRPr>
-            </a:lvl5pPr>
-            <a:lvl6pPr marL="2514600" indent="-228600" algn="l" defTabSz="457200" rtl="0" eaLnBrk="1" latinLnBrk="0" hangingPunct="1">
-              <a:spcBef>
-                <a:spcPct val="20000"/>
-              </a:spcBef>
-              <a:buFont typeface="Arial"/>
-              <a:buChar char="•"/>
-              <a:defRPr sz="2000" kern="1200">
-                <a:solidFill>
-                  <a:schemeClr val="tx1"/>
-                </a:solidFill>
-                <a:latin typeface="+mn-lt"/>
-                <a:ea typeface="+mn-ea"/>
-                <a:cs typeface="+mn-cs"/>
-              </a:defRPr>
-            </a:lvl6pPr>
-            <a:lvl7pPr marL="2971800" indent="-228600" algn="l" defTabSz="457200" rtl="0" eaLnBrk="1" latinLnBrk="0" hangingPunct="1">
-              <a:spcBef>
-                <a:spcPct val="20000"/>
-              </a:spcBef>
-              <a:buFont typeface="Arial"/>
-              <a:buChar char="•"/>
-              <a:defRPr sz="2000" kern="1200">
-                <a:solidFill>
-                  <a:schemeClr val="tx1"/>
-                </a:solidFill>
-                <a:latin typeface="+mn-lt"/>
-                <a:ea typeface="+mn-ea"/>
-                <a:cs typeface="+mn-cs"/>
-              </a:defRPr>
-            </a:lvl7pPr>
-            <a:lvl8pPr marL="3429000" indent="-228600" algn="l" defTabSz="457200" rtl="0" eaLnBrk="1" latinLnBrk="0" hangingPunct="1">
-              <a:spcBef>
-                <a:spcPct val="20000"/>
-              </a:spcBef>
-              <a:buFont typeface="Arial"/>
-              <a:buChar char="•"/>
-              <a:defRPr sz="2000" kern="1200">
-                <a:solidFill>
-                  <a:schemeClr val="tx1"/>
-                </a:solidFill>
-                <a:latin typeface="+mn-lt"/>
-                <a:ea typeface="+mn-ea"/>
-                <a:cs typeface="+mn-cs"/>
-              </a:defRPr>
-            </a:lvl8pPr>
-            <a:lvl9pPr marL="3886200" indent="-228600" algn="l" defTabSz="457200" rtl="0" eaLnBrk="1" latinLnBrk="0" hangingPunct="1">
-              <a:spcBef>
-                <a:spcPct val="20000"/>
-              </a:spcBef>
-              <a:buFont typeface="Arial"/>
-              <a:buChar char="•"/>
-              <a:defRPr sz="2000" kern="1200">
-                <a:solidFill>
-                  <a:schemeClr val="tx1"/>
-                </a:solidFill>
-                <a:latin typeface="+mn-lt"/>
-                <a:ea typeface="+mn-ea"/>
-                <a:cs typeface="+mn-cs"/>
-              </a:defRPr>
-            </a:lvl9pPr>
-          </a:lstStyle>
-          <a:p>
-            <a:pPr eaLnBrk="1" fontAlgn="auto" hangingPunct="1">
-              <a:spcAft>
-                <a:spcPts val="0"/>
-              </a:spcAft>
-              <a:buFont typeface="Arial"/>
-              <a:buChar char="•"/>
-              <a:defRPr/>
-            </a:pPr>
-            <a:endParaRPr lang="en-US" sz="2000" b="1" dirty="0">
-              <a:latin typeface="Arial" charset="0"/>
-              <a:ea typeface="+mn-ea"/>
-              <a:cs typeface="+mn-cs"/>
-            </a:endParaRPr>
-          </a:p>
-          <a:p>
-            <a:pPr eaLnBrk="1" hangingPunct="1">
-              <a:lnSpc>
-                <a:spcPct val="70000"/>
-              </a:lnSpc>
-              <a:defRPr/>
-            </a:pPr>
-            <a:r>
-              <a:rPr lang="en-US" altLang="en-US" sz="2000" b="1" dirty="0">
-                <a:latin typeface="Arial" panose="020B0604020202020204" pitchFamily="34" charset="0"/>
-                <a:ea typeface="ＭＳ Ｐゴシック" panose="020B0600070205080204" pitchFamily="34" charset="-128"/>
-              </a:rPr>
-              <a:t>App UI changes:</a:t>
-            </a:r>
-          </a:p>
-          <a:p>
-            <a:pPr eaLnBrk="1" hangingPunct="1">
-              <a:lnSpc>
-                <a:spcPct val="70000"/>
-              </a:lnSpc>
-              <a:defRPr/>
-            </a:pPr>
-            <a:endParaRPr lang="en-US" altLang="en-US" sz="2000" b="1" dirty="0">
-              <a:latin typeface="Arial" panose="020B0604020202020204" pitchFamily="34" charset="0"/>
-              <a:ea typeface="ＭＳ Ｐゴシック" panose="020B0600070205080204" pitchFamily="34" charset="-128"/>
-            </a:endParaRPr>
-          </a:p>
-          <a:p>
-            <a:pPr marL="857250" lvl="1" indent="-457200" eaLnBrk="1" hangingPunct="1">
-              <a:lnSpc>
-                <a:spcPct val="70000"/>
-              </a:lnSpc>
-              <a:buFont typeface="+mj-lt"/>
-              <a:buAutoNum type="arabicPeriod"/>
-              <a:defRPr/>
-            </a:pPr>
-            <a:r>
-              <a:rPr lang="en-US" altLang="en-US" sz="2000" b="1" dirty="0">
-                <a:latin typeface="Arial" panose="020B0604020202020204" pitchFamily="34" charset="0"/>
-                <a:ea typeface="ＭＳ Ｐゴシック" panose="020B0600070205080204" pitchFamily="34" charset="-128"/>
-              </a:rPr>
-              <a:t>A ‘Reset’ button – loads a new list of friends (overwriting the current list).</a:t>
-            </a:r>
-          </a:p>
-          <a:p>
-            <a:pPr marL="857250" lvl="1" indent="-457200" eaLnBrk="1" hangingPunct="1">
-              <a:lnSpc>
-                <a:spcPct val="70000"/>
-              </a:lnSpc>
-              <a:buFont typeface="+mj-lt"/>
-              <a:buAutoNum type="arabicPeriod"/>
-              <a:defRPr/>
-            </a:pPr>
-            <a:r>
-              <a:rPr lang="en-US" altLang="en-US" sz="2000" b="1" dirty="0">
-                <a:latin typeface="Arial" panose="020B0604020202020204" pitchFamily="34" charset="0"/>
-                <a:ea typeface="ＭＳ Ｐゴシック" panose="020B0600070205080204" pitchFamily="34" charset="-128"/>
-              </a:rPr>
-              <a:t>Combine Reset button and search text into a new component, </a:t>
-            </a:r>
-            <a:r>
-              <a:rPr lang="en-US" altLang="en-US" sz="2000" b="1" dirty="0" err="1">
-                <a:latin typeface="Arial" panose="020B0604020202020204" pitchFamily="34" charset="0"/>
-                <a:ea typeface="ＭＳ Ｐゴシック" panose="020B0600070205080204" pitchFamily="34" charset="-128"/>
-              </a:rPr>
-              <a:t>SearchBox</a:t>
-            </a:r>
-            <a:r>
-              <a:rPr lang="en-US" altLang="en-US" sz="2000" b="1" dirty="0">
-                <a:latin typeface="Arial" panose="020B0604020202020204" pitchFamily="34" charset="0"/>
-                <a:ea typeface="ＭＳ Ｐゴシック" panose="020B0600070205080204" pitchFamily="34" charset="-128"/>
-              </a:rPr>
-              <a:t>.</a:t>
-            </a:r>
-          </a:p>
-          <a:p>
-            <a:pPr marL="857250" lvl="1" indent="-457200" eaLnBrk="1" hangingPunct="1">
-              <a:lnSpc>
-                <a:spcPct val="70000"/>
-              </a:lnSpc>
-              <a:buFont typeface="+mj-lt"/>
-              <a:buAutoNum type="arabicPeriod"/>
-              <a:defRPr/>
-            </a:pPr>
-            <a:endParaRPr lang="en-US" altLang="en-US" sz="2000" b="1" dirty="0">
-              <a:latin typeface="Arial" panose="020B0604020202020204" pitchFamily="34" charset="0"/>
-              <a:ea typeface="ＭＳ Ｐゴシック" panose="020B0600070205080204" pitchFamily="34" charset="-128"/>
-            </a:endParaRPr>
-          </a:p>
-          <a:p>
-            <a:pPr marL="857250" lvl="1" indent="-457200" eaLnBrk="1" hangingPunct="1">
-              <a:lnSpc>
-                <a:spcPct val="70000"/>
-              </a:lnSpc>
-              <a:buFont typeface="+mj-lt"/>
-              <a:buAutoNum type="arabicPeriod"/>
-              <a:defRPr/>
-            </a:pPr>
-            <a:r>
-              <a:rPr lang="en-US" altLang="en-US" sz="2000" b="1" dirty="0">
-                <a:latin typeface="Arial" panose="020B0604020202020204" pitchFamily="34" charset="0"/>
-                <a:ea typeface="ＭＳ Ｐゴシック" panose="020B0600070205080204" pitchFamily="34" charset="-128"/>
-              </a:rPr>
-              <a:t>Browser tab title - shows # of matching friends (side effect).</a:t>
-            </a:r>
-          </a:p>
-          <a:p>
-            <a:pPr marL="857250" lvl="1" indent="-457200" eaLnBrk="1" hangingPunct="1">
-              <a:lnSpc>
-                <a:spcPct val="70000"/>
-              </a:lnSpc>
-              <a:buFont typeface="+mj-lt"/>
-              <a:buAutoNum type="arabicPeriod"/>
-              <a:defRPr/>
-            </a:pPr>
-            <a:endParaRPr lang="en-US" altLang="en-US" sz="2000" b="1" dirty="0">
-              <a:latin typeface="Arial" panose="020B0604020202020204" pitchFamily="34" charset="0"/>
-              <a:ea typeface="ＭＳ Ｐゴシック" panose="020B0600070205080204" pitchFamily="34" charset="-128"/>
-            </a:endParaRPr>
-          </a:p>
-          <a:p>
-            <a:pPr marL="457200" indent="-457200" eaLnBrk="1" hangingPunct="1">
-              <a:lnSpc>
-                <a:spcPct val="70000"/>
-              </a:lnSpc>
-              <a:defRPr/>
-            </a:pPr>
-            <a:r>
-              <a:rPr lang="en-US" altLang="en-US" sz="2000" b="1" dirty="0">
-                <a:latin typeface="Arial" panose="020B0604020202020204" pitchFamily="34" charset="0"/>
-                <a:ea typeface="ＭＳ Ｐゴシック" panose="020B0600070205080204" pitchFamily="34" charset="-128"/>
-              </a:rPr>
-              <a:t>Ref. lecture archive for source code</a:t>
-            </a:r>
-          </a:p>
-          <a:p>
-            <a:pPr eaLnBrk="1" fontAlgn="auto" hangingPunct="1">
-              <a:spcAft>
-                <a:spcPts val="0"/>
-              </a:spcAft>
-              <a:buFont typeface="Arial"/>
-              <a:buChar char="•"/>
-              <a:defRPr/>
-            </a:pPr>
-            <a:endParaRPr lang="en-US" sz="2000" b="1" dirty="0">
-              <a:latin typeface="Arial" charset="0"/>
-              <a:ea typeface="+mn-ea"/>
-              <a:cs typeface="+mn-cs"/>
-            </a:endParaRPr>
-          </a:p>
-        </p:txBody>
-      </p:sp>
-      <p:sp>
-        <p:nvSpPr>
-          <p:cNvPr id="2" name="Rectangle: Rounded Corners 1">
-            <a:extLst>
-              <a:ext uri="{FF2B5EF4-FFF2-40B4-BE49-F238E27FC236}">
-                <a16:creationId xmlns:a16="http://schemas.microsoft.com/office/drawing/2014/main" id="{D8447863-5166-AE05-5195-0FA23D4A1138}"/>
-              </a:ext>
-            </a:extLst>
-          </p:cNvPr>
-          <p:cNvSpPr/>
-          <p:nvPr/>
-        </p:nvSpPr>
-        <p:spPr>
-          <a:xfrm>
-            <a:off x="2189163" y="3138564"/>
-            <a:ext cx="1981200" cy="457200"/>
-          </a:xfrm>
-          <a:prstGeom prst="roundRect">
-            <a:avLst/>
-          </a:prstGeom>
-          <a:noFill/>
-          <a:ln w="25400">
-            <a:solidFill>
-              <a:srgbClr val="FF0000"/>
-            </a:solidFill>
-          </a:ln>
-        </p:spPr>
-        <p:style>
-          <a:lnRef idx="1">
-            <a:schemeClr val="accent1"/>
-          </a:lnRef>
-          <a:fillRef idx="3">
-            <a:schemeClr val="accent1"/>
-          </a:fillRef>
-          <a:effectRef idx="2">
-            <a:schemeClr val="accent1"/>
-          </a:effectRef>
-          <a:fontRef idx="minor">
-            <a:schemeClr val="lt1"/>
-          </a:fontRef>
-        </p:style>
-        <p:txBody>
-          <a:bodyPr rtlCol="0" anchor="ctr"/>
-          <a:lstStyle/>
-          <a:p>
-            <a:pPr algn="ctr"/>
-            <a:endParaRPr lang="en-IE"/>
-          </a:p>
-        </p:txBody>
-      </p:sp>
-      <p:sp>
-        <p:nvSpPr>
-          <p:cNvPr id="3" name="Content Placeholder 2">
-            <a:extLst>
-              <a:ext uri="{FF2B5EF4-FFF2-40B4-BE49-F238E27FC236}">
-                <a16:creationId xmlns:a16="http://schemas.microsoft.com/office/drawing/2014/main" id="{8A631232-167B-9CCA-F902-7F6C3B92A5D7}"/>
-              </a:ext>
-            </a:extLst>
-          </p:cNvPr>
-          <p:cNvSpPr>
-            <a:spLocks noGrp="1"/>
-          </p:cNvSpPr>
-          <p:nvPr>
-            <p:ph idx="1"/>
-          </p:nvPr>
-        </p:nvSpPr>
-        <p:spPr/>
-        <p:txBody>
-          <a:bodyPr/>
-          <a:lstStyle/>
-          <a:p>
-            <a:endParaRPr lang="en-IE" dirty="0"/>
-          </a:p>
-        </p:txBody>
-      </p:sp>
-      <p:pic>
-        <p:nvPicPr>
-          <p:cNvPr id="7" name="Picture 6">
-            <a:extLst>
-              <a:ext uri="{FF2B5EF4-FFF2-40B4-BE49-F238E27FC236}">
-                <a16:creationId xmlns:a16="http://schemas.microsoft.com/office/drawing/2014/main" id="{3DEB2BB0-7639-56A1-5F2E-5B1B66773E8C}"/>
-              </a:ext>
-            </a:extLst>
-          </p:cNvPr>
-          <p:cNvPicPr>
-            <a:picLocks noChangeAspect="1"/>
-          </p:cNvPicPr>
-          <p:nvPr/>
-        </p:nvPicPr>
-        <p:blipFill rotWithShape="1">
-          <a:blip r:embed="rId2"/>
-          <a:srcRect b="13142"/>
-          <a:stretch/>
-        </p:blipFill>
-        <p:spPr>
-          <a:xfrm>
-            <a:off x="1655763" y="1330162"/>
-            <a:ext cx="3178176" cy="5146434"/>
-          </a:xfrm>
-          <a:prstGeom prst="rect">
-            <a:avLst/>
-          </a:prstGeom>
-          <a:ln w="15875">
-            <a:solidFill>
-              <a:schemeClr val="tx1"/>
-            </a:solidFill>
-          </a:ln>
-        </p:spPr>
-      </p:pic>
-      <p:sp>
-        <p:nvSpPr>
-          <p:cNvPr id="11" name="Rectangle: Rounded Corners 10">
-            <a:extLst>
-              <a:ext uri="{FF2B5EF4-FFF2-40B4-BE49-F238E27FC236}">
-                <a16:creationId xmlns:a16="http://schemas.microsoft.com/office/drawing/2014/main" id="{B5742C53-6A0B-5A63-C26D-5DB798A5C210}"/>
-              </a:ext>
-            </a:extLst>
-          </p:cNvPr>
-          <p:cNvSpPr/>
-          <p:nvPr/>
-        </p:nvSpPr>
-        <p:spPr>
-          <a:xfrm>
-            <a:off x="1601789" y="3900564"/>
-            <a:ext cx="2644774" cy="685800"/>
-          </a:xfrm>
-          <a:prstGeom prst="roundRect">
-            <a:avLst/>
-          </a:prstGeom>
-          <a:noFill/>
-          <a:ln w="25400">
-            <a:solidFill>
-              <a:srgbClr val="FF0000"/>
-            </a:solidFill>
-          </a:ln>
-        </p:spPr>
-        <p:style>
-          <a:lnRef idx="1">
-            <a:schemeClr val="accent1"/>
-          </a:lnRef>
-          <a:fillRef idx="3">
-            <a:schemeClr val="accent1"/>
-          </a:fillRef>
-          <a:effectRef idx="2">
-            <a:schemeClr val="accent1"/>
-          </a:effectRef>
-          <a:fontRef idx="minor">
-            <a:schemeClr val="lt1"/>
-          </a:fontRef>
-        </p:style>
-        <p:txBody>
-          <a:bodyPr rtlCol="0" anchor="ctr"/>
-          <a:lstStyle/>
-          <a:p>
-            <a:pPr algn="ctr"/>
-            <a:endParaRPr lang="en-IE"/>
-          </a:p>
-        </p:txBody>
-      </p:sp>
-      <mc:AlternateContent xmlns:mc="http://schemas.openxmlformats.org/markup-compatibility/2006">
-        <mc:Choice xmlns:p14="http://schemas.microsoft.com/office/powerpoint/2010/main" xmlns:aink="http://schemas.microsoft.com/office/drawing/2016/ink" Requires="p14 aink">
-          <p:contentPart p14:bwMode="auto" r:id="rId3">
+      <mc:AlternateContent xmlns:mc="http://schemas.openxmlformats.org/markup-compatibility/2006" xmlns:p14="http://schemas.microsoft.com/office/powerpoint/2010/main" xmlns:aink="http://schemas.microsoft.com/office/drawing/2016/ink">
+        <mc:Choice Requires="p14 aink">
+          <p:contentPart p14:bwMode="auto" r:id="rId2">
             <p14:nvContentPartPr>
               <p14:cNvPr id="14" name="Ink 13">
                 <a:extLst>
@@ -12724,7 +17306,7 @@
             </p14:xfrm>
           </p:contentPart>
         </mc:Choice>
-        <mc:Fallback>
+        <mc:Fallback xmlns="">
           <p:pic>
             <p:nvPicPr>
               <p:cNvPr id="14" name="Ink 13">
@@ -12755,8 +17337,8 @@
           </p:pic>
         </mc:Fallback>
       </mc:AlternateContent>
-      <mc:AlternateContent xmlns:mc="http://schemas.openxmlformats.org/markup-compatibility/2006">
-        <mc:Choice xmlns:p14="http://schemas.microsoft.com/office/powerpoint/2010/main" xmlns:aink="http://schemas.microsoft.com/office/drawing/2016/ink" Requires="p14 aink">
+      <mc:AlternateContent xmlns:mc="http://schemas.openxmlformats.org/markup-compatibility/2006" xmlns:p14="http://schemas.microsoft.com/office/powerpoint/2010/main" xmlns:aink="http://schemas.microsoft.com/office/drawing/2016/ink">
+        <mc:Choice Requires="p14 aink">
           <p:contentPart p14:bwMode="auto" r:id="rId5">
             <p14:nvContentPartPr>
               <p14:cNvPr id="15" name="Ink 14">
@@ -12775,7 +17357,7 @@
             </p14:xfrm>
           </p:contentPart>
         </mc:Choice>
-        <mc:Fallback>
+        <mc:Fallback xmlns="">
           <p:pic>
             <p:nvPicPr>
               <p:cNvPr id="15" name="Ink 14">
@@ -12806,12 +17388,113 @@
           </p:pic>
         </mc:Fallback>
       </mc:AlternateContent>
+      <p:graphicFrame>
+        <p:nvGraphicFramePr>
+          <p:cNvPr id="7175" name="Content Placeholder 2">
+            <a:extLst>
+              <a:ext uri="{FF2B5EF4-FFF2-40B4-BE49-F238E27FC236}">
+                <a16:creationId xmlns:a16="http://schemas.microsoft.com/office/drawing/2014/main" id="{337043A2-47BE-3C10-D507-A8DCDE84DFE9}"/>
+              </a:ext>
+            </a:extLst>
+          </p:cNvPr>
+          <p:cNvGraphicFramePr/>
+          <p:nvPr>
+            <p:extLst>
+              <p:ext uri="{D42A27DB-BD31-4B8C-83A1-F6EECF244321}">
+                <p14:modId xmlns:p14="http://schemas.microsoft.com/office/powerpoint/2010/main" val="3713271680"/>
+              </p:ext>
+            </p:extLst>
+          </p:nvPr>
+        </p:nvGraphicFramePr>
+        <p:xfrm>
+          <a:off x="632085" y="1892675"/>
+          <a:ext cx="10927829" cy="4192805"/>
+        </p:xfrm>
+        <a:graphic>
+          <a:graphicData uri="http://schemas.openxmlformats.org/drawingml/2006/diagram">
+            <dgm:relIds xmlns:dgm="http://schemas.openxmlformats.org/drawingml/2006/diagram" xmlns:r="http://schemas.openxmlformats.org/officeDocument/2006/relationships" r:dm="rId7" r:lo="rId8" r:qs="rId9" r:cs="rId10"/>
+          </a:graphicData>
+        </a:graphic>
+      </p:graphicFrame>
+      <p:pic>
+        <p:nvPicPr>
+          <p:cNvPr id="4" name="Picture 3">
+            <a:extLst>
+              <a:ext uri="{FF2B5EF4-FFF2-40B4-BE49-F238E27FC236}">
+                <a16:creationId xmlns:a16="http://schemas.microsoft.com/office/drawing/2014/main" id="{3DEB2BB0-7639-56A1-5F2E-5B1B66773E8C}"/>
+              </a:ext>
+            </a:extLst>
+          </p:cNvPr>
+          <p:cNvPicPr>
+            <a:picLocks noChangeAspect="1"/>
+          </p:cNvPicPr>
+          <p:nvPr/>
+        </p:nvPicPr>
+        <p:blipFill rotWithShape="1">
+          <a:blip r:embed="rId12"/>
+          <a:srcRect b="13142"/>
+          <a:stretch/>
+        </p:blipFill>
+        <p:spPr>
+          <a:xfrm>
+            <a:off x="6393179" y="1680227"/>
+            <a:ext cx="3435112" cy="5562492"/>
+          </a:xfrm>
+          <a:prstGeom prst="rect">
+            <a:avLst/>
+          </a:prstGeom>
+          <a:ln w="15875">
+            <a:solidFill>
+              <a:schemeClr val="tx1"/>
+            </a:solidFill>
+          </a:ln>
+        </p:spPr>
+      </p:pic>
+      <p:cxnSp>
+        <p:nvCxnSpPr>
+          <p:cNvPr id="6" name="Straight Arrow Connector 5">
+            <a:extLst>
+              <a:ext uri="{FF2B5EF4-FFF2-40B4-BE49-F238E27FC236}">
+                <a16:creationId xmlns:a16="http://schemas.microsoft.com/office/drawing/2014/main" id="{DDE9725E-B013-2226-FBE7-5E7A9AB09025}"/>
+              </a:ext>
+            </a:extLst>
+          </p:cNvPr>
+          <p:cNvCxnSpPr/>
+          <p:nvPr/>
+        </p:nvCxnSpPr>
+        <p:spPr>
+          <a:xfrm>
+            <a:off x="4876800" y="4724400"/>
+            <a:ext cx="3581400" cy="152400"/>
+          </a:xfrm>
+          <a:prstGeom prst="straightConnector1">
+            <a:avLst/>
+          </a:prstGeom>
+          <a:ln>
+            <a:tailEnd type="triangle"/>
+          </a:ln>
+        </p:spPr>
+        <p:style>
+          <a:lnRef idx="2">
+            <a:schemeClr val="accent2"/>
+          </a:lnRef>
+          <a:fillRef idx="0">
+            <a:schemeClr val="accent2"/>
+          </a:fillRef>
+          <a:effectRef idx="1">
+            <a:schemeClr val="accent2"/>
+          </a:effectRef>
+          <a:fontRef idx="minor">
+            <a:schemeClr val="tx1"/>
+          </a:fontRef>
+        </p:style>
+      </p:cxnSp>
       <p:sp>
         <p:nvSpPr>
-          <p:cNvPr id="16" name="Rectangle: Rounded Corners 15">
+          <p:cNvPr id="8" name="Rectangle: Rounded Corners 7">
             <a:extLst>
               <a:ext uri="{FF2B5EF4-FFF2-40B4-BE49-F238E27FC236}">
-                <a16:creationId xmlns:a16="http://schemas.microsoft.com/office/drawing/2014/main" id="{FE1CDC48-662A-302F-E3E0-8542059F4521}"/>
+                <a16:creationId xmlns:a16="http://schemas.microsoft.com/office/drawing/2014/main" id="{3C04A91D-9DB3-043D-1D5A-3721AC8E5C85}"/>
               </a:ext>
             </a:extLst>
           </p:cNvPr>
@@ -12820,14 +17503,14 @@
         </p:nvSpPr>
         <p:spPr>
           <a:xfrm>
-            <a:off x="1922464" y="1248332"/>
-            <a:ext cx="1181099" cy="442432"/>
+            <a:off x="6172200" y="4425619"/>
+            <a:ext cx="3048000" cy="788008"/>
           </a:xfrm>
           <a:prstGeom prst="roundRect">
             <a:avLst/>
           </a:prstGeom>
           <a:noFill/>
-          <a:ln w="25400">
+          <a:ln w="28575">
             <a:solidFill>
               <a:srgbClr val="FF0000"/>
             </a:solidFill>
@@ -12856,17 +17539,313 @@
           </a:p>
         </p:txBody>
       </p:sp>
+      <p:cxnSp>
+        <p:nvCxnSpPr>
+          <p:cNvPr id="12" name="Straight Arrow Connector 11">
+            <a:extLst>
+              <a:ext uri="{FF2B5EF4-FFF2-40B4-BE49-F238E27FC236}">
+                <a16:creationId xmlns:a16="http://schemas.microsoft.com/office/drawing/2014/main" id="{9874B2FB-9231-4589-6199-8225ECF8D6A1}"/>
+              </a:ext>
+            </a:extLst>
+          </p:cNvPr>
+          <p:cNvCxnSpPr/>
+          <p:nvPr/>
+        </p:nvCxnSpPr>
+        <p:spPr>
+          <a:xfrm flipV="1">
+            <a:off x="5562600" y="2057400"/>
+            <a:ext cx="1600200" cy="3581400"/>
+          </a:xfrm>
+          <a:prstGeom prst="straightConnector1">
+            <a:avLst/>
+          </a:prstGeom>
+          <a:ln>
+            <a:solidFill>
+              <a:srgbClr val="FF0000"/>
+            </a:solidFill>
+            <a:tailEnd type="triangle"/>
+          </a:ln>
+        </p:spPr>
+        <p:style>
+          <a:lnRef idx="2">
+            <a:schemeClr val="accent1"/>
+          </a:lnRef>
+          <a:fillRef idx="0">
+            <a:schemeClr val="accent1"/>
+          </a:fillRef>
+          <a:effectRef idx="1">
+            <a:schemeClr val="accent1"/>
+          </a:effectRef>
+          <a:fontRef idx="minor">
+            <a:schemeClr val="tx1"/>
+          </a:fontRef>
+        </p:style>
+      </p:cxnSp>
+      <p:sp>
+        <p:nvSpPr>
+          <p:cNvPr id="13" name="Rectangle: Rounded Corners 12">
+            <a:extLst>
+              <a:ext uri="{FF2B5EF4-FFF2-40B4-BE49-F238E27FC236}">
+                <a16:creationId xmlns:a16="http://schemas.microsoft.com/office/drawing/2014/main" id="{7BF36B08-4CA3-96A7-2D05-4A8941BD7D6B}"/>
+              </a:ext>
+            </a:extLst>
+          </p:cNvPr>
+          <p:cNvSpPr/>
+          <p:nvPr/>
+        </p:nvSpPr>
+        <p:spPr>
+          <a:xfrm>
+            <a:off x="6448015" y="1670879"/>
+            <a:ext cx="2253518" cy="359584"/>
+          </a:xfrm>
+          <a:prstGeom prst="roundRect">
+            <a:avLst/>
+          </a:prstGeom>
+          <a:noFill/>
+          <a:ln w="38100">
+            <a:solidFill>
+              <a:srgbClr val="FF0000"/>
+            </a:solidFill>
+          </a:ln>
+        </p:spPr>
+        <p:style>
+          <a:lnRef idx="1">
+            <a:schemeClr val="accent1"/>
+          </a:lnRef>
+          <a:fillRef idx="3">
+            <a:schemeClr val="accent1"/>
+          </a:fillRef>
+          <a:effectRef idx="2">
+            <a:schemeClr val="accent1"/>
+          </a:effectRef>
+          <a:fontRef idx="minor">
+            <a:schemeClr val="lt1"/>
+          </a:fontRef>
+        </p:style>
+        <p:txBody>
+          <a:bodyPr rtlCol="0" anchor="ctr"/>
+          <a:lstStyle/>
+          <a:p>
+            <a:pPr algn="ctr"/>
+            <a:endParaRPr lang="en-IE"/>
+          </a:p>
+        </p:txBody>
+      </p:sp>
     </p:spTree>
   </p:cSld>
   <p:clrMapOvr>
     <a:masterClrMapping/>
   </p:clrMapOvr>
+  <p:timing>
+    <p:tnLst>
+      <p:par>
+        <p:cTn id="1" dur="indefinite" restart="never" nodeType="tmRoot">
+          <p:childTnLst>
+            <p:seq concurrent="1" nextAc="seek">
+              <p:cTn id="2" dur="indefinite" nodeType="mainSeq">
+                <p:childTnLst>
+                  <p:par>
+                    <p:cTn id="3" fill="hold">
+                      <p:stCondLst>
+                        <p:cond delay="indefinite"/>
+                      </p:stCondLst>
+                      <p:childTnLst>
+                        <p:par>
+                          <p:cTn id="4" fill="hold">
+                            <p:stCondLst>
+                              <p:cond delay="0"/>
+                            </p:stCondLst>
+                            <p:childTnLst>
+                              <p:par>
+                                <p:cTn id="5" presetID="1" presetClass="entr" presetSubtype="0" fill="hold" nodeType="clickEffect">
+                                  <p:stCondLst>
+                                    <p:cond delay="0"/>
+                                  </p:stCondLst>
+                                  <p:childTnLst>
+                                    <p:set>
+                                      <p:cBhvr>
+                                        <p:cTn id="6" dur="1" fill="hold">
+                                          <p:stCondLst>
+                                            <p:cond delay="0"/>
+                                          </p:stCondLst>
+                                        </p:cTn>
+                                        <p:tgtEl>
+                                          <p:spTgt spid="6"/>
+                                        </p:tgtEl>
+                                        <p:attrNameLst>
+                                          <p:attrName>style.visibility</p:attrName>
+                                        </p:attrNameLst>
+                                      </p:cBhvr>
+                                      <p:to>
+                                        <p:strVal val="visible"/>
+                                      </p:to>
+                                    </p:set>
+                                  </p:childTnLst>
+                                </p:cTn>
+                              </p:par>
+                            </p:childTnLst>
+                          </p:cTn>
+                        </p:par>
+                      </p:childTnLst>
+                    </p:cTn>
+                  </p:par>
+                  <p:par>
+                    <p:cTn id="7" fill="hold">
+                      <p:stCondLst>
+                        <p:cond delay="indefinite"/>
+                      </p:stCondLst>
+                      <p:childTnLst>
+                        <p:par>
+                          <p:cTn id="8" fill="hold">
+                            <p:stCondLst>
+                              <p:cond delay="0"/>
+                            </p:stCondLst>
+                            <p:childTnLst>
+                              <p:par>
+                                <p:cTn id="9" presetID="1" presetClass="entr" presetSubtype="0" fill="hold" grpId="0" nodeType="clickEffect">
+                                  <p:stCondLst>
+                                    <p:cond delay="0"/>
+                                  </p:stCondLst>
+                                  <p:childTnLst>
+                                    <p:set>
+                                      <p:cBhvr>
+                                        <p:cTn id="10" dur="1" fill="hold">
+                                          <p:stCondLst>
+                                            <p:cond delay="0"/>
+                                          </p:stCondLst>
+                                        </p:cTn>
+                                        <p:tgtEl>
+                                          <p:spTgt spid="8"/>
+                                        </p:tgtEl>
+                                        <p:attrNameLst>
+                                          <p:attrName>style.visibility</p:attrName>
+                                        </p:attrNameLst>
+                                      </p:cBhvr>
+                                      <p:to>
+                                        <p:strVal val="visible"/>
+                                      </p:to>
+                                    </p:set>
+                                  </p:childTnLst>
+                                </p:cTn>
+                              </p:par>
+                            </p:childTnLst>
+                          </p:cTn>
+                        </p:par>
+                      </p:childTnLst>
+                    </p:cTn>
+                  </p:par>
+                  <p:par>
+                    <p:cTn id="11" fill="hold">
+                      <p:stCondLst>
+                        <p:cond delay="indefinite"/>
+                      </p:stCondLst>
+                      <p:childTnLst>
+                        <p:par>
+                          <p:cTn id="12" fill="hold">
+                            <p:stCondLst>
+                              <p:cond delay="0"/>
+                            </p:stCondLst>
+                            <p:childTnLst>
+                              <p:par>
+                                <p:cTn id="13" presetID="1" presetClass="entr" presetSubtype="0" fill="hold" nodeType="clickEffect">
+                                  <p:stCondLst>
+                                    <p:cond delay="0"/>
+                                  </p:stCondLst>
+                                  <p:childTnLst>
+                                    <p:set>
+                                      <p:cBhvr>
+                                        <p:cTn id="14" dur="1" fill="hold">
+                                          <p:stCondLst>
+                                            <p:cond delay="0"/>
+                                          </p:stCondLst>
+                                        </p:cTn>
+                                        <p:tgtEl>
+                                          <p:spTgt spid="12"/>
+                                        </p:tgtEl>
+                                        <p:attrNameLst>
+                                          <p:attrName>style.visibility</p:attrName>
+                                        </p:attrNameLst>
+                                      </p:cBhvr>
+                                      <p:to>
+                                        <p:strVal val="visible"/>
+                                      </p:to>
+                                    </p:set>
+                                  </p:childTnLst>
+                                </p:cTn>
+                              </p:par>
+                              <p:par>
+                                <p:cTn id="15" presetID="1" presetClass="entr" presetSubtype="0" fill="hold" grpId="0" nodeType="withEffect">
+                                  <p:stCondLst>
+                                    <p:cond delay="0"/>
+                                  </p:stCondLst>
+                                  <p:childTnLst>
+                                    <p:set>
+                                      <p:cBhvr>
+                                        <p:cTn id="16" dur="1" fill="hold">
+                                          <p:stCondLst>
+                                            <p:cond delay="0"/>
+                                          </p:stCondLst>
+                                        </p:cTn>
+                                        <p:tgtEl>
+                                          <p:spTgt spid="13"/>
+                                        </p:tgtEl>
+                                        <p:attrNameLst>
+                                          <p:attrName>style.visibility</p:attrName>
+                                        </p:attrNameLst>
+                                      </p:cBhvr>
+                                      <p:to>
+                                        <p:strVal val="visible"/>
+                                      </p:to>
+                                    </p:set>
+                                  </p:childTnLst>
+                                </p:cTn>
+                              </p:par>
+                            </p:childTnLst>
+                          </p:cTn>
+                        </p:par>
+                      </p:childTnLst>
+                    </p:cTn>
+                  </p:par>
+                </p:childTnLst>
+              </p:cTn>
+              <p:prevCondLst>
+                <p:cond evt="onPrev" delay="0">
+                  <p:tgtEl>
+                    <p:sldTgt/>
+                  </p:tgtEl>
+                </p:cond>
+              </p:prevCondLst>
+              <p:nextCondLst>
+                <p:cond evt="onNext" delay="0">
+                  <p:tgtEl>
+                    <p:sldTgt/>
+                  </p:tgtEl>
+                </p:cond>
+              </p:nextCondLst>
+            </p:seq>
+          </p:childTnLst>
+        </p:cTn>
+      </p:par>
+    </p:tnLst>
+    <p:bldLst>
+      <p:bldP spid="8" grpId="0" animBg="1"/>
+      <p:bldP spid="13" grpId="0" animBg="1"/>
+    </p:bldLst>
+  </p:timing>
 </p:sld>
 </file>
 
 <file path=ppt/slides/slide4.xml><?xml version="1.0" encoding="utf-8"?>
 <p:sld xmlns:a="http://schemas.openxmlformats.org/drawingml/2006/main" xmlns:r="http://schemas.openxmlformats.org/officeDocument/2006/relationships" xmlns:p="http://schemas.openxmlformats.org/presentationml/2006/main">
   <p:cSld>
+    <p:bg>
+      <p:bgPr>
+        <a:solidFill>
+          <a:schemeClr val="bg1"/>
+        </a:solidFill>
+        <a:effectLst/>
+      </p:bgPr>
+    </p:bg>
     <p:spTree>
       <p:nvGrpSpPr>
         <p:cNvPr id="1" name=""/>
@@ -12881,6 +17860,552 @@
           <a:chExt cx="0" cy="0"/>
         </a:xfrm>
       </p:grpSpPr>
+      <p:sp useBgFill="1">
+        <p:nvSpPr>
+          <p:cNvPr id="30727" name="Rectangle 30726">
+            <a:extLst>
+              <a:ext uri="{FF2B5EF4-FFF2-40B4-BE49-F238E27FC236}">
+                <a16:creationId xmlns:a16="http://schemas.microsoft.com/office/drawing/2014/main" id="{C4285719-470E-454C-AF62-8323075F1F5B}"/>
+              </a:ext>
+              <a:ext uri="{C183D7F6-B498-43B3-948B-1728B52AA6E4}">
+                <adec:decorative xmlns:adec="http://schemas.microsoft.com/office/drawing/2017/decorative" val="1"/>
+              </a:ext>
+            </a:extLst>
+          </p:cNvPr>
+          <p:cNvSpPr>
+            <a:spLocks noGrp="1" noRot="1" noChangeAspect="1" noMove="1" noResize="1" noEditPoints="1" noAdjustHandles="1" noChangeArrowheads="1" noChangeShapeType="1" noTextEdit="1"/>
+          </p:cNvSpPr>
+          <p:nvPr>
+            <p:extLst>
+              <p:ext uri="{386F3935-93C4-4BCD-93E2-E3B085C9AB24}">
+                <p16:designElem xmlns:p16="http://schemas.microsoft.com/office/powerpoint/2015/main" val="1"/>
+              </p:ext>
+            </p:extLst>
+          </p:nvPr>
+        </p:nvSpPr>
+        <p:spPr>
+          <a:xfrm>
+            <a:off x="0" y="0"/>
+            <a:ext cx="12188952" cy="6858000"/>
+          </a:xfrm>
+          <a:prstGeom prst="rect">
+            <a:avLst/>
+          </a:prstGeom>
+          <a:ln w="12700" cap="flat" cmpd="sng" algn="ctr">
+            <a:noFill/>
+            <a:prstDash val="solid"/>
+            <a:miter lim="800000"/>
+          </a:ln>
+          <a:effectLst/>
+          <a:extLst>
+            <a:ext uri="{91240B29-F687-4F45-9708-019B960494DF}">
+              <a14:hiddenLine xmlns:a14="http://schemas.microsoft.com/office/drawing/2010/main" w="12700" cap="flat" cmpd="sng" algn="ctr">
+                <a:solidFill>
+                  <a:schemeClr val="accent1">
+                    <a:shade val="50000"/>
+                  </a:schemeClr>
+                </a:solidFill>
+                <a:prstDash val="solid"/>
+                <a:miter lim="800000"/>
+              </a14:hiddenLine>
+            </a:ext>
+          </a:extLst>
+        </p:spPr>
+        <p:style>
+          <a:lnRef idx="2">
+            <a:schemeClr val="accent1">
+              <a:shade val="50000"/>
+            </a:schemeClr>
+          </a:lnRef>
+          <a:fillRef idx="1">
+            <a:schemeClr val="accent1"/>
+          </a:fillRef>
+          <a:effectRef idx="0">
+            <a:schemeClr val="accent1"/>
+          </a:effectRef>
+          <a:fontRef idx="minor">
+            <a:schemeClr val="lt1"/>
+          </a:fontRef>
+        </p:style>
+        <p:txBody>
+          <a:bodyPr rtlCol="0" anchor="ctr"/>
+          <a:lstStyle/>
+          <a:p>
+            <a:pPr algn="ctr"/>
+            <a:endParaRPr lang="en-US"/>
+          </a:p>
+        </p:txBody>
+      </p:sp>
+      <p:sp>
+        <p:nvSpPr>
+          <p:cNvPr id="30729" name="Rectangle 30728">
+            <a:extLst>
+              <a:ext uri="{FF2B5EF4-FFF2-40B4-BE49-F238E27FC236}">
+                <a16:creationId xmlns:a16="http://schemas.microsoft.com/office/drawing/2014/main" id="{CD9FE4EF-C4D8-49A0-B2FF-81D8DB7D8A24}"/>
+              </a:ext>
+              <a:ext uri="{C183D7F6-B498-43B3-948B-1728B52AA6E4}">
+                <adec:decorative xmlns:adec="http://schemas.microsoft.com/office/drawing/2017/decorative" val="1"/>
+              </a:ext>
+            </a:extLst>
+          </p:cNvPr>
+          <p:cNvSpPr>
+            <a:spLocks noGrp="1" noRot="1" noChangeAspect="1" noMove="1" noResize="1" noEditPoints="1" noAdjustHandles="1" noChangeArrowheads="1" noChangeShapeType="1" noTextEdit="1"/>
+          </p:cNvSpPr>
+          <p:nvPr>
+            <p:extLst>
+              <p:ext uri="{386F3935-93C4-4BCD-93E2-E3B085C9AB24}">
+                <p16:designElem xmlns:p16="http://schemas.microsoft.com/office/powerpoint/2015/main" val="1"/>
+              </p:ext>
+            </p:extLst>
+          </p:nvPr>
+        </p:nvSpPr>
+        <p:spPr>
+          <a:xfrm rot="5400000" flipH="1">
+            <a:off x="-1410084" y="1410082"/>
+            <a:ext cx="6858000" cy="4037836"/>
+          </a:xfrm>
+          <a:prstGeom prst="rect">
+            <a:avLst/>
+          </a:prstGeom>
+          <a:gradFill>
+            <a:gsLst>
+              <a:gs pos="8000">
+                <a:srgbClr val="000000"/>
+              </a:gs>
+              <a:gs pos="100000">
+                <a:schemeClr val="accent1">
+                  <a:lumMod val="75000"/>
+                </a:schemeClr>
+              </a:gs>
+            </a:gsLst>
+            <a:lin ang="3000000" scaled="0"/>
+          </a:gradFill>
+          <a:ln>
+            <a:noFill/>
+          </a:ln>
+        </p:spPr>
+        <p:style>
+          <a:lnRef idx="2">
+            <a:schemeClr val="accent1">
+              <a:shade val="50000"/>
+            </a:schemeClr>
+          </a:lnRef>
+          <a:fillRef idx="1">
+            <a:schemeClr val="accent1"/>
+          </a:fillRef>
+          <a:effectRef idx="0">
+            <a:schemeClr val="accent1"/>
+          </a:effectRef>
+          <a:fontRef idx="minor">
+            <a:schemeClr val="lt1"/>
+          </a:fontRef>
+        </p:style>
+        <p:txBody>
+          <a:bodyPr rtlCol="0" anchor="ctr"/>
+          <a:lstStyle/>
+          <a:p>
+            <a:pPr algn="ctr"/>
+            <a:endParaRPr lang="en-US"/>
+          </a:p>
+        </p:txBody>
+      </p:sp>
+      <p:sp>
+        <p:nvSpPr>
+          <p:cNvPr id="30731" name="Rectangle 30730">
+            <a:extLst>
+              <a:ext uri="{FF2B5EF4-FFF2-40B4-BE49-F238E27FC236}">
+                <a16:creationId xmlns:a16="http://schemas.microsoft.com/office/drawing/2014/main" id="{4300840D-0A0B-4512-BACA-B439D5B9C57C}"/>
+              </a:ext>
+              <a:ext uri="{C183D7F6-B498-43B3-948B-1728B52AA6E4}">
+                <adec:decorative xmlns:adec="http://schemas.microsoft.com/office/drawing/2017/decorative" val="1"/>
+              </a:ext>
+            </a:extLst>
+          </p:cNvPr>
+          <p:cNvSpPr>
+            <a:spLocks noGrp="1" noRot="1" noChangeAspect="1" noMove="1" noResize="1" noEditPoints="1" noAdjustHandles="1" noChangeArrowheads="1" noChangeShapeType="1" noTextEdit="1"/>
+          </p:cNvSpPr>
+          <p:nvPr>
+            <p:extLst>
+              <p:ext uri="{386F3935-93C4-4BCD-93E2-E3B085C9AB24}">
+                <p16:designElem xmlns:p16="http://schemas.microsoft.com/office/powerpoint/2015/main" val="1"/>
+              </p:ext>
+            </p:extLst>
+          </p:nvPr>
+        </p:nvSpPr>
+        <p:spPr>
+          <a:xfrm rot="5400000" flipH="1">
+            <a:off x="-1410085" y="1420219"/>
+            <a:ext cx="6857999" cy="4037839"/>
+          </a:xfrm>
+          <a:prstGeom prst="rect">
+            <a:avLst/>
+          </a:prstGeom>
+          <a:gradFill>
+            <a:gsLst>
+              <a:gs pos="0">
+                <a:srgbClr val="000000">
+                  <a:alpha val="0"/>
+                </a:srgbClr>
+              </a:gs>
+              <a:gs pos="99000">
+                <a:schemeClr val="accent1">
+                  <a:alpha val="46000"/>
+                </a:schemeClr>
+              </a:gs>
+            </a:gsLst>
+            <a:lin ang="1800000" scaled="0"/>
+          </a:gradFill>
+          <a:ln>
+            <a:noFill/>
+          </a:ln>
+        </p:spPr>
+        <p:style>
+          <a:lnRef idx="2">
+            <a:schemeClr val="accent1">
+              <a:shade val="50000"/>
+            </a:schemeClr>
+          </a:lnRef>
+          <a:fillRef idx="1">
+            <a:schemeClr val="accent1"/>
+          </a:fillRef>
+          <a:effectRef idx="0">
+            <a:schemeClr val="accent1"/>
+          </a:effectRef>
+          <a:fontRef idx="minor">
+            <a:schemeClr val="lt1"/>
+          </a:fontRef>
+        </p:style>
+        <p:txBody>
+          <a:bodyPr rtlCol="0" anchor="ctr"/>
+          <a:lstStyle/>
+          <a:p>
+            <a:pPr algn="ctr"/>
+            <a:endParaRPr lang="en-US"/>
+          </a:p>
+        </p:txBody>
+      </p:sp>
+      <p:sp>
+        <p:nvSpPr>
+          <p:cNvPr id="30733" name="Rectangle 30732">
+            <a:extLst>
+              <a:ext uri="{FF2B5EF4-FFF2-40B4-BE49-F238E27FC236}">
+                <a16:creationId xmlns:a16="http://schemas.microsoft.com/office/drawing/2014/main" id="{D2B78728-A580-49A7-84F9-6EF6F583ADE0}"/>
+              </a:ext>
+              <a:ext uri="{C183D7F6-B498-43B3-948B-1728B52AA6E4}">
+                <adec:decorative xmlns:adec="http://schemas.microsoft.com/office/drawing/2017/decorative" val="1"/>
+              </a:ext>
+            </a:extLst>
+          </p:cNvPr>
+          <p:cNvSpPr>
+            <a:spLocks noGrp="1" noRot="1" noChangeAspect="1" noMove="1" noResize="1" noEditPoints="1" noAdjustHandles="1" noChangeArrowheads="1" noChangeShapeType="1" noTextEdit="1"/>
+          </p:cNvSpPr>
+          <p:nvPr>
+            <p:extLst>
+              <p:ext uri="{386F3935-93C4-4BCD-93E2-E3B085C9AB24}">
+                <p16:designElem xmlns:p16="http://schemas.microsoft.com/office/powerpoint/2015/main" val="1"/>
+              </p:ext>
+            </p:extLst>
+          </p:nvPr>
+        </p:nvSpPr>
+        <p:spPr>
+          <a:xfrm rot="5400000" flipH="1">
+            <a:off x="767923" y="3588085"/>
+            <a:ext cx="2501979" cy="4037841"/>
+          </a:xfrm>
+          <a:prstGeom prst="rect">
+            <a:avLst/>
+          </a:prstGeom>
+          <a:gradFill>
+            <a:gsLst>
+              <a:gs pos="2000">
+                <a:schemeClr val="accent1">
+                  <a:alpha val="29000"/>
+                </a:schemeClr>
+              </a:gs>
+              <a:gs pos="100000">
+                <a:srgbClr val="000000">
+                  <a:alpha val="30000"/>
+                </a:srgbClr>
+              </a:gs>
+            </a:gsLst>
+            <a:lin ang="7800000" scaled="0"/>
+          </a:gradFill>
+          <a:ln>
+            <a:noFill/>
+          </a:ln>
+        </p:spPr>
+        <p:style>
+          <a:lnRef idx="2">
+            <a:schemeClr val="accent1">
+              <a:shade val="50000"/>
+            </a:schemeClr>
+          </a:lnRef>
+          <a:fillRef idx="1">
+            <a:schemeClr val="accent1"/>
+          </a:fillRef>
+          <a:effectRef idx="0">
+            <a:schemeClr val="accent1"/>
+          </a:effectRef>
+          <a:fontRef idx="minor">
+            <a:schemeClr val="lt1"/>
+          </a:fontRef>
+        </p:style>
+        <p:txBody>
+          <a:bodyPr rtlCol="0" anchor="ctr"/>
+          <a:lstStyle/>
+          <a:p>
+            <a:pPr algn="ctr"/>
+            <a:endParaRPr lang="en-US" dirty="0"/>
+          </a:p>
+        </p:txBody>
+      </p:sp>
+      <p:sp>
+        <p:nvSpPr>
+          <p:cNvPr id="30735" name="Freeform: Shape 30734">
+            <a:extLst>
+              <a:ext uri="{FF2B5EF4-FFF2-40B4-BE49-F238E27FC236}">
+                <a16:creationId xmlns:a16="http://schemas.microsoft.com/office/drawing/2014/main" id="{38FAA1A1-D861-433F-88FA-1E9D6FD31D11}"/>
+              </a:ext>
+              <a:ext uri="{C183D7F6-B498-43B3-948B-1728B52AA6E4}">
+                <adec:decorative xmlns:adec="http://schemas.microsoft.com/office/drawing/2017/decorative" val="1"/>
+              </a:ext>
+            </a:extLst>
+          </p:cNvPr>
+          <p:cNvSpPr>
+            <a:spLocks noGrp="1" noRot="1" noChangeAspect="1" noMove="1" noResize="1" noEditPoints="1" noAdjustHandles="1" noChangeArrowheads="1" noChangeShapeType="1" noTextEdit="1"/>
+          </p:cNvSpPr>
+          <p:nvPr>
+            <p:extLst>
+              <p:ext uri="{386F3935-93C4-4BCD-93E2-E3B085C9AB24}">
+                <p16:designElem xmlns:p16="http://schemas.microsoft.com/office/powerpoint/2015/main" val="1"/>
+              </p:ext>
+            </p:extLst>
+          </p:nvPr>
+        </p:nvSpPr>
+        <p:spPr>
+          <a:xfrm rot="20635413">
+            <a:off x="-501737" y="969718"/>
+            <a:ext cx="3900357" cy="4178958"/>
+          </a:xfrm>
+          <a:custGeom>
+            <a:avLst/>
+            <a:gdLst>
+              <a:gd name="connsiteX0" fmla="*/ 2432225 w 3900357"/>
+              <a:gd name="connsiteY0" fmla="*/ 93939 h 4178958"/>
+              <a:gd name="connsiteX1" fmla="*/ 3900357 w 3900357"/>
+              <a:gd name="connsiteY1" fmla="*/ 2089479 h 4178958"/>
+              <a:gd name="connsiteX2" fmla="*/ 1810878 w 3900357"/>
+              <a:gd name="connsiteY2" fmla="*/ 4178958 h 4178958"/>
+              <a:gd name="connsiteX3" fmla="*/ 78249 w 3900357"/>
+              <a:gd name="connsiteY3" fmla="*/ 3257727 h 4178958"/>
+              <a:gd name="connsiteX4" fmla="*/ 0 w 3900357"/>
+              <a:gd name="connsiteY4" fmla="*/ 3128923 h 4178958"/>
+              <a:gd name="connsiteX5" fmla="*/ 831324 w 3900357"/>
+              <a:gd name="connsiteY5" fmla="*/ 244281 h 4178958"/>
+              <a:gd name="connsiteX6" fmla="*/ 997559 w 3900357"/>
+              <a:gd name="connsiteY6" fmla="*/ 164202 h 4178958"/>
+              <a:gd name="connsiteX7" fmla="*/ 1810878 w 3900357"/>
+              <a:gd name="connsiteY7" fmla="*/ 0 h 4178958"/>
+              <a:gd name="connsiteX8" fmla="*/ 2432225 w 3900357"/>
+              <a:gd name="connsiteY8" fmla="*/ 93939 h 4178958"/>
+            </a:gdLst>
+            <a:ahLst/>
+            <a:cxnLst>
+              <a:cxn ang="0">
+                <a:pos x="connsiteX0" y="connsiteY0"/>
+              </a:cxn>
+              <a:cxn ang="0">
+                <a:pos x="connsiteX1" y="connsiteY1"/>
+              </a:cxn>
+              <a:cxn ang="0">
+                <a:pos x="connsiteX2" y="connsiteY2"/>
+              </a:cxn>
+              <a:cxn ang="0">
+                <a:pos x="connsiteX3" y="connsiteY3"/>
+              </a:cxn>
+              <a:cxn ang="0">
+                <a:pos x="connsiteX4" y="connsiteY4"/>
+              </a:cxn>
+              <a:cxn ang="0">
+                <a:pos x="connsiteX5" y="connsiteY5"/>
+              </a:cxn>
+              <a:cxn ang="0">
+                <a:pos x="connsiteX6" y="connsiteY6"/>
+              </a:cxn>
+              <a:cxn ang="0">
+                <a:pos x="connsiteX7" y="connsiteY7"/>
+              </a:cxn>
+              <a:cxn ang="0">
+                <a:pos x="connsiteX8" y="connsiteY8"/>
+              </a:cxn>
+            </a:cxnLst>
+            <a:rect l="l" t="t" r="r" b="b"/>
+            <a:pathLst>
+              <a:path w="3900357" h="4178958">
+                <a:moveTo>
+                  <a:pt x="2432225" y="93939"/>
+                </a:moveTo>
+                <a:cubicBezTo>
+                  <a:pt x="3282786" y="358491"/>
+                  <a:pt x="3900357" y="1151865"/>
+                  <a:pt x="3900357" y="2089479"/>
+                </a:cubicBezTo>
+                <a:cubicBezTo>
+                  <a:pt x="3900357" y="3243466"/>
+                  <a:pt x="2964865" y="4178958"/>
+                  <a:pt x="1810878" y="4178958"/>
+                </a:cubicBezTo>
+                <a:cubicBezTo>
+                  <a:pt x="1089636" y="4178958"/>
+                  <a:pt x="453744" y="3813531"/>
+                  <a:pt x="78249" y="3257727"/>
+                </a:cubicBezTo>
+                <a:lnTo>
+                  <a:pt x="0" y="3128923"/>
+                </a:lnTo>
+                <a:lnTo>
+                  <a:pt x="831324" y="244281"/>
+                </a:lnTo>
+                <a:lnTo>
+                  <a:pt x="997559" y="164202"/>
+                </a:lnTo>
+                <a:cubicBezTo>
+                  <a:pt x="1247540" y="58468"/>
+                  <a:pt x="1522381" y="0"/>
+                  <a:pt x="1810878" y="0"/>
+                </a:cubicBezTo>
+                <a:cubicBezTo>
+                  <a:pt x="2027251" y="0"/>
+                  <a:pt x="2235942" y="32888"/>
+                  <a:pt x="2432225" y="93939"/>
+                </a:cubicBezTo>
+                <a:close/>
+              </a:path>
+            </a:pathLst>
+          </a:custGeom>
+          <a:gradFill>
+            <a:gsLst>
+              <a:gs pos="29000">
+                <a:srgbClr val="000000">
+                  <a:alpha val="0"/>
+                </a:srgbClr>
+              </a:gs>
+              <a:gs pos="100000">
+                <a:schemeClr val="accent1">
+                  <a:alpha val="43000"/>
+                </a:schemeClr>
+              </a:gs>
+            </a:gsLst>
+            <a:lin ang="1800000" scaled="0"/>
+          </a:gradFill>
+          <a:ln>
+            <a:noFill/>
+          </a:ln>
+        </p:spPr>
+        <p:style>
+          <a:lnRef idx="2">
+            <a:schemeClr val="accent1">
+              <a:shade val="50000"/>
+            </a:schemeClr>
+          </a:lnRef>
+          <a:fillRef idx="1">
+            <a:schemeClr val="accent1"/>
+          </a:fillRef>
+          <a:effectRef idx="0">
+            <a:schemeClr val="accent1"/>
+          </a:effectRef>
+          <a:fontRef idx="minor">
+            <a:schemeClr val="lt1"/>
+          </a:fontRef>
+        </p:style>
+        <p:txBody>
+          <a:bodyPr wrap="square" rtlCol="0" anchor="ctr">
+            <a:noAutofit/>
+          </a:bodyPr>
+          <a:lstStyle/>
+          <a:p>
+            <a:pPr algn="ctr"/>
+            <a:endParaRPr lang="en-US" dirty="0"/>
+          </a:p>
+        </p:txBody>
+      </p:sp>
+      <p:sp>
+        <p:nvSpPr>
+          <p:cNvPr id="30737" name="Rectangle 30736">
+            <a:extLst>
+              <a:ext uri="{FF2B5EF4-FFF2-40B4-BE49-F238E27FC236}">
+                <a16:creationId xmlns:a16="http://schemas.microsoft.com/office/drawing/2014/main" id="{8D71EDA1-87BF-4D5D-AB79-F346FD19278A}"/>
+              </a:ext>
+              <a:ext uri="{C183D7F6-B498-43B3-948B-1728B52AA6E4}">
+                <adec:decorative xmlns:adec="http://schemas.microsoft.com/office/drawing/2017/decorative" val="1"/>
+              </a:ext>
+            </a:extLst>
+          </p:cNvPr>
+          <p:cNvSpPr>
+            <a:spLocks noGrp="1" noRot="1" noChangeAspect="1" noMove="1" noResize="1" noEditPoints="1" noAdjustHandles="1" noChangeArrowheads="1" noChangeShapeType="1" noTextEdit="1"/>
+          </p:cNvSpPr>
+          <p:nvPr>
+            <p:extLst>
+              <p:ext uri="{386F3935-93C4-4BCD-93E2-E3B085C9AB24}">
+                <p16:designElem xmlns:p16="http://schemas.microsoft.com/office/powerpoint/2015/main" val="1"/>
+              </p:ext>
+            </p:extLst>
+          </p:nvPr>
+        </p:nvSpPr>
+        <p:spPr>
+          <a:xfrm rot="5400000" flipH="1">
+            <a:off x="-1410093" y="1399943"/>
+            <a:ext cx="6858003" cy="4037835"/>
+          </a:xfrm>
+          <a:prstGeom prst="rect">
+            <a:avLst/>
+          </a:prstGeom>
+          <a:gradFill>
+            <a:gsLst>
+              <a:gs pos="0">
+                <a:srgbClr val="000000">
+                  <a:alpha val="0"/>
+                </a:srgbClr>
+              </a:gs>
+              <a:gs pos="99000">
+                <a:schemeClr val="accent1">
+                  <a:lumMod val="60000"/>
+                  <a:lumOff val="40000"/>
+                  <a:alpha val="11000"/>
+                </a:schemeClr>
+              </a:gs>
+            </a:gsLst>
+            <a:lin ang="7200000" scaled="0"/>
+          </a:gradFill>
+          <a:ln>
+            <a:noFill/>
+          </a:ln>
+        </p:spPr>
+        <p:style>
+          <a:lnRef idx="2">
+            <a:schemeClr val="accent1">
+              <a:shade val="50000"/>
+            </a:schemeClr>
+          </a:lnRef>
+          <a:fillRef idx="1">
+            <a:schemeClr val="accent1"/>
+          </a:fillRef>
+          <a:effectRef idx="0">
+            <a:schemeClr val="accent1"/>
+          </a:effectRef>
+          <a:fontRef idx="minor">
+            <a:schemeClr val="lt1"/>
+          </a:fontRef>
+        </p:style>
+        <p:txBody>
+          <a:bodyPr rtlCol="0" anchor="ctr"/>
+          <a:lstStyle/>
+          <a:p>
+            <a:pPr algn="ctr"/>
+            <a:endParaRPr lang="en-US"/>
+          </a:p>
+        </p:txBody>
+      </p:sp>
       <p:sp>
         <p:nvSpPr>
           <p:cNvPr id="8194" name="Title 1">
@@ -12899,22 +18424,232 @@
         </p:nvSpPr>
         <p:spPr>
           <a:xfrm>
-            <a:off x="2514600" y="274638"/>
-            <a:ext cx="7086600" cy="1143000"/>
+            <a:off x="466721" y="586855"/>
+            <a:ext cx="3434251" cy="3387497"/>
           </a:xfrm>
         </p:spPr>
         <p:txBody>
-          <a:bodyPr/>
+          <a:bodyPr anchor="b">
+            <a:normAutofit/>
+          </a:bodyPr>
           <a:lstStyle/>
           <a:p>
-            <a:pPr eaLnBrk="1" hangingPunct="1"/>
+            <a:pPr algn="r" eaLnBrk="1" hangingPunct="1"/>
             <a:r>
-              <a:rPr lang="en-US" altLang="en-US" sz="3200">
+              <a:rPr lang="en-US" altLang="en-US" sz="4000" dirty="0">
+                <a:solidFill>
+                  <a:srgbClr val="FFFFFF"/>
+                </a:solidFill>
                 <a:latin typeface="Arial" panose="020B0604020202020204" pitchFamily="34" charset="0"/>
                 <a:ea typeface="ＭＳ Ｐゴシック" panose="020B0600070205080204" pitchFamily="34" charset="-128"/>
               </a:rPr>
               <a:t>Sample App 1 (v2) - Design</a:t>
             </a:r>
+          </a:p>
+        </p:txBody>
+      </p:sp>
+      <p:sp>
+        <p:nvSpPr>
+          <p:cNvPr id="8196" name="Footer Placeholder 1">
+            <a:extLst>
+              <a:ext uri="{FF2B5EF4-FFF2-40B4-BE49-F238E27FC236}">
+                <a16:creationId xmlns:a16="http://schemas.microsoft.com/office/drawing/2014/main" id="{572D1579-C578-9FC8-1182-2367C1666CBF}"/>
+              </a:ext>
+            </a:extLst>
+          </p:cNvPr>
+          <p:cNvSpPr>
+            <a:spLocks noGrp="1"/>
+          </p:cNvSpPr>
+          <p:nvPr>
+            <p:ph type="ftr" sz="quarter" idx="11"/>
+          </p:nvPr>
+        </p:nvSpPr>
+        <p:spPr bwMode="auto">
+          <a:xfrm rot="5400000">
+            <a:off x="-1828800" y="2002536"/>
+            <a:ext cx="4114800" cy="365125"/>
+          </a:xfrm>
+          <a:extLst>
+            <a:ext uri="{909E8E84-426E-40DD-AFC4-6F175D3DCCD1}">
+              <a14:hiddenFill xmlns:a14="http://schemas.microsoft.com/office/drawing/2010/main">
+                <a:solidFill>
+                  <a:srgbClr val="FFFFFF"/>
+                </a:solidFill>
+              </a14:hiddenFill>
+            </a:ext>
+            <a:ext uri="{91240B29-F687-4F45-9708-019B960494DF}">
+              <a14:hiddenLine xmlns:a14="http://schemas.microsoft.com/office/drawing/2010/main" w="9525">
+                <a:solidFill>
+                  <a:srgbClr val="000000"/>
+                </a:solidFill>
+                <a:miter lim="800000"/>
+                <a:headEnd/>
+                <a:tailEnd/>
+              </a14:hiddenLine>
+            </a:ext>
+          </a:extLst>
+        </p:spPr>
+        <p:txBody>
+          <a:bodyPr numCol="1" anchorCtr="0" compatLnSpc="1">
+            <a:prstTxWarp prst="textNoShape">
+              <a:avLst/>
+            </a:prstTxWarp>
+            <a:normAutofit/>
+          </a:bodyPr>
+          <a:lstStyle>
+            <a:lvl1pPr>
+              <a:spcBef>
+                <a:spcPct val="20000"/>
+              </a:spcBef>
+              <a:buFont typeface="Arial" panose="020B0604020202020204" pitchFamily="34" charset="0"/>
+              <a:buChar char="•"/>
+              <a:defRPr sz="3200">
+                <a:solidFill>
+                  <a:schemeClr val="tx1"/>
+                </a:solidFill>
+                <a:latin typeface="Calibri" panose="020F0502020204030204" pitchFamily="34" charset="0"/>
+                <a:ea typeface="ＭＳ Ｐゴシック" panose="020B0600070205080204" pitchFamily="34" charset="-128"/>
+              </a:defRPr>
+            </a:lvl1pPr>
+            <a:lvl2pPr marL="742950" indent="-285750">
+              <a:spcBef>
+                <a:spcPct val="20000"/>
+              </a:spcBef>
+              <a:buFont typeface="Arial" panose="020B0604020202020204" pitchFamily="34" charset="0"/>
+              <a:buChar char="–"/>
+              <a:defRPr sz="2800">
+                <a:solidFill>
+                  <a:schemeClr val="tx1"/>
+                </a:solidFill>
+                <a:latin typeface="Calibri" panose="020F0502020204030204" pitchFamily="34" charset="0"/>
+                <a:ea typeface="ＭＳ Ｐゴシック" panose="020B0600070205080204" pitchFamily="34" charset="-128"/>
+              </a:defRPr>
+            </a:lvl2pPr>
+            <a:lvl3pPr marL="1143000" indent="-228600">
+              <a:spcBef>
+                <a:spcPct val="20000"/>
+              </a:spcBef>
+              <a:buFont typeface="Arial" panose="020B0604020202020204" pitchFamily="34" charset="0"/>
+              <a:buChar char="•"/>
+              <a:defRPr sz="2400">
+                <a:solidFill>
+                  <a:schemeClr val="tx1"/>
+                </a:solidFill>
+                <a:latin typeface="Calibri" panose="020F0502020204030204" pitchFamily="34" charset="0"/>
+                <a:ea typeface="ＭＳ Ｐゴシック" panose="020B0600070205080204" pitchFamily="34" charset="-128"/>
+              </a:defRPr>
+            </a:lvl3pPr>
+            <a:lvl4pPr marL="1600200" indent="-228600">
+              <a:spcBef>
+                <a:spcPct val="20000"/>
+              </a:spcBef>
+              <a:buFont typeface="Arial" panose="020B0604020202020204" pitchFamily="34" charset="0"/>
+              <a:buChar char="–"/>
+              <a:defRPr sz="2000">
+                <a:solidFill>
+                  <a:schemeClr val="tx1"/>
+                </a:solidFill>
+                <a:latin typeface="Calibri" panose="020F0502020204030204" pitchFamily="34" charset="0"/>
+                <a:ea typeface="ＭＳ Ｐゴシック" panose="020B0600070205080204" pitchFamily="34" charset="-128"/>
+              </a:defRPr>
+            </a:lvl4pPr>
+            <a:lvl5pPr marL="2057400" indent="-228600">
+              <a:spcBef>
+                <a:spcPct val="20000"/>
+              </a:spcBef>
+              <a:buFont typeface="Arial" panose="020B0604020202020204" pitchFamily="34" charset="0"/>
+              <a:buChar char="»"/>
+              <a:defRPr sz="2000">
+                <a:solidFill>
+                  <a:schemeClr val="tx1"/>
+                </a:solidFill>
+                <a:latin typeface="Calibri" panose="020F0502020204030204" pitchFamily="34" charset="0"/>
+                <a:ea typeface="ＭＳ Ｐゴシック" panose="020B0600070205080204" pitchFamily="34" charset="-128"/>
+              </a:defRPr>
+            </a:lvl5pPr>
+            <a:lvl6pPr marL="2514600" indent="-228600" eaLnBrk="0" fontAlgn="base" hangingPunct="0">
+              <a:spcBef>
+                <a:spcPct val="20000"/>
+              </a:spcBef>
+              <a:spcAft>
+                <a:spcPct val="0"/>
+              </a:spcAft>
+              <a:buFont typeface="Arial" panose="020B0604020202020204" pitchFamily="34" charset="0"/>
+              <a:buChar char="»"/>
+              <a:defRPr sz="2000">
+                <a:solidFill>
+                  <a:schemeClr val="tx1"/>
+                </a:solidFill>
+                <a:latin typeface="Calibri" panose="020F0502020204030204" pitchFamily="34" charset="0"/>
+                <a:ea typeface="ＭＳ Ｐゴシック" panose="020B0600070205080204" pitchFamily="34" charset="-128"/>
+              </a:defRPr>
+            </a:lvl6pPr>
+            <a:lvl7pPr marL="2971800" indent="-228600" eaLnBrk="0" fontAlgn="base" hangingPunct="0">
+              <a:spcBef>
+                <a:spcPct val="20000"/>
+              </a:spcBef>
+              <a:spcAft>
+                <a:spcPct val="0"/>
+              </a:spcAft>
+              <a:buFont typeface="Arial" panose="020B0604020202020204" pitchFamily="34" charset="0"/>
+              <a:buChar char="»"/>
+              <a:defRPr sz="2000">
+                <a:solidFill>
+                  <a:schemeClr val="tx1"/>
+                </a:solidFill>
+                <a:latin typeface="Calibri" panose="020F0502020204030204" pitchFamily="34" charset="0"/>
+                <a:ea typeface="ＭＳ Ｐゴシック" panose="020B0600070205080204" pitchFamily="34" charset="-128"/>
+              </a:defRPr>
+            </a:lvl7pPr>
+            <a:lvl8pPr marL="3429000" indent="-228600" eaLnBrk="0" fontAlgn="base" hangingPunct="0">
+              <a:spcBef>
+                <a:spcPct val="20000"/>
+              </a:spcBef>
+              <a:spcAft>
+                <a:spcPct val="0"/>
+              </a:spcAft>
+              <a:buFont typeface="Arial" panose="020B0604020202020204" pitchFamily="34" charset="0"/>
+              <a:buChar char="»"/>
+              <a:defRPr sz="2000">
+                <a:solidFill>
+                  <a:schemeClr val="tx1"/>
+                </a:solidFill>
+                <a:latin typeface="Calibri" panose="020F0502020204030204" pitchFamily="34" charset="0"/>
+                <a:ea typeface="ＭＳ Ｐゴシック" panose="020B0600070205080204" pitchFamily="34" charset="-128"/>
+              </a:defRPr>
+            </a:lvl8pPr>
+            <a:lvl9pPr marL="3886200" indent="-228600" eaLnBrk="0" fontAlgn="base" hangingPunct="0">
+              <a:spcBef>
+                <a:spcPct val="20000"/>
+              </a:spcBef>
+              <a:spcAft>
+                <a:spcPct val="0"/>
+              </a:spcAft>
+              <a:buFont typeface="Arial" panose="020B0604020202020204" pitchFamily="34" charset="0"/>
+              <a:buChar char="»"/>
+              <a:defRPr sz="2000">
+                <a:solidFill>
+                  <a:schemeClr val="tx1"/>
+                </a:solidFill>
+                <a:latin typeface="Calibri" panose="020F0502020204030204" pitchFamily="34" charset="0"/>
+                <a:ea typeface="ＭＳ Ｐゴシック" panose="020B0600070205080204" pitchFamily="34" charset="-128"/>
+              </a:defRPr>
+            </a:lvl9pPr>
+          </a:lstStyle>
+          <a:p>
+            <a:pPr algn="l">
+              <a:spcBef>
+                <a:spcPct val="0"/>
+              </a:spcBef>
+              <a:buFontTx/>
+              <a:buNone/>
+            </a:pPr>
+            <a:endParaRPr lang="en-US" altLang="en-US" sz="1100">
+              <a:solidFill>
+                <a:srgbClr val="FFFFFF"/>
+              </a:solidFill>
+              <a:latin typeface="Arial" panose="020B0604020202020204" pitchFamily="34" charset="0"/>
+            </a:endParaRPr>
           </a:p>
         </p:txBody>
       </p:sp>
@@ -12936,21 +18671,23 @@
         </p:nvSpPr>
         <p:spPr>
           <a:xfrm>
-            <a:off x="5715000" y="1439863"/>
-            <a:ext cx="4572000" cy="5029200"/>
+            <a:off x="4581727" y="649480"/>
+            <a:ext cx="3025303" cy="5546047"/>
           </a:xfrm>
         </p:spPr>
         <p:txBody>
-          <a:bodyPr/>
+          <a:bodyPr anchor="ctr">
+            <a:normAutofit/>
+          </a:bodyPr>
           <a:lstStyle/>
           <a:p>
             <a:pPr marL="457200" indent="-457200" eaLnBrk="1" hangingPunct="1">
               <a:lnSpc>
-                <a:spcPct val="70000"/>
+                <a:spcPct val="90000"/>
               </a:lnSpc>
               <a:defRPr/>
             </a:pPr>
-            <a:endParaRPr lang="en-US" altLang="en-US" sz="2000" b="1" dirty="0">
+            <a:endParaRPr lang="en-US" altLang="en-US" sz="1700" b="1">
               <a:latin typeface="Arial" panose="020B0604020202020204" pitchFamily="34" charset="0"/>
               <a:ea typeface="ＭＳ Ｐゴシック" panose="020B0600070205080204" pitchFamily="34" charset="-128"/>
             </a:endParaRPr>
@@ -12958,12 +18695,12 @@
           <a:p>
             <a:pPr marL="457200" indent="-457200" eaLnBrk="1" hangingPunct="1">
               <a:lnSpc>
-                <a:spcPct val="70000"/>
+                <a:spcPct val="90000"/>
               </a:lnSpc>
               <a:defRPr/>
             </a:pPr>
             <a:r>
-              <a:rPr lang="en-US" altLang="en-US" sz="2000" b="1" dirty="0">
+              <a:rPr lang="en-US" altLang="en-US" sz="1700" b="1">
                 <a:latin typeface="Arial" panose="020B0604020202020204" pitchFamily="34" charset="0"/>
                 <a:ea typeface="ＭＳ Ｐゴシック" panose="020B0600070205080204" pitchFamily="34" charset="-128"/>
               </a:rPr>
@@ -12973,14 +18710,14 @@
           <a:p>
             <a:pPr marL="857250" lvl="1" indent="-457200" eaLnBrk="1" hangingPunct="1">
               <a:lnSpc>
-                <a:spcPct val="70000"/>
+                <a:spcPct val="90000"/>
               </a:lnSpc>
               <a:buFont typeface="+mj-lt"/>
               <a:buAutoNum type="arabicPeriod"/>
               <a:defRPr/>
             </a:pPr>
             <a:r>
-              <a:rPr lang="en-US" altLang="en-US" sz="2000" b="1" dirty="0">
+              <a:rPr lang="en-US" altLang="en-US" sz="1700" b="1">
                 <a:latin typeface="Arial" panose="020B0604020202020204" pitchFamily="34" charset="0"/>
                 <a:ea typeface="ＭＳ Ｐゴシック" panose="020B0600070205080204" pitchFamily="34" charset="-128"/>
               </a:rPr>
@@ -12990,20 +18727,20 @@
           <a:p>
             <a:pPr marL="857250" lvl="1" indent="-457200" eaLnBrk="1" hangingPunct="1">
               <a:lnSpc>
-                <a:spcPct val="70000"/>
+                <a:spcPct val="90000"/>
               </a:lnSpc>
               <a:buFont typeface="+mj-lt"/>
               <a:buAutoNum type="arabicPeriod"/>
               <a:defRPr/>
             </a:pPr>
             <a:r>
-              <a:rPr lang="en-US" altLang="en-US" sz="2000" b="1" dirty="0">
+              <a:rPr lang="en-US" altLang="en-US" sz="1700" b="1">
                 <a:latin typeface="Arial" panose="020B0604020202020204" pitchFamily="34" charset="0"/>
                 <a:ea typeface="ＭＳ Ｐゴシック" panose="020B0600070205080204" pitchFamily="34" charset="-128"/>
               </a:rPr>
               <a:t>Text box content.</a:t>
             </a:r>
-            <a:endParaRPr lang="en-US" altLang="en-US" sz="2000" dirty="0">
+            <a:endParaRPr lang="en-US" altLang="en-US" sz="1700">
               <a:latin typeface="Arial" panose="020B0604020202020204" pitchFamily="34" charset="0"/>
               <a:ea typeface="ＭＳ Ｐゴシック" panose="020B0600070205080204" pitchFamily="34" charset="-128"/>
             </a:endParaRPr>
@@ -13011,14 +18748,14 @@
           <a:p>
             <a:pPr marL="857250" lvl="1" indent="-457200" eaLnBrk="1" hangingPunct="1">
               <a:lnSpc>
-                <a:spcPct val="70000"/>
+                <a:spcPct val="90000"/>
               </a:lnSpc>
               <a:buFont typeface="+mj-lt"/>
               <a:buAutoNum type="arabicPeriod"/>
               <a:defRPr/>
             </a:pPr>
             <a:r>
-              <a:rPr lang="en-US" altLang="en-US" sz="2000" i="1" dirty="0">
+              <a:rPr lang="en-US" altLang="en-US" sz="1700" i="1">
                 <a:latin typeface="Arial" panose="020B0604020202020204" pitchFamily="34" charset="0"/>
                 <a:ea typeface="ＭＳ Ｐゴシック" panose="020B0600070205080204" pitchFamily="34" charset="-128"/>
               </a:rPr>
@@ -13028,13 +18765,13 @@
           <a:p>
             <a:pPr marL="857250" lvl="1" indent="-457200" eaLnBrk="1" hangingPunct="1">
               <a:lnSpc>
-                <a:spcPct val="70000"/>
+                <a:spcPct val="90000"/>
               </a:lnSpc>
               <a:buFont typeface="+mj-lt"/>
               <a:buAutoNum type="arabicPeriod"/>
               <a:defRPr/>
             </a:pPr>
-            <a:endParaRPr lang="en-US" altLang="en-US" sz="2000" b="1" dirty="0">
+            <a:endParaRPr lang="en-US" altLang="en-US" sz="1700" b="1">
               <a:latin typeface="Arial" panose="020B0604020202020204" pitchFamily="34" charset="0"/>
               <a:ea typeface="ＭＳ Ｐゴシック" panose="020B0600070205080204" pitchFamily="34" charset="-128"/>
             </a:endParaRPr>
@@ -13042,12 +18779,12 @@
           <a:p>
             <a:pPr marL="457200" indent="-457200" eaLnBrk="1" hangingPunct="1">
               <a:lnSpc>
-                <a:spcPct val="70000"/>
+                <a:spcPct val="90000"/>
               </a:lnSpc>
               <a:defRPr/>
             </a:pPr>
             <a:r>
-              <a:rPr lang="en-US" altLang="en-US" sz="2000" b="1" dirty="0">
+              <a:rPr lang="en-US" altLang="en-US" sz="1700" b="1">
                 <a:latin typeface="Arial" panose="020B0604020202020204" pitchFamily="34" charset="0"/>
                 <a:ea typeface="ＭＳ Ｐゴシック" panose="020B0600070205080204" pitchFamily="34" charset="-128"/>
               </a:rPr>
@@ -13057,28 +18794,28 @@
           <a:p>
             <a:pPr marL="857250" lvl="1" indent="-457200" eaLnBrk="1" hangingPunct="1">
               <a:lnSpc>
-                <a:spcPct val="70000"/>
+                <a:spcPct val="90000"/>
               </a:lnSpc>
               <a:buFont typeface="+mj-lt"/>
               <a:buAutoNum type="arabicPeriod"/>
               <a:defRPr/>
             </a:pPr>
             <a:r>
-              <a:rPr lang="en-US" altLang="en-US" sz="2000" b="1" dirty="0">
+              <a:rPr lang="en-US" altLang="en-US" sz="1700" b="1">
                 <a:latin typeface="Arial" panose="020B0604020202020204" pitchFamily="34" charset="0"/>
                 <a:ea typeface="ＭＳ Ｐゴシック" panose="020B0600070205080204" pitchFamily="34" charset="-128"/>
               </a:rPr>
               <a:t>‘Fetch API data’ - </a:t>
             </a:r>
             <a:r>
-              <a:rPr lang="en-US" altLang="en-US" sz="2000" dirty="0">
+              <a:rPr lang="en-US" altLang="en-US" sz="1700">
                 <a:latin typeface="Arial" panose="020B0604020202020204" pitchFamily="34" charset="0"/>
                 <a:ea typeface="ＭＳ Ｐゴシック" panose="020B0600070205080204" pitchFamily="34" charset="-128"/>
               </a:rPr>
               <a:t>reset button</a:t>
             </a:r>
             <a:r>
-              <a:rPr lang="en-US" altLang="en-US" sz="2000" b="1" dirty="0">
+              <a:rPr lang="en-US" altLang="en-US" sz="1700" b="1">
                 <a:latin typeface="Arial" panose="020B0604020202020204" pitchFamily="34" charset="0"/>
                 <a:ea typeface="ＭＳ Ｐゴシック" panose="020B0600070205080204" pitchFamily="34" charset="-128"/>
               </a:rPr>
@@ -13088,13 +18825,13 @@
           <a:p>
             <a:pPr marL="857250" lvl="1" indent="-457200" eaLnBrk="1" hangingPunct="1">
               <a:lnSpc>
-                <a:spcPct val="70000"/>
+                <a:spcPct val="90000"/>
               </a:lnSpc>
               <a:buFont typeface="+mj-lt"/>
               <a:buAutoNum type="arabicPeriod"/>
               <a:defRPr/>
             </a:pPr>
-            <a:endParaRPr lang="en-US" altLang="en-US" sz="2000" b="1" dirty="0">
+            <a:endParaRPr lang="en-US" altLang="en-US" sz="1700" b="1">
               <a:latin typeface="Arial" panose="020B0604020202020204" pitchFamily="34" charset="0"/>
               <a:ea typeface="ＭＳ Ｐゴシック" panose="020B0600070205080204" pitchFamily="34" charset="-128"/>
             </a:endParaRPr>
@@ -13102,28 +18839,28 @@
           <a:p>
             <a:pPr marL="857250" lvl="1" indent="-457200" eaLnBrk="1" hangingPunct="1">
               <a:lnSpc>
-                <a:spcPct val="70000"/>
+                <a:spcPct val="90000"/>
               </a:lnSpc>
               <a:buFont typeface="+mj-lt"/>
               <a:buAutoNum type="arabicPeriod"/>
               <a:defRPr/>
             </a:pPr>
             <a:r>
-              <a:rPr lang="en-US" altLang="en-US" sz="2000" b="1" dirty="0">
+              <a:rPr lang="en-US" altLang="en-US" sz="1700" b="1">
                 <a:latin typeface="Arial" panose="020B0604020202020204" pitchFamily="34" charset="0"/>
                 <a:ea typeface="ＭＳ Ｐゴシック" panose="020B0600070205080204" pitchFamily="34" charset="-128"/>
               </a:rPr>
               <a:t>‘Set browser tab title’ - matching list </a:t>
             </a:r>
             <a:r>
-              <a:rPr lang="en-US" altLang="en-US" sz="2000" b="1" u="sng" dirty="0">
+              <a:rPr lang="en-US" altLang="en-US" sz="1700" b="1" u="sng">
                 <a:latin typeface="Arial" panose="020B0604020202020204" pitchFamily="34" charset="0"/>
                 <a:ea typeface="ＭＳ Ｐゴシック" panose="020B0600070205080204" pitchFamily="34" charset="-128"/>
               </a:rPr>
               <a:t>length</a:t>
             </a:r>
             <a:r>
-              <a:rPr lang="en-US" altLang="en-US" sz="2000" b="1" dirty="0">
+              <a:rPr lang="en-US" altLang="en-US" sz="1700" b="1">
                 <a:latin typeface="Arial" panose="020B0604020202020204" pitchFamily="34" charset="0"/>
                 <a:ea typeface="ＭＳ Ｐゴシック" panose="020B0600070205080204" pitchFamily="34" charset="-128"/>
               </a:rPr>
@@ -13133,421 +18870,13 @@
           <a:p>
             <a:pPr eaLnBrk="1" hangingPunct="1">
               <a:lnSpc>
-                <a:spcPct val="70000"/>
+                <a:spcPct val="90000"/>
               </a:lnSpc>
               <a:defRPr/>
             </a:pPr>
-            <a:endParaRPr lang="en-US" altLang="en-US" sz="2000" b="1" dirty="0">
+            <a:endParaRPr lang="en-US" altLang="en-US" sz="1700" b="1">
               <a:latin typeface="Arial" panose="020B0604020202020204" pitchFamily="34" charset="0"/>
               <a:ea typeface="ＭＳ Ｐゴシック" panose="020B0600070205080204" pitchFamily="34" charset="-128"/>
-            </a:endParaRPr>
-          </a:p>
-        </p:txBody>
-      </p:sp>
-      <p:sp>
-        <p:nvSpPr>
-          <p:cNvPr id="8196" name="Footer Placeholder 1">
-            <a:extLst>
-              <a:ext uri="{FF2B5EF4-FFF2-40B4-BE49-F238E27FC236}">
-                <a16:creationId xmlns:a16="http://schemas.microsoft.com/office/drawing/2014/main" id="{572D1579-C578-9FC8-1182-2367C1666CBF}"/>
-              </a:ext>
-            </a:extLst>
-          </p:cNvPr>
-          <p:cNvSpPr>
-            <a:spLocks noGrp="1"/>
-          </p:cNvSpPr>
-          <p:nvPr>
-            <p:ph type="ftr" sz="quarter" idx="11"/>
-          </p:nvPr>
-        </p:nvSpPr>
-        <p:spPr bwMode="auto">
-          <a:noFill/>
-          <a:extLst>
-            <a:ext uri="{909E8E84-426E-40DD-AFC4-6F175D3DCCD1}">
-              <a14:hiddenFill xmlns:a14="http://schemas.microsoft.com/office/drawing/2010/main">
-                <a:solidFill>
-                  <a:srgbClr val="FFFFFF"/>
-                </a:solidFill>
-              </a14:hiddenFill>
-            </a:ext>
-            <a:ext uri="{91240B29-F687-4F45-9708-019B960494DF}">
-              <a14:hiddenLine xmlns:a14="http://schemas.microsoft.com/office/drawing/2010/main" w="9525">
-                <a:solidFill>
-                  <a:srgbClr val="000000"/>
-                </a:solidFill>
-                <a:miter lim="800000"/>
-                <a:headEnd/>
-                <a:tailEnd/>
-              </a14:hiddenLine>
-            </a:ext>
-          </a:extLst>
-        </p:spPr>
-        <p:txBody>
-          <a:bodyPr wrap="square" numCol="1" anchorCtr="0" compatLnSpc="1">
-            <a:prstTxWarp prst="textNoShape">
-              <a:avLst/>
-            </a:prstTxWarp>
-          </a:bodyPr>
-          <a:lstStyle>
-            <a:lvl1pPr>
-              <a:spcBef>
-                <a:spcPct val="20000"/>
-              </a:spcBef>
-              <a:buFont typeface="Arial" panose="020B0604020202020204" pitchFamily="34" charset="0"/>
-              <a:buChar char="•"/>
-              <a:defRPr sz="3200">
-                <a:solidFill>
-                  <a:schemeClr val="tx1"/>
-                </a:solidFill>
-                <a:latin typeface="Calibri" panose="020F0502020204030204" pitchFamily="34" charset="0"/>
-                <a:ea typeface="ＭＳ Ｐゴシック" panose="020B0600070205080204" pitchFamily="34" charset="-128"/>
-              </a:defRPr>
-            </a:lvl1pPr>
-            <a:lvl2pPr marL="742950" indent="-285750">
-              <a:spcBef>
-                <a:spcPct val="20000"/>
-              </a:spcBef>
-              <a:buFont typeface="Arial" panose="020B0604020202020204" pitchFamily="34" charset="0"/>
-              <a:buChar char="–"/>
-              <a:defRPr sz="2800">
-                <a:solidFill>
-                  <a:schemeClr val="tx1"/>
-                </a:solidFill>
-                <a:latin typeface="Calibri" panose="020F0502020204030204" pitchFamily="34" charset="0"/>
-                <a:ea typeface="ＭＳ Ｐゴシック" panose="020B0600070205080204" pitchFamily="34" charset="-128"/>
-              </a:defRPr>
-            </a:lvl2pPr>
-            <a:lvl3pPr marL="1143000" indent="-228600">
-              <a:spcBef>
-                <a:spcPct val="20000"/>
-              </a:spcBef>
-              <a:buFont typeface="Arial" panose="020B0604020202020204" pitchFamily="34" charset="0"/>
-              <a:buChar char="•"/>
-              <a:defRPr sz="2400">
-                <a:solidFill>
-                  <a:schemeClr val="tx1"/>
-                </a:solidFill>
-                <a:latin typeface="Calibri" panose="020F0502020204030204" pitchFamily="34" charset="0"/>
-                <a:ea typeface="ＭＳ Ｐゴシック" panose="020B0600070205080204" pitchFamily="34" charset="-128"/>
-              </a:defRPr>
-            </a:lvl3pPr>
-            <a:lvl4pPr marL="1600200" indent="-228600">
-              <a:spcBef>
-                <a:spcPct val="20000"/>
-              </a:spcBef>
-              <a:buFont typeface="Arial" panose="020B0604020202020204" pitchFamily="34" charset="0"/>
-              <a:buChar char="–"/>
-              <a:defRPr sz="2000">
-                <a:solidFill>
-                  <a:schemeClr val="tx1"/>
-                </a:solidFill>
-                <a:latin typeface="Calibri" panose="020F0502020204030204" pitchFamily="34" charset="0"/>
-                <a:ea typeface="ＭＳ Ｐゴシック" panose="020B0600070205080204" pitchFamily="34" charset="-128"/>
-              </a:defRPr>
-            </a:lvl4pPr>
-            <a:lvl5pPr marL="2057400" indent="-228600">
-              <a:spcBef>
-                <a:spcPct val="20000"/>
-              </a:spcBef>
-              <a:buFont typeface="Arial" panose="020B0604020202020204" pitchFamily="34" charset="0"/>
-              <a:buChar char="»"/>
-              <a:defRPr sz="2000">
-                <a:solidFill>
-                  <a:schemeClr val="tx1"/>
-                </a:solidFill>
-                <a:latin typeface="Calibri" panose="020F0502020204030204" pitchFamily="34" charset="0"/>
-                <a:ea typeface="ＭＳ Ｐゴシック" panose="020B0600070205080204" pitchFamily="34" charset="-128"/>
-              </a:defRPr>
-            </a:lvl5pPr>
-            <a:lvl6pPr marL="2514600" indent="-228600" eaLnBrk="0" fontAlgn="base" hangingPunct="0">
-              <a:spcBef>
-                <a:spcPct val="20000"/>
-              </a:spcBef>
-              <a:spcAft>
-                <a:spcPct val="0"/>
-              </a:spcAft>
-              <a:buFont typeface="Arial" panose="020B0604020202020204" pitchFamily="34" charset="0"/>
-              <a:buChar char="»"/>
-              <a:defRPr sz="2000">
-                <a:solidFill>
-                  <a:schemeClr val="tx1"/>
-                </a:solidFill>
-                <a:latin typeface="Calibri" panose="020F0502020204030204" pitchFamily="34" charset="0"/>
-                <a:ea typeface="ＭＳ Ｐゴシック" panose="020B0600070205080204" pitchFamily="34" charset="-128"/>
-              </a:defRPr>
-            </a:lvl6pPr>
-            <a:lvl7pPr marL="2971800" indent="-228600" eaLnBrk="0" fontAlgn="base" hangingPunct="0">
-              <a:spcBef>
-                <a:spcPct val="20000"/>
-              </a:spcBef>
-              <a:spcAft>
-                <a:spcPct val="0"/>
-              </a:spcAft>
-              <a:buFont typeface="Arial" panose="020B0604020202020204" pitchFamily="34" charset="0"/>
-              <a:buChar char="»"/>
-              <a:defRPr sz="2000">
-                <a:solidFill>
-                  <a:schemeClr val="tx1"/>
-                </a:solidFill>
-                <a:latin typeface="Calibri" panose="020F0502020204030204" pitchFamily="34" charset="0"/>
-                <a:ea typeface="ＭＳ Ｐゴシック" panose="020B0600070205080204" pitchFamily="34" charset="-128"/>
-              </a:defRPr>
-            </a:lvl7pPr>
-            <a:lvl8pPr marL="3429000" indent="-228600" eaLnBrk="0" fontAlgn="base" hangingPunct="0">
-              <a:spcBef>
-                <a:spcPct val="20000"/>
-              </a:spcBef>
-              <a:spcAft>
-                <a:spcPct val="0"/>
-              </a:spcAft>
-              <a:buFont typeface="Arial" panose="020B0604020202020204" pitchFamily="34" charset="0"/>
-              <a:buChar char="»"/>
-              <a:defRPr sz="2000">
-                <a:solidFill>
-                  <a:schemeClr val="tx1"/>
-                </a:solidFill>
-                <a:latin typeface="Calibri" panose="020F0502020204030204" pitchFamily="34" charset="0"/>
-                <a:ea typeface="ＭＳ Ｐゴシック" panose="020B0600070205080204" pitchFamily="34" charset="-128"/>
-              </a:defRPr>
-            </a:lvl8pPr>
-            <a:lvl9pPr marL="3886200" indent="-228600" eaLnBrk="0" fontAlgn="base" hangingPunct="0">
-              <a:spcBef>
-                <a:spcPct val="20000"/>
-              </a:spcBef>
-              <a:spcAft>
-                <a:spcPct val="0"/>
-              </a:spcAft>
-              <a:buFont typeface="Arial" panose="020B0604020202020204" pitchFamily="34" charset="0"/>
-              <a:buChar char="»"/>
-              <a:defRPr sz="2000">
-                <a:solidFill>
-                  <a:schemeClr val="tx1"/>
-                </a:solidFill>
-                <a:latin typeface="Calibri" panose="020F0502020204030204" pitchFamily="34" charset="0"/>
-                <a:ea typeface="ＭＳ Ｐゴシック" panose="020B0600070205080204" pitchFamily="34" charset="-128"/>
-              </a:defRPr>
-            </a:lvl9pPr>
-          </a:lstStyle>
-          <a:p>
-            <a:pPr>
-              <a:spcBef>
-                <a:spcPct val="0"/>
-              </a:spcBef>
-              <a:buFontTx/>
-              <a:buNone/>
-            </a:pPr>
-            <a:endParaRPr lang="en-US" altLang="en-US" sz="1200">
-              <a:solidFill>
-                <a:schemeClr val="bg2"/>
-              </a:solidFill>
-              <a:latin typeface="Arial" panose="020B0604020202020204" pitchFamily="34" charset="0"/>
-            </a:endParaRPr>
-          </a:p>
-        </p:txBody>
-      </p:sp>
-      <p:sp>
-        <p:nvSpPr>
-          <p:cNvPr id="8197" name="Slide Number Placeholder 3">
-            <a:extLst>
-              <a:ext uri="{FF2B5EF4-FFF2-40B4-BE49-F238E27FC236}">
-                <a16:creationId xmlns:a16="http://schemas.microsoft.com/office/drawing/2014/main" id="{8964F620-20DA-0ED4-9A63-9839F4A02664}"/>
-              </a:ext>
-            </a:extLst>
-          </p:cNvPr>
-          <p:cNvSpPr>
-            <a:spLocks noGrp="1"/>
-          </p:cNvSpPr>
-          <p:nvPr>
-            <p:ph type="sldNum" sz="quarter" idx="12"/>
-          </p:nvPr>
-        </p:nvSpPr>
-        <p:spPr bwMode="auto">
-          <a:noFill/>
-          <a:extLst>
-            <a:ext uri="{909E8E84-426E-40DD-AFC4-6F175D3DCCD1}">
-              <a14:hiddenFill xmlns:a14="http://schemas.microsoft.com/office/drawing/2010/main">
-                <a:solidFill>
-                  <a:srgbClr val="FFFFFF"/>
-                </a:solidFill>
-              </a14:hiddenFill>
-            </a:ext>
-            <a:ext uri="{91240B29-F687-4F45-9708-019B960494DF}">
-              <a14:hiddenLine xmlns:a14="http://schemas.microsoft.com/office/drawing/2010/main" w="9525">
-                <a:solidFill>
-                  <a:srgbClr val="000000"/>
-                </a:solidFill>
-                <a:round/>
-                <a:headEnd/>
-                <a:tailEnd/>
-              </a14:hiddenLine>
-            </a:ext>
-          </a:extLst>
-        </p:spPr>
-        <p:txBody>
-          <a:bodyPr/>
-          <a:lstStyle>
-            <a:lvl1pPr>
-              <a:spcBef>
-                <a:spcPct val="20000"/>
-              </a:spcBef>
-              <a:buFont typeface="Arial" panose="020B0604020202020204" pitchFamily="34" charset="0"/>
-              <a:buChar char="•"/>
-              <a:defRPr sz="3200">
-                <a:solidFill>
-                  <a:schemeClr val="tx1"/>
-                </a:solidFill>
-                <a:latin typeface="Calibri" panose="020F0502020204030204" pitchFamily="34" charset="0"/>
-                <a:ea typeface="ＭＳ Ｐゴシック" panose="020B0600070205080204" pitchFamily="34" charset="-128"/>
-              </a:defRPr>
-            </a:lvl1pPr>
-            <a:lvl2pPr marL="742950" indent="-285750">
-              <a:spcBef>
-                <a:spcPct val="20000"/>
-              </a:spcBef>
-              <a:buFont typeface="Arial" panose="020B0604020202020204" pitchFamily="34" charset="0"/>
-              <a:buChar char="–"/>
-              <a:defRPr sz="2800">
-                <a:solidFill>
-                  <a:schemeClr val="tx1"/>
-                </a:solidFill>
-                <a:latin typeface="Calibri" panose="020F0502020204030204" pitchFamily="34" charset="0"/>
-                <a:ea typeface="ＭＳ Ｐゴシック" panose="020B0600070205080204" pitchFamily="34" charset="-128"/>
-              </a:defRPr>
-            </a:lvl2pPr>
-            <a:lvl3pPr marL="1143000" indent="-228600">
-              <a:spcBef>
-                <a:spcPct val="20000"/>
-              </a:spcBef>
-              <a:buFont typeface="Arial" panose="020B0604020202020204" pitchFamily="34" charset="0"/>
-              <a:buChar char="•"/>
-              <a:defRPr sz="2400">
-                <a:solidFill>
-                  <a:schemeClr val="tx1"/>
-                </a:solidFill>
-                <a:latin typeface="Calibri" panose="020F0502020204030204" pitchFamily="34" charset="0"/>
-                <a:ea typeface="ＭＳ Ｐゴシック" panose="020B0600070205080204" pitchFamily="34" charset="-128"/>
-              </a:defRPr>
-            </a:lvl3pPr>
-            <a:lvl4pPr marL="1600200" indent="-228600">
-              <a:spcBef>
-                <a:spcPct val="20000"/>
-              </a:spcBef>
-              <a:buFont typeface="Arial" panose="020B0604020202020204" pitchFamily="34" charset="0"/>
-              <a:buChar char="–"/>
-              <a:defRPr sz="2000">
-                <a:solidFill>
-                  <a:schemeClr val="tx1"/>
-                </a:solidFill>
-                <a:latin typeface="Calibri" panose="020F0502020204030204" pitchFamily="34" charset="0"/>
-                <a:ea typeface="ＭＳ Ｐゴシック" panose="020B0600070205080204" pitchFamily="34" charset="-128"/>
-              </a:defRPr>
-            </a:lvl4pPr>
-            <a:lvl5pPr marL="2057400" indent="-228600">
-              <a:spcBef>
-                <a:spcPct val="20000"/>
-              </a:spcBef>
-              <a:buFont typeface="Arial" panose="020B0604020202020204" pitchFamily="34" charset="0"/>
-              <a:buChar char="»"/>
-              <a:defRPr sz="2000">
-                <a:solidFill>
-                  <a:schemeClr val="tx1"/>
-                </a:solidFill>
-                <a:latin typeface="Calibri" panose="020F0502020204030204" pitchFamily="34" charset="0"/>
-                <a:ea typeface="ＭＳ Ｐゴシック" panose="020B0600070205080204" pitchFamily="34" charset="-128"/>
-              </a:defRPr>
-            </a:lvl5pPr>
-            <a:lvl6pPr marL="2514600" indent="-228600" eaLnBrk="0" fontAlgn="base" hangingPunct="0">
-              <a:spcBef>
-                <a:spcPct val="20000"/>
-              </a:spcBef>
-              <a:spcAft>
-                <a:spcPct val="0"/>
-              </a:spcAft>
-              <a:buFont typeface="Arial" panose="020B0604020202020204" pitchFamily="34" charset="0"/>
-              <a:buChar char="»"/>
-              <a:defRPr sz="2000">
-                <a:solidFill>
-                  <a:schemeClr val="tx1"/>
-                </a:solidFill>
-                <a:latin typeface="Calibri" panose="020F0502020204030204" pitchFamily="34" charset="0"/>
-                <a:ea typeface="ＭＳ Ｐゴシック" panose="020B0600070205080204" pitchFamily="34" charset="-128"/>
-              </a:defRPr>
-            </a:lvl6pPr>
-            <a:lvl7pPr marL="2971800" indent="-228600" eaLnBrk="0" fontAlgn="base" hangingPunct="0">
-              <a:spcBef>
-                <a:spcPct val="20000"/>
-              </a:spcBef>
-              <a:spcAft>
-                <a:spcPct val="0"/>
-              </a:spcAft>
-              <a:buFont typeface="Arial" panose="020B0604020202020204" pitchFamily="34" charset="0"/>
-              <a:buChar char="»"/>
-              <a:defRPr sz="2000">
-                <a:solidFill>
-                  <a:schemeClr val="tx1"/>
-                </a:solidFill>
-                <a:latin typeface="Calibri" panose="020F0502020204030204" pitchFamily="34" charset="0"/>
-                <a:ea typeface="ＭＳ Ｐゴシック" panose="020B0600070205080204" pitchFamily="34" charset="-128"/>
-              </a:defRPr>
-            </a:lvl7pPr>
-            <a:lvl8pPr marL="3429000" indent="-228600" eaLnBrk="0" fontAlgn="base" hangingPunct="0">
-              <a:spcBef>
-                <a:spcPct val="20000"/>
-              </a:spcBef>
-              <a:spcAft>
-                <a:spcPct val="0"/>
-              </a:spcAft>
-              <a:buFont typeface="Arial" panose="020B0604020202020204" pitchFamily="34" charset="0"/>
-              <a:buChar char="»"/>
-              <a:defRPr sz="2000">
-                <a:solidFill>
-                  <a:schemeClr val="tx1"/>
-                </a:solidFill>
-                <a:latin typeface="Calibri" panose="020F0502020204030204" pitchFamily="34" charset="0"/>
-                <a:ea typeface="ＭＳ Ｐゴシック" panose="020B0600070205080204" pitchFamily="34" charset="-128"/>
-              </a:defRPr>
-            </a:lvl8pPr>
-            <a:lvl9pPr marL="3886200" indent="-228600" eaLnBrk="0" fontAlgn="base" hangingPunct="0">
-              <a:spcBef>
-                <a:spcPct val="20000"/>
-              </a:spcBef>
-              <a:spcAft>
-                <a:spcPct val="0"/>
-              </a:spcAft>
-              <a:buFont typeface="Arial" panose="020B0604020202020204" pitchFamily="34" charset="0"/>
-              <a:buChar char="»"/>
-              <a:defRPr sz="2000">
-                <a:solidFill>
-                  <a:schemeClr val="tx1"/>
-                </a:solidFill>
-                <a:latin typeface="Calibri" panose="020F0502020204030204" pitchFamily="34" charset="0"/>
-                <a:ea typeface="ＭＳ Ｐゴシック" panose="020B0600070205080204" pitchFamily="34" charset="-128"/>
-              </a:defRPr>
-            </a:lvl9pPr>
-          </a:lstStyle>
-          <a:p>
-            <a:pPr>
-              <a:spcBef>
-                <a:spcPct val="0"/>
-              </a:spcBef>
-              <a:buFontTx/>
-              <a:buNone/>
-            </a:pPr>
-            <a:fld id="{DF006974-A408-4600-9CB8-40FF43544F01}" type="slidenum">
-              <a:rPr lang="en-US" altLang="en-US" sz="1400" smtClean="0">
-                <a:latin typeface="Arial" panose="020B0604020202020204" pitchFamily="34" charset="0"/>
-              </a:rPr>
-              <a:pPr>
-                <a:spcBef>
-                  <a:spcPct val="0"/>
-                </a:spcBef>
-                <a:buFontTx/>
-                <a:buNone/>
-              </a:pPr>
-              <a:t>4</a:t>
-            </a:fld>
-            <a:endParaRPr lang="en-US" altLang="en-US" sz="1400">
-              <a:latin typeface="Arial" panose="020B0604020202020204" pitchFamily="34" charset="0"/>
             </a:endParaRPr>
           </a:p>
         </p:txBody>
@@ -13568,32 +18897,251 @@
         </p:nvPicPr>
         <p:blipFill>
           <a:blip r:embed="rId2"/>
-          <a:srcRect/>
           <a:stretch>
             <a:fillRect/>
           </a:stretch>
         </p:blipFill>
         <p:spPr bwMode="auto">
           <a:xfrm>
-            <a:off x="1676400" y="1885156"/>
-            <a:ext cx="3647499" cy="3753644"/>
+            <a:off x="8109502" y="1574034"/>
+            <a:ext cx="3615776" cy="3721810"/>
           </a:xfrm>
           <a:prstGeom prst="rect">
             <a:avLst/>
           </a:prstGeom>
           <a:noFill/>
-          <a:ln>
-            <a:noFill/>
-          </a:ln>
-          <a:effectLst>
-            <a:outerShdw blurRad="292100" dist="139700" dir="2700000" algn="tl" rotWithShape="0">
-              <a:srgbClr val="333333">
-                <a:alpha val="64999"/>
-              </a:srgbClr>
-            </a:outerShdw>
-          </a:effectLst>
         </p:spPr>
       </p:pic>
+      <p:sp>
+        <p:nvSpPr>
+          <p:cNvPr id="8197" name="Slide Number Placeholder 3">
+            <a:extLst>
+              <a:ext uri="{FF2B5EF4-FFF2-40B4-BE49-F238E27FC236}">
+                <a16:creationId xmlns:a16="http://schemas.microsoft.com/office/drawing/2014/main" id="{8964F620-20DA-0ED4-9A63-9839F4A02664}"/>
+              </a:ext>
+            </a:extLst>
+          </p:cNvPr>
+          <p:cNvSpPr>
+            <a:spLocks noGrp="1"/>
+          </p:cNvSpPr>
+          <p:nvPr>
+            <p:ph type="sldNum" sz="quarter" idx="12"/>
+          </p:nvPr>
+        </p:nvSpPr>
+        <p:spPr bwMode="auto">
+          <a:xfrm>
+            <a:off x="11704320" y="6455664"/>
+            <a:ext cx="448056" cy="365125"/>
+          </a:xfrm>
+          <a:extLst>
+            <a:ext uri="{909E8E84-426E-40DD-AFC4-6F175D3DCCD1}">
+              <a14:hiddenFill xmlns:a14="http://schemas.microsoft.com/office/drawing/2010/main">
+                <a:solidFill>
+                  <a:srgbClr val="FFFFFF"/>
+                </a:solidFill>
+              </a14:hiddenFill>
+            </a:ext>
+            <a:ext uri="{91240B29-F687-4F45-9708-019B960494DF}">
+              <a14:hiddenLine xmlns:a14="http://schemas.microsoft.com/office/drawing/2010/main" w="9525">
+                <a:solidFill>
+                  <a:srgbClr val="000000"/>
+                </a:solidFill>
+                <a:round/>
+                <a:headEnd/>
+                <a:tailEnd/>
+              </a14:hiddenLine>
+            </a:ext>
+          </a:extLst>
+        </p:spPr>
+        <p:txBody>
+          <a:bodyPr>
+            <a:normAutofit/>
+          </a:bodyPr>
+          <a:lstStyle>
+            <a:lvl1pPr>
+              <a:spcBef>
+                <a:spcPct val="20000"/>
+              </a:spcBef>
+              <a:buFont typeface="Arial" panose="020B0604020202020204" pitchFamily="34" charset="0"/>
+              <a:buChar char="•"/>
+              <a:defRPr sz="3200">
+                <a:solidFill>
+                  <a:schemeClr val="tx1"/>
+                </a:solidFill>
+                <a:latin typeface="Calibri" panose="020F0502020204030204" pitchFamily="34" charset="0"/>
+                <a:ea typeface="ＭＳ Ｐゴシック" panose="020B0600070205080204" pitchFamily="34" charset="-128"/>
+              </a:defRPr>
+            </a:lvl1pPr>
+            <a:lvl2pPr marL="742950" indent="-285750">
+              <a:spcBef>
+                <a:spcPct val="20000"/>
+              </a:spcBef>
+              <a:buFont typeface="Arial" panose="020B0604020202020204" pitchFamily="34" charset="0"/>
+              <a:buChar char="–"/>
+              <a:defRPr sz="2800">
+                <a:solidFill>
+                  <a:schemeClr val="tx1"/>
+                </a:solidFill>
+                <a:latin typeface="Calibri" panose="020F0502020204030204" pitchFamily="34" charset="0"/>
+                <a:ea typeface="ＭＳ Ｐゴシック" panose="020B0600070205080204" pitchFamily="34" charset="-128"/>
+              </a:defRPr>
+            </a:lvl2pPr>
+            <a:lvl3pPr marL="1143000" indent="-228600">
+              <a:spcBef>
+                <a:spcPct val="20000"/>
+              </a:spcBef>
+              <a:buFont typeface="Arial" panose="020B0604020202020204" pitchFamily="34" charset="0"/>
+              <a:buChar char="•"/>
+              <a:defRPr sz="2400">
+                <a:solidFill>
+                  <a:schemeClr val="tx1"/>
+                </a:solidFill>
+                <a:latin typeface="Calibri" panose="020F0502020204030204" pitchFamily="34" charset="0"/>
+                <a:ea typeface="ＭＳ Ｐゴシック" panose="020B0600070205080204" pitchFamily="34" charset="-128"/>
+              </a:defRPr>
+            </a:lvl3pPr>
+            <a:lvl4pPr marL="1600200" indent="-228600">
+              <a:spcBef>
+                <a:spcPct val="20000"/>
+              </a:spcBef>
+              <a:buFont typeface="Arial" panose="020B0604020202020204" pitchFamily="34" charset="0"/>
+              <a:buChar char="–"/>
+              <a:defRPr sz="2000">
+                <a:solidFill>
+                  <a:schemeClr val="tx1"/>
+                </a:solidFill>
+                <a:latin typeface="Calibri" panose="020F0502020204030204" pitchFamily="34" charset="0"/>
+                <a:ea typeface="ＭＳ Ｐゴシック" panose="020B0600070205080204" pitchFamily="34" charset="-128"/>
+              </a:defRPr>
+            </a:lvl4pPr>
+            <a:lvl5pPr marL="2057400" indent="-228600">
+              <a:spcBef>
+                <a:spcPct val="20000"/>
+              </a:spcBef>
+              <a:buFont typeface="Arial" panose="020B0604020202020204" pitchFamily="34" charset="0"/>
+              <a:buChar char="»"/>
+              <a:defRPr sz="2000">
+                <a:solidFill>
+                  <a:schemeClr val="tx1"/>
+                </a:solidFill>
+                <a:latin typeface="Calibri" panose="020F0502020204030204" pitchFamily="34" charset="0"/>
+                <a:ea typeface="ＭＳ Ｐゴシック" panose="020B0600070205080204" pitchFamily="34" charset="-128"/>
+              </a:defRPr>
+            </a:lvl5pPr>
+            <a:lvl6pPr marL="2514600" indent="-228600" eaLnBrk="0" fontAlgn="base" hangingPunct="0">
+              <a:spcBef>
+                <a:spcPct val="20000"/>
+              </a:spcBef>
+              <a:spcAft>
+                <a:spcPct val="0"/>
+              </a:spcAft>
+              <a:buFont typeface="Arial" panose="020B0604020202020204" pitchFamily="34" charset="0"/>
+              <a:buChar char="»"/>
+              <a:defRPr sz="2000">
+                <a:solidFill>
+                  <a:schemeClr val="tx1"/>
+                </a:solidFill>
+                <a:latin typeface="Calibri" panose="020F0502020204030204" pitchFamily="34" charset="0"/>
+                <a:ea typeface="ＭＳ Ｐゴシック" panose="020B0600070205080204" pitchFamily="34" charset="-128"/>
+              </a:defRPr>
+            </a:lvl6pPr>
+            <a:lvl7pPr marL="2971800" indent="-228600" eaLnBrk="0" fontAlgn="base" hangingPunct="0">
+              <a:spcBef>
+                <a:spcPct val="20000"/>
+              </a:spcBef>
+              <a:spcAft>
+                <a:spcPct val="0"/>
+              </a:spcAft>
+              <a:buFont typeface="Arial" panose="020B0604020202020204" pitchFamily="34" charset="0"/>
+              <a:buChar char="»"/>
+              <a:defRPr sz="2000">
+                <a:solidFill>
+                  <a:schemeClr val="tx1"/>
+                </a:solidFill>
+                <a:latin typeface="Calibri" panose="020F0502020204030204" pitchFamily="34" charset="0"/>
+                <a:ea typeface="ＭＳ Ｐゴシック" panose="020B0600070205080204" pitchFamily="34" charset="-128"/>
+              </a:defRPr>
+            </a:lvl7pPr>
+            <a:lvl8pPr marL="3429000" indent="-228600" eaLnBrk="0" fontAlgn="base" hangingPunct="0">
+              <a:spcBef>
+                <a:spcPct val="20000"/>
+              </a:spcBef>
+              <a:spcAft>
+                <a:spcPct val="0"/>
+              </a:spcAft>
+              <a:buFont typeface="Arial" panose="020B0604020202020204" pitchFamily="34" charset="0"/>
+              <a:buChar char="»"/>
+              <a:defRPr sz="2000">
+                <a:solidFill>
+                  <a:schemeClr val="tx1"/>
+                </a:solidFill>
+                <a:latin typeface="Calibri" panose="020F0502020204030204" pitchFamily="34" charset="0"/>
+                <a:ea typeface="ＭＳ Ｐゴシック" panose="020B0600070205080204" pitchFamily="34" charset="-128"/>
+              </a:defRPr>
+            </a:lvl8pPr>
+            <a:lvl9pPr marL="3886200" indent="-228600" eaLnBrk="0" fontAlgn="base" hangingPunct="0">
+              <a:spcBef>
+                <a:spcPct val="20000"/>
+              </a:spcBef>
+              <a:spcAft>
+                <a:spcPct val="0"/>
+              </a:spcAft>
+              <a:buFont typeface="Arial" panose="020B0604020202020204" pitchFamily="34" charset="0"/>
+              <a:buChar char="»"/>
+              <a:defRPr sz="2000">
+                <a:solidFill>
+                  <a:schemeClr val="tx1"/>
+                </a:solidFill>
+                <a:latin typeface="Calibri" panose="020F0502020204030204" pitchFamily="34" charset="0"/>
+                <a:ea typeface="ＭＳ Ｐゴシック" panose="020B0600070205080204" pitchFamily="34" charset="-128"/>
+              </a:defRPr>
+            </a:lvl9pPr>
+          </a:lstStyle>
+          <a:p>
+            <a:pPr>
+              <a:spcBef>
+                <a:spcPct val="0"/>
+              </a:spcBef>
+              <a:spcAft>
+                <a:spcPts val="600"/>
+              </a:spcAft>
+              <a:buFontTx/>
+              <a:buNone/>
+            </a:pPr>
+            <a:fld id="{DF006974-A408-4600-9CB8-40FF43544F01}" type="slidenum">
+              <a:rPr lang="en-US" altLang="en-US" sz="1100">
+                <a:solidFill>
+                  <a:schemeClr val="tx1">
+                    <a:lumMod val="50000"/>
+                    <a:lumOff val="50000"/>
+                  </a:schemeClr>
+                </a:solidFill>
+                <a:latin typeface="Arial" panose="020B0604020202020204" pitchFamily="34" charset="0"/>
+              </a:rPr>
+              <a:pPr>
+                <a:spcBef>
+                  <a:spcPct val="0"/>
+                </a:spcBef>
+                <a:spcAft>
+                  <a:spcPts val="600"/>
+                </a:spcAft>
+                <a:buFontTx/>
+                <a:buNone/>
+              </a:pPr>
+              <a:t>4</a:t>
+            </a:fld>
+            <a:endParaRPr lang="en-US" altLang="en-US" sz="1100">
+              <a:solidFill>
+                <a:schemeClr val="tx1">
+                  <a:lumMod val="50000"/>
+                  <a:lumOff val="50000"/>
+                </a:schemeClr>
+              </a:solidFill>
+              <a:latin typeface="Arial" panose="020B0604020202020204" pitchFamily="34" charset="0"/>
+            </a:endParaRPr>
+          </a:p>
+        </p:txBody>
+      </p:sp>
     </p:spTree>
   </p:cSld>
   <p:clrMapOvr>
@@ -14073,7 +19621,23 @@
                 <a:ea typeface="ＭＳ Ｐゴシック" panose="020B0600070205080204" pitchFamily="34" charset="-128"/>
                 <a:sym typeface="Wingdings" pitchFamily="2" charset="2"/>
               </a:rPr>
-              <a:t>‘Fetch data’ effect initializes ‘friends list’ state.</a:t>
+              <a:t>‘Fetch data’ effect </a:t>
+            </a:r>
+            <a:r>
+              <a:rPr lang="en-US" altLang="en-US" sz="2000" b="1" dirty="0" err="1">
+                <a:latin typeface="Arial" panose="020B0604020202020204" pitchFamily="34" charset="0"/>
+                <a:ea typeface="ＭＳ Ｐゴシック" panose="020B0600070205080204" pitchFamily="34" charset="-128"/>
+                <a:sym typeface="Wingdings" pitchFamily="2" charset="2"/>
+              </a:rPr>
+              <a:t>initialises</a:t>
+            </a:r>
+            <a:r>
+              <a:rPr lang="en-US" altLang="en-US" sz="2000" b="1" dirty="0">
+                <a:latin typeface="Arial" panose="020B0604020202020204" pitchFamily="34" charset="0"/>
+                <a:ea typeface="ＭＳ Ｐゴシック" panose="020B0600070205080204" pitchFamily="34" charset="-128"/>
+                <a:sym typeface="Wingdings" pitchFamily="2" charset="2"/>
+              </a:rPr>
+              <a:t> ‘friends list’ state.</a:t>
             </a:r>
           </a:p>
           <a:p>
@@ -17507,62 +23071,62 @@
       </p:grpSpPr>
       <p:pic>
         <p:nvPicPr>
-          <p:cNvPr id="13314" name="Picture 2">
+          <p:cNvPr id="5" name="Picture 4">
             <a:extLst>
               <a:ext uri="{FF2B5EF4-FFF2-40B4-BE49-F238E27FC236}">
-                <a16:creationId xmlns:a16="http://schemas.microsoft.com/office/drawing/2014/main" id="{7731FA6E-A219-E899-949B-727E3CF86EFC}"/>
+                <a16:creationId xmlns:a16="http://schemas.microsoft.com/office/drawing/2014/main" id="{4777184D-BA86-46D0-B361-DAA5634F5BD4}"/>
               </a:ext>
             </a:extLst>
           </p:cNvPr>
           <p:cNvPicPr>
-            <a:picLocks noChangeAspect="1" noChangeArrowheads="1"/>
+            <a:picLocks noChangeAspect="1"/>
           </p:cNvPicPr>
           <p:nvPr/>
         </p:nvPicPr>
         <p:blipFill>
-          <a:blip r:embed="rId2">
-            <a:extLst>
-              <a:ext uri="{28A0092B-C50C-407E-A947-70E740481C1C}">
-                <a14:useLocalDpi xmlns:a14="http://schemas.microsoft.com/office/drawing/2010/main" val="0"/>
-              </a:ext>
-            </a:extLst>
-          </a:blip>
-          <a:srcRect/>
+          <a:blip r:embed="rId2"/>
           <a:stretch>
             <a:fillRect/>
           </a:stretch>
         </p:blipFill>
-        <p:spPr bwMode="auto">
+        <p:spPr>
           <a:xfrm>
-            <a:off x="5257800" y="485775"/>
-            <a:ext cx="5926138" cy="5443538"/>
+            <a:off x="1143000" y="4019601"/>
+            <a:ext cx="4026107" cy="2819545"/>
           </a:xfrm>
           <a:prstGeom prst="rect">
             <a:avLst/>
           </a:prstGeom>
-          <a:noFill/>
-          <a:ln>
-            <a:noFill/>
-          </a:ln>
-          <a:extLst>
-            <a:ext uri="{909E8E84-426E-40DD-AFC4-6F175D3DCCD1}">
-              <a14:hiddenFill xmlns:a14="http://schemas.microsoft.com/office/drawing/2010/main">
-                <a:solidFill>
-                  <a:srgbClr val="FFFFFF"/>
-                </a:solidFill>
-              </a14:hiddenFill>
-            </a:ext>
-            <a:ext uri="{91240B29-F687-4F45-9708-019B960494DF}">
-              <a14:hiddenLine xmlns:a14="http://schemas.microsoft.com/office/drawing/2010/main" w="9525">
-                <a:solidFill>
-                  <a:srgbClr val="000000"/>
-                </a:solidFill>
-                <a:miter lim="800000"/>
-                <a:headEnd/>
-                <a:tailEnd/>
-              </a14:hiddenLine>
-            </a:ext>
-          </a:extLst>
+        </p:spPr>
+      </p:pic>
+      <p:pic>
+        <p:nvPicPr>
+          <p:cNvPr id="3" name="Picture 2">
+            <a:extLst>
+              <a:ext uri="{FF2B5EF4-FFF2-40B4-BE49-F238E27FC236}">
+                <a16:creationId xmlns:a16="http://schemas.microsoft.com/office/drawing/2014/main" id="{D21EF2FA-7C5F-F46A-BBE0-48293BD717C9}"/>
+              </a:ext>
+            </a:extLst>
+          </p:cNvPr>
+          <p:cNvPicPr>
+            <a:picLocks noChangeAspect="1"/>
+          </p:cNvPicPr>
+          <p:nvPr/>
+        </p:nvPicPr>
+        <p:blipFill>
+          <a:blip r:embed="rId3"/>
+          <a:stretch>
+            <a:fillRect/>
+          </a:stretch>
+        </p:blipFill>
+        <p:spPr>
+          <a:xfrm>
+            <a:off x="5781676" y="-39962"/>
+            <a:ext cx="4521432" cy="5359675"/>
+          </a:xfrm>
+          <a:prstGeom prst="rect">
+            <a:avLst/>
+          </a:prstGeom>
         </p:spPr>
       </p:pic>
       <p:sp>
@@ -17710,207 +23274,6 @@
       </p:sp>
       <p:sp>
         <p:nvSpPr>
-          <p:cNvPr id="13317" name="Footer Placeholder 1">
-            <a:extLst>
-              <a:ext uri="{FF2B5EF4-FFF2-40B4-BE49-F238E27FC236}">
-                <a16:creationId xmlns:a16="http://schemas.microsoft.com/office/drawing/2014/main" id="{F67FF8F8-C10F-240B-48A8-900F36F837A0}"/>
-              </a:ext>
-            </a:extLst>
-          </p:cNvPr>
-          <p:cNvSpPr>
-            <a:spLocks noGrp="1"/>
-          </p:cNvSpPr>
-          <p:nvPr>
-            <p:ph type="ftr" sz="quarter" idx="11"/>
-          </p:nvPr>
-        </p:nvSpPr>
-        <p:spPr bwMode="auto">
-          <a:noFill/>
-          <a:extLst>
-            <a:ext uri="{909E8E84-426E-40DD-AFC4-6F175D3DCCD1}">
-              <a14:hiddenFill xmlns:a14="http://schemas.microsoft.com/office/drawing/2010/main">
-                <a:solidFill>
-                  <a:srgbClr val="FFFFFF"/>
-                </a:solidFill>
-              </a14:hiddenFill>
-            </a:ext>
-            <a:ext uri="{91240B29-F687-4F45-9708-019B960494DF}">
-              <a14:hiddenLine xmlns:a14="http://schemas.microsoft.com/office/drawing/2010/main" w="9525">
-                <a:solidFill>
-                  <a:srgbClr val="000000"/>
-                </a:solidFill>
-                <a:miter lim="800000"/>
-                <a:headEnd/>
-                <a:tailEnd/>
-              </a14:hiddenLine>
-            </a:ext>
-          </a:extLst>
-        </p:spPr>
-        <p:txBody>
-          <a:bodyPr wrap="square" numCol="1" anchorCtr="0" compatLnSpc="1">
-            <a:prstTxWarp prst="textNoShape">
-              <a:avLst/>
-            </a:prstTxWarp>
-          </a:bodyPr>
-          <a:lstStyle>
-            <a:lvl1pPr>
-              <a:spcBef>
-                <a:spcPct val="20000"/>
-              </a:spcBef>
-              <a:buFont typeface="Arial" panose="020B0604020202020204" pitchFamily="34" charset="0"/>
-              <a:buChar char="•"/>
-              <a:defRPr sz="3200">
-                <a:solidFill>
-                  <a:schemeClr val="tx1"/>
-                </a:solidFill>
-                <a:latin typeface="Calibri" panose="020F0502020204030204" pitchFamily="34" charset="0"/>
-                <a:ea typeface="ＭＳ Ｐゴシック" panose="020B0600070205080204" pitchFamily="34" charset="-128"/>
-              </a:defRPr>
-            </a:lvl1pPr>
-            <a:lvl2pPr marL="742950" indent="-285750">
-              <a:spcBef>
-                <a:spcPct val="20000"/>
-              </a:spcBef>
-              <a:buFont typeface="Arial" panose="020B0604020202020204" pitchFamily="34" charset="0"/>
-              <a:buChar char="–"/>
-              <a:defRPr sz="2800">
-                <a:solidFill>
-                  <a:schemeClr val="tx1"/>
-                </a:solidFill>
-                <a:latin typeface="Calibri" panose="020F0502020204030204" pitchFamily="34" charset="0"/>
-                <a:ea typeface="ＭＳ Ｐゴシック" panose="020B0600070205080204" pitchFamily="34" charset="-128"/>
-              </a:defRPr>
-            </a:lvl2pPr>
-            <a:lvl3pPr marL="1143000" indent="-228600">
-              <a:spcBef>
-                <a:spcPct val="20000"/>
-              </a:spcBef>
-              <a:buFont typeface="Arial" panose="020B0604020202020204" pitchFamily="34" charset="0"/>
-              <a:buChar char="•"/>
-              <a:defRPr sz="2400">
-                <a:solidFill>
-                  <a:schemeClr val="tx1"/>
-                </a:solidFill>
-                <a:latin typeface="Calibri" panose="020F0502020204030204" pitchFamily="34" charset="0"/>
-                <a:ea typeface="ＭＳ Ｐゴシック" panose="020B0600070205080204" pitchFamily="34" charset="-128"/>
-              </a:defRPr>
-            </a:lvl3pPr>
-            <a:lvl4pPr marL="1600200" indent="-228600">
-              <a:spcBef>
-                <a:spcPct val="20000"/>
-              </a:spcBef>
-              <a:buFont typeface="Arial" panose="020B0604020202020204" pitchFamily="34" charset="0"/>
-              <a:buChar char="–"/>
-              <a:defRPr sz="2000">
-                <a:solidFill>
-                  <a:schemeClr val="tx1"/>
-                </a:solidFill>
-                <a:latin typeface="Calibri" panose="020F0502020204030204" pitchFamily="34" charset="0"/>
-                <a:ea typeface="ＭＳ Ｐゴシック" panose="020B0600070205080204" pitchFamily="34" charset="-128"/>
-              </a:defRPr>
-            </a:lvl4pPr>
-            <a:lvl5pPr marL="2057400" indent="-228600">
-              <a:spcBef>
-                <a:spcPct val="20000"/>
-              </a:spcBef>
-              <a:buFont typeface="Arial" panose="020B0604020202020204" pitchFamily="34" charset="0"/>
-              <a:buChar char="»"/>
-              <a:defRPr sz="2000">
-                <a:solidFill>
-                  <a:schemeClr val="tx1"/>
-                </a:solidFill>
-                <a:latin typeface="Calibri" panose="020F0502020204030204" pitchFamily="34" charset="0"/>
-                <a:ea typeface="ＭＳ Ｐゴシック" panose="020B0600070205080204" pitchFamily="34" charset="-128"/>
-              </a:defRPr>
-            </a:lvl5pPr>
-            <a:lvl6pPr marL="2514600" indent="-228600" eaLnBrk="0" fontAlgn="base" hangingPunct="0">
-              <a:spcBef>
-                <a:spcPct val="20000"/>
-              </a:spcBef>
-              <a:spcAft>
-                <a:spcPct val="0"/>
-              </a:spcAft>
-              <a:buFont typeface="Arial" panose="020B0604020202020204" pitchFamily="34" charset="0"/>
-              <a:buChar char="»"/>
-              <a:defRPr sz="2000">
-                <a:solidFill>
-                  <a:schemeClr val="tx1"/>
-                </a:solidFill>
-                <a:latin typeface="Calibri" panose="020F0502020204030204" pitchFamily="34" charset="0"/>
-                <a:ea typeface="ＭＳ Ｐゴシック" panose="020B0600070205080204" pitchFamily="34" charset="-128"/>
-              </a:defRPr>
-            </a:lvl6pPr>
-            <a:lvl7pPr marL="2971800" indent="-228600" eaLnBrk="0" fontAlgn="base" hangingPunct="0">
-              <a:spcBef>
-                <a:spcPct val="20000"/>
-              </a:spcBef>
-              <a:spcAft>
-                <a:spcPct val="0"/>
-              </a:spcAft>
-              <a:buFont typeface="Arial" panose="020B0604020202020204" pitchFamily="34" charset="0"/>
-              <a:buChar char="»"/>
-              <a:defRPr sz="2000">
-                <a:solidFill>
-                  <a:schemeClr val="tx1"/>
-                </a:solidFill>
-                <a:latin typeface="Calibri" panose="020F0502020204030204" pitchFamily="34" charset="0"/>
-                <a:ea typeface="ＭＳ Ｐゴシック" panose="020B0600070205080204" pitchFamily="34" charset="-128"/>
-              </a:defRPr>
-            </a:lvl7pPr>
-            <a:lvl8pPr marL="3429000" indent="-228600" eaLnBrk="0" fontAlgn="base" hangingPunct="0">
-              <a:spcBef>
-                <a:spcPct val="20000"/>
-              </a:spcBef>
-              <a:spcAft>
-                <a:spcPct val="0"/>
-              </a:spcAft>
-              <a:buFont typeface="Arial" panose="020B0604020202020204" pitchFamily="34" charset="0"/>
-              <a:buChar char="»"/>
-              <a:defRPr sz="2000">
-                <a:solidFill>
-                  <a:schemeClr val="tx1"/>
-                </a:solidFill>
-                <a:latin typeface="Calibri" panose="020F0502020204030204" pitchFamily="34" charset="0"/>
-                <a:ea typeface="ＭＳ Ｐゴシック" panose="020B0600070205080204" pitchFamily="34" charset="-128"/>
-              </a:defRPr>
-            </a:lvl8pPr>
-            <a:lvl9pPr marL="3886200" indent="-228600" eaLnBrk="0" fontAlgn="base" hangingPunct="0">
-              <a:spcBef>
-                <a:spcPct val="20000"/>
-              </a:spcBef>
-              <a:spcAft>
-                <a:spcPct val="0"/>
-              </a:spcAft>
-              <a:buFont typeface="Arial" panose="020B0604020202020204" pitchFamily="34" charset="0"/>
-              <a:buChar char="»"/>
-              <a:defRPr sz="2000">
-                <a:solidFill>
-                  <a:schemeClr val="tx1"/>
-                </a:solidFill>
-                <a:latin typeface="Calibri" panose="020F0502020204030204" pitchFamily="34" charset="0"/>
-                <a:ea typeface="ＭＳ Ｐゴシック" panose="020B0600070205080204" pitchFamily="34" charset="-128"/>
-              </a:defRPr>
-            </a:lvl9pPr>
-          </a:lstStyle>
-          <a:p>
-            <a:pPr>
-              <a:spcBef>
-                <a:spcPct val="0"/>
-              </a:spcBef>
-              <a:buFontTx/>
-              <a:buNone/>
-            </a:pPr>
-            <a:endParaRPr lang="en-US" altLang="en-US" sz="1200">
-              <a:solidFill>
-                <a:schemeClr val="bg2"/>
-              </a:solidFill>
-              <a:latin typeface="Arial" panose="020B0604020202020204" pitchFamily="34" charset="0"/>
-            </a:endParaRPr>
-          </a:p>
-        </p:txBody>
-      </p:sp>
-      <p:sp>
-        <p:nvSpPr>
           <p:cNvPr id="13318" name="Slide Number Placeholder 3">
             <a:extLst>
               <a:ext uri="{FF2B5EF4-FFF2-40B4-BE49-F238E27FC236}">
@@ -18116,66 +23479,6 @@
           </a:p>
         </p:txBody>
       </p:sp>
-      <p:pic>
-        <p:nvPicPr>
-          <p:cNvPr id="13319" name="Picture 6">
-            <a:extLst>
-              <a:ext uri="{FF2B5EF4-FFF2-40B4-BE49-F238E27FC236}">
-                <a16:creationId xmlns:a16="http://schemas.microsoft.com/office/drawing/2014/main" id="{AE648915-2B87-0589-A5F1-43987C6E59C2}"/>
-              </a:ext>
-            </a:extLst>
-          </p:cNvPr>
-          <p:cNvPicPr>
-            <a:picLocks noChangeAspect="1" noChangeArrowheads="1"/>
-          </p:cNvPicPr>
-          <p:nvPr/>
-        </p:nvPicPr>
-        <p:blipFill>
-          <a:blip r:embed="rId3">
-            <a:extLst>
-              <a:ext uri="{28A0092B-C50C-407E-A947-70E740481C1C}">
-                <a14:useLocalDpi xmlns:a14="http://schemas.microsoft.com/office/drawing/2010/main" val="0"/>
-              </a:ext>
-            </a:extLst>
-          </a:blip>
-          <a:srcRect/>
-          <a:stretch>
-            <a:fillRect/>
-          </a:stretch>
-        </p:blipFill>
-        <p:spPr bwMode="auto">
-          <a:xfrm>
-            <a:off x="1295400" y="4114800"/>
-            <a:ext cx="4321175" cy="2667000"/>
-          </a:xfrm>
-          <a:prstGeom prst="rect">
-            <a:avLst/>
-          </a:prstGeom>
-          <a:noFill/>
-          <a:ln>
-            <a:noFill/>
-          </a:ln>
-          <a:extLst>
-            <a:ext uri="{909E8E84-426E-40DD-AFC4-6F175D3DCCD1}">
-              <a14:hiddenFill xmlns:a14="http://schemas.microsoft.com/office/drawing/2010/main">
-                <a:solidFill>
-                  <a:srgbClr val="FFFFFF"/>
-                </a:solidFill>
-              </a14:hiddenFill>
-            </a:ext>
-            <a:ext uri="{91240B29-F687-4F45-9708-019B960494DF}">
-              <a14:hiddenLine xmlns:a14="http://schemas.microsoft.com/office/drawing/2010/main" w="9525">
-                <a:solidFill>
-                  <a:srgbClr val="000000"/>
-                </a:solidFill>
-                <a:miter lim="800000"/>
-                <a:headEnd/>
-                <a:tailEnd/>
-              </a14:hiddenLine>
-            </a:ext>
-          </a:extLst>
-        </p:spPr>
-      </p:pic>
       <p:cxnSp>
         <p:nvCxnSpPr>
           <p:cNvPr id="8" name="Straight Connector 7">
@@ -18622,15 +23925,7 @@
           <a:p>
             <a:r>
               <a:rPr lang="en-IE" dirty="0"/>
-              <a:t>Event handlers designed for value changes/mouse events </a:t>
-            </a:r>
-            <a:r>
-              <a:rPr lang="en-IE" dirty="0" err="1"/>
-              <a:t>atc</a:t>
-            </a:r>
-            <a:r>
-              <a:rPr lang="en-IE" dirty="0"/>
-              <a:t>.</a:t>
+              <a:t>Event handlers designed for value changes/mouse events etc.</a:t>
             </a:r>
           </a:p>
           <a:p>
